--- a/Fase2/03_results/Evaluación AgenteRL_F2– Plataforma Inclinada.pptx
+++ b/Fase2/03_results/Evaluación AgenteRL_F2– Plataforma Inclinada.pptx
@@ -110,6 +110,11 @@
       </a:defRPr>
     </a:lvl9pPr>
   </p:defaultTextStyle>
+  <p:extLst>
+    <p:ext uri="{EFAFB233-063F-42B5-8137-9DF3F51BA10A}">
+      <p15:sldGuideLst xmlns:p15="http://schemas.microsoft.com/office/powerpoint/2012/main"/>
+    </p:ext>
+  </p:extLst>
 </p:presentation>
 </file>
 
@@ -262,7 +267,7 @@
           <a:p>
             <a:fld id="{EA95FD8C-7F73-E84F-BACD-84EACECBE6A5}" type="datetimeFigureOut">
               <a:rPr lang="es-ES_tradnl" smtClean="0"/>
-              <a:t>28/3/26</a:t>
+              <a:t>6/4/26</a:t>
             </a:fld>
             <a:endParaRPr lang="es-ES_tradnl"/>
           </a:p>
@@ -462,7 +467,7 @@
           <a:p>
             <a:fld id="{EA95FD8C-7F73-E84F-BACD-84EACECBE6A5}" type="datetimeFigureOut">
               <a:rPr lang="es-ES_tradnl" smtClean="0"/>
-              <a:t>28/3/26</a:t>
+              <a:t>6/4/26</a:t>
             </a:fld>
             <a:endParaRPr lang="es-ES_tradnl"/>
           </a:p>
@@ -672,7 +677,7 @@
           <a:p>
             <a:fld id="{EA95FD8C-7F73-E84F-BACD-84EACECBE6A5}" type="datetimeFigureOut">
               <a:rPr lang="es-ES_tradnl" smtClean="0"/>
-              <a:t>28/3/26</a:t>
+              <a:t>6/4/26</a:t>
             </a:fld>
             <a:endParaRPr lang="es-ES_tradnl"/>
           </a:p>
@@ -1726,7 +1731,7 @@
           <a:p>
             <a:fld id="{EA95FD8C-7F73-E84F-BACD-84EACECBE6A5}" type="datetimeFigureOut">
               <a:rPr lang="es-ES_tradnl" smtClean="0"/>
-              <a:t>28/3/26</a:t>
+              <a:t>6/4/26</a:t>
             </a:fld>
             <a:endParaRPr lang="es-ES_tradnl"/>
           </a:p>
@@ -2002,7 +2007,7 @@
           <a:p>
             <a:fld id="{EA95FD8C-7F73-E84F-BACD-84EACECBE6A5}" type="datetimeFigureOut">
               <a:rPr lang="es-ES_tradnl" smtClean="0"/>
-              <a:t>28/3/26</a:t>
+              <a:t>6/4/26</a:t>
             </a:fld>
             <a:endParaRPr lang="es-ES_tradnl"/>
           </a:p>
@@ -2270,7 +2275,7 @@
           <a:p>
             <a:fld id="{EA95FD8C-7F73-E84F-BACD-84EACECBE6A5}" type="datetimeFigureOut">
               <a:rPr lang="es-ES_tradnl" smtClean="0"/>
-              <a:t>28/3/26</a:t>
+              <a:t>6/4/26</a:t>
             </a:fld>
             <a:endParaRPr lang="es-ES_tradnl"/>
           </a:p>
@@ -2685,7 +2690,7 @@
           <a:p>
             <a:fld id="{EA95FD8C-7F73-E84F-BACD-84EACECBE6A5}" type="datetimeFigureOut">
               <a:rPr lang="es-ES_tradnl" smtClean="0"/>
-              <a:t>28/3/26</a:t>
+              <a:t>6/4/26</a:t>
             </a:fld>
             <a:endParaRPr lang="es-ES_tradnl"/>
           </a:p>
@@ -2827,7 +2832,7 @@
           <a:p>
             <a:fld id="{EA95FD8C-7F73-E84F-BACD-84EACECBE6A5}" type="datetimeFigureOut">
               <a:rPr lang="es-ES_tradnl" smtClean="0"/>
-              <a:t>28/3/26</a:t>
+              <a:t>6/4/26</a:t>
             </a:fld>
             <a:endParaRPr lang="es-ES_tradnl"/>
           </a:p>
@@ -2940,7 +2945,7 @@
           <a:p>
             <a:fld id="{EA95FD8C-7F73-E84F-BACD-84EACECBE6A5}" type="datetimeFigureOut">
               <a:rPr lang="es-ES_tradnl" smtClean="0"/>
-              <a:t>28/3/26</a:t>
+              <a:t>6/4/26</a:t>
             </a:fld>
             <a:endParaRPr lang="es-ES_tradnl"/>
           </a:p>
@@ -3253,7 +3258,7 @@
           <a:p>
             <a:fld id="{EA95FD8C-7F73-E84F-BACD-84EACECBE6A5}" type="datetimeFigureOut">
               <a:rPr lang="es-ES_tradnl" smtClean="0"/>
-              <a:t>28/3/26</a:t>
+              <a:t>6/4/26</a:t>
             </a:fld>
             <a:endParaRPr lang="es-ES_tradnl"/>
           </a:p>
@@ -3542,7 +3547,7 @@
           <a:p>
             <a:fld id="{EA95FD8C-7F73-E84F-BACD-84EACECBE6A5}" type="datetimeFigureOut">
               <a:rPr lang="es-ES_tradnl" smtClean="0"/>
-              <a:t>28/3/26</a:t>
+              <a:t>6/4/26</a:t>
             </a:fld>
             <a:endParaRPr lang="es-ES_tradnl"/>
           </a:p>
@@ -3785,7 +3790,7 @@
           <a:p>
             <a:fld id="{EA95FD8C-7F73-E84F-BACD-84EACECBE6A5}" type="datetimeFigureOut">
               <a:rPr lang="es-ES_tradnl" smtClean="0"/>
-              <a:t>28/3/26</a:t>
+              <a:t>6/4/26</a:t>
             </a:fld>
             <a:endParaRPr lang="es-ES_tradnl"/>
           </a:p>
@@ -4364,38 +4369,6 @@
           </a:p>
         </p:txBody>
       </p:sp>
-      <p:pic>
-        <p:nvPicPr>
-          <p:cNvPr id="8" name="Onlinebild-Platzhalter 7">
-            <a:extLst>
-              <a:ext uri="{FF2B5EF4-FFF2-40B4-BE49-F238E27FC236}">
-                <a16:creationId xmlns:a16="http://schemas.microsoft.com/office/drawing/2014/main" id="{35689336-CD84-462A-8C56-55EBC1DE8304}"/>
-              </a:ext>
-            </a:extLst>
-          </p:cNvPr>
-          <p:cNvPicPr>
-            <a:picLocks noGrp="1" noChangeAspect="1"/>
-          </p:cNvPicPr>
-          <p:nvPr>
-            <p:ph type="clipArt" sz="quarter" idx="15"/>
-          </p:nvPr>
-        </p:nvPicPr>
-        <p:blipFill>
-          <a:blip r:embed="rId2"/>
-          <a:stretch>
-            <a:fillRect/>
-          </a:stretch>
-        </p:blipFill>
-        <p:spPr>
-          <a:xfrm>
-            <a:off x="583920" y="2151063"/>
-            <a:ext cx="5239310" cy="4008437"/>
-          </a:xfrm>
-          <a:prstGeom prst="rect">
-            <a:avLst/>
-          </a:prstGeom>
-        </p:spPr>
-      </p:pic>
       <p:sp>
         <p:nvSpPr>
           <p:cNvPr id="4" name="Fußzeilenplatzhalter 2">
@@ -4525,6 +4498,38 @@
           </a:p>
         </p:txBody>
       </p:sp>
+      <p:pic>
+        <p:nvPicPr>
+          <p:cNvPr id="9" name="Onlinebild-Platzhalter 8">
+            <a:extLst>
+              <a:ext uri="{FF2B5EF4-FFF2-40B4-BE49-F238E27FC236}">
+                <a16:creationId xmlns:a16="http://schemas.microsoft.com/office/drawing/2014/main" id="{D48F28F5-2BF8-9D6B-B690-FEF30DFCC6AC}"/>
+              </a:ext>
+            </a:extLst>
+          </p:cNvPr>
+          <p:cNvPicPr>
+            <a:picLocks noGrp="1" noChangeAspect="1"/>
+          </p:cNvPicPr>
+          <p:nvPr>
+            <p:ph type="clipArt" sz="quarter" idx="15"/>
+          </p:nvPr>
+        </p:nvPicPr>
+        <p:blipFill>
+          <a:blip r:embed="rId2"/>
+          <a:stretch>
+            <a:fillRect/>
+          </a:stretch>
+        </p:blipFill>
+        <p:spPr>
+          <a:xfrm>
+            <a:off x="639591" y="2151063"/>
+            <a:ext cx="5127968" cy="4008437"/>
+          </a:xfrm>
+          <a:prstGeom prst="rect">
+            <a:avLst/>
+          </a:prstGeom>
+        </p:spPr>
+      </p:pic>
     </p:spTree>
     <p:extLst>
       <p:ext uri="{BB962C8B-B14F-4D97-AF65-F5344CB8AC3E}">
@@ -4615,14 +4620,14 @@
             <p:ph sz="quarter" idx="14"/>
             <p:extLst>
               <p:ext uri="{D42A27DB-BD31-4B8C-83A1-F6EECF244321}">
-                <p14:modId xmlns:p14="http://schemas.microsoft.com/office/powerpoint/2010/main" val="379906391"/>
+                <p14:modId xmlns:p14="http://schemas.microsoft.com/office/powerpoint/2010/main" val="618540953"/>
               </p:ext>
             </p:extLst>
           </p:nvPr>
         </p:nvGraphicFramePr>
         <p:xfrm>
           <a:off x="561487" y="4765096"/>
-          <a:ext cx="10532960" cy="1501140"/>
+          <a:ext cx="10532960" cy="1210945"/>
         </p:xfrm>
         <a:graphic>
           <a:graphicData uri="http://schemas.openxmlformats.org/drawingml/2006/table">
@@ -4754,7 +4759,7 @@
                         <a:buNone/>
                       </a:pPr>
                       <a:r>
-                        <a:rPr lang="es-ES_tradnl" sz="1000" noProof="1">
+                        <a:rPr lang="es-ES_tradnl" sz="900" noProof="1">
                           <a:solidFill>
                             <a:schemeClr val="tx1"/>
                           </a:solidFill>
@@ -4764,7 +4769,7 @@
                         </a:rPr>
                         <a:t>Rank</a:t>
                       </a:r>
-                      <a:endParaRPr lang="es-ES_tradnl" sz="1000" noProof="1">
+                      <a:endParaRPr lang="es-ES_tradnl" sz="900" noProof="1">
                         <a:solidFill>
                           <a:schemeClr val="tx1"/>
                         </a:solidFill>
@@ -4806,7 +4811,7 @@
                         <a:buNone/>
                       </a:pPr>
                       <a:r>
-                        <a:rPr lang="es-ES_tradnl" sz="1000" noProof="1">
+                        <a:rPr lang="es-ES_tradnl" sz="900" noProof="1">
                           <a:solidFill>
                             <a:schemeClr val="tx1"/>
                           </a:solidFill>
@@ -4816,7 +4821,7 @@
                         </a:rPr>
                         <a:t>Sweep Val</a:t>
                       </a:r>
-                      <a:endParaRPr lang="es-ES_tradnl" sz="1000" noProof="1">
+                      <a:endParaRPr lang="es-ES_tradnl" sz="900" noProof="1">
                         <a:solidFill>
                           <a:schemeClr val="tx1"/>
                         </a:solidFill>
@@ -4858,7 +4863,7 @@
                         <a:buNone/>
                       </a:pPr>
                       <a:r>
-                        <a:rPr lang="es-ES_tradnl" sz="1000" noProof="1">
+                        <a:rPr lang="es-ES_tradnl" sz="900" noProof="1">
                           <a:solidFill>
                             <a:schemeClr val="tx1"/>
                           </a:solidFill>
@@ -4868,7 +4873,7 @@
                         </a:rPr>
                         <a:t>O1_final</a:t>
                       </a:r>
-                      <a:endParaRPr lang="es-ES_tradnl" sz="1000" noProof="1">
+                      <a:endParaRPr lang="es-ES_tradnl" sz="900" noProof="1">
                         <a:solidFill>
                           <a:schemeClr val="tx1"/>
                         </a:solidFill>
@@ -4913,7 +4918,7 @@
                         <a:buNone/>
                       </a:pPr>
                       <a:r>
-                        <a:rPr lang="es-ES_tradnl" sz="1000" noProof="1">
+                        <a:rPr lang="es-ES_tradnl" sz="900" noProof="1">
                           <a:solidFill>
                             <a:schemeClr val="tx1"/>
                           </a:solidFill>
@@ -4923,7 +4928,7 @@
                         </a:rPr>
                         <a:t>Mp [°]</a:t>
                       </a:r>
-                      <a:endParaRPr lang="es-ES_tradnl" sz="1000" noProof="1">
+                      <a:endParaRPr lang="es-ES_tradnl" sz="900" noProof="1">
                         <a:solidFill>
                           <a:schemeClr val="tx1"/>
                         </a:solidFill>
@@ -4965,7 +4970,7 @@
                         <a:buNone/>
                       </a:pPr>
                       <a:r>
-                        <a:rPr lang="es-ES_tradnl" sz="1000" noProof="1">
+                        <a:rPr lang="es-ES_tradnl" sz="900" noProof="1">
                           <a:solidFill>
                             <a:schemeClr val="tx1"/>
                           </a:solidFill>
@@ -4975,7 +4980,7 @@
                         </a:rPr>
                         <a:t>Mp[%]</a:t>
                       </a:r>
-                      <a:endParaRPr lang="es-ES_tradnl" sz="1000" noProof="1">
+                      <a:endParaRPr lang="es-ES_tradnl" sz="900" noProof="1">
                         <a:solidFill>
                           <a:schemeClr val="tx1"/>
                         </a:solidFill>
@@ -5020,7 +5025,7 @@
                         <a:buNone/>
                       </a:pPr>
                       <a:r>
-                        <a:rPr lang="es-ES_tradnl" sz="1000" noProof="1">
+                        <a:rPr lang="es-ES_tradnl" sz="900" noProof="1">
                           <a:solidFill>
                             <a:schemeClr val="tx1"/>
                           </a:solidFill>
@@ -5030,7 +5035,7 @@
                         </a:rPr>
                         <a:t>T[s]</a:t>
                       </a:r>
-                      <a:endParaRPr lang="es-ES_tradnl" sz="1000" noProof="1">
+                      <a:endParaRPr lang="es-ES_tradnl" sz="900" noProof="1">
                         <a:solidFill>
                           <a:schemeClr val="tx1"/>
                         </a:solidFill>
@@ -5075,7 +5080,7 @@
                         <a:buNone/>
                       </a:pPr>
                       <a:r>
-                        <a:rPr lang="es-ES_tradnl" sz="1000" noProof="1">
+                        <a:rPr lang="es-ES_tradnl" sz="900" noProof="1">
                           <a:solidFill>
                             <a:schemeClr val="tx1"/>
                           </a:solidFill>
@@ -5085,7 +5090,7 @@
                         </a:rPr>
                         <a:t>e_ss_abs[°]</a:t>
                       </a:r>
-                      <a:endParaRPr lang="es-ES_tradnl" sz="1000" noProof="1">
+                      <a:endParaRPr lang="es-ES_tradnl" sz="900" noProof="1">
                         <a:solidFill>
                           <a:schemeClr val="tx1"/>
                         </a:solidFill>
@@ -5127,7 +5132,7 @@
                         <a:buNone/>
                       </a:pPr>
                       <a:r>
-                        <a:rPr lang="es-ES_tradnl" sz="1000" noProof="1">
+                        <a:rPr lang="es-ES_tradnl" sz="900" noProof="1">
                           <a:solidFill>
                             <a:schemeClr val="tx1"/>
                           </a:solidFill>
@@ -5137,7 +5142,7 @@
                         </a:rPr>
                         <a:t>RMSE[°]</a:t>
                       </a:r>
-                      <a:endParaRPr lang="es-ES_tradnl" sz="1000" noProof="1">
+                      <a:endParaRPr lang="es-ES_tradnl" sz="900" noProof="1">
                         <a:solidFill>
                           <a:schemeClr val="tx1"/>
                         </a:solidFill>
@@ -5179,7 +5184,7 @@
                         <a:buNone/>
                       </a:pPr>
                       <a:r>
-                        <a:rPr lang="es-ES_tradnl" sz="1000" noProof="1">
+                        <a:rPr lang="es-ES_tradnl" sz="900" noProof="1">
                           <a:solidFill>
                             <a:schemeClr val="tx1"/>
                           </a:solidFill>
@@ -5189,7 +5194,7 @@
                         </a:rPr>
                         <a:t>ITAE[°s]</a:t>
                       </a:r>
-                      <a:endParaRPr lang="es-ES_tradnl" sz="1000" noProof="1">
+                      <a:endParaRPr lang="es-ES_tradnl" sz="900" noProof="1">
                         <a:solidFill>
                           <a:schemeClr val="tx1"/>
                         </a:solidFill>
@@ -5231,7 +5236,7 @@
                         <a:buNone/>
                       </a:pPr>
                       <a:r>
-                        <a:rPr lang="es-ES_tradnl" sz="1000" noProof="1">
+                        <a:rPr lang="es-ES_tradnl" sz="900" noProof="1">
                           <a:solidFill>
                             <a:schemeClr val="tx1"/>
                           </a:solidFill>
@@ -5241,7 +5246,7 @@
                         </a:rPr>
                         <a:t>Tr[s]</a:t>
                       </a:r>
-                      <a:endParaRPr lang="es-ES_tradnl" sz="1000" noProof="1">
+                      <a:endParaRPr lang="es-ES_tradnl" sz="900" noProof="1">
                         <a:solidFill>
                           <a:schemeClr val="tx1"/>
                         </a:solidFill>
@@ -5283,7 +5288,7 @@
                         <a:buNone/>
                       </a:pPr>
                       <a:r>
-                        <a:rPr lang="es-ES_tradnl" sz="1000" noProof="1">
+                        <a:rPr lang="es-ES_tradnl" sz="900" noProof="1">
                           <a:solidFill>
                             <a:schemeClr val="tx1"/>
                           </a:solidFill>
@@ -5293,7 +5298,7 @@
                         </a:rPr>
                         <a:t>Iosc</a:t>
                       </a:r>
-                      <a:endParaRPr lang="es-ES_tradnl" sz="1000" noProof="1">
+                      <a:endParaRPr lang="es-ES_tradnl" sz="900" noProof="1">
                         <a:solidFill>
                           <a:schemeClr val="tx1"/>
                         </a:solidFill>
@@ -5335,7 +5340,7 @@
                         <a:buNone/>
                       </a:pPr>
                       <a:r>
-                        <a:rPr lang="es-ES_tradnl" sz="1000" noProof="1">
+                        <a:rPr lang="es-ES_tradnl" sz="900" noProof="1">
                           <a:solidFill>
                             <a:schemeClr val="tx1"/>
                           </a:solidFill>
@@ -5345,7 +5350,7 @@
                         </a:rPr>
                         <a:t>U_peak</a:t>
                       </a:r>
-                      <a:endParaRPr lang="es-ES_tradnl" sz="1000" noProof="1">
+                      <a:endParaRPr lang="es-ES_tradnl" sz="900" noProof="1">
                         <a:solidFill>
                           <a:schemeClr val="tx1"/>
                         </a:solidFill>
@@ -5387,7 +5392,7 @@
                         <a:buNone/>
                       </a:pPr>
                       <a:r>
-                        <a:rPr lang="es-ES_tradnl" sz="1000" noProof="1">
+                        <a:rPr lang="es-ES_tradnl" sz="900" noProof="1">
                           <a:solidFill>
                             <a:schemeClr val="tx1"/>
                           </a:solidFill>
@@ -5397,7 +5402,7 @@
                         </a:rPr>
                         <a:t>U_rms</a:t>
                       </a:r>
-                      <a:endParaRPr lang="es-ES_tradnl" sz="1000" noProof="1">
+                      <a:endParaRPr lang="es-ES_tradnl" sz="900" noProof="1">
                         <a:solidFill>
                           <a:schemeClr val="tx1"/>
                         </a:solidFill>
@@ -5439,7 +5444,7 @@
                         <a:buNone/>
                       </a:pPr>
                       <a:r>
-                        <a:rPr lang="es-ES_tradnl" sz="1000" noProof="1">
+                        <a:rPr lang="es-ES_tradnl" sz="900" noProof="1">
                           <a:solidFill>
                             <a:schemeClr val="tx1"/>
                           </a:solidFill>
@@ -5449,7 +5454,7 @@
                         </a:rPr>
                         <a:t>U_energy</a:t>
                       </a:r>
-                      <a:endParaRPr lang="es-ES_tradnl" sz="1000" noProof="1">
+                      <a:endParaRPr lang="es-ES_tradnl" sz="900" noProof="1">
                         <a:solidFill>
                           <a:schemeClr val="tx1"/>
                         </a:solidFill>
@@ -5491,7 +5496,7 @@
                         <a:buNone/>
                       </a:pPr>
                       <a:r>
-                        <a:rPr lang="es-ES_tradnl" sz="1000" noProof="1">
+                        <a:rPr lang="es-ES_tradnl" sz="900" noProof="1">
                           <a:solidFill>
                             <a:schemeClr val="tx1"/>
                           </a:solidFill>
@@ -5501,7 +5506,7 @@
                         </a:rPr>
                         <a:t>U_abs</a:t>
                       </a:r>
-                      <a:endParaRPr lang="es-ES_tradnl" sz="1000" noProof="1">
+                      <a:endParaRPr lang="es-ES_tradnl" sz="900" noProof="1">
                         <a:solidFill>
                           <a:schemeClr val="tx1"/>
                         </a:solidFill>
@@ -5543,7 +5548,7 @@
                         <a:buNone/>
                       </a:pPr>
                       <a:r>
-                        <a:rPr lang="es-ES_tradnl" sz="1000" noProof="1">
+                        <a:rPr lang="es-ES_tradnl" sz="900" noProof="1">
                           <a:solidFill>
                             <a:schemeClr val="tx1"/>
                           </a:solidFill>
@@ -5553,7 +5558,7 @@
                         </a:rPr>
                         <a:t>U_TV</a:t>
                       </a:r>
-                      <a:endParaRPr lang="es-ES_tradnl" sz="1000" noProof="1">
+                      <a:endParaRPr lang="es-ES_tradnl" sz="900" noProof="1">
                         <a:solidFill>
                           <a:schemeClr val="tx1"/>
                         </a:solidFill>
@@ -5602,7 +5607,7 @@
                         <a:buNone/>
                       </a:pPr>
                       <a:r>
-                        <a:rPr lang="es-ES_tradnl" sz="1000" b="0" noProof="1">
+                        <a:rPr lang="es-ES_tradnl" sz="900" b="0" noProof="1">
                           <a:solidFill>
                             <a:schemeClr val="tx1"/>
                           </a:solidFill>
@@ -5612,7 +5617,7 @@
                         </a:rPr>
                         <a:t>1</a:t>
                       </a:r>
-                      <a:endParaRPr lang="es-ES_tradnl" sz="1000" b="0" noProof="1">
+                      <a:endParaRPr lang="es-ES_tradnl" sz="900" b="0" noProof="1">
                         <a:solidFill>
                           <a:schemeClr val="tx1"/>
                         </a:solidFill>
@@ -5645,7 +5650,7 @@
                         <a:buNone/>
                       </a:pPr>
                       <a:r>
-                        <a:rPr lang="es-ES_tradnl" sz="1050" dirty="0">
+                        <a:rPr lang="es-ES_tradnl" sz="900" dirty="0">
                           <a:effectLst/>
                           <a:latin typeface="Times New Roman" panose="02020603050405020304" pitchFamily="18" charset="0"/>
                           <a:ea typeface="Times New Roman" panose="02020603050405020304" pitchFamily="18" charset="0"/>
@@ -5677,7 +5682,7 @@
                         <a:buNone/>
                       </a:pPr>
                       <a:r>
-                        <a:rPr lang="es-ES_tradnl" sz="1050" dirty="0">
+                        <a:rPr lang="es-ES_tradnl" sz="900" dirty="0">
                           <a:effectLst/>
                           <a:latin typeface="Times New Roman" panose="02020603050405020304" pitchFamily="18" charset="0"/>
                           <a:ea typeface="Times New Roman" panose="02020603050405020304" pitchFamily="18" charset="0"/>
@@ -5709,7 +5714,7 @@
                         <a:buNone/>
                       </a:pPr>
                       <a:r>
-                        <a:rPr lang="es-ES_tradnl" sz="1050" dirty="0">
+                        <a:rPr lang="es-ES_tradnl" sz="900" dirty="0">
                           <a:effectLst/>
                           <a:latin typeface="Times New Roman" panose="02020603050405020304" pitchFamily="18" charset="0"/>
                           <a:ea typeface="Times New Roman" panose="02020603050405020304" pitchFamily="18" charset="0"/>
@@ -5741,7 +5746,7 @@
                         <a:buNone/>
                       </a:pPr>
                       <a:r>
-                        <a:rPr lang="es-ES_tradnl" sz="1050" dirty="0">
+                        <a:rPr lang="es-ES_tradnl" sz="900" dirty="0">
                           <a:effectLst/>
                           <a:latin typeface="Times New Roman" panose="02020603050405020304" pitchFamily="18" charset="0"/>
                           <a:ea typeface="Times New Roman" panose="02020603050405020304" pitchFamily="18" charset="0"/>
@@ -5773,7 +5778,7 @@
                         <a:buNone/>
                       </a:pPr>
                       <a:r>
-                        <a:rPr lang="es-ES_tradnl" sz="1050" dirty="0">
+                        <a:rPr lang="es-ES_tradnl" sz="900" dirty="0">
                           <a:effectLst/>
                           <a:latin typeface="Times New Roman" panose="02020603050405020304" pitchFamily="18" charset="0"/>
                           <a:ea typeface="Times New Roman" panose="02020603050405020304" pitchFamily="18" charset="0"/>
@@ -5805,7 +5810,7 @@
                         <a:buNone/>
                       </a:pPr>
                       <a:r>
-                        <a:rPr lang="es-ES_tradnl" sz="1050" dirty="0">
+                        <a:rPr lang="es-ES_tradnl" sz="900" dirty="0">
                           <a:effectLst/>
                           <a:latin typeface="Times New Roman" panose="02020603050405020304" pitchFamily="18" charset="0"/>
                           <a:ea typeface="Times New Roman" panose="02020603050405020304" pitchFamily="18" charset="0"/>
@@ -5837,7 +5842,7 @@
                         <a:buNone/>
                       </a:pPr>
                       <a:r>
-                        <a:rPr lang="es-ES_tradnl" sz="1050" dirty="0">
+                        <a:rPr lang="es-ES_tradnl" sz="900" dirty="0">
                           <a:effectLst/>
                           <a:latin typeface="Times New Roman" panose="02020603050405020304" pitchFamily="18" charset="0"/>
                           <a:ea typeface="Times New Roman" panose="02020603050405020304" pitchFamily="18" charset="0"/>
@@ -5869,7 +5874,7 @@
                         <a:buNone/>
                       </a:pPr>
                       <a:r>
-                        <a:rPr lang="es-ES_tradnl" sz="1050" dirty="0">
+                        <a:rPr lang="es-ES_tradnl" sz="900" dirty="0">
                           <a:effectLst/>
                           <a:latin typeface="Times New Roman" panose="02020603050405020304" pitchFamily="18" charset="0"/>
                           <a:ea typeface="Times New Roman" panose="02020603050405020304" pitchFamily="18" charset="0"/>
@@ -5901,7 +5906,7 @@
                         <a:buNone/>
                       </a:pPr>
                       <a:r>
-                        <a:rPr lang="es-ES_tradnl" sz="1050" dirty="0">
+                        <a:rPr lang="es-ES_tradnl" sz="900" dirty="0">
                           <a:effectLst/>
                           <a:latin typeface="Times New Roman" panose="02020603050405020304" pitchFamily="18" charset="0"/>
                           <a:ea typeface="Times New Roman" panose="02020603050405020304" pitchFamily="18" charset="0"/>
@@ -5933,7 +5938,7 @@
                         <a:buNone/>
                       </a:pPr>
                       <a:r>
-                        <a:rPr lang="es-ES_tradnl" sz="1050" dirty="0">
+                        <a:rPr lang="es-ES_tradnl" sz="900" dirty="0">
                           <a:effectLst/>
                           <a:latin typeface="Times New Roman" panose="02020603050405020304" pitchFamily="18" charset="0"/>
                           <a:ea typeface="Times New Roman" panose="02020603050405020304" pitchFamily="18" charset="0"/>
@@ -5965,14 +5970,20 @@
                         <a:buNone/>
                       </a:pPr>
                       <a:r>
-                        <a:rPr lang="es-ES_tradnl" sz="1050" dirty="0">
+                        <a:rPr lang="es-ES" sz="900">
                           <a:effectLst/>
                           <a:latin typeface="Times New Roman" panose="02020603050405020304" pitchFamily="18" charset="0"/>
                           <a:ea typeface="Times New Roman" panose="02020603050405020304" pitchFamily="18" charset="0"/>
                           <a:cs typeface="Times New Roman" panose="02020603050405020304" pitchFamily="18" charset="0"/>
                         </a:rPr>
-                        <a:t>9.92</a:t>
-                      </a:r>
+                        <a:t>6.00</a:t>
+                      </a:r>
+                      <a:endParaRPr lang="de-DE" sz="900">
+                        <a:effectLst/>
+                        <a:latin typeface="Times New Roman" panose="02020603050405020304" pitchFamily="18" charset="0"/>
+                        <a:ea typeface="Times New Roman" panose="02020603050405020304" pitchFamily="18" charset="0"/>
+                        <a:cs typeface="Times New Roman" panose="02020603050405020304" pitchFamily="18" charset="0"/>
+                      </a:endParaRPr>
                     </a:p>
                   </a:txBody>
                   <a:tcPr marL="68580" marR="68580" marT="0" marB="0">
@@ -5997,14 +6008,20 @@
                         <a:buNone/>
                       </a:pPr>
                       <a:r>
-                        <a:rPr lang="es-ES_tradnl" sz="1050" dirty="0">
+                        <a:rPr lang="es-ES" sz="900">
                           <a:effectLst/>
                           <a:latin typeface="Times New Roman" panose="02020603050405020304" pitchFamily="18" charset="0"/>
                           <a:ea typeface="Times New Roman" panose="02020603050405020304" pitchFamily="18" charset="0"/>
                           <a:cs typeface="Times New Roman" panose="02020603050405020304" pitchFamily="18" charset="0"/>
                         </a:rPr>
-                        <a:t>3.74</a:t>
-                      </a:r>
+                        <a:t>2.70</a:t>
+                      </a:r>
+                      <a:endParaRPr lang="de-DE" sz="900">
+                        <a:effectLst/>
+                        <a:latin typeface="Times New Roman" panose="02020603050405020304" pitchFamily="18" charset="0"/>
+                        <a:ea typeface="Times New Roman" panose="02020603050405020304" pitchFamily="18" charset="0"/>
+                        <a:cs typeface="Times New Roman" panose="02020603050405020304" pitchFamily="18" charset="0"/>
+                      </a:endParaRPr>
                     </a:p>
                   </a:txBody>
                   <a:tcPr marL="68580" marR="68580" marT="0" marB="0">
@@ -6029,14 +6046,20 @@
                         <a:buNone/>
                       </a:pPr>
                       <a:r>
-                        <a:rPr lang="es-ES_tradnl" sz="1050" dirty="0">
+                        <a:rPr lang="es-ES" sz="900">
                           <a:effectLst/>
                           <a:latin typeface="Times New Roman" panose="02020603050405020304" pitchFamily="18" charset="0"/>
                           <a:ea typeface="Times New Roman" panose="02020603050405020304" pitchFamily="18" charset="0"/>
                           <a:cs typeface="Times New Roman" panose="02020603050405020304" pitchFamily="18" charset="0"/>
                         </a:rPr>
-                        <a:t>78.53</a:t>
-                      </a:r>
+                        <a:t>43.52</a:t>
+                      </a:r>
+                      <a:endParaRPr lang="de-DE" sz="900">
+                        <a:effectLst/>
+                        <a:latin typeface="Times New Roman" panose="02020603050405020304" pitchFamily="18" charset="0"/>
+                        <a:ea typeface="Times New Roman" panose="02020603050405020304" pitchFamily="18" charset="0"/>
+                        <a:cs typeface="Times New Roman" panose="02020603050405020304" pitchFamily="18" charset="0"/>
+                      </a:endParaRPr>
                     </a:p>
                   </a:txBody>
                   <a:tcPr marL="68580" marR="68580" marT="0" marB="0">
@@ -6061,14 +6084,20 @@
                         <a:buNone/>
                       </a:pPr>
                       <a:r>
-                        <a:rPr lang="es-ES_tradnl" sz="1050" dirty="0">
+                        <a:rPr lang="es-ES" sz="900">
                           <a:effectLst/>
                           <a:latin typeface="Times New Roman" panose="02020603050405020304" pitchFamily="18" charset="0"/>
                           <a:ea typeface="Times New Roman" panose="02020603050405020304" pitchFamily="18" charset="0"/>
                           <a:cs typeface="Times New Roman" panose="02020603050405020304" pitchFamily="18" charset="0"/>
                         </a:rPr>
-                        <a:t>19.16</a:t>
-                      </a:r>
+                        <a:t>14.66</a:t>
+                      </a:r>
+                      <a:endParaRPr lang="de-DE" sz="900">
+                        <a:effectLst/>
+                        <a:latin typeface="Times New Roman" panose="02020603050405020304" pitchFamily="18" charset="0"/>
+                        <a:ea typeface="Times New Roman" panose="02020603050405020304" pitchFamily="18" charset="0"/>
+                        <a:cs typeface="Times New Roman" panose="02020603050405020304" pitchFamily="18" charset="0"/>
+                      </a:endParaRPr>
                     </a:p>
                   </a:txBody>
                   <a:tcPr marL="68580" marR="68580" marT="0" marB="0">
@@ -6093,14 +6122,20 @@
                         <a:buNone/>
                       </a:pPr>
                       <a:r>
-                        <a:rPr lang="es-ES_tradnl" sz="1050" dirty="0">
+                        <a:rPr lang="es-ES" sz="900">
                           <a:effectLst/>
                           <a:latin typeface="Times New Roman" panose="02020603050405020304" pitchFamily="18" charset="0"/>
                           <a:ea typeface="Times New Roman" panose="02020603050405020304" pitchFamily="18" charset="0"/>
                           <a:cs typeface="Times New Roman" panose="02020603050405020304" pitchFamily="18" charset="0"/>
                         </a:rPr>
-                        <a:t>48.30</a:t>
-                      </a:r>
+                        <a:t>6.00</a:t>
+                      </a:r>
+                      <a:endParaRPr lang="de-DE" sz="900">
+                        <a:effectLst/>
+                        <a:latin typeface="Times New Roman" panose="02020603050405020304" pitchFamily="18" charset="0"/>
+                        <a:ea typeface="Times New Roman" panose="02020603050405020304" pitchFamily="18" charset="0"/>
+                        <a:cs typeface="Times New Roman" panose="02020603050405020304" pitchFamily="18" charset="0"/>
+                      </a:endParaRPr>
                     </a:p>
                   </a:txBody>
                   <a:tcPr marL="68580" marR="68580" marT="0" marB="0">
@@ -6132,7 +6167,7 @@
                         <a:buNone/>
                       </a:pPr>
                       <a:r>
-                        <a:rPr lang="es-ES_tradnl" sz="1000" b="0" noProof="1">
+                        <a:rPr lang="es-ES_tradnl" sz="900" b="0" noProof="1">
                           <a:solidFill>
                             <a:schemeClr val="tx1"/>
                           </a:solidFill>
@@ -6158,7 +6193,7 @@
                         <a:buNone/>
                       </a:pPr>
                       <a:r>
-                        <a:rPr lang="es-ES_tradnl" sz="1050" dirty="0">
+                        <a:rPr lang="es-ES_tradnl" sz="900" dirty="0">
                           <a:effectLst/>
                           <a:latin typeface="Times New Roman" panose="02020603050405020304" pitchFamily="18" charset="0"/>
                           <a:ea typeface="Times New Roman" panose="02020603050405020304" pitchFamily="18" charset="0"/>
@@ -6181,7 +6216,7 @@
                         <a:buNone/>
                       </a:pPr>
                       <a:r>
-                        <a:rPr lang="es-ES_tradnl" sz="1050" dirty="0">
+                        <a:rPr lang="es-ES_tradnl" sz="900" dirty="0">
                           <a:effectLst/>
                           <a:latin typeface="Times New Roman" panose="02020603050405020304" pitchFamily="18" charset="0"/>
                           <a:ea typeface="Times New Roman" panose="02020603050405020304" pitchFamily="18" charset="0"/>
@@ -6204,7 +6239,7 @@
                         <a:buNone/>
                       </a:pPr>
                       <a:r>
-                        <a:rPr lang="es-ES_tradnl" sz="1050" dirty="0">
+                        <a:rPr lang="es-ES_tradnl" sz="900" dirty="0">
                           <a:effectLst/>
                           <a:latin typeface="Times New Roman" panose="02020603050405020304" pitchFamily="18" charset="0"/>
                           <a:ea typeface="Times New Roman" panose="02020603050405020304" pitchFamily="18" charset="0"/>
@@ -6227,7 +6262,7 @@
                         <a:buNone/>
                       </a:pPr>
                       <a:r>
-                        <a:rPr lang="es-ES_tradnl" sz="1050" dirty="0">
+                        <a:rPr lang="es-ES_tradnl" sz="900" dirty="0">
                           <a:effectLst/>
                           <a:latin typeface="Times New Roman" panose="02020603050405020304" pitchFamily="18" charset="0"/>
                           <a:ea typeface="Times New Roman" panose="02020603050405020304" pitchFamily="18" charset="0"/>
@@ -6250,7 +6285,7 @@
                         <a:buNone/>
                       </a:pPr>
                       <a:r>
-                        <a:rPr lang="es-ES_tradnl" sz="1050" dirty="0">
+                        <a:rPr lang="es-ES_tradnl" sz="900" dirty="0">
                           <a:effectLst/>
                           <a:latin typeface="Times New Roman" panose="02020603050405020304" pitchFamily="18" charset="0"/>
                           <a:ea typeface="Times New Roman" panose="02020603050405020304" pitchFamily="18" charset="0"/>
@@ -6273,7 +6308,7 @@
                         <a:buNone/>
                       </a:pPr>
                       <a:r>
-                        <a:rPr lang="es-ES_tradnl" sz="1050" dirty="0">
+                        <a:rPr lang="es-ES_tradnl" sz="900" dirty="0">
                           <a:effectLst/>
                           <a:latin typeface="Times New Roman" panose="02020603050405020304" pitchFamily="18" charset="0"/>
                           <a:ea typeface="Times New Roman" panose="02020603050405020304" pitchFamily="18" charset="0"/>
@@ -6296,7 +6331,7 @@
                         <a:buNone/>
                       </a:pPr>
                       <a:r>
-                        <a:rPr lang="es-ES_tradnl" sz="1050" dirty="0">
+                        <a:rPr lang="es-ES_tradnl" sz="900" dirty="0">
                           <a:effectLst/>
                           <a:latin typeface="Times New Roman" panose="02020603050405020304" pitchFamily="18" charset="0"/>
                           <a:ea typeface="Times New Roman" panose="02020603050405020304" pitchFamily="18" charset="0"/>
@@ -6319,7 +6354,7 @@
                         <a:buNone/>
                       </a:pPr>
                       <a:r>
-                        <a:rPr lang="es-ES_tradnl" sz="1050" dirty="0">
+                        <a:rPr lang="es-ES_tradnl" sz="900" dirty="0">
                           <a:effectLst/>
                           <a:latin typeface="Times New Roman" panose="02020603050405020304" pitchFamily="18" charset="0"/>
                           <a:ea typeface="Times New Roman" panose="02020603050405020304" pitchFamily="18" charset="0"/>
@@ -6342,7 +6377,7 @@
                         <a:buNone/>
                       </a:pPr>
                       <a:r>
-                        <a:rPr lang="es-ES_tradnl" sz="1050" dirty="0">
+                        <a:rPr lang="es-ES_tradnl" sz="900" dirty="0">
                           <a:effectLst/>
                           <a:latin typeface="Times New Roman" panose="02020603050405020304" pitchFamily="18" charset="0"/>
                           <a:ea typeface="Times New Roman" panose="02020603050405020304" pitchFamily="18" charset="0"/>
@@ -6365,7 +6400,7 @@
                         <a:buNone/>
                       </a:pPr>
                       <a:r>
-                        <a:rPr lang="es-ES_tradnl" sz="1050" dirty="0">
+                        <a:rPr lang="es-ES_tradnl" sz="900" dirty="0">
                           <a:effectLst/>
                           <a:latin typeface="Times New Roman" panose="02020603050405020304" pitchFamily="18" charset="0"/>
                           <a:ea typeface="Times New Roman" panose="02020603050405020304" pitchFamily="18" charset="0"/>
@@ -6388,106 +6423,136 @@
                         <a:buNone/>
                       </a:pPr>
                       <a:r>
-                        <a:rPr lang="es-ES_tradnl" sz="1050" dirty="0">
+                        <a:rPr lang="es-ES" sz="900">
                           <a:effectLst/>
                           <a:latin typeface="Times New Roman" panose="02020603050405020304" pitchFamily="18" charset="0"/>
                           <a:ea typeface="Times New Roman" panose="02020603050405020304" pitchFamily="18" charset="0"/>
                           <a:cs typeface="Times New Roman" panose="02020603050405020304" pitchFamily="18" charset="0"/>
                         </a:rPr>
-                        <a:t>10.00</a:t>
-                      </a:r>
-                    </a:p>
-                  </a:txBody>
-                  <a:tcPr marL="68580" marR="68580" marT="0" marB="0">
-                    <a:noFill/>
-                  </a:tcPr>
-                </a:tc>
-                <a:tc>
-                  <a:txBody>
-                    <a:bodyPr/>
-                    <a:lstStyle/>
-                    <a:p>
-                      <a:pPr algn="ctr">
-                        <a:buNone/>
-                      </a:pPr>
-                      <a:r>
-                        <a:rPr lang="es-ES_tradnl" sz="1050" dirty="0">
+                        <a:t>6.00</a:t>
+                      </a:r>
+                      <a:endParaRPr lang="de-DE" sz="900">
+                        <a:effectLst/>
+                        <a:latin typeface="Times New Roman" panose="02020603050405020304" pitchFamily="18" charset="0"/>
+                        <a:ea typeface="Times New Roman" panose="02020603050405020304" pitchFamily="18" charset="0"/>
+                        <a:cs typeface="Times New Roman" panose="02020603050405020304" pitchFamily="18" charset="0"/>
+                      </a:endParaRPr>
+                    </a:p>
+                  </a:txBody>
+                  <a:tcPr marL="68580" marR="68580" marT="0" marB="0">
+                    <a:noFill/>
+                  </a:tcPr>
+                </a:tc>
+                <a:tc>
+                  <a:txBody>
+                    <a:bodyPr/>
+                    <a:lstStyle/>
+                    <a:p>
+                      <a:pPr algn="ctr">
+                        <a:buNone/>
+                      </a:pPr>
+                      <a:r>
+                        <a:rPr lang="es-ES" sz="900">
                           <a:effectLst/>
                           <a:latin typeface="Times New Roman" panose="02020603050405020304" pitchFamily="18" charset="0"/>
                           <a:ea typeface="Times New Roman" panose="02020603050405020304" pitchFamily="18" charset="0"/>
                           <a:cs typeface="Times New Roman" panose="02020603050405020304" pitchFamily="18" charset="0"/>
                         </a:rPr>
-                        <a:t>3.40</a:t>
-                      </a:r>
-                    </a:p>
-                  </a:txBody>
-                  <a:tcPr marL="68580" marR="68580" marT="0" marB="0">
-                    <a:noFill/>
-                  </a:tcPr>
-                </a:tc>
-                <a:tc>
-                  <a:txBody>
-                    <a:bodyPr/>
-                    <a:lstStyle/>
-                    <a:p>
-                      <a:pPr algn="ctr">
-                        <a:buNone/>
-                      </a:pPr>
-                      <a:r>
-                        <a:rPr lang="es-ES_tradnl" sz="1050" dirty="0">
+                        <a:t>1.99</a:t>
+                      </a:r>
+                      <a:endParaRPr lang="de-DE" sz="900">
+                        <a:effectLst/>
+                        <a:latin typeface="Times New Roman" panose="02020603050405020304" pitchFamily="18" charset="0"/>
+                        <a:ea typeface="Times New Roman" panose="02020603050405020304" pitchFamily="18" charset="0"/>
+                        <a:cs typeface="Times New Roman" panose="02020603050405020304" pitchFamily="18" charset="0"/>
+                      </a:endParaRPr>
+                    </a:p>
+                  </a:txBody>
+                  <a:tcPr marL="68580" marR="68580" marT="0" marB="0">
+                    <a:noFill/>
+                  </a:tcPr>
+                </a:tc>
+                <a:tc>
+                  <a:txBody>
+                    <a:bodyPr/>
+                    <a:lstStyle/>
+                    <a:p>
+                      <a:pPr algn="ctr">
+                        <a:buNone/>
+                      </a:pPr>
+                      <a:r>
+                        <a:rPr lang="es-ES" sz="900">
                           <a:effectLst/>
                           <a:latin typeface="Times New Roman" panose="02020603050405020304" pitchFamily="18" charset="0"/>
                           <a:ea typeface="Times New Roman" panose="02020603050405020304" pitchFamily="18" charset="0"/>
                           <a:cs typeface="Times New Roman" panose="02020603050405020304" pitchFamily="18" charset="0"/>
                         </a:rPr>
-                        <a:t>62.45</a:t>
-                      </a:r>
-                    </a:p>
-                  </a:txBody>
-                  <a:tcPr marL="68580" marR="68580" marT="0" marB="0">
-                    <a:noFill/>
-                  </a:tcPr>
-                </a:tc>
-                <a:tc>
-                  <a:txBody>
-                    <a:bodyPr/>
-                    <a:lstStyle/>
-                    <a:p>
-                      <a:pPr algn="ctr">
-                        <a:buNone/>
-                      </a:pPr>
-                      <a:r>
-                        <a:rPr lang="es-ES_tradnl" sz="1050" dirty="0">
+                        <a:t>19.90</a:t>
+                      </a:r>
+                      <a:endParaRPr lang="de-DE" sz="900">
+                        <a:effectLst/>
+                        <a:latin typeface="Times New Roman" panose="02020603050405020304" pitchFamily="18" charset="0"/>
+                        <a:ea typeface="Times New Roman" panose="02020603050405020304" pitchFamily="18" charset="0"/>
+                        <a:cs typeface="Times New Roman" panose="02020603050405020304" pitchFamily="18" charset="0"/>
+                      </a:endParaRPr>
+                    </a:p>
+                  </a:txBody>
+                  <a:tcPr marL="68580" marR="68580" marT="0" marB="0">
+                    <a:noFill/>
+                  </a:tcPr>
+                </a:tc>
+                <a:tc>
+                  <a:txBody>
+                    <a:bodyPr/>
+                    <a:lstStyle/>
+                    <a:p>
+                      <a:pPr algn="ctr">
+                        <a:buNone/>
+                      </a:pPr>
+                      <a:r>
+                        <a:rPr lang="es-ES" sz="900">
                           <a:effectLst/>
                           <a:latin typeface="Times New Roman" panose="02020603050405020304" pitchFamily="18" charset="0"/>
                           <a:ea typeface="Times New Roman" panose="02020603050405020304" pitchFamily="18" charset="0"/>
                           <a:cs typeface="Times New Roman" panose="02020603050405020304" pitchFamily="18" charset="0"/>
                         </a:rPr>
-                        <a:t>17.57</a:t>
-                      </a:r>
-                    </a:p>
-                  </a:txBody>
-                  <a:tcPr marL="68580" marR="68580" marT="0" marB="0">
-                    <a:noFill/>
-                  </a:tcPr>
-                </a:tc>
-                <a:tc>
-                  <a:txBody>
-                    <a:bodyPr/>
-                    <a:lstStyle/>
-                    <a:p>
-                      <a:pPr algn="ctr">
-                        <a:buNone/>
-                      </a:pPr>
-                      <a:r>
-                        <a:rPr lang="es-ES_tradnl" sz="1050" dirty="0">
+                        <a:t>9.79</a:t>
+                      </a:r>
+                      <a:endParaRPr lang="de-DE" sz="900">
+                        <a:effectLst/>
+                        <a:latin typeface="Times New Roman" panose="02020603050405020304" pitchFamily="18" charset="0"/>
+                        <a:ea typeface="Times New Roman" panose="02020603050405020304" pitchFamily="18" charset="0"/>
+                        <a:cs typeface="Times New Roman" panose="02020603050405020304" pitchFamily="18" charset="0"/>
+                      </a:endParaRPr>
+                    </a:p>
+                  </a:txBody>
+                  <a:tcPr marL="68580" marR="68580" marT="0" marB="0">
+                    <a:noFill/>
+                  </a:tcPr>
+                </a:tc>
+                <a:tc>
+                  <a:txBody>
+                    <a:bodyPr/>
+                    <a:lstStyle/>
+                    <a:p>
+                      <a:pPr algn="ctr">
+                        <a:buNone/>
+                      </a:pPr>
+                      <a:r>
+                        <a:rPr lang="es-ES" sz="900">
                           <a:effectLst/>
                           <a:latin typeface="Times New Roman" panose="02020603050405020304" pitchFamily="18" charset="0"/>
                           <a:ea typeface="Times New Roman" panose="02020603050405020304" pitchFamily="18" charset="0"/>
                           <a:cs typeface="Times New Roman" panose="02020603050405020304" pitchFamily="18" charset="0"/>
                         </a:rPr>
-                        <a:t>17.31</a:t>
-                      </a:r>
+                        <a:t>6.00</a:t>
+                      </a:r>
+                      <a:endParaRPr lang="de-DE" sz="900">
+                        <a:effectLst/>
+                        <a:latin typeface="Times New Roman" panose="02020603050405020304" pitchFamily="18" charset="0"/>
+                        <a:ea typeface="Times New Roman" panose="02020603050405020304" pitchFamily="18" charset="0"/>
+                        <a:cs typeface="Times New Roman" panose="02020603050405020304" pitchFamily="18" charset="0"/>
+                      </a:endParaRPr>
                     </a:p>
                   </a:txBody>
                   <a:tcPr marL="68580" marR="68580" marT="0" marB="0">
@@ -6510,7 +6575,7 @@
                         <a:buNone/>
                       </a:pPr>
                       <a:r>
-                        <a:rPr lang="es-ES_tradnl" sz="1000" b="0" noProof="1">
+                        <a:rPr lang="es-ES_tradnl" sz="900" b="0" noProof="1">
                           <a:solidFill>
                             <a:schemeClr val="tx1"/>
                           </a:solidFill>
@@ -6536,7 +6601,7 @@
                         <a:buNone/>
                       </a:pPr>
                       <a:r>
-                        <a:rPr lang="es-ES_tradnl" sz="1050" dirty="0">
+                        <a:rPr lang="es-ES_tradnl" sz="900" dirty="0">
                           <a:effectLst/>
                           <a:latin typeface="Times New Roman" panose="02020603050405020304" pitchFamily="18" charset="0"/>
                           <a:ea typeface="Times New Roman" panose="02020603050405020304" pitchFamily="18" charset="0"/>
@@ -6559,7 +6624,7 @@
                         <a:buNone/>
                       </a:pPr>
                       <a:r>
-                        <a:rPr lang="es-ES_tradnl" sz="1050" dirty="0">
+                        <a:rPr lang="es-ES_tradnl" sz="900" dirty="0">
                           <a:effectLst/>
                           <a:latin typeface="Times New Roman" panose="02020603050405020304" pitchFamily="18" charset="0"/>
                           <a:ea typeface="Times New Roman" panose="02020603050405020304" pitchFamily="18" charset="0"/>
@@ -6582,7 +6647,7 @@
                         <a:buNone/>
                       </a:pPr>
                       <a:r>
-                        <a:rPr lang="es-ES_tradnl" sz="1050" dirty="0">
+                        <a:rPr lang="es-ES_tradnl" sz="900" dirty="0">
                           <a:effectLst/>
                           <a:latin typeface="Times New Roman" panose="02020603050405020304" pitchFamily="18" charset="0"/>
                           <a:ea typeface="Times New Roman" panose="02020603050405020304" pitchFamily="18" charset="0"/>
@@ -6605,7 +6670,7 @@
                         <a:buNone/>
                       </a:pPr>
                       <a:r>
-                        <a:rPr lang="es-ES_tradnl" sz="1050" dirty="0">
+                        <a:rPr lang="es-ES_tradnl" sz="900" dirty="0">
                           <a:effectLst/>
                           <a:latin typeface="Times New Roman" panose="02020603050405020304" pitchFamily="18" charset="0"/>
                           <a:ea typeface="Times New Roman" panose="02020603050405020304" pitchFamily="18" charset="0"/>
@@ -6628,7 +6693,7 @@
                         <a:buNone/>
                       </a:pPr>
                       <a:r>
-                        <a:rPr lang="es-ES_tradnl" sz="1050" dirty="0">
+                        <a:rPr lang="es-ES_tradnl" sz="900" dirty="0">
                           <a:effectLst/>
                           <a:latin typeface="Times New Roman" panose="02020603050405020304" pitchFamily="18" charset="0"/>
                           <a:ea typeface="Times New Roman" panose="02020603050405020304" pitchFamily="18" charset="0"/>
@@ -6651,7 +6716,7 @@
                         <a:buNone/>
                       </a:pPr>
                       <a:r>
-                        <a:rPr lang="es-ES_tradnl" sz="1050" dirty="0">
+                        <a:rPr lang="es-ES_tradnl" sz="900" dirty="0">
                           <a:effectLst/>
                           <a:latin typeface="Times New Roman" panose="02020603050405020304" pitchFamily="18" charset="0"/>
                           <a:ea typeface="Times New Roman" panose="02020603050405020304" pitchFamily="18" charset="0"/>
@@ -6674,7 +6739,7 @@
                         <a:buNone/>
                       </a:pPr>
                       <a:r>
-                        <a:rPr lang="es-ES_tradnl" sz="1050" dirty="0">
+                        <a:rPr lang="es-ES_tradnl" sz="900" dirty="0">
                           <a:effectLst/>
                           <a:latin typeface="Times New Roman" panose="02020603050405020304" pitchFamily="18" charset="0"/>
                           <a:ea typeface="Times New Roman" panose="02020603050405020304" pitchFamily="18" charset="0"/>
@@ -6697,7 +6762,7 @@
                         <a:buNone/>
                       </a:pPr>
                       <a:r>
-                        <a:rPr lang="es-ES_tradnl" sz="1050" dirty="0">
+                        <a:rPr lang="es-ES_tradnl" sz="900" dirty="0">
                           <a:effectLst/>
                           <a:latin typeface="Times New Roman" panose="02020603050405020304" pitchFamily="18" charset="0"/>
                           <a:ea typeface="Times New Roman" panose="02020603050405020304" pitchFamily="18" charset="0"/>
@@ -6720,7 +6785,7 @@
                         <a:buNone/>
                       </a:pPr>
                       <a:r>
-                        <a:rPr lang="es-ES_tradnl" sz="1050" dirty="0">
+                        <a:rPr lang="es-ES_tradnl" sz="900" dirty="0">
                           <a:effectLst/>
                           <a:latin typeface="Times New Roman" panose="02020603050405020304" pitchFamily="18" charset="0"/>
                           <a:ea typeface="Times New Roman" panose="02020603050405020304" pitchFamily="18" charset="0"/>
@@ -6743,7 +6808,7 @@
                         <a:buNone/>
                       </a:pPr>
                       <a:r>
-                        <a:rPr lang="es-ES_tradnl" sz="1050" dirty="0">
+                        <a:rPr lang="es-ES_tradnl" sz="900" dirty="0">
                           <a:effectLst/>
                           <a:latin typeface="Times New Roman" panose="02020603050405020304" pitchFamily="18" charset="0"/>
                           <a:ea typeface="Times New Roman" panose="02020603050405020304" pitchFamily="18" charset="0"/>
@@ -6766,106 +6831,136 @@
                         <a:buNone/>
                       </a:pPr>
                       <a:r>
-                        <a:rPr lang="es-ES_tradnl" sz="1050" dirty="0">
+                        <a:rPr lang="es-ES" sz="900">
                           <a:effectLst/>
                           <a:latin typeface="Times New Roman" panose="02020603050405020304" pitchFamily="18" charset="0"/>
                           <a:ea typeface="Times New Roman" panose="02020603050405020304" pitchFamily="18" charset="0"/>
                           <a:cs typeface="Times New Roman" panose="02020603050405020304" pitchFamily="18" charset="0"/>
                         </a:rPr>
-                        <a:t>5.54</a:t>
-                      </a:r>
-                    </a:p>
-                  </a:txBody>
-                  <a:tcPr marL="68580" marR="68580" marT="0" marB="0">
-                    <a:noFill/>
-                  </a:tcPr>
-                </a:tc>
-                <a:tc>
-                  <a:txBody>
-                    <a:bodyPr/>
-                    <a:lstStyle/>
-                    <a:p>
-                      <a:pPr algn="ctr">
-                        <a:buNone/>
-                      </a:pPr>
-                      <a:r>
-                        <a:rPr lang="es-ES_tradnl" sz="1050" dirty="0">
+                        <a:t>3.44</a:t>
+                      </a:r>
+                      <a:endParaRPr lang="de-DE" sz="900">
+                        <a:effectLst/>
+                        <a:latin typeface="Times New Roman" panose="02020603050405020304" pitchFamily="18" charset="0"/>
+                        <a:ea typeface="Times New Roman" panose="02020603050405020304" pitchFamily="18" charset="0"/>
+                        <a:cs typeface="Times New Roman" panose="02020603050405020304" pitchFamily="18" charset="0"/>
+                      </a:endParaRPr>
+                    </a:p>
+                  </a:txBody>
+                  <a:tcPr marL="68580" marR="68580" marT="0" marB="0">
+                    <a:noFill/>
+                  </a:tcPr>
+                </a:tc>
+                <a:tc>
+                  <a:txBody>
+                    <a:bodyPr/>
+                    <a:lstStyle/>
+                    <a:p>
+                      <a:pPr algn="ctr">
+                        <a:buNone/>
+                      </a:pPr>
+                      <a:r>
+                        <a:rPr lang="es-ES" sz="900">
                           <a:effectLst/>
                           <a:latin typeface="Times New Roman" panose="02020603050405020304" pitchFamily="18" charset="0"/>
                           <a:ea typeface="Times New Roman" panose="02020603050405020304" pitchFamily="18" charset="0"/>
                           <a:cs typeface="Times New Roman" panose="02020603050405020304" pitchFamily="18" charset="0"/>
                         </a:rPr>
-                        <a:t>175.44</a:t>
-                      </a:r>
-                    </a:p>
-                  </a:txBody>
-                  <a:tcPr marL="68580" marR="68580" marT="0" marB="0">
-                    <a:noFill/>
-                  </a:tcPr>
-                </a:tc>
-                <a:tc>
-                  <a:txBody>
-                    <a:bodyPr/>
-                    <a:lstStyle/>
-                    <a:p>
-                      <a:pPr algn="ctr">
-                        <a:buNone/>
-                      </a:pPr>
-                      <a:r>
-                        <a:rPr lang="es-ES_tradnl" sz="1050" dirty="0">
+                        <a:t>70.47</a:t>
+                      </a:r>
+                      <a:endParaRPr lang="de-DE" sz="900">
+                        <a:effectLst/>
+                        <a:latin typeface="Times New Roman" panose="02020603050405020304" pitchFamily="18" charset="0"/>
+                        <a:ea typeface="Times New Roman" panose="02020603050405020304" pitchFamily="18" charset="0"/>
+                        <a:cs typeface="Times New Roman" panose="02020603050405020304" pitchFamily="18" charset="0"/>
+                      </a:endParaRPr>
+                    </a:p>
+                  </a:txBody>
+                  <a:tcPr marL="68580" marR="68580" marT="0" marB="0">
+                    <a:noFill/>
+                  </a:tcPr>
+                </a:tc>
+                <a:tc>
+                  <a:txBody>
+                    <a:bodyPr/>
+                    <a:lstStyle/>
+                    <a:p>
+                      <a:pPr algn="ctr">
+                        <a:buNone/>
+                      </a:pPr>
+                      <a:r>
+                        <a:rPr lang="es-ES" sz="900">
                           <a:effectLst/>
                           <a:latin typeface="Times New Roman" panose="02020603050405020304" pitchFamily="18" charset="0"/>
                           <a:ea typeface="Times New Roman" panose="02020603050405020304" pitchFamily="18" charset="0"/>
                           <a:cs typeface="Times New Roman" panose="02020603050405020304" pitchFamily="18" charset="0"/>
                         </a:rPr>
-                        <a:t>26.47</a:t>
-                      </a:r>
-                    </a:p>
-                  </a:txBody>
-                  <a:tcPr marL="68580" marR="68580" marT="0" marB="0">
-                    <a:noFill/>
-                  </a:tcPr>
-                </a:tc>
-                <a:tc>
-                  <a:txBody>
-                    <a:bodyPr/>
-                    <a:lstStyle/>
-                    <a:p>
-                      <a:pPr algn="ctr">
-                        <a:buNone/>
-                      </a:pPr>
-                      <a:r>
-                        <a:rPr lang="es-ES_tradnl" sz="1050" dirty="0">
+                        <a:t>17.86</a:t>
+                      </a:r>
+                      <a:endParaRPr lang="de-DE" sz="900">
+                        <a:effectLst/>
+                        <a:latin typeface="Times New Roman" panose="02020603050405020304" pitchFamily="18" charset="0"/>
+                        <a:ea typeface="Times New Roman" panose="02020603050405020304" pitchFamily="18" charset="0"/>
+                        <a:cs typeface="Times New Roman" panose="02020603050405020304" pitchFamily="18" charset="0"/>
+                      </a:endParaRPr>
+                    </a:p>
+                  </a:txBody>
+                  <a:tcPr marL="68580" marR="68580" marT="0" marB="0">
+                    <a:noFill/>
+                  </a:tcPr>
+                </a:tc>
+                <a:tc>
+                  <a:txBody>
+                    <a:bodyPr/>
+                    <a:lstStyle/>
+                    <a:p>
+                      <a:pPr algn="ctr">
+                        <a:buNone/>
+                      </a:pPr>
+                      <a:r>
+                        <a:rPr lang="es-ES" sz="900">
                           <a:effectLst/>
                           <a:latin typeface="Times New Roman" panose="02020603050405020304" pitchFamily="18" charset="0"/>
                           <a:ea typeface="Times New Roman" panose="02020603050405020304" pitchFamily="18" charset="0"/>
                           <a:cs typeface="Times New Roman" panose="02020603050405020304" pitchFamily="18" charset="0"/>
                         </a:rPr>
-                        <a:t>57.65</a:t>
-                      </a:r>
-                    </a:p>
-                  </a:txBody>
-                  <a:tcPr marL="68580" marR="68580" marT="0" marB="0">
-                    <a:noFill/>
-                  </a:tcPr>
-                </a:tc>
-                <a:tc>
-                  <a:txBody>
-                    <a:bodyPr/>
-                    <a:lstStyle/>
-                    <a:p>
-                      <a:pPr algn="ctr">
-                        <a:buNone/>
-                      </a:pPr>
-                      <a:r>
-                        <a:rPr lang="es-ES_tradnl" sz="1050" dirty="0">
+                        <a:t>33.75</a:t>
+                      </a:r>
+                      <a:endParaRPr lang="de-DE" sz="900">
+                        <a:effectLst/>
+                        <a:latin typeface="Times New Roman" panose="02020603050405020304" pitchFamily="18" charset="0"/>
+                        <a:ea typeface="Times New Roman" panose="02020603050405020304" pitchFamily="18" charset="0"/>
+                        <a:cs typeface="Times New Roman" panose="02020603050405020304" pitchFamily="18" charset="0"/>
+                      </a:endParaRPr>
+                    </a:p>
+                  </a:txBody>
+                  <a:tcPr marL="68580" marR="68580" marT="0" marB="0">
+                    <a:noFill/>
+                  </a:tcPr>
+                </a:tc>
+                <a:tc>
+                  <a:txBody>
+                    <a:bodyPr/>
+                    <a:lstStyle/>
+                    <a:p>
+                      <a:pPr algn="ctr">
+                        <a:buNone/>
+                      </a:pPr>
+                      <a:r>
+                        <a:rPr lang="es-ES" sz="900" dirty="0">
                           <a:effectLst/>
                           <a:latin typeface="Times New Roman" panose="02020603050405020304" pitchFamily="18" charset="0"/>
                           <a:ea typeface="Times New Roman" panose="02020603050405020304" pitchFamily="18" charset="0"/>
                           <a:cs typeface="Times New Roman" panose="02020603050405020304" pitchFamily="18" charset="0"/>
                         </a:rPr>
-                        <a:t>NaN</a:t>
-                      </a:r>
+                        <a:t>3.44</a:t>
+                      </a:r>
+                      <a:endParaRPr lang="de-DE" sz="900" dirty="0">
+                        <a:effectLst/>
+                        <a:latin typeface="Times New Roman" panose="02020603050405020304" pitchFamily="18" charset="0"/>
+                        <a:ea typeface="Times New Roman" panose="02020603050405020304" pitchFamily="18" charset="0"/>
+                        <a:cs typeface="Times New Roman" panose="02020603050405020304" pitchFamily="18" charset="0"/>
+                      </a:endParaRPr>
                     </a:p>
                   </a:txBody>
                   <a:tcPr marL="68580" marR="68580" marT="0" marB="0">
@@ -6887,7 +6982,7 @@
                       <a:pPr algn="ctr">
                         <a:buNone/>
                       </a:pPr>
-                      <a:endParaRPr lang="es-ES_tradnl" sz="1000" b="0" noProof="1">
+                      <a:endParaRPr lang="es-ES_tradnl" sz="900" b="0" noProof="1">
                         <a:solidFill>
                           <a:schemeClr val="tx1"/>
                         </a:solidFill>
@@ -6910,7 +7005,7 @@
                       <a:pPr algn="ctr">
                         <a:buNone/>
                       </a:pPr>
-                      <a:endParaRPr lang="es-ES_tradnl" sz="1000" dirty="0">
+                      <a:endParaRPr lang="es-ES_tradnl" sz="900" dirty="0">
                         <a:effectLst/>
                         <a:latin typeface="Times New Roman" panose="02020603050405020304" pitchFamily="18" charset="0"/>
                         <a:ea typeface="Times New Roman" panose="02020603050405020304" pitchFamily="18" charset="0"/>
@@ -6930,7 +7025,7 @@
                       <a:pPr algn="ctr">
                         <a:buNone/>
                       </a:pPr>
-                      <a:endParaRPr lang="es-ES_tradnl" sz="1000" dirty="0">
+                      <a:endParaRPr lang="es-ES_tradnl" sz="900" dirty="0">
                         <a:effectLst/>
                         <a:latin typeface="Times New Roman" panose="02020603050405020304" pitchFamily="18" charset="0"/>
                         <a:ea typeface="Times New Roman" panose="02020603050405020304" pitchFamily="18" charset="0"/>
@@ -6950,7 +7045,7 @@
                       <a:pPr algn="ctr">
                         <a:buNone/>
                       </a:pPr>
-                      <a:endParaRPr lang="es-ES_tradnl" sz="1000" dirty="0">
+                      <a:endParaRPr lang="es-ES_tradnl" sz="900" dirty="0">
                         <a:effectLst/>
                         <a:latin typeface="Times New Roman" panose="02020603050405020304" pitchFamily="18" charset="0"/>
                         <a:ea typeface="Times New Roman" panose="02020603050405020304" pitchFamily="18" charset="0"/>
@@ -6970,7 +7065,7 @@
                       <a:pPr algn="ctr">
                         <a:buNone/>
                       </a:pPr>
-                      <a:endParaRPr lang="es-ES_tradnl" sz="1000" dirty="0">
+                      <a:endParaRPr lang="es-ES_tradnl" sz="900" dirty="0">
                         <a:effectLst/>
                         <a:latin typeface="Times New Roman" panose="02020603050405020304" pitchFamily="18" charset="0"/>
                         <a:ea typeface="Times New Roman" panose="02020603050405020304" pitchFamily="18" charset="0"/>
@@ -6990,7 +7085,7 @@
                       <a:pPr algn="ctr">
                         <a:buNone/>
                       </a:pPr>
-                      <a:endParaRPr lang="es-ES_tradnl" sz="1000" dirty="0">
+                      <a:endParaRPr lang="es-ES_tradnl" sz="900" dirty="0">
                         <a:effectLst/>
                         <a:latin typeface="Times New Roman" panose="02020603050405020304" pitchFamily="18" charset="0"/>
                         <a:ea typeface="Times New Roman" panose="02020603050405020304" pitchFamily="18" charset="0"/>
@@ -7010,7 +7105,7 @@
                       <a:pPr algn="ctr">
                         <a:buNone/>
                       </a:pPr>
-                      <a:endParaRPr lang="es-ES_tradnl" sz="1000" dirty="0">
+                      <a:endParaRPr lang="es-ES_tradnl" sz="900" dirty="0">
                         <a:effectLst/>
                         <a:latin typeface="Times New Roman" panose="02020603050405020304" pitchFamily="18" charset="0"/>
                         <a:ea typeface="Times New Roman" panose="02020603050405020304" pitchFamily="18" charset="0"/>
@@ -7030,7 +7125,7 @@
                       <a:pPr algn="ctr">
                         <a:buNone/>
                       </a:pPr>
-                      <a:endParaRPr lang="es-ES_tradnl" sz="1000" dirty="0">
+                      <a:endParaRPr lang="es-ES_tradnl" sz="900" dirty="0">
                         <a:effectLst/>
                         <a:latin typeface="Times New Roman" panose="02020603050405020304" pitchFamily="18" charset="0"/>
                         <a:ea typeface="Times New Roman" panose="02020603050405020304" pitchFamily="18" charset="0"/>
@@ -7050,7 +7145,7 @@
                       <a:pPr algn="ctr">
                         <a:buNone/>
                       </a:pPr>
-                      <a:endParaRPr lang="es-ES_tradnl" sz="1000" dirty="0">
+                      <a:endParaRPr lang="es-ES_tradnl" sz="900" dirty="0">
                         <a:effectLst/>
                         <a:latin typeface="Times New Roman" panose="02020603050405020304" pitchFamily="18" charset="0"/>
                         <a:ea typeface="Times New Roman" panose="02020603050405020304" pitchFamily="18" charset="0"/>
@@ -7070,7 +7165,7 @@
                       <a:pPr algn="ctr">
                         <a:buNone/>
                       </a:pPr>
-                      <a:endParaRPr lang="es-ES_tradnl" sz="1000" dirty="0">
+                      <a:endParaRPr lang="es-ES_tradnl" sz="900" dirty="0">
                         <a:effectLst/>
                         <a:latin typeface="Times New Roman" panose="02020603050405020304" pitchFamily="18" charset="0"/>
                         <a:ea typeface="Times New Roman" panose="02020603050405020304" pitchFamily="18" charset="0"/>
@@ -7090,7 +7185,7 @@
                       <a:pPr algn="ctr">
                         <a:buNone/>
                       </a:pPr>
-                      <a:endParaRPr lang="es-ES_tradnl" sz="1000" dirty="0">
+                      <a:endParaRPr lang="es-ES_tradnl" sz="900" dirty="0">
                         <a:effectLst/>
                         <a:latin typeface="Times New Roman" panose="02020603050405020304" pitchFamily="18" charset="0"/>
                         <a:ea typeface="Times New Roman" panose="02020603050405020304" pitchFamily="18" charset="0"/>
@@ -7110,7 +7205,7 @@
                       <a:pPr algn="ctr">
                         <a:buNone/>
                       </a:pPr>
-                      <a:endParaRPr lang="es-ES_tradnl" sz="1000" dirty="0">
+                      <a:endParaRPr lang="es-ES_tradnl" sz="900" dirty="0">
                         <a:effectLst/>
                         <a:latin typeface="Times New Roman" panose="02020603050405020304" pitchFamily="18" charset="0"/>
                         <a:ea typeface="Times New Roman" panose="02020603050405020304" pitchFamily="18" charset="0"/>
@@ -7130,7 +7225,7 @@
                       <a:pPr algn="ctr">
                         <a:buNone/>
                       </a:pPr>
-                      <a:endParaRPr lang="es-ES_tradnl" sz="1000" dirty="0">
+                      <a:endParaRPr lang="es-ES_tradnl" sz="900" dirty="0">
                         <a:effectLst/>
                         <a:latin typeface="Times New Roman" panose="02020603050405020304" pitchFamily="18" charset="0"/>
                         <a:ea typeface="Times New Roman" panose="02020603050405020304" pitchFamily="18" charset="0"/>
@@ -7150,7 +7245,7 @@
                       <a:pPr algn="ctr">
                         <a:buNone/>
                       </a:pPr>
-                      <a:endParaRPr lang="es-ES_tradnl" sz="1000" dirty="0">
+                      <a:endParaRPr lang="es-ES_tradnl" sz="900" dirty="0">
                         <a:effectLst/>
                         <a:latin typeface="Times New Roman" panose="02020603050405020304" pitchFamily="18" charset="0"/>
                         <a:ea typeface="Times New Roman" panose="02020603050405020304" pitchFamily="18" charset="0"/>
@@ -7170,7 +7265,7 @@
                       <a:pPr algn="ctr">
                         <a:buNone/>
                       </a:pPr>
-                      <a:endParaRPr lang="es-ES_tradnl" sz="1000" dirty="0">
+                      <a:endParaRPr lang="es-ES_tradnl" sz="900" dirty="0">
                         <a:effectLst/>
                         <a:latin typeface="Times New Roman" panose="02020603050405020304" pitchFamily="18" charset="0"/>
                         <a:ea typeface="Times New Roman" panose="02020603050405020304" pitchFamily="18" charset="0"/>
@@ -7190,7 +7285,7 @@
                       <a:pPr algn="ctr">
                         <a:buNone/>
                       </a:pPr>
-                      <a:endParaRPr lang="es-ES_tradnl" sz="1000" dirty="0">
+                      <a:endParaRPr lang="es-ES_tradnl" sz="900" dirty="0">
                         <a:effectLst/>
                         <a:latin typeface="Times New Roman" panose="02020603050405020304" pitchFamily="18" charset="0"/>
                         <a:ea typeface="Times New Roman" panose="02020603050405020304" pitchFamily="18" charset="0"/>
@@ -7217,7 +7312,7 @@
                       <a:pPr algn="ctr">
                         <a:buNone/>
                       </a:pPr>
-                      <a:endParaRPr lang="es-ES_tradnl" sz="1000" b="0" noProof="1">
+                      <a:endParaRPr lang="es-ES_tradnl" sz="900" b="0" noProof="1">
                         <a:solidFill>
                           <a:schemeClr val="tx1"/>
                         </a:solidFill>
@@ -7249,7 +7344,7 @@
                       <a:pPr algn="ctr">
                         <a:buNone/>
                       </a:pPr>
-                      <a:endParaRPr lang="es-ES_tradnl" sz="1000" dirty="0">
+                      <a:endParaRPr lang="es-ES_tradnl" sz="900" dirty="0">
                         <a:effectLst/>
                         <a:latin typeface="Times New Roman" panose="02020603050405020304" pitchFamily="18" charset="0"/>
                         <a:ea typeface="Times New Roman" panose="02020603050405020304" pitchFamily="18" charset="0"/>
@@ -7278,7 +7373,7 @@
                       <a:pPr algn="ctr">
                         <a:buNone/>
                       </a:pPr>
-                      <a:endParaRPr lang="es-ES_tradnl" sz="1000" dirty="0">
+                      <a:endParaRPr lang="es-ES_tradnl" sz="900" dirty="0">
                         <a:effectLst/>
                         <a:latin typeface="Times New Roman" panose="02020603050405020304" pitchFamily="18" charset="0"/>
                         <a:ea typeface="Times New Roman" panose="02020603050405020304" pitchFamily="18" charset="0"/>
@@ -7307,7 +7402,7 @@
                       <a:pPr algn="ctr">
                         <a:buNone/>
                       </a:pPr>
-                      <a:endParaRPr lang="es-ES_tradnl" sz="1000" dirty="0">
+                      <a:endParaRPr lang="es-ES_tradnl" sz="900" dirty="0">
                         <a:effectLst/>
                         <a:latin typeface="Times New Roman" panose="02020603050405020304" pitchFamily="18" charset="0"/>
                         <a:ea typeface="Times New Roman" panose="02020603050405020304" pitchFamily="18" charset="0"/>
@@ -7336,7 +7431,7 @@
                       <a:pPr algn="ctr">
                         <a:buNone/>
                       </a:pPr>
-                      <a:endParaRPr lang="es-ES_tradnl" sz="1000" dirty="0">
+                      <a:endParaRPr lang="es-ES_tradnl" sz="900" dirty="0">
                         <a:effectLst/>
                         <a:latin typeface="Times New Roman" panose="02020603050405020304" pitchFamily="18" charset="0"/>
                         <a:ea typeface="Times New Roman" panose="02020603050405020304" pitchFamily="18" charset="0"/>
@@ -7365,7 +7460,7 @@
                       <a:pPr algn="ctr">
                         <a:buNone/>
                       </a:pPr>
-                      <a:endParaRPr lang="es-ES_tradnl" sz="1000" dirty="0">
+                      <a:endParaRPr lang="es-ES_tradnl" sz="900" dirty="0">
                         <a:effectLst/>
                         <a:latin typeface="Times New Roman" panose="02020603050405020304" pitchFamily="18" charset="0"/>
                         <a:ea typeface="Times New Roman" panose="02020603050405020304" pitchFamily="18" charset="0"/>
@@ -7394,7 +7489,7 @@
                       <a:pPr algn="ctr">
                         <a:buNone/>
                       </a:pPr>
-                      <a:endParaRPr lang="es-ES_tradnl" sz="1000" dirty="0">
+                      <a:endParaRPr lang="es-ES_tradnl" sz="900" dirty="0">
                         <a:effectLst/>
                         <a:latin typeface="Times New Roman" panose="02020603050405020304" pitchFamily="18" charset="0"/>
                         <a:ea typeface="Times New Roman" panose="02020603050405020304" pitchFamily="18" charset="0"/>
@@ -7423,7 +7518,7 @@
                       <a:pPr algn="ctr">
                         <a:buNone/>
                       </a:pPr>
-                      <a:endParaRPr lang="es-ES_tradnl" sz="1000" dirty="0">
+                      <a:endParaRPr lang="es-ES_tradnl" sz="900" dirty="0">
                         <a:effectLst/>
                         <a:latin typeface="Times New Roman" panose="02020603050405020304" pitchFamily="18" charset="0"/>
                         <a:ea typeface="Times New Roman" panose="02020603050405020304" pitchFamily="18" charset="0"/>
@@ -7452,7 +7547,7 @@
                       <a:pPr algn="ctr">
                         <a:buNone/>
                       </a:pPr>
-                      <a:endParaRPr lang="es-ES_tradnl" sz="1000" dirty="0">
+                      <a:endParaRPr lang="es-ES_tradnl" sz="900" dirty="0">
                         <a:effectLst/>
                         <a:latin typeface="Times New Roman" panose="02020603050405020304" pitchFamily="18" charset="0"/>
                         <a:ea typeface="Times New Roman" panose="02020603050405020304" pitchFamily="18" charset="0"/>
@@ -7481,7 +7576,7 @@
                       <a:pPr algn="ctr">
                         <a:buNone/>
                       </a:pPr>
-                      <a:endParaRPr lang="es-ES_tradnl" sz="1000" dirty="0">
+                      <a:endParaRPr lang="es-ES_tradnl" sz="900" dirty="0">
                         <a:effectLst/>
                         <a:latin typeface="Times New Roman" panose="02020603050405020304" pitchFamily="18" charset="0"/>
                         <a:ea typeface="Times New Roman" panose="02020603050405020304" pitchFamily="18" charset="0"/>
@@ -7510,7 +7605,7 @@
                       <a:pPr algn="ctr">
                         <a:buNone/>
                       </a:pPr>
-                      <a:endParaRPr lang="es-ES_tradnl" sz="1000" dirty="0">
+                      <a:endParaRPr lang="es-ES_tradnl" sz="900" dirty="0">
                         <a:effectLst/>
                         <a:latin typeface="Times New Roman" panose="02020603050405020304" pitchFamily="18" charset="0"/>
                         <a:ea typeface="Times New Roman" panose="02020603050405020304" pitchFamily="18" charset="0"/>
@@ -7539,7 +7634,7 @@
                       <a:pPr algn="ctr">
                         <a:buNone/>
                       </a:pPr>
-                      <a:endParaRPr lang="es-ES_tradnl" sz="1000" dirty="0">
+                      <a:endParaRPr lang="es-ES_tradnl" sz="900" dirty="0">
                         <a:effectLst/>
                         <a:latin typeface="Times New Roman" panose="02020603050405020304" pitchFamily="18" charset="0"/>
                         <a:ea typeface="Times New Roman" panose="02020603050405020304" pitchFamily="18" charset="0"/>
@@ -7568,7 +7663,7 @@
                       <a:pPr algn="ctr">
                         <a:buNone/>
                       </a:pPr>
-                      <a:endParaRPr lang="es-ES_tradnl" sz="1000" dirty="0">
+                      <a:endParaRPr lang="es-ES_tradnl" sz="900" dirty="0">
                         <a:effectLst/>
                         <a:latin typeface="Times New Roman" panose="02020603050405020304" pitchFamily="18" charset="0"/>
                         <a:ea typeface="Times New Roman" panose="02020603050405020304" pitchFamily="18" charset="0"/>
@@ -7597,7 +7692,7 @@
                       <a:pPr algn="ctr">
                         <a:buNone/>
                       </a:pPr>
-                      <a:endParaRPr lang="es-ES_tradnl" sz="1000" dirty="0">
+                      <a:endParaRPr lang="es-ES_tradnl" sz="900" dirty="0">
                         <a:effectLst/>
                         <a:latin typeface="Times New Roman" panose="02020603050405020304" pitchFamily="18" charset="0"/>
                         <a:ea typeface="Times New Roman" panose="02020603050405020304" pitchFamily="18" charset="0"/>
@@ -7626,7 +7721,7 @@
                       <a:pPr algn="ctr">
                         <a:buNone/>
                       </a:pPr>
-                      <a:endParaRPr lang="es-ES_tradnl" sz="1000" dirty="0">
+                      <a:endParaRPr lang="es-ES_tradnl" sz="900" dirty="0">
                         <a:effectLst/>
                         <a:latin typeface="Times New Roman" panose="02020603050405020304" pitchFamily="18" charset="0"/>
                         <a:ea typeface="Times New Roman" panose="02020603050405020304" pitchFamily="18" charset="0"/>
@@ -7655,7 +7750,7 @@
                       <a:pPr algn="ctr">
                         <a:buNone/>
                       </a:pPr>
-                      <a:endParaRPr lang="es-ES_tradnl" sz="1000" dirty="0">
+                      <a:endParaRPr lang="es-ES_tradnl" sz="900" dirty="0">
                         <a:effectLst/>
                         <a:latin typeface="Times New Roman" panose="02020603050405020304" pitchFamily="18" charset="0"/>
                         <a:ea typeface="Times New Roman" panose="02020603050405020304" pitchFamily="18" charset="0"/>
@@ -8058,38 +8153,6 @@
           </a:p>
         </p:txBody>
       </p:sp>
-      <p:pic>
-        <p:nvPicPr>
-          <p:cNvPr id="5" name="Onlinebild-Platzhalter 4">
-            <a:extLst>
-              <a:ext uri="{FF2B5EF4-FFF2-40B4-BE49-F238E27FC236}">
-                <a16:creationId xmlns:a16="http://schemas.microsoft.com/office/drawing/2014/main" id="{10DC7C37-3A39-EB86-05E2-E28CB7090711}"/>
-              </a:ext>
-            </a:extLst>
-          </p:cNvPr>
-          <p:cNvPicPr>
-            <a:picLocks noGrp="1" noChangeAspect="1"/>
-          </p:cNvPicPr>
-          <p:nvPr>
-            <p:ph type="clipArt" sz="quarter" idx="15"/>
-          </p:nvPr>
-        </p:nvPicPr>
-        <p:blipFill>
-          <a:blip r:embed="rId2"/>
-          <a:stretch>
-            <a:fillRect/>
-          </a:stretch>
-        </p:blipFill>
-        <p:spPr>
-          <a:xfrm>
-            <a:off x="583920" y="2151063"/>
-            <a:ext cx="5239310" cy="4008437"/>
-          </a:xfrm>
-          <a:prstGeom prst="rect">
-            <a:avLst/>
-          </a:prstGeom>
-        </p:spPr>
-      </p:pic>
       <p:sp>
         <p:nvSpPr>
           <p:cNvPr id="2" name="Fußzeilenplatzhalter 2">
@@ -8219,6 +8282,38 @@
           </a:p>
         </p:txBody>
       </p:sp>
+      <p:pic>
+        <p:nvPicPr>
+          <p:cNvPr id="7" name="Onlinebild-Platzhalter 6">
+            <a:extLst>
+              <a:ext uri="{FF2B5EF4-FFF2-40B4-BE49-F238E27FC236}">
+                <a16:creationId xmlns:a16="http://schemas.microsoft.com/office/drawing/2014/main" id="{DF6DB24A-909C-8D83-4E30-5AA9DCDC66E4}"/>
+              </a:ext>
+            </a:extLst>
+          </p:cNvPr>
+          <p:cNvPicPr>
+            <a:picLocks noGrp="1" noChangeAspect="1"/>
+          </p:cNvPicPr>
+          <p:nvPr>
+            <p:ph type="clipArt" sz="quarter" idx="15"/>
+          </p:nvPr>
+        </p:nvPicPr>
+        <p:blipFill>
+          <a:blip r:embed="rId2"/>
+          <a:stretch>
+            <a:fillRect/>
+          </a:stretch>
+        </p:blipFill>
+        <p:spPr>
+          <a:xfrm>
+            <a:off x="639591" y="2151063"/>
+            <a:ext cx="5127968" cy="4008437"/>
+          </a:xfrm>
+          <a:prstGeom prst="rect">
+            <a:avLst/>
+          </a:prstGeom>
+        </p:spPr>
+      </p:pic>
     </p:spTree>
     <p:extLst>
       <p:ext uri="{BB962C8B-B14F-4D97-AF65-F5344CB8AC3E}">
@@ -8309,14 +8404,14 @@
             <p:ph sz="quarter" idx="14"/>
             <p:extLst>
               <p:ext uri="{D42A27DB-BD31-4B8C-83A1-F6EECF244321}">
-                <p14:modId xmlns:p14="http://schemas.microsoft.com/office/powerpoint/2010/main" val="1936720017"/>
+                <p14:modId xmlns:p14="http://schemas.microsoft.com/office/powerpoint/2010/main" val="2394073669"/>
               </p:ext>
             </p:extLst>
           </p:nvPr>
         </p:nvGraphicFramePr>
         <p:xfrm>
           <a:off x="561487" y="4593328"/>
-          <a:ext cx="10532960" cy="1635760"/>
+          <a:ext cx="10532960" cy="1210945"/>
         </p:xfrm>
         <a:graphic>
           <a:graphicData uri="http://schemas.openxmlformats.org/drawingml/2006/table">
@@ -8448,7 +8543,7 @@
                         <a:buNone/>
                       </a:pPr>
                       <a:r>
-                        <a:rPr lang="es-ES_tradnl" sz="1000" noProof="1">
+                        <a:rPr lang="es-ES_tradnl" sz="900" noProof="1">
                           <a:solidFill>
                             <a:schemeClr val="tx1"/>
                           </a:solidFill>
@@ -8458,7 +8553,7 @@
                         </a:rPr>
                         <a:t>Rank</a:t>
                       </a:r>
-                      <a:endParaRPr lang="es-ES_tradnl" sz="1000" noProof="1">
+                      <a:endParaRPr lang="es-ES_tradnl" sz="900" noProof="1">
                         <a:solidFill>
                           <a:schemeClr val="tx1"/>
                         </a:solidFill>
@@ -8500,7 +8595,7 @@
                         <a:buNone/>
                       </a:pPr>
                       <a:r>
-                        <a:rPr lang="es-ES_tradnl" sz="1000" noProof="1">
+                        <a:rPr lang="es-ES_tradnl" sz="900" noProof="1">
                           <a:solidFill>
                             <a:schemeClr val="tx1"/>
                           </a:solidFill>
@@ -8510,7 +8605,7 @@
                         </a:rPr>
                         <a:t>Sweep Val</a:t>
                       </a:r>
-                      <a:endParaRPr lang="es-ES_tradnl" sz="1000" noProof="1">
+                      <a:endParaRPr lang="es-ES_tradnl" sz="900" noProof="1">
                         <a:solidFill>
                           <a:schemeClr val="tx1"/>
                         </a:solidFill>
@@ -8552,7 +8647,7 @@
                         <a:buNone/>
                       </a:pPr>
                       <a:r>
-                        <a:rPr lang="es-ES_tradnl" sz="1000" noProof="1">
+                        <a:rPr lang="es-ES_tradnl" sz="900" noProof="1">
                           <a:solidFill>
                             <a:schemeClr val="tx1"/>
                           </a:solidFill>
@@ -8562,7 +8657,7 @@
                         </a:rPr>
                         <a:t>O1_final</a:t>
                       </a:r>
-                      <a:endParaRPr lang="es-ES_tradnl" sz="1000" noProof="1">
+                      <a:endParaRPr lang="es-ES_tradnl" sz="900" noProof="1">
                         <a:solidFill>
                           <a:schemeClr val="tx1"/>
                         </a:solidFill>
@@ -8607,7 +8702,7 @@
                         <a:buNone/>
                       </a:pPr>
                       <a:r>
-                        <a:rPr lang="es-ES_tradnl" sz="1000" noProof="1">
+                        <a:rPr lang="es-ES_tradnl" sz="900" noProof="1">
                           <a:solidFill>
                             <a:schemeClr val="tx1"/>
                           </a:solidFill>
@@ -8617,7 +8712,7 @@
                         </a:rPr>
                         <a:t>Mp [°]</a:t>
                       </a:r>
-                      <a:endParaRPr lang="es-ES_tradnl" sz="1000" noProof="1">
+                      <a:endParaRPr lang="es-ES_tradnl" sz="900" noProof="1">
                         <a:solidFill>
                           <a:schemeClr val="tx1"/>
                         </a:solidFill>
@@ -8659,7 +8754,7 @@
                         <a:buNone/>
                       </a:pPr>
                       <a:r>
-                        <a:rPr lang="es-ES_tradnl" sz="1000" noProof="1">
+                        <a:rPr lang="es-ES_tradnl" sz="900" noProof="1">
                           <a:solidFill>
                             <a:schemeClr val="tx1"/>
                           </a:solidFill>
@@ -8669,7 +8764,7 @@
                         </a:rPr>
                         <a:t>Mp[%]</a:t>
                       </a:r>
-                      <a:endParaRPr lang="es-ES_tradnl" sz="1000" noProof="1">
+                      <a:endParaRPr lang="es-ES_tradnl" sz="900" noProof="1">
                         <a:solidFill>
                           <a:schemeClr val="tx1"/>
                         </a:solidFill>
@@ -8714,7 +8809,7 @@
                         <a:buNone/>
                       </a:pPr>
                       <a:r>
-                        <a:rPr lang="es-ES_tradnl" sz="1000" noProof="1">
+                        <a:rPr lang="es-ES_tradnl" sz="900" noProof="1">
                           <a:solidFill>
                             <a:schemeClr val="tx1"/>
                           </a:solidFill>
@@ -8724,7 +8819,7 @@
                         </a:rPr>
                         <a:t>T[s]</a:t>
                       </a:r>
-                      <a:endParaRPr lang="es-ES_tradnl" sz="1000" noProof="1">
+                      <a:endParaRPr lang="es-ES_tradnl" sz="900" noProof="1">
                         <a:solidFill>
                           <a:schemeClr val="tx1"/>
                         </a:solidFill>
@@ -8769,7 +8864,7 @@
                         <a:buNone/>
                       </a:pPr>
                       <a:r>
-                        <a:rPr lang="es-ES_tradnl" sz="1000" noProof="1">
+                        <a:rPr lang="es-ES_tradnl" sz="900" noProof="1">
                           <a:solidFill>
                             <a:schemeClr val="tx1"/>
                           </a:solidFill>
@@ -8779,7 +8874,7 @@
                         </a:rPr>
                         <a:t>e_ss_abs[°]</a:t>
                       </a:r>
-                      <a:endParaRPr lang="es-ES_tradnl" sz="1000" noProof="1">
+                      <a:endParaRPr lang="es-ES_tradnl" sz="900" noProof="1">
                         <a:solidFill>
                           <a:schemeClr val="tx1"/>
                         </a:solidFill>
@@ -8821,7 +8916,7 @@
                         <a:buNone/>
                       </a:pPr>
                       <a:r>
-                        <a:rPr lang="es-ES_tradnl" sz="1000" noProof="1">
+                        <a:rPr lang="es-ES_tradnl" sz="900" noProof="1">
                           <a:solidFill>
                             <a:schemeClr val="tx1"/>
                           </a:solidFill>
@@ -8831,7 +8926,7 @@
                         </a:rPr>
                         <a:t>RMSE[°]</a:t>
                       </a:r>
-                      <a:endParaRPr lang="es-ES_tradnl" sz="1000" noProof="1">
+                      <a:endParaRPr lang="es-ES_tradnl" sz="900" noProof="1">
                         <a:solidFill>
                           <a:schemeClr val="tx1"/>
                         </a:solidFill>
@@ -8873,7 +8968,7 @@
                         <a:buNone/>
                       </a:pPr>
                       <a:r>
-                        <a:rPr lang="es-ES_tradnl" sz="1000" noProof="1">
+                        <a:rPr lang="es-ES_tradnl" sz="900" noProof="1">
                           <a:solidFill>
                             <a:schemeClr val="tx1"/>
                           </a:solidFill>
@@ -8883,7 +8978,7 @@
                         </a:rPr>
                         <a:t>ITAE[°s]</a:t>
                       </a:r>
-                      <a:endParaRPr lang="es-ES_tradnl" sz="1000" noProof="1">
+                      <a:endParaRPr lang="es-ES_tradnl" sz="900" noProof="1">
                         <a:solidFill>
                           <a:schemeClr val="tx1"/>
                         </a:solidFill>
@@ -8925,7 +9020,7 @@
                         <a:buNone/>
                       </a:pPr>
                       <a:r>
-                        <a:rPr lang="es-ES_tradnl" sz="1000" noProof="1">
+                        <a:rPr lang="es-ES_tradnl" sz="900" noProof="1">
                           <a:solidFill>
                             <a:schemeClr val="tx1"/>
                           </a:solidFill>
@@ -8935,7 +9030,7 @@
                         </a:rPr>
                         <a:t>Tr[s]</a:t>
                       </a:r>
-                      <a:endParaRPr lang="es-ES_tradnl" sz="1000" noProof="1">
+                      <a:endParaRPr lang="es-ES_tradnl" sz="900" noProof="1">
                         <a:solidFill>
                           <a:schemeClr val="tx1"/>
                         </a:solidFill>
@@ -8977,7 +9072,7 @@
                         <a:buNone/>
                       </a:pPr>
                       <a:r>
-                        <a:rPr lang="es-ES_tradnl" sz="1000" noProof="1">
+                        <a:rPr lang="es-ES_tradnl" sz="900" noProof="1">
                           <a:solidFill>
                             <a:schemeClr val="tx1"/>
                           </a:solidFill>
@@ -8987,7 +9082,7 @@
                         </a:rPr>
                         <a:t>Iosc</a:t>
                       </a:r>
-                      <a:endParaRPr lang="es-ES_tradnl" sz="1000" noProof="1">
+                      <a:endParaRPr lang="es-ES_tradnl" sz="900" noProof="1">
                         <a:solidFill>
                           <a:schemeClr val="tx1"/>
                         </a:solidFill>
@@ -9029,7 +9124,7 @@
                         <a:buNone/>
                       </a:pPr>
                       <a:r>
-                        <a:rPr lang="es-ES_tradnl" sz="1000" noProof="1">
+                        <a:rPr lang="es-ES_tradnl" sz="900" noProof="1">
                           <a:solidFill>
                             <a:schemeClr val="tx1"/>
                           </a:solidFill>
@@ -9039,7 +9134,7 @@
                         </a:rPr>
                         <a:t>U_peak</a:t>
                       </a:r>
-                      <a:endParaRPr lang="es-ES_tradnl" sz="1000" noProof="1">
+                      <a:endParaRPr lang="es-ES_tradnl" sz="900" noProof="1">
                         <a:solidFill>
                           <a:schemeClr val="tx1"/>
                         </a:solidFill>
@@ -9081,7 +9176,7 @@
                         <a:buNone/>
                       </a:pPr>
                       <a:r>
-                        <a:rPr lang="es-ES_tradnl" sz="1000" noProof="1">
+                        <a:rPr lang="es-ES_tradnl" sz="900" noProof="1">
                           <a:solidFill>
                             <a:schemeClr val="tx1"/>
                           </a:solidFill>
@@ -9091,7 +9186,7 @@
                         </a:rPr>
                         <a:t>U_rms</a:t>
                       </a:r>
-                      <a:endParaRPr lang="es-ES_tradnl" sz="1000" noProof="1">
+                      <a:endParaRPr lang="es-ES_tradnl" sz="900" noProof="1">
                         <a:solidFill>
                           <a:schemeClr val="tx1"/>
                         </a:solidFill>
@@ -9133,7 +9228,7 @@
                         <a:buNone/>
                       </a:pPr>
                       <a:r>
-                        <a:rPr lang="es-ES_tradnl" sz="1000" noProof="1">
+                        <a:rPr lang="es-ES_tradnl" sz="900" noProof="1">
                           <a:solidFill>
                             <a:schemeClr val="tx1"/>
                           </a:solidFill>
@@ -9143,7 +9238,7 @@
                         </a:rPr>
                         <a:t>U_energy</a:t>
                       </a:r>
-                      <a:endParaRPr lang="es-ES_tradnl" sz="1000" noProof="1">
+                      <a:endParaRPr lang="es-ES_tradnl" sz="900" noProof="1">
                         <a:solidFill>
                           <a:schemeClr val="tx1"/>
                         </a:solidFill>
@@ -9185,7 +9280,7 @@
                         <a:buNone/>
                       </a:pPr>
                       <a:r>
-                        <a:rPr lang="es-ES_tradnl" sz="1000" noProof="1">
+                        <a:rPr lang="es-ES_tradnl" sz="900" noProof="1">
                           <a:solidFill>
                             <a:schemeClr val="tx1"/>
                           </a:solidFill>
@@ -9195,7 +9290,7 @@
                         </a:rPr>
                         <a:t>U_abs</a:t>
                       </a:r>
-                      <a:endParaRPr lang="es-ES_tradnl" sz="1000" noProof="1">
+                      <a:endParaRPr lang="es-ES_tradnl" sz="900" noProof="1">
                         <a:solidFill>
                           <a:schemeClr val="tx1"/>
                         </a:solidFill>
@@ -9237,7 +9332,7 @@
                         <a:buNone/>
                       </a:pPr>
                       <a:r>
-                        <a:rPr lang="es-ES_tradnl" sz="1000" noProof="1">
+                        <a:rPr lang="es-ES_tradnl" sz="900" noProof="1">
                           <a:solidFill>
                             <a:schemeClr val="tx1"/>
                           </a:solidFill>
@@ -9247,7 +9342,7 @@
                         </a:rPr>
                         <a:t>U_TV</a:t>
                       </a:r>
-                      <a:endParaRPr lang="es-ES_tradnl" sz="1000" noProof="1">
+                      <a:endParaRPr lang="es-ES_tradnl" sz="900" noProof="1">
                         <a:solidFill>
                           <a:schemeClr val="tx1"/>
                         </a:solidFill>
@@ -9296,7 +9391,7 @@
                         <a:buNone/>
                       </a:pPr>
                       <a:r>
-                        <a:rPr lang="es-ES_tradnl" sz="1000" b="0" noProof="1">
+                        <a:rPr lang="es-ES_tradnl" sz="900" b="0" noProof="1">
                           <a:solidFill>
                             <a:schemeClr val="tx1"/>
                           </a:solidFill>
@@ -9306,7 +9401,7 @@
                         </a:rPr>
                         <a:t>1</a:t>
                       </a:r>
-                      <a:endParaRPr lang="es-ES_tradnl" sz="1000" b="0" noProof="1">
+                      <a:endParaRPr lang="es-ES_tradnl" sz="900" b="0" noProof="1">
                         <a:solidFill>
                           <a:schemeClr val="tx1"/>
                         </a:solidFill>
@@ -9339,7 +9434,7 @@
                         <a:buNone/>
                       </a:pPr>
                       <a:r>
-                        <a:rPr lang="es-ES_tradnl" sz="1050" dirty="0">
+                        <a:rPr lang="es-ES_tradnl" sz="900" dirty="0">
                           <a:effectLst/>
                           <a:latin typeface="Times New Roman" panose="02020603050405020304" pitchFamily="18" charset="0"/>
                           <a:ea typeface="Times New Roman" panose="02020603050405020304" pitchFamily="18" charset="0"/>
@@ -9371,7 +9466,7 @@
                         <a:buNone/>
                       </a:pPr>
                       <a:r>
-                        <a:rPr lang="es-ES_tradnl" sz="1050" dirty="0">
+                        <a:rPr lang="es-ES_tradnl" sz="900" dirty="0">
                           <a:effectLst/>
                           <a:latin typeface="Times New Roman" panose="02020603050405020304" pitchFamily="18" charset="0"/>
                           <a:ea typeface="Times New Roman" panose="02020603050405020304" pitchFamily="18" charset="0"/>
@@ -9403,7 +9498,7 @@
                         <a:buNone/>
                       </a:pPr>
                       <a:r>
-                        <a:rPr lang="es-ES_tradnl" sz="1050" dirty="0">
+                        <a:rPr lang="es-ES_tradnl" sz="900" dirty="0">
                           <a:effectLst/>
                           <a:latin typeface="Times New Roman" panose="02020603050405020304" pitchFamily="18" charset="0"/>
                           <a:ea typeface="Times New Roman" panose="02020603050405020304" pitchFamily="18" charset="0"/>
@@ -9435,7 +9530,7 @@
                         <a:buNone/>
                       </a:pPr>
                       <a:r>
-                        <a:rPr lang="es-ES_tradnl" sz="1050" dirty="0">
+                        <a:rPr lang="es-ES_tradnl" sz="900" dirty="0">
                           <a:effectLst/>
                           <a:latin typeface="Times New Roman" panose="02020603050405020304" pitchFamily="18" charset="0"/>
                           <a:ea typeface="Times New Roman" panose="02020603050405020304" pitchFamily="18" charset="0"/>
@@ -9467,7 +9562,7 @@
                         <a:buNone/>
                       </a:pPr>
                       <a:r>
-                        <a:rPr lang="es-ES_tradnl" sz="1050" dirty="0">
+                        <a:rPr lang="es-ES_tradnl" sz="900" dirty="0">
                           <a:effectLst/>
                           <a:latin typeface="Times New Roman" panose="02020603050405020304" pitchFamily="18" charset="0"/>
                           <a:ea typeface="Times New Roman" panose="02020603050405020304" pitchFamily="18" charset="0"/>
@@ -9499,7 +9594,7 @@
                         <a:buNone/>
                       </a:pPr>
                       <a:r>
-                        <a:rPr lang="es-ES_tradnl" sz="1050" dirty="0">
+                        <a:rPr lang="es-ES_tradnl" sz="900" dirty="0">
                           <a:effectLst/>
                           <a:latin typeface="Times New Roman" panose="02020603050405020304" pitchFamily="18" charset="0"/>
                           <a:ea typeface="Times New Roman" panose="02020603050405020304" pitchFamily="18" charset="0"/>
@@ -9531,7 +9626,7 @@
                         <a:buNone/>
                       </a:pPr>
                       <a:r>
-                        <a:rPr lang="es-ES_tradnl" sz="1050" dirty="0">
+                        <a:rPr lang="es-ES_tradnl" sz="900" dirty="0">
                           <a:effectLst/>
                           <a:latin typeface="Times New Roman" panose="02020603050405020304" pitchFamily="18" charset="0"/>
                           <a:ea typeface="Times New Roman" panose="02020603050405020304" pitchFamily="18" charset="0"/>
@@ -9563,7 +9658,7 @@
                         <a:buNone/>
                       </a:pPr>
                       <a:r>
-                        <a:rPr lang="es-ES_tradnl" sz="1050" dirty="0">
+                        <a:rPr lang="es-ES_tradnl" sz="900" dirty="0">
                           <a:effectLst/>
                           <a:latin typeface="Times New Roman" panose="02020603050405020304" pitchFamily="18" charset="0"/>
                           <a:ea typeface="Times New Roman" panose="02020603050405020304" pitchFamily="18" charset="0"/>
@@ -9595,7 +9690,7 @@
                         <a:buNone/>
                       </a:pPr>
                       <a:r>
-                        <a:rPr lang="es-ES_tradnl" sz="1050" dirty="0">
+                        <a:rPr lang="es-ES_tradnl" sz="900" dirty="0">
                           <a:effectLst/>
                           <a:latin typeface="Times New Roman" panose="02020603050405020304" pitchFamily="18" charset="0"/>
                           <a:ea typeface="Times New Roman" panose="02020603050405020304" pitchFamily="18" charset="0"/>
@@ -9627,7 +9722,7 @@
                         <a:buNone/>
                       </a:pPr>
                       <a:r>
-                        <a:rPr lang="es-ES_tradnl" sz="1050" dirty="0">
+                        <a:rPr lang="es-ES_tradnl" sz="900" dirty="0">
                           <a:effectLst/>
                           <a:latin typeface="Times New Roman" panose="02020603050405020304" pitchFamily="18" charset="0"/>
                           <a:ea typeface="Times New Roman" panose="02020603050405020304" pitchFamily="18" charset="0"/>
@@ -9659,17 +9754,23 @@
                         <a:buNone/>
                       </a:pPr>
                       <a:r>
-                        <a:rPr lang="es-ES_tradnl" sz="1050" dirty="0">
+                        <a:rPr lang="es-ES" sz="900">
                           <a:effectLst/>
                           <a:latin typeface="Times New Roman" panose="02020603050405020304" pitchFamily="18" charset="0"/>
                           <a:ea typeface="Times New Roman" panose="02020603050405020304" pitchFamily="18" charset="0"/>
                           <a:cs typeface="Times New Roman" panose="02020603050405020304" pitchFamily="18" charset="0"/>
                         </a:rPr>
-                        <a:t>9.92</a:t>
-                      </a:r>
-                    </a:p>
-                  </a:txBody>
-                  <a:tcPr marL="68580" marR="68580" marT="0" marB="0" anchor="ctr">
+                        <a:t>6.00</a:t>
+                      </a:r>
+                      <a:endParaRPr lang="de-DE" sz="900">
+                        <a:effectLst/>
+                        <a:latin typeface="Times New Roman" panose="02020603050405020304" pitchFamily="18" charset="0"/>
+                        <a:ea typeface="Times New Roman" panose="02020603050405020304" pitchFamily="18" charset="0"/>
+                        <a:cs typeface="Times New Roman" panose="02020603050405020304" pitchFamily="18" charset="0"/>
+                      </a:endParaRPr>
+                    </a:p>
+                  </a:txBody>
+                  <a:tcPr marL="68580" marR="68580" marT="0" marB="0">
                     <a:lnT w="12700" cap="flat" cmpd="sng" algn="ctr">
                       <a:solidFill>
                         <a:schemeClr val="tx1"/>
@@ -9691,17 +9792,23 @@
                         <a:buNone/>
                       </a:pPr>
                       <a:r>
-                        <a:rPr lang="es-ES_tradnl" sz="1050" dirty="0">
+                        <a:rPr lang="es-ES" sz="900">
                           <a:effectLst/>
                           <a:latin typeface="Times New Roman" panose="02020603050405020304" pitchFamily="18" charset="0"/>
                           <a:ea typeface="Times New Roman" panose="02020603050405020304" pitchFamily="18" charset="0"/>
                           <a:cs typeface="Times New Roman" panose="02020603050405020304" pitchFamily="18" charset="0"/>
                         </a:rPr>
-                        <a:t>3.74</a:t>
-                      </a:r>
-                    </a:p>
-                  </a:txBody>
-                  <a:tcPr marL="68580" marR="68580" marT="0" marB="0" anchor="ctr">
+                        <a:t>2.70</a:t>
+                      </a:r>
+                      <a:endParaRPr lang="de-DE" sz="900">
+                        <a:effectLst/>
+                        <a:latin typeface="Times New Roman" panose="02020603050405020304" pitchFamily="18" charset="0"/>
+                        <a:ea typeface="Times New Roman" panose="02020603050405020304" pitchFamily="18" charset="0"/>
+                        <a:cs typeface="Times New Roman" panose="02020603050405020304" pitchFamily="18" charset="0"/>
+                      </a:endParaRPr>
+                    </a:p>
+                  </a:txBody>
+                  <a:tcPr marL="68580" marR="68580" marT="0" marB="0">
                     <a:lnT w="12700" cap="flat" cmpd="sng" algn="ctr">
                       <a:solidFill>
                         <a:schemeClr val="tx1"/>
@@ -9723,17 +9830,23 @@
                         <a:buNone/>
                       </a:pPr>
                       <a:r>
-                        <a:rPr lang="es-ES_tradnl" sz="1050" dirty="0">
+                        <a:rPr lang="es-ES" sz="900">
                           <a:effectLst/>
                           <a:latin typeface="Times New Roman" panose="02020603050405020304" pitchFamily="18" charset="0"/>
                           <a:ea typeface="Times New Roman" panose="02020603050405020304" pitchFamily="18" charset="0"/>
                           <a:cs typeface="Times New Roman" panose="02020603050405020304" pitchFamily="18" charset="0"/>
                         </a:rPr>
-                        <a:t>78.53</a:t>
-                      </a:r>
-                    </a:p>
-                  </a:txBody>
-                  <a:tcPr marL="68580" marR="68580" marT="0" marB="0" anchor="ctr">
+                        <a:t>43.52</a:t>
+                      </a:r>
+                      <a:endParaRPr lang="de-DE" sz="900">
+                        <a:effectLst/>
+                        <a:latin typeface="Times New Roman" panose="02020603050405020304" pitchFamily="18" charset="0"/>
+                        <a:ea typeface="Times New Roman" panose="02020603050405020304" pitchFamily="18" charset="0"/>
+                        <a:cs typeface="Times New Roman" panose="02020603050405020304" pitchFamily="18" charset="0"/>
+                      </a:endParaRPr>
+                    </a:p>
+                  </a:txBody>
+                  <a:tcPr marL="68580" marR="68580" marT="0" marB="0">
                     <a:lnT w="12700" cap="flat" cmpd="sng" algn="ctr">
                       <a:solidFill>
                         <a:schemeClr val="tx1"/>
@@ -9755,17 +9868,23 @@
                         <a:buNone/>
                       </a:pPr>
                       <a:r>
-                        <a:rPr lang="es-ES_tradnl" sz="1050" dirty="0">
+                        <a:rPr lang="es-ES" sz="900">
                           <a:effectLst/>
                           <a:latin typeface="Times New Roman" panose="02020603050405020304" pitchFamily="18" charset="0"/>
                           <a:ea typeface="Times New Roman" panose="02020603050405020304" pitchFamily="18" charset="0"/>
                           <a:cs typeface="Times New Roman" panose="02020603050405020304" pitchFamily="18" charset="0"/>
                         </a:rPr>
-                        <a:t>19.16</a:t>
-                      </a:r>
-                    </a:p>
-                  </a:txBody>
-                  <a:tcPr marL="68580" marR="68580" marT="0" marB="0" anchor="ctr">
+                        <a:t>14.66</a:t>
+                      </a:r>
+                      <a:endParaRPr lang="de-DE" sz="900">
+                        <a:effectLst/>
+                        <a:latin typeface="Times New Roman" panose="02020603050405020304" pitchFamily="18" charset="0"/>
+                        <a:ea typeface="Times New Roman" panose="02020603050405020304" pitchFamily="18" charset="0"/>
+                        <a:cs typeface="Times New Roman" panose="02020603050405020304" pitchFamily="18" charset="0"/>
+                      </a:endParaRPr>
+                    </a:p>
+                  </a:txBody>
+                  <a:tcPr marL="68580" marR="68580" marT="0" marB="0">
                     <a:lnT w="12700" cap="flat" cmpd="sng" algn="ctr">
                       <a:solidFill>
                         <a:schemeClr val="tx1"/>
@@ -9787,17 +9906,23 @@
                         <a:buNone/>
                       </a:pPr>
                       <a:r>
-                        <a:rPr lang="es-ES_tradnl" sz="1050" dirty="0">
+                        <a:rPr lang="es-ES" sz="900">
                           <a:effectLst/>
                           <a:latin typeface="Times New Roman" panose="02020603050405020304" pitchFamily="18" charset="0"/>
                           <a:ea typeface="Times New Roman" panose="02020603050405020304" pitchFamily="18" charset="0"/>
                           <a:cs typeface="Times New Roman" panose="02020603050405020304" pitchFamily="18" charset="0"/>
                         </a:rPr>
-                        <a:t>48.30</a:t>
-                      </a:r>
-                    </a:p>
-                  </a:txBody>
-                  <a:tcPr marL="68580" marR="68580" marT="0" marB="0" anchor="ctr">
+                        <a:t>6.00</a:t>
+                      </a:r>
+                      <a:endParaRPr lang="de-DE" sz="900">
+                        <a:effectLst/>
+                        <a:latin typeface="Times New Roman" panose="02020603050405020304" pitchFamily="18" charset="0"/>
+                        <a:ea typeface="Times New Roman" panose="02020603050405020304" pitchFamily="18" charset="0"/>
+                        <a:cs typeface="Times New Roman" panose="02020603050405020304" pitchFamily="18" charset="0"/>
+                      </a:endParaRPr>
+                    </a:p>
+                  </a:txBody>
+                  <a:tcPr marL="68580" marR="68580" marT="0" marB="0">
                     <a:lnT w="12700" cap="flat" cmpd="sng" algn="ctr">
                       <a:solidFill>
                         <a:schemeClr val="tx1"/>
@@ -9826,7 +9951,7 @@
                         <a:buNone/>
                       </a:pPr>
                       <a:r>
-                        <a:rPr lang="es-ES_tradnl" sz="1000" b="0" noProof="1">
+                        <a:rPr lang="es-ES_tradnl" sz="900" b="0" noProof="1">
                           <a:solidFill>
                             <a:schemeClr val="tx1"/>
                           </a:solidFill>
@@ -9852,7 +9977,7 @@
                         <a:buNone/>
                       </a:pPr>
                       <a:r>
-                        <a:rPr lang="es-ES_tradnl" sz="1050" dirty="0">
+                        <a:rPr lang="es-ES_tradnl" sz="900" dirty="0">
                           <a:effectLst/>
                           <a:latin typeface="Times New Roman" panose="02020603050405020304" pitchFamily="18" charset="0"/>
                           <a:ea typeface="Times New Roman" panose="02020603050405020304" pitchFamily="18" charset="0"/>
@@ -9875,7 +10000,7 @@
                         <a:buNone/>
                       </a:pPr>
                       <a:r>
-                        <a:rPr lang="es-ES_tradnl" sz="1050" dirty="0">
+                        <a:rPr lang="es-ES_tradnl" sz="900" dirty="0">
                           <a:effectLst/>
                           <a:latin typeface="Times New Roman" panose="02020603050405020304" pitchFamily="18" charset="0"/>
                           <a:ea typeface="Times New Roman" panose="02020603050405020304" pitchFamily="18" charset="0"/>
@@ -9898,7 +10023,7 @@
                         <a:buNone/>
                       </a:pPr>
                       <a:r>
-                        <a:rPr lang="es-ES_tradnl" sz="1050" dirty="0">
+                        <a:rPr lang="es-ES_tradnl" sz="900" dirty="0">
                           <a:effectLst/>
                           <a:latin typeface="Times New Roman" panose="02020603050405020304" pitchFamily="18" charset="0"/>
                           <a:ea typeface="Times New Roman" panose="02020603050405020304" pitchFamily="18" charset="0"/>
@@ -9921,7 +10046,7 @@
                         <a:buNone/>
                       </a:pPr>
                       <a:r>
-                        <a:rPr lang="es-ES_tradnl" sz="1050" dirty="0">
+                        <a:rPr lang="es-ES_tradnl" sz="900" dirty="0">
                           <a:effectLst/>
                           <a:latin typeface="Times New Roman" panose="02020603050405020304" pitchFamily="18" charset="0"/>
                           <a:ea typeface="Times New Roman" panose="02020603050405020304" pitchFamily="18" charset="0"/>
@@ -9944,7 +10069,7 @@
                         <a:buNone/>
                       </a:pPr>
                       <a:r>
-                        <a:rPr lang="es-ES_tradnl" sz="1050" dirty="0">
+                        <a:rPr lang="es-ES_tradnl" sz="900" dirty="0">
                           <a:effectLst/>
                           <a:latin typeface="Times New Roman" panose="02020603050405020304" pitchFamily="18" charset="0"/>
                           <a:ea typeface="Times New Roman" panose="02020603050405020304" pitchFamily="18" charset="0"/>
@@ -9967,7 +10092,7 @@
                         <a:buNone/>
                       </a:pPr>
                       <a:r>
-                        <a:rPr lang="es-ES_tradnl" sz="1050" dirty="0">
+                        <a:rPr lang="es-ES_tradnl" sz="900" dirty="0">
                           <a:effectLst/>
                           <a:latin typeface="Times New Roman" panose="02020603050405020304" pitchFamily="18" charset="0"/>
                           <a:ea typeface="Times New Roman" panose="02020603050405020304" pitchFamily="18" charset="0"/>
@@ -9990,7 +10115,7 @@
                         <a:buNone/>
                       </a:pPr>
                       <a:r>
-                        <a:rPr lang="es-ES_tradnl" sz="1050" dirty="0">
+                        <a:rPr lang="es-ES_tradnl" sz="900" dirty="0">
                           <a:effectLst/>
                           <a:latin typeface="Times New Roman" panose="02020603050405020304" pitchFamily="18" charset="0"/>
                           <a:ea typeface="Times New Roman" panose="02020603050405020304" pitchFamily="18" charset="0"/>
@@ -10013,7 +10138,7 @@
                         <a:buNone/>
                       </a:pPr>
                       <a:r>
-                        <a:rPr lang="es-ES_tradnl" sz="1050" dirty="0">
+                        <a:rPr lang="es-ES_tradnl" sz="900" dirty="0">
                           <a:effectLst/>
                           <a:latin typeface="Times New Roman" panose="02020603050405020304" pitchFamily="18" charset="0"/>
                           <a:ea typeface="Times New Roman" panose="02020603050405020304" pitchFamily="18" charset="0"/>
@@ -10036,7 +10161,7 @@
                         <a:buNone/>
                       </a:pPr>
                       <a:r>
-                        <a:rPr lang="es-ES_tradnl" sz="1050" dirty="0">
+                        <a:rPr lang="es-ES_tradnl" sz="900" dirty="0">
                           <a:effectLst/>
                           <a:latin typeface="Times New Roman" panose="02020603050405020304" pitchFamily="18" charset="0"/>
                           <a:ea typeface="Times New Roman" panose="02020603050405020304" pitchFamily="18" charset="0"/>
@@ -10059,7 +10184,7 @@
                         <a:buNone/>
                       </a:pPr>
                       <a:r>
-                        <a:rPr lang="es-ES_tradnl" sz="1050" dirty="0">
+                        <a:rPr lang="es-ES_tradnl" sz="900" dirty="0">
                           <a:effectLst/>
                           <a:latin typeface="Times New Roman" panose="02020603050405020304" pitchFamily="18" charset="0"/>
                           <a:ea typeface="Times New Roman" panose="02020603050405020304" pitchFamily="18" charset="0"/>
@@ -10082,109 +10207,139 @@
                         <a:buNone/>
                       </a:pPr>
                       <a:r>
-                        <a:rPr lang="es-ES_tradnl" sz="1050" dirty="0">
+                        <a:rPr lang="es-ES" sz="900">
                           <a:effectLst/>
                           <a:latin typeface="Times New Roman" panose="02020603050405020304" pitchFamily="18" charset="0"/>
                           <a:ea typeface="Times New Roman" panose="02020603050405020304" pitchFamily="18" charset="0"/>
                           <a:cs typeface="Times New Roman" panose="02020603050405020304" pitchFamily="18" charset="0"/>
                         </a:rPr>
-                        <a:t>9.92</a:t>
-                      </a:r>
-                    </a:p>
-                  </a:txBody>
-                  <a:tcPr marL="68580" marR="68580" marT="0" marB="0" anchor="ctr">
-                    <a:noFill/>
-                  </a:tcPr>
-                </a:tc>
-                <a:tc>
-                  <a:txBody>
-                    <a:bodyPr/>
-                    <a:lstStyle/>
-                    <a:p>
-                      <a:pPr algn="ctr">
-                        <a:buNone/>
-                      </a:pPr>
-                      <a:r>
-                        <a:rPr lang="es-ES_tradnl" sz="1050" dirty="0">
+                        <a:t>6.00</a:t>
+                      </a:r>
+                      <a:endParaRPr lang="de-DE" sz="900">
+                        <a:effectLst/>
+                        <a:latin typeface="Times New Roman" panose="02020603050405020304" pitchFamily="18" charset="0"/>
+                        <a:ea typeface="Times New Roman" panose="02020603050405020304" pitchFamily="18" charset="0"/>
+                        <a:cs typeface="Times New Roman" panose="02020603050405020304" pitchFamily="18" charset="0"/>
+                      </a:endParaRPr>
+                    </a:p>
+                  </a:txBody>
+                  <a:tcPr marL="68580" marR="68580" marT="0" marB="0">
+                    <a:noFill/>
+                  </a:tcPr>
+                </a:tc>
+                <a:tc>
+                  <a:txBody>
+                    <a:bodyPr/>
+                    <a:lstStyle/>
+                    <a:p>
+                      <a:pPr algn="ctr">
+                        <a:buNone/>
+                      </a:pPr>
+                      <a:r>
+                        <a:rPr lang="es-ES" sz="900">
                           <a:effectLst/>
                           <a:latin typeface="Times New Roman" panose="02020603050405020304" pitchFamily="18" charset="0"/>
                           <a:ea typeface="Times New Roman" panose="02020603050405020304" pitchFamily="18" charset="0"/>
                           <a:cs typeface="Times New Roman" panose="02020603050405020304" pitchFamily="18" charset="0"/>
                         </a:rPr>
-                        <a:t>3.84</a:t>
-                      </a:r>
-                    </a:p>
-                  </a:txBody>
-                  <a:tcPr marL="68580" marR="68580" marT="0" marB="0" anchor="ctr">
-                    <a:noFill/>
-                  </a:tcPr>
-                </a:tc>
-                <a:tc>
-                  <a:txBody>
-                    <a:bodyPr/>
-                    <a:lstStyle/>
-                    <a:p>
-                      <a:pPr algn="ctr">
-                        <a:buNone/>
-                      </a:pPr>
-                      <a:r>
-                        <a:rPr lang="es-ES_tradnl" sz="1050" dirty="0">
+                        <a:t>2.72</a:t>
+                      </a:r>
+                      <a:endParaRPr lang="de-DE" sz="900">
+                        <a:effectLst/>
+                        <a:latin typeface="Times New Roman" panose="02020603050405020304" pitchFamily="18" charset="0"/>
+                        <a:ea typeface="Times New Roman" panose="02020603050405020304" pitchFamily="18" charset="0"/>
+                        <a:cs typeface="Times New Roman" panose="02020603050405020304" pitchFamily="18" charset="0"/>
+                      </a:endParaRPr>
+                    </a:p>
+                  </a:txBody>
+                  <a:tcPr marL="68580" marR="68580" marT="0" marB="0">
+                    <a:noFill/>
+                  </a:tcPr>
+                </a:tc>
+                <a:tc>
+                  <a:txBody>
+                    <a:bodyPr/>
+                    <a:lstStyle/>
+                    <a:p>
+                      <a:pPr algn="ctr">
+                        <a:buNone/>
+                      </a:pPr>
+                      <a:r>
+                        <a:rPr lang="es-ES" sz="900">
                           <a:effectLst/>
                           <a:latin typeface="Times New Roman" panose="02020603050405020304" pitchFamily="18" charset="0"/>
                           <a:ea typeface="Times New Roman" panose="02020603050405020304" pitchFamily="18" charset="0"/>
                           <a:cs typeface="Times New Roman" panose="02020603050405020304" pitchFamily="18" charset="0"/>
                         </a:rPr>
-                        <a:t>82.83</a:t>
-                      </a:r>
-                    </a:p>
-                  </a:txBody>
-                  <a:tcPr marL="68580" marR="68580" marT="0" marB="0" anchor="ctr">
-                    <a:noFill/>
-                  </a:tcPr>
-                </a:tc>
-                <a:tc>
-                  <a:txBody>
-                    <a:bodyPr/>
-                    <a:lstStyle/>
-                    <a:p>
-                      <a:pPr algn="ctr">
-                        <a:buNone/>
-                      </a:pPr>
-                      <a:r>
-                        <a:rPr lang="es-ES_tradnl" sz="1050" dirty="0">
+                        <a:t>44.22</a:t>
+                      </a:r>
+                      <a:endParaRPr lang="de-DE" sz="900">
+                        <a:effectLst/>
+                        <a:latin typeface="Times New Roman" panose="02020603050405020304" pitchFamily="18" charset="0"/>
+                        <a:ea typeface="Times New Roman" panose="02020603050405020304" pitchFamily="18" charset="0"/>
+                        <a:cs typeface="Times New Roman" panose="02020603050405020304" pitchFamily="18" charset="0"/>
+                      </a:endParaRPr>
+                    </a:p>
+                  </a:txBody>
+                  <a:tcPr marL="68580" marR="68580" marT="0" marB="0">
+                    <a:noFill/>
+                  </a:tcPr>
+                </a:tc>
+                <a:tc>
+                  <a:txBody>
+                    <a:bodyPr/>
+                    <a:lstStyle/>
+                    <a:p>
+                      <a:pPr algn="ctr">
+                        <a:buNone/>
+                      </a:pPr>
+                      <a:r>
+                        <a:rPr lang="es-ES" sz="900">
                           <a:effectLst/>
                           <a:latin typeface="Times New Roman" panose="02020603050405020304" pitchFamily="18" charset="0"/>
                           <a:ea typeface="Times New Roman" panose="02020603050405020304" pitchFamily="18" charset="0"/>
                           <a:cs typeface="Times New Roman" panose="02020603050405020304" pitchFamily="18" charset="0"/>
                         </a:rPr>
-                        <a:t>19.48</a:t>
-                      </a:r>
-                    </a:p>
-                  </a:txBody>
-                  <a:tcPr marL="68580" marR="68580" marT="0" marB="0" anchor="ctr">
-                    <a:noFill/>
-                  </a:tcPr>
-                </a:tc>
-                <a:tc>
-                  <a:txBody>
-                    <a:bodyPr/>
-                    <a:lstStyle/>
-                    <a:p>
-                      <a:pPr algn="ctr">
-                        <a:buNone/>
-                      </a:pPr>
-                      <a:r>
-                        <a:rPr lang="es-ES_tradnl" sz="1050" dirty="0">
+                        <a:t>14.79</a:t>
+                      </a:r>
+                      <a:endParaRPr lang="de-DE" sz="900">
+                        <a:effectLst/>
+                        <a:latin typeface="Times New Roman" panose="02020603050405020304" pitchFamily="18" charset="0"/>
+                        <a:ea typeface="Times New Roman" panose="02020603050405020304" pitchFamily="18" charset="0"/>
+                        <a:cs typeface="Times New Roman" panose="02020603050405020304" pitchFamily="18" charset="0"/>
+                      </a:endParaRPr>
+                    </a:p>
+                  </a:txBody>
+                  <a:tcPr marL="68580" marR="68580" marT="0" marB="0">
+                    <a:noFill/>
+                  </a:tcPr>
+                </a:tc>
+                <a:tc>
+                  <a:txBody>
+                    <a:bodyPr/>
+                    <a:lstStyle/>
+                    <a:p>
+                      <a:pPr algn="ctr">
+                        <a:buNone/>
+                      </a:pPr>
+                      <a:r>
+                        <a:rPr lang="es-ES" sz="900">
                           <a:effectLst/>
                           <a:latin typeface="Times New Roman" panose="02020603050405020304" pitchFamily="18" charset="0"/>
                           <a:ea typeface="Times New Roman" panose="02020603050405020304" pitchFamily="18" charset="0"/>
                           <a:cs typeface="Times New Roman" panose="02020603050405020304" pitchFamily="18" charset="0"/>
                         </a:rPr>
-                        <a:t>51.02</a:t>
-                      </a:r>
-                    </a:p>
-                  </a:txBody>
-                  <a:tcPr marL="68580" marR="68580" marT="0" marB="0" anchor="ctr">
+                        <a:t>6.00</a:t>
+                      </a:r>
+                      <a:endParaRPr lang="de-DE" sz="900">
+                        <a:effectLst/>
+                        <a:latin typeface="Times New Roman" panose="02020603050405020304" pitchFamily="18" charset="0"/>
+                        <a:ea typeface="Times New Roman" panose="02020603050405020304" pitchFamily="18" charset="0"/>
+                        <a:cs typeface="Times New Roman" panose="02020603050405020304" pitchFamily="18" charset="0"/>
+                      </a:endParaRPr>
+                    </a:p>
+                  </a:txBody>
+                  <a:tcPr marL="68580" marR="68580" marT="0" marB="0">
                     <a:noFill/>
                   </a:tcPr>
                 </a:tc>
@@ -10204,7 +10359,7 @@
                         <a:buNone/>
                       </a:pPr>
                       <a:r>
-                        <a:rPr lang="es-ES_tradnl" sz="1000" b="0" noProof="1">
+                        <a:rPr lang="es-ES_tradnl" sz="900" b="0" noProof="1">
                           <a:solidFill>
                             <a:schemeClr val="tx1"/>
                           </a:solidFill>
@@ -10230,7 +10385,7 @@
                         <a:buNone/>
                       </a:pPr>
                       <a:r>
-                        <a:rPr lang="es-ES_tradnl" sz="1050" dirty="0">
+                        <a:rPr lang="es-ES_tradnl" sz="900" dirty="0">
                           <a:effectLst/>
                           <a:latin typeface="Times New Roman" panose="02020603050405020304" pitchFamily="18" charset="0"/>
                           <a:ea typeface="Times New Roman" panose="02020603050405020304" pitchFamily="18" charset="0"/>
@@ -10253,7 +10408,7 @@
                         <a:buNone/>
                       </a:pPr>
                       <a:r>
-                        <a:rPr lang="es-ES_tradnl" sz="1050" dirty="0">
+                        <a:rPr lang="es-ES_tradnl" sz="900" dirty="0">
                           <a:effectLst/>
                           <a:latin typeface="Times New Roman" panose="02020603050405020304" pitchFamily="18" charset="0"/>
                           <a:ea typeface="Times New Roman" panose="02020603050405020304" pitchFamily="18" charset="0"/>
@@ -10276,7 +10431,7 @@
                         <a:buNone/>
                       </a:pPr>
                       <a:r>
-                        <a:rPr lang="es-ES_tradnl" sz="1050" dirty="0">
+                        <a:rPr lang="es-ES_tradnl" sz="900" dirty="0">
                           <a:effectLst/>
                           <a:latin typeface="Times New Roman" panose="02020603050405020304" pitchFamily="18" charset="0"/>
                           <a:ea typeface="Times New Roman" panose="02020603050405020304" pitchFamily="18" charset="0"/>
@@ -10299,7 +10454,7 @@
                         <a:buNone/>
                       </a:pPr>
                       <a:r>
-                        <a:rPr lang="es-ES_tradnl" sz="1050" dirty="0">
+                        <a:rPr lang="es-ES_tradnl" sz="900" dirty="0">
                           <a:effectLst/>
                           <a:latin typeface="Times New Roman" panose="02020603050405020304" pitchFamily="18" charset="0"/>
                           <a:ea typeface="Times New Roman" panose="02020603050405020304" pitchFamily="18" charset="0"/>
@@ -10322,7 +10477,7 @@
                         <a:buNone/>
                       </a:pPr>
                       <a:r>
-                        <a:rPr lang="es-ES_tradnl" sz="1050" dirty="0">
+                        <a:rPr lang="es-ES_tradnl" sz="900" dirty="0">
                           <a:effectLst/>
                           <a:latin typeface="Times New Roman" panose="02020603050405020304" pitchFamily="18" charset="0"/>
                           <a:ea typeface="Times New Roman" panose="02020603050405020304" pitchFamily="18" charset="0"/>
@@ -10345,7 +10500,7 @@
                         <a:buNone/>
                       </a:pPr>
                       <a:r>
-                        <a:rPr lang="es-ES_tradnl" sz="1050" dirty="0">
+                        <a:rPr lang="es-ES_tradnl" sz="900" dirty="0">
                           <a:effectLst/>
                           <a:latin typeface="Times New Roman" panose="02020603050405020304" pitchFamily="18" charset="0"/>
                           <a:ea typeface="Times New Roman" panose="02020603050405020304" pitchFamily="18" charset="0"/>
@@ -10368,7 +10523,7 @@
                         <a:buNone/>
                       </a:pPr>
                       <a:r>
-                        <a:rPr lang="es-ES_tradnl" sz="1050" dirty="0">
+                        <a:rPr lang="es-ES_tradnl" sz="900" dirty="0">
                           <a:effectLst/>
                           <a:latin typeface="Times New Roman" panose="02020603050405020304" pitchFamily="18" charset="0"/>
                           <a:ea typeface="Times New Roman" panose="02020603050405020304" pitchFamily="18" charset="0"/>
@@ -10391,7 +10546,7 @@
                         <a:buNone/>
                       </a:pPr>
                       <a:r>
-                        <a:rPr lang="es-ES_tradnl" sz="1050" dirty="0">
+                        <a:rPr lang="es-ES_tradnl" sz="900" dirty="0">
                           <a:effectLst/>
                           <a:latin typeface="Times New Roman" panose="02020603050405020304" pitchFamily="18" charset="0"/>
                           <a:ea typeface="Times New Roman" panose="02020603050405020304" pitchFamily="18" charset="0"/>
@@ -10414,7 +10569,7 @@
                         <a:buNone/>
                       </a:pPr>
                       <a:r>
-                        <a:rPr lang="es-ES_tradnl" sz="1050" dirty="0">
+                        <a:rPr lang="es-ES_tradnl" sz="900" dirty="0">
                           <a:effectLst/>
                           <a:latin typeface="Times New Roman" panose="02020603050405020304" pitchFamily="18" charset="0"/>
                           <a:ea typeface="Times New Roman" panose="02020603050405020304" pitchFamily="18" charset="0"/>
@@ -10437,7 +10592,7 @@
                         <a:buNone/>
                       </a:pPr>
                       <a:r>
-                        <a:rPr lang="es-ES_tradnl" sz="1050" dirty="0">
+                        <a:rPr lang="es-ES_tradnl" sz="900" dirty="0">
                           <a:effectLst/>
                           <a:latin typeface="Times New Roman" panose="02020603050405020304" pitchFamily="18" charset="0"/>
                           <a:ea typeface="Times New Roman" panose="02020603050405020304" pitchFamily="18" charset="0"/>
@@ -10460,109 +10615,139 @@
                         <a:buNone/>
                       </a:pPr>
                       <a:r>
-                        <a:rPr lang="es-ES_tradnl" sz="1050" dirty="0">
+                        <a:rPr lang="es-ES" sz="900">
                           <a:effectLst/>
                           <a:latin typeface="Times New Roman" panose="02020603050405020304" pitchFamily="18" charset="0"/>
                           <a:ea typeface="Times New Roman" panose="02020603050405020304" pitchFamily="18" charset="0"/>
                           <a:cs typeface="Times New Roman" panose="02020603050405020304" pitchFamily="18" charset="0"/>
                         </a:rPr>
-                        <a:t>9.92</a:t>
-                      </a:r>
-                    </a:p>
-                  </a:txBody>
-                  <a:tcPr marL="68580" marR="68580" marT="0" marB="0" anchor="ctr">
-                    <a:noFill/>
-                  </a:tcPr>
-                </a:tc>
-                <a:tc>
-                  <a:txBody>
-                    <a:bodyPr/>
-                    <a:lstStyle/>
-                    <a:p>
-                      <a:pPr algn="ctr">
-                        <a:buNone/>
-                      </a:pPr>
-                      <a:r>
-                        <a:rPr lang="es-ES_tradnl" sz="1050" dirty="0">
+                        <a:t>6.00</a:t>
+                      </a:r>
+                      <a:endParaRPr lang="de-DE" sz="900">
+                        <a:effectLst/>
+                        <a:latin typeface="Times New Roman" panose="02020603050405020304" pitchFamily="18" charset="0"/>
+                        <a:ea typeface="Times New Roman" panose="02020603050405020304" pitchFamily="18" charset="0"/>
+                        <a:cs typeface="Times New Roman" panose="02020603050405020304" pitchFamily="18" charset="0"/>
+                      </a:endParaRPr>
+                    </a:p>
+                  </a:txBody>
+                  <a:tcPr marL="68580" marR="68580" marT="0" marB="0">
+                    <a:noFill/>
+                  </a:tcPr>
+                </a:tc>
+                <a:tc>
+                  <a:txBody>
+                    <a:bodyPr/>
+                    <a:lstStyle/>
+                    <a:p>
+                      <a:pPr algn="ctr">
+                        <a:buNone/>
+                      </a:pPr>
+                      <a:r>
+                        <a:rPr lang="es-ES" sz="900">
                           <a:effectLst/>
                           <a:latin typeface="Times New Roman" panose="02020603050405020304" pitchFamily="18" charset="0"/>
                           <a:ea typeface="Times New Roman" panose="02020603050405020304" pitchFamily="18" charset="0"/>
                           <a:cs typeface="Times New Roman" panose="02020603050405020304" pitchFamily="18" charset="0"/>
                         </a:rPr>
-                        <a:t>3.90</a:t>
-                      </a:r>
-                    </a:p>
-                  </a:txBody>
-                  <a:tcPr marL="68580" marR="68580" marT="0" marB="0" anchor="ctr">
-                    <a:noFill/>
-                  </a:tcPr>
-                </a:tc>
-                <a:tc>
-                  <a:txBody>
-                    <a:bodyPr/>
-                    <a:lstStyle/>
-                    <a:p>
-                      <a:pPr algn="ctr">
-                        <a:buNone/>
-                      </a:pPr>
-                      <a:r>
-                        <a:rPr lang="es-ES_tradnl" sz="1050" dirty="0">
+                        <a:t>2.72</a:t>
+                      </a:r>
+                      <a:endParaRPr lang="de-DE" sz="900">
+                        <a:effectLst/>
+                        <a:latin typeface="Times New Roman" panose="02020603050405020304" pitchFamily="18" charset="0"/>
+                        <a:ea typeface="Times New Roman" panose="02020603050405020304" pitchFamily="18" charset="0"/>
+                        <a:cs typeface="Times New Roman" panose="02020603050405020304" pitchFamily="18" charset="0"/>
+                      </a:endParaRPr>
+                    </a:p>
+                  </a:txBody>
+                  <a:tcPr marL="68580" marR="68580" marT="0" marB="0">
+                    <a:noFill/>
+                  </a:tcPr>
+                </a:tc>
+                <a:tc>
+                  <a:txBody>
+                    <a:bodyPr/>
+                    <a:lstStyle/>
+                    <a:p>
+                      <a:pPr algn="ctr">
+                        <a:buNone/>
+                      </a:pPr>
+                      <a:r>
+                        <a:rPr lang="es-ES" sz="900">
                           <a:effectLst/>
                           <a:latin typeface="Times New Roman" panose="02020603050405020304" pitchFamily="18" charset="0"/>
                           <a:ea typeface="Times New Roman" panose="02020603050405020304" pitchFamily="18" charset="0"/>
                           <a:cs typeface="Times New Roman" panose="02020603050405020304" pitchFamily="18" charset="0"/>
                         </a:rPr>
-                        <a:t>85.64</a:t>
-                      </a:r>
-                    </a:p>
-                  </a:txBody>
-                  <a:tcPr marL="68580" marR="68580" marT="0" marB="0" anchor="ctr">
-                    <a:noFill/>
-                  </a:tcPr>
-                </a:tc>
-                <a:tc>
-                  <a:txBody>
-                    <a:bodyPr/>
-                    <a:lstStyle/>
-                    <a:p>
-                      <a:pPr algn="ctr">
-                        <a:buNone/>
-                      </a:pPr>
-                      <a:r>
-                        <a:rPr lang="es-ES_tradnl" sz="1050" dirty="0">
+                        <a:t>44.16</a:t>
+                      </a:r>
+                      <a:endParaRPr lang="de-DE" sz="900">
+                        <a:effectLst/>
+                        <a:latin typeface="Times New Roman" panose="02020603050405020304" pitchFamily="18" charset="0"/>
+                        <a:ea typeface="Times New Roman" panose="02020603050405020304" pitchFamily="18" charset="0"/>
+                        <a:cs typeface="Times New Roman" panose="02020603050405020304" pitchFamily="18" charset="0"/>
+                      </a:endParaRPr>
+                    </a:p>
+                  </a:txBody>
+                  <a:tcPr marL="68580" marR="68580" marT="0" marB="0">
+                    <a:noFill/>
+                  </a:tcPr>
+                </a:tc>
+                <a:tc>
+                  <a:txBody>
+                    <a:bodyPr/>
+                    <a:lstStyle/>
+                    <a:p>
+                      <a:pPr algn="ctr">
+                        <a:buNone/>
+                      </a:pPr>
+                      <a:r>
+                        <a:rPr lang="es-ES" sz="900">
                           <a:effectLst/>
                           <a:latin typeface="Times New Roman" panose="02020603050405020304" pitchFamily="18" charset="0"/>
                           <a:ea typeface="Times New Roman" panose="02020603050405020304" pitchFamily="18" charset="0"/>
                           <a:cs typeface="Times New Roman" panose="02020603050405020304" pitchFamily="18" charset="0"/>
                         </a:rPr>
-                        <a:t>19.52</a:t>
-                      </a:r>
-                    </a:p>
-                  </a:txBody>
-                  <a:tcPr marL="68580" marR="68580" marT="0" marB="0" anchor="ctr">
-                    <a:noFill/>
-                  </a:tcPr>
-                </a:tc>
-                <a:tc>
-                  <a:txBody>
-                    <a:bodyPr/>
-                    <a:lstStyle/>
-                    <a:p>
-                      <a:pPr algn="ctr">
-                        <a:buNone/>
-                      </a:pPr>
-                      <a:r>
-                        <a:rPr lang="es-ES_tradnl" sz="1050" dirty="0">
+                        <a:t>14.72</a:t>
+                      </a:r>
+                      <a:endParaRPr lang="de-DE" sz="900">
+                        <a:effectLst/>
+                        <a:latin typeface="Times New Roman" panose="02020603050405020304" pitchFamily="18" charset="0"/>
+                        <a:ea typeface="Times New Roman" panose="02020603050405020304" pitchFamily="18" charset="0"/>
+                        <a:cs typeface="Times New Roman" panose="02020603050405020304" pitchFamily="18" charset="0"/>
+                      </a:endParaRPr>
+                    </a:p>
+                  </a:txBody>
+                  <a:tcPr marL="68580" marR="68580" marT="0" marB="0">
+                    <a:noFill/>
+                  </a:tcPr>
+                </a:tc>
+                <a:tc>
+                  <a:txBody>
+                    <a:bodyPr/>
+                    <a:lstStyle/>
+                    <a:p>
+                      <a:pPr algn="ctr">
+                        <a:buNone/>
+                      </a:pPr>
+                      <a:r>
+                        <a:rPr lang="es-ES" sz="900" dirty="0">
                           <a:effectLst/>
                           <a:latin typeface="Times New Roman" panose="02020603050405020304" pitchFamily="18" charset="0"/>
                           <a:ea typeface="Times New Roman" panose="02020603050405020304" pitchFamily="18" charset="0"/>
                           <a:cs typeface="Times New Roman" panose="02020603050405020304" pitchFamily="18" charset="0"/>
                         </a:rPr>
-                        <a:t>54.16</a:t>
-                      </a:r>
-                    </a:p>
-                  </a:txBody>
-                  <a:tcPr marL="68580" marR="68580" marT="0" marB="0" anchor="ctr">
+                        <a:t>6.00</a:t>
+                      </a:r>
+                      <a:endParaRPr lang="de-DE" sz="900" dirty="0">
+                        <a:effectLst/>
+                        <a:latin typeface="Times New Roman" panose="02020603050405020304" pitchFamily="18" charset="0"/>
+                        <a:ea typeface="Times New Roman" panose="02020603050405020304" pitchFamily="18" charset="0"/>
+                        <a:cs typeface="Times New Roman" panose="02020603050405020304" pitchFamily="18" charset="0"/>
+                      </a:endParaRPr>
+                    </a:p>
+                  </a:txBody>
+                  <a:tcPr marL="68580" marR="68580" marT="0" marB="0">
                     <a:noFill/>
                   </a:tcPr>
                 </a:tc>
@@ -10581,7 +10766,7 @@
                       <a:pPr algn="ctr">
                         <a:buNone/>
                       </a:pPr>
-                      <a:endParaRPr lang="es-ES_tradnl" sz="1000" b="0" noProof="1">
+                      <a:endParaRPr lang="es-ES_tradnl" sz="900" b="0" noProof="1">
                         <a:solidFill>
                           <a:schemeClr val="tx1"/>
                         </a:solidFill>
@@ -10604,287 +10789,287 @@
                       <a:pPr algn="ctr">
                         <a:buNone/>
                       </a:pPr>
-                      <a:endParaRPr lang="es-ES_tradnl" sz="1000" dirty="0">
-                        <a:effectLst/>
-                        <a:latin typeface="Times New Roman" panose="02020603050405020304" pitchFamily="18" charset="0"/>
-                        <a:ea typeface="Times New Roman" panose="02020603050405020304" pitchFamily="18" charset="0"/>
-                        <a:cs typeface="Times New Roman" panose="02020603050405020304" pitchFamily="18" charset="0"/>
-                      </a:endParaRPr>
-                    </a:p>
-                  </a:txBody>
-                  <a:tcPr marL="68580" marR="68580" marT="0" marB="0">
-                    <a:noFill/>
-                  </a:tcPr>
-                </a:tc>
-                <a:tc>
-                  <a:txBody>
-                    <a:bodyPr/>
-                    <a:lstStyle/>
-                    <a:p>
-                      <a:pPr algn="ctr">
-                        <a:buNone/>
-                      </a:pPr>
-                      <a:endParaRPr lang="es-ES_tradnl" sz="1000" dirty="0">
-                        <a:effectLst/>
-                        <a:latin typeface="Times New Roman" panose="02020603050405020304" pitchFamily="18" charset="0"/>
-                        <a:ea typeface="Times New Roman" panose="02020603050405020304" pitchFamily="18" charset="0"/>
-                        <a:cs typeface="Times New Roman" panose="02020603050405020304" pitchFamily="18" charset="0"/>
-                      </a:endParaRPr>
-                    </a:p>
-                  </a:txBody>
-                  <a:tcPr marL="68580" marR="68580" marT="0" marB="0">
-                    <a:noFill/>
-                  </a:tcPr>
-                </a:tc>
-                <a:tc>
-                  <a:txBody>
-                    <a:bodyPr/>
-                    <a:lstStyle/>
-                    <a:p>
-                      <a:pPr algn="ctr">
-                        <a:buNone/>
-                      </a:pPr>
-                      <a:endParaRPr lang="es-ES_tradnl" sz="1000" dirty="0">
-                        <a:effectLst/>
-                        <a:latin typeface="Times New Roman" panose="02020603050405020304" pitchFamily="18" charset="0"/>
-                        <a:ea typeface="Times New Roman" panose="02020603050405020304" pitchFamily="18" charset="0"/>
-                        <a:cs typeface="Times New Roman" panose="02020603050405020304" pitchFamily="18" charset="0"/>
-                      </a:endParaRPr>
-                    </a:p>
-                  </a:txBody>
-                  <a:tcPr marL="68580" marR="68580" marT="0" marB="0">
-                    <a:noFill/>
-                  </a:tcPr>
-                </a:tc>
-                <a:tc>
-                  <a:txBody>
-                    <a:bodyPr/>
-                    <a:lstStyle/>
-                    <a:p>
-                      <a:pPr algn="ctr">
-                        <a:buNone/>
-                      </a:pPr>
-                      <a:endParaRPr lang="es-ES_tradnl" sz="1000" dirty="0">
-                        <a:effectLst/>
-                        <a:latin typeface="Times New Roman" panose="02020603050405020304" pitchFamily="18" charset="0"/>
-                        <a:ea typeface="Times New Roman" panose="02020603050405020304" pitchFamily="18" charset="0"/>
-                        <a:cs typeface="Times New Roman" panose="02020603050405020304" pitchFamily="18" charset="0"/>
-                      </a:endParaRPr>
-                    </a:p>
-                  </a:txBody>
-                  <a:tcPr marL="68580" marR="68580" marT="0" marB="0">
-                    <a:noFill/>
-                  </a:tcPr>
-                </a:tc>
-                <a:tc>
-                  <a:txBody>
-                    <a:bodyPr/>
-                    <a:lstStyle/>
-                    <a:p>
-                      <a:pPr algn="ctr">
-                        <a:buNone/>
-                      </a:pPr>
-                      <a:endParaRPr lang="es-ES_tradnl" sz="1000" dirty="0">
-                        <a:effectLst/>
-                        <a:latin typeface="Times New Roman" panose="02020603050405020304" pitchFamily="18" charset="0"/>
-                        <a:ea typeface="Times New Roman" panose="02020603050405020304" pitchFamily="18" charset="0"/>
-                        <a:cs typeface="Times New Roman" panose="02020603050405020304" pitchFamily="18" charset="0"/>
-                      </a:endParaRPr>
-                    </a:p>
-                  </a:txBody>
-                  <a:tcPr marL="68580" marR="68580" marT="0" marB="0">
-                    <a:noFill/>
-                  </a:tcPr>
-                </a:tc>
-                <a:tc>
-                  <a:txBody>
-                    <a:bodyPr/>
-                    <a:lstStyle/>
-                    <a:p>
-                      <a:pPr algn="ctr">
-                        <a:buNone/>
-                      </a:pPr>
-                      <a:endParaRPr lang="es-ES_tradnl" sz="1000" dirty="0">
-                        <a:effectLst/>
-                        <a:latin typeface="Times New Roman" panose="02020603050405020304" pitchFamily="18" charset="0"/>
-                        <a:ea typeface="Times New Roman" panose="02020603050405020304" pitchFamily="18" charset="0"/>
-                        <a:cs typeface="Times New Roman" panose="02020603050405020304" pitchFamily="18" charset="0"/>
-                      </a:endParaRPr>
-                    </a:p>
-                  </a:txBody>
-                  <a:tcPr marL="68580" marR="68580" marT="0" marB="0">
-                    <a:noFill/>
-                  </a:tcPr>
-                </a:tc>
-                <a:tc>
-                  <a:txBody>
-                    <a:bodyPr/>
-                    <a:lstStyle/>
-                    <a:p>
-                      <a:pPr algn="ctr">
-                        <a:buNone/>
-                      </a:pPr>
-                      <a:endParaRPr lang="es-ES_tradnl" sz="1000" dirty="0">
-                        <a:effectLst/>
-                        <a:latin typeface="Times New Roman" panose="02020603050405020304" pitchFamily="18" charset="0"/>
-                        <a:ea typeface="Times New Roman" panose="02020603050405020304" pitchFamily="18" charset="0"/>
-                        <a:cs typeface="Times New Roman" panose="02020603050405020304" pitchFamily="18" charset="0"/>
-                      </a:endParaRPr>
-                    </a:p>
-                  </a:txBody>
-                  <a:tcPr marL="68580" marR="68580" marT="0" marB="0">
-                    <a:noFill/>
-                  </a:tcPr>
-                </a:tc>
-                <a:tc>
-                  <a:txBody>
-                    <a:bodyPr/>
-                    <a:lstStyle/>
-                    <a:p>
-                      <a:pPr algn="ctr">
-                        <a:buNone/>
-                      </a:pPr>
-                      <a:endParaRPr lang="es-ES_tradnl" sz="1000" dirty="0">
-                        <a:effectLst/>
-                        <a:latin typeface="Times New Roman" panose="02020603050405020304" pitchFamily="18" charset="0"/>
-                        <a:ea typeface="Times New Roman" panose="02020603050405020304" pitchFamily="18" charset="0"/>
-                        <a:cs typeface="Times New Roman" panose="02020603050405020304" pitchFamily="18" charset="0"/>
-                      </a:endParaRPr>
-                    </a:p>
-                  </a:txBody>
-                  <a:tcPr marL="68580" marR="68580" marT="0" marB="0">
-                    <a:noFill/>
-                  </a:tcPr>
-                </a:tc>
-                <a:tc>
-                  <a:txBody>
-                    <a:bodyPr/>
-                    <a:lstStyle/>
-                    <a:p>
-                      <a:pPr algn="ctr">
-                        <a:buNone/>
-                      </a:pPr>
-                      <a:endParaRPr lang="es-ES_tradnl" sz="1000" dirty="0">
-                        <a:effectLst/>
-                        <a:latin typeface="Times New Roman" panose="02020603050405020304" pitchFamily="18" charset="0"/>
-                        <a:ea typeface="Times New Roman" panose="02020603050405020304" pitchFamily="18" charset="0"/>
-                        <a:cs typeface="Times New Roman" panose="02020603050405020304" pitchFamily="18" charset="0"/>
-                      </a:endParaRPr>
-                    </a:p>
-                  </a:txBody>
-                  <a:tcPr marL="68580" marR="68580" marT="0" marB="0">
-                    <a:noFill/>
-                  </a:tcPr>
-                </a:tc>
-                <a:tc>
-                  <a:txBody>
-                    <a:bodyPr/>
-                    <a:lstStyle/>
-                    <a:p>
-                      <a:pPr algn="ctr">
-                        <a:buNone/>
-                      </a:pPr>
-                      <a:endParaRPr lang="es-ES_tradnl" sz="1000" dirty="0">
-                        <a:effectLst/>
-                        <a:latin typeface="Times New Roman" panose="02020603050405020304" pitchFamily="18" charset="0"/>
-                        <a:ea typeface="Times New Roman" panose="02020603050405020304" pitchFamily="18" charset="0"/>
-                        <a:cs typeface="Times New Roman" panose="02020603050405020304" pitchFamily="18" charset="0"/>
-                      </a:endParaRPr>
-                    </a:p>
-                  </a:txBody>
-                  <a:tcPr marL="68580" marR="68580" marT="0" marB="0">
-                    <a:noFill/>
-                  </a:tcPr>
-                </a:tc>
-                <a:tc>
-                  <a:txBody>
-                    <a:bodyPr/>
-                    <a:lstStyle/>
-                    <a:p>
-                      <a:pPr algn="ctr">
-                        <a:buNone/>
-                      </a:pPr>
-                      <a:endParaRPr lang="es-ES_tradnl" sz="1000" dirty="0">
-                        <a:effectLst/>
-                        <a:latin typeface="Times New Roman" panose="02020603050405020304" pitchFamily="18" charset="0"/>
-                        <a:ea typeface="Times New Roman" panose="02020603050405020304" pitchFamily="18" charset="0"/>
-                        <a:cs typeface="Times New Roman" panose="02020603050405020304" pitchFamily="18" charset="0"/>
-                      </a:endParaRPr>
-                    </a:p>
-                  </a:txBody>
-                  <a:tcPr marL="68580" marR="68580" marT="0" marB="0">
-                    <a:noFill/>
-                  </a:tcPr>
-                </a:tc>
-                <a:tc>
-                  <a:txBody>
-                    <a:bodyPr/>
-                    <a:lstStyle/>
-                    <a:p>
-                      <a:pPr algn="ctr">
-                        <a:buNone/>
-                      </a:pPr>
-                      <a:endParaRPr lang="es-ES_tradnl" sz="1000" dirty="0">
-                        <a:effectLst/>
-                        <a:latin typeface="Times New Roman" panose="02020603050405020304" pitchFamily="18" charset="0"/>
-                        <a:ea typeface="Times New Roman" panose="02020603050405020304" pitchFamily="18" charset="0"/>
-                        <a:cs typeface="Times New Roman" panose="02020603050405020304" pitchFamily="18" charset="0"/>
-                      </a:endParaRPr>
-                    </a:p>
-                  </a:txBody>
-                  <a:tcPr marL="68580" marR="68580" marT="0" marB="0">
-                    <a:noFill/>
-                  </a:tcPr>
-                </a:tc>
-                <a:tc>
-                  <a:txBody>
-                    <a:bodyPr/>
-                    <a:lstStyle/>
-                    <a:p>
-                      <a:pPr algn="ctr">
-                        <a:buNone/>
-                      </a:pPr>
-                      <a:endParaRPr lang="es-ES_tradnl" sz="1000" dirty="0">
-                        <a:effectLst/>
-                        <a:latin typeface="Times New Roman" panose="02020603050405020304" pitchFamily="18" charset="0"/>
-                        <a:ea typeface="Times New Roman" panose="02020603050405020304" pitchFamily="18" charset="0"/>
-                        <a:cs typeface="Times New Roman" panose="02020603050405020304" pitchFamily="18" charset="0"/>
-                      </a:endParaRPr>
-                    </a:p>
-                  </a:txBody>
-                  <a:tcPr marL="68580" marR="68580" marT="0" marB="0">
-                    <a:noFill/>
-                  </a:tcPr>
-                </a:tc>
-                <a:tc>
-                  <a:txBody>
-                    <a:bodyPr/>
-                    <a:lstStyle/>
-                    <a:p>
-                      <a:pPr algn="ctr">
-                        <a:buNone/>
-                      </a:pPr>
-                      <a:endParaRPr lang="es-ES_tradnl" sz="1000" dirty="0">
-                        <a:effectLst/>
-                        <a:latin typeface="Times New Roman" panose="02020603050405020304" pitchFamily="18" charset="0"/>
-                        <a:ea typeface="Times New Roman" panose="02020603050405020304" pitchFamily="18" charset="0"/>
-                        <a:cs typeface="Times New Roman" panose="02020603050405020304" pitchFamily="18" charset="0"/>
-                      </a:endParaRPr>
-                    </a:p>
-                  </a:txBody>
-                  <a:tcPr marL="68580" marR="68580" marT="0" marB="0">
-                    <a:noFill/>
-                  </a:tcPr>
-                </a:tc>
-                <a:tc>
-                  <a:txBody>
-                    <a:bodyPr/>
-                    <a:lstStyle/>
-                    <a:p>
-                      <a:pPr algn="ctr">
-                        <a:buNone/>
-                      </a:pPr>
-                      <a:endParaRPr lang="es-ES_tradnl" sz="1000" dirty="0">
+                      <a:endParaRPr lang="es-ES_tradnl" sz="900" dirty="0">
+                        <a:effectLst/>
+                        <a:latin typeface="Times New Roman" panose="02020603050405020304" pitchFamily="18" charset="0"/>
+                        <a:ea typeface="Times New Roman" panose="02020603050405020304" pitchFamily="18" charset="0"/>
+                        <a:cs typeface="Times New Roman" panose="02020603050405020304" pitchFamily="18" charset="0"/>
+                      </a:endParaRPr>
+                    </a:p>
+                  </a:txBody>
+                  <a:tcPr marL="68580" marR="68580" marT="0" marB="0">
+                    <a:noFill/>
+                  </a:tcPr>
+                </a:tc>
+                <a:tc>
+                  <a:txBody>
+                    <a:bodyPr/>
+                    <a:lstStyle/>
+                    <a:p>
+                      <a:pPr algn="ctr">
+                        <a:buNone/>
+                      </a:pPr>
+                      <a:endParaRPr lang="es-ES_tradnl" sz="900" dirty="0">
+                        <a:effectLst/>
+                        <a:latin typeface="Times New Roman" panose="02020603050405020304" pitchFamily="18" charset="0"/>
+                        <a:ea typeface="Times New Roman" panose="02020603050405020304" pitchFamily="18" charset="0"/>
+                        <a:cs typeface="Times New Roman" panose="02020603050405020304" pitchFamily="18" charset="0"/>
+                      </a:endParaRPr>
+                    </a:p>
+                  </a:txBody>
+                  <a:tcPr marL="68580" marR="68580" marT="0" marB="0">
+                    <a:noFill/>
+                  </a:tcPr>
+                </a:tc>
+                <a:tc>
+                  <a:txBody>
+                    <a:bodyPr/>
+                    <a:lstStyle/>
+                    <a:p>
+                      <a:pPr algn="ctr">
+                        <a:buNone/>
+                      </a:pPr>
+                      <a:endParaRPr lang="es-ES_tradnl" sz="900" dirty="0">
+                        <a:effectLst/>
+                        <a:latin typeface="Times New Roman" panose="02020603050405020304" pitchFamily="18" charset="0"/>
+                        <a:ea typeface="Times New Roman" panose="02020603050405020304" pitchFamily="18" charset="0"/>
+                        <a:cs typeface="Times New Roman" panose="02020603050405020304" pitchFamily="18" charset="0"/>
+                      </a:endParaRPr>
+                    </a:p>
+                  </a:txBody>
+                  <a:tcPr marL="68580" marR="68580" marT="0" marB="0">
+                    <a:noFill/>
+                  </a:tcPr>
+                </a:tc>
+                <a:tc>
+                  <a:txBody>
+                    <a:bodyPr/>
+                    <a:lstStyle/>
+                    <a:p>
+                      <a:pPr algn="ctr">
+                        <a:buNone/>
+                      </a:pPr>
+                      <a:endParaRPr lang="es-ES_tradnl" sz="900" dirty="0">
+                        <a:effectLst/>
+                        <a:latin typeface="Times New Roman" panose="02020603050405020304" pitchFamily="18" charset="0"/>
+                        <a:ea typeface="Times New Roman" panose="02020603050405020304" pitchFamily="18" charset="0"/>
+                        <a:cs typeface="Times New Roman" panose="02020603050405020304" pitchFamily="18" charset="0"/>
+                      </a:endParaRPr>
+                    </a:p>
+                  </a:txBody>
+                  <a:tcPr marL="68580" marR="68580" marT="0" marB="0">
+                    <a:noFill/>
+                  </a:tcPr>
+                </a:tc>
+                <a:tc>
+                  <a:txBody>
+                    <a:bodyPr/>
+                    <a:lstStyle/>
+                    <a:p>
+                      <a:pPr algn="ctr">
+                        <a:buNone/>
+                      </a:pPr>
+                      <a:endParaRPr lang="es-ES_tradnl" sz="900" dirty="0">
+                        <a:effectLst/>
+                        <a:latin typeface="Times New Roman" panose="02020603050405020304" pitchFamily="18" charset="0"/>
+                        <a:ea typeface="Times New Roman" panose="02020603050405020304" pitchFamily="18" charset="0"/>
+                        <a:cs typeface="Times New Roman" panose="02020603050405020304" pitchFamily="18" charset="0"/>
+                      </a:endParaRPr>
+                    </a:p>
+                  </a:txBody>
+                  <a:tcPr marL="68580" marR="68580" marT="0" marB="0">
+                    <a:noFill/>
+                  </a:tcPr>
+                </a:tc>
+                <a:tc>
+                  <a:txBody>
+                    <a:bodyPr/>
+                    <a:lstStyle/>
+                    <a:p>
+                      <a:pPr algn="ctr">
+                        <a:buNone/>
+                      </a:pPr>
+                      <a:endParaRPr lang="es-ES_tradnl" sz="900" dirty="0">
+                        <a:effectLst/>
+                        <a:latin typeface="Times New Roman" panose="02020603050405020304" pitchFamily="18" charset="0"/>
+                        <a:ea typeface="Times New Roman" panose="02020603050405020304" pitchFamily="18" charset="0"/>
+                        <a:cs typeface="Times New Roman" panose="02020603050405020304" pitchFamily="18" charset="0"/>
+                      </a:endParaRPr>
+                    </a:p>
+                  </a:txBody>
+                  <a:tcPr marL="68580" marR="68580" marT="0" marB="0">
+                    <a:noFill/>
+                  </a:tcPr>
+                </a:tc>
+                <a:tc>
+                  <a:txBody>
+                    <a:bodyPr/>
+                    <a:lstStyle/>
+                    <a:p>
+                      <a:pPr algn="ctr">
+                        <a:buNone/>
+                      </a:pPr>
+                      <a:endParaRPr lang="es-ES_tradnl" sz="900" dirty="0">
+                        <a:effectLst/>
+                        <a:latin typeface="Times New Roman" panose="02020603050405020304" pitchFamily="18" charset="0"/>
+                        <a:ea typeface="Times New Roman" panose="02020603050405020304" pitchFamily="18" charset="0"/>
+                        <a:cs typeface="Times New Roman" panose="02020603050405020304" pitchFamily="18" charset="0"/>
+                      </a:endParaRPr>
+                    </a:p>
+                  </a:txBody>
+                  <a:tcPr marL="68580" marR="68580" marT="0" marB="0">
+                    <a:noFill/>
+                  </a:tcPr>
+                </a:tc>
+                <a:tc>
+                  <a:txBody>
+                    <a:bodyPr/>
+                    <a:lstStyle/>
+                    <a:p>
+                      <a:pPr algn="ctr">
+                        <a:buNone/>
+                      </a:pPr>
+                      <a:endParaRPr lang="es-ES_tradnl" sz="900" dirty="0">
+                        <a:effectLst/>
+                        <a:latin typeface="Times New Roman" panose="02020603050405020304" pitchFamily="18" charset="0"/>
+                        <a:ea typeface="Times New Roman" panose="02020603050405020304" pitchFamily="18" charset="0"/>
+                        <a:cs typeface="Times New Roman" panose="02020603050405020304" pitchFamily="18" charset="0"/>
+                      </a:endParaRPr>
+                    </a:p>
+                  </a:txBody>
+                  <a:tcPr marL="68580" marR="68580" marT="0" marB="0">
+                    <a:noFill/>
+                  </a:tcPr>
+                </a:tc>
+                <a:tc>
+                  <a:txBody>
+                    <a:bodyPr/>
+                    <a:lstStyle/>
+                    <a:p>
+                      <a:pPr algn="ctr">
+                        <a:buNone/>
+                      </a:pPr>
+                      <a:endParaRPr lang="es-ES_tradnl" sz="900" dirty="0">
+                        <a:effectLst/>
+                        <a:latin typeface="Times New Roman" panose="02020603050405020304" pitchFamily="18" charset="0"/>
+                        <a:ea typeface="Times New Roman" panose="02020603050405020304" pitchFamily="18" charset="0"/>
+                        <a:cs typeface="Times New Roman" panose="02020603050405020304" pitchFamily="18" charset="0"/>
+                      </a:endParaRPr>
+                    </a:p>
+                  </a:txBody>
+                  <a:tcPr marL="68580" marR="68580" marT="0" marB="0">
+                    <a:noFill/>
+                  </a:tcPr>
+                </a:tc>
+                <a:tc>
+                  <a:txBody>
+                    <a:bodyPr/>
+                    <a:lstStyle/>
+                    <a:p>
+                      <a:pPr algn="ctr">
+                        <a:buNone/>
+                      </a:pPr>
+                      <a:endParaRPr lang="es-ES_tradnl" sz="900" dirty="0">
+                        <a:effectLst/>
+                        <a:latin typeface="Times New Roman" panose="02020603050405020304" pitchFamily="18" charset="0"/>
+                        <a:ea typeface="Times New Roman" panose="02020603050405020304" pitchFamily="18" charset="0"/>
+                        <a:cs typeface="Times New Roman" panose="02020603050405020304" pitchFamily="18" charset="0"/>
+                      </a:endParaRPr>
+                    </a:p>
+                  </a:txBody>
+                  <a:tcPr marL="68580" marR="68580" marT="0" marB="0">
+                    <a:noFill/>
+                  </a:tcPr>
+                </a:tc>
+                <a:tc>
+                  <a:txBody>
+                    <a:bodyPr/>
+                    <a:lstStyle/>
+                    <a:p>
+                      <a:pPr algn="ctr">
+                        <a:buNone/>
+                      </a:pPr>
+                      <a:endParaRPr lang="es-ES_tradnl" sz="900" dirty="0">
+                        <a:effectLst/>
+                        <a:latin typeface="Times New Roman" panose="02020603050405020304" pitchFamily="18" charset="0"/>
+                        <a:ea typeface="Times New Roman" panose="02020603050405020304" pitchFamily="18" charset="0"/>
+                        <a:cs typeface="Times New Roman" panose="02020603050405020304" pitchFamily="18" charset="0"/>
+                      </a:endParaRPr>
+                    </a:p>
+                  </a:txBody>
+                  <a:tcPr marL="68580" marR="68580" marT="0" marB="0">
+                    <a:noFill/>
+                  </a:tcPr>
+                </a:tc>
+                <a:tc>
+                  <a:txBody>
+                    <a:bodyPr/>
+                    <a:lstStyle/>
+                    <a:p>
+                      <a:pPr algn="ctr">
+                        <a:buNone/>
+                      </a:pPr>
+                      <a:endParaRPr lang="es-ES_tradnl" sz="900" dirty="0">
+                        <a:effectLst/>
+                        <a:latin typeface="Times New Roman" panose="02020603050405020304" pitchFamily="18" charset="0"/>
+                        <a:ea typeface="Times New Roman" panose="02020603050405020304" pitchFamily="18" charset="0"/>
+                        <a:cs typeface="Times New Roman" panose="02020603050405020304" pitchFamily="18" charset="0"/>
+                      </a:endParaRPr>
+                    </a:p>
+                  </a:txBody>
+                  <a:tcPr marL="68580" marR="68580" marT="0" marB="0">
+                    <a:noFill/>
+                  </a:tcPr>
+                </a:tc>
+                <a:tc>
+                  <a:txBody>
+                    <a:bodyPr/>
+                    <a:lstStyle/>
+                    <a:p>
+                      <a:pPr algn="ctr">
+                        <a:buNone/>
+                      </a:pPr>
+                      <a:endParaRPr lang="es-ES_tradnl" sz="900" dirty="0">
+                        <a:effectLst/>
+                        <a:latin typeface="Times New Roman" panose="02020603050405020304" pitchFamily="18" charset="0"/>
+                        <a:ea typeface="Times New Roman" panose="02020603050405020304" pitchFamily="18" charset="0"/>
+                        <a:cs typeface="Times New Roman" panose="02020603050405020304" pitchFamily="18" charset="0"/>
+                      </a:endParaRPr>
+                    </a:p>
+                  </a:txBody>
+                  <a:tcPr marL="68580" marR="68580" marT="0" marB="0">
+                    <a:noFill/>
+                  </a:tcPr>
+                </a:tc>
+                <a:tc>
+                  <a:txBody>
+                    <a:bodyPr/>
+                    <a:lstStyle/>
+                    <a:p>
+                      <a:pPr algn="ctr">
+                        <a:buNone/>
+                      </a:pPr>
+                      <a:endParaRPr lang="es-ES_tradnl" sz="900" dirty="0">
+                        <a:effectLst/>
+                        <a:latin typeface="Times New Roman" panose="02020603050405020304" pitchFamily="18" charset="0"/>
+                        <a:ea typeface="Times New Roman" panose="02020603050405020304" pitchFamily="18" charset="0"/>
+                        <a:cs typeface="Times New Roman" panose="02020603050405020304" pitchFamily="18" charset="0"/>
+                      </a:endParaRPr>
+                    </a:p>
+                  </a:txBody>
+                  <a:tcPr marL="68580" marR="68580" marT="0" marB="0">
+                    <a:noFill/>
+                  </a:tcPr>
+                </a:tc>
+                <a:tc>
+                  <a:txBody>
+                    <a:bodyPr/>
+                    <a:lstStyle/>
+                    <a:p>
+                      <a:pPr algn="ctr">
+                        <a:buNone/>
+                      </a:pPr>
+                      <a:endParaRPr lang="es-ES_tradnl" sz="900" dirty="0">
                         <a:effectLst/>
                         <a:latin typeface="Times New Roman" panose="02020603050405020304" pitchFamily="18" charset="0"/>
                         <a:ea typeface="Times New Roman" panose="02020603050405020304" pitchFamily="18" charset="0"/>
@@ -10911,7 +11096,7 @@
                       <a:pPr algn="ctr">
                         <a:buNone/>
                       </a:pPr>
-                      <a:endParaRPr lang="es-ES_tradnl" sz="1000" b="0" noProof="1">
+                      <a:endParaRPr lang="es-ES_tradnl" sz="900" b="0" noProof="1">
                         <a:solidFill>
                           <a:schemeClr val="tx1"/>
                         </a:solidFill>
@@ -10943,7 +11128,7 @@
                       <a:pPr algn="ctr">
                         <a:buNone/>
                       </a:pPr>
-                      <a:endParaRPr lang="es-ES_tradnl" sz="1000" dirty="0">
+                      <a:endParaRPr lang="es-ES_tradnl" sz="900" dirty="0">
                         <a:effectLst/>
                         <a:latin typeface="Times New Roman" panose="02020603050405020304" pitchFamily="18" charset="0"/>
                         <a:ea typeface="Times New Roman" panose="02020603050405020304" pitchFamily="18" charset="0"/>
@@ -10972,7 +11157,7 @@
                       <a:pPr algn="ctr">
                         <a:buNone/>
                       </a:pPr>
-                      <a:endParaRPr lang="es-ES_tradnl" sz="1000" dirty="0">
+                      <a:endParaRPr lang="es-ES_tradnl" sz="900" dirty="0">
                         <a:effectLst/>
                         <a:latin typeface="Times New Roman" panose="02020603050405020304" pitchFamily="18" charset="0"/>
                         <a:ea typeface="Times New Roman" panose="02020603050405020304" pitchFamily="18" charset="0"/>
@@ -11001,7 +11186,7 @@
                       <a:pPr algn="ctr">
                         <a:buNone/>
                       </a:pPr>
-                      <a:endParaRPr lang="es-ES_tradnl" sz="1000" dirty="0">
+                      <a:endParaRPr lang="es-ES_tradnl" sz="900" dirty="0">
                         <a:effectLst/>
                         <a:latin typeface="Times New Roman" panose="02020603050405020304" pitchFamily="18" charset="0"/>
                         <a:ea typeface="Times New Roman" panose="02020603050405020304" pitchFamily="18" charset="0"/>
@@ -11030,7 +11215,7 @@
                       <a:pPr algn="ctr">
                         <a:buNone/>
                       </a:pPr>
-                      <a:endParaRPr lang="es-ES_tradnl" sz="1000" dirty="0">
+                      <a:endParaRPr lang="es-ES_tradnl" sz="900" dirty="0">
                         <a:effectLst/>
                         <a:latin typeface="Times New Roman" panose="02020603050405020304" pitchFamily="18" charset="0"/>
                         <a:ea typeface="Times New Roman" panose="02020603050405020304" pitchFamily="18" charset="0"/>
@@ -11059,7 +11244,7 @@
                       <a:pPr algn="ctr">
                         <a:buNone/>
                       </a:pPr>
-                      <a:endParaRPr lang="es-ES_tradnl" sz="1000" dirty="0">
+                      <a:endParaRPr lang="es-ES_tradnl" sz="900" dirty="0">
                         <a:effectLst/>
                         <a:latin typeface="Times New Roman" panose="02020603050405020304" pitchFamily="18" charset="0"/>
                         <a:ea typeface="Times New Roman" panose="02020603050405020304" pitchFamily="18" charset="0"/>
@@ -11088,7 +11273,7 @@
                       <a:pPr algn="ctr">
                         <a:buNone/>
                       </a:pPr>
-                      <a:endParaRPr lang="es-ES_tradnl" sz="1000" dirty="0">
+                      <a:endParaRPr lang="es-ES_tradnl" sz="900" dirty="0">
                         <a:effectLst/>
                         <a:latin typeface="Times New Roman" panose="02020603050405020304" pitchFamily="18" charset="0"/>
                         <a:ea typeface="Times New Roman" panose="02020603050405020304" pitchFamily="18" charset="0"/>
@@ -11117,7 +11302,7 @@
                       <a:pPr algn="ctr">
                         <a:buNone/>
                       </a:pPr>
-                      <a:endParaRPr lang="es-ES_tradnl" sz="1000" dirty="0">
+                      <a:endParaRPr lang="es-ES_tradnl" sz="900" dirty="0">
                         <a:effectLst/>
                         <a:latin typeface="Times New Roman" panose="02020603050405020304" pitchFamily="18" charset="0"/>
                         <a:ea typeface="Times New Roman" panose="02020603050405020304" pitchFamily="18" charset="0"/>
@@ -11146,7 +11331,7 @@
                       <a:pPr algn="ctr">
                         <a:buNone/>
                       </a:pPr>
-                      <a:endParaRPr lang="es-ES_tradnl" sz="1000" dirty="0">
+                      <a:endParaRPr lang="es-ES_tradnl" sz="900" dirty="0">
                         <a:effectLst/>
                         <a:latin typeface="Times New Roman" panose="02020603050405020304" pitchFamily="18" charset="0"/>
                         <a:ea typeface="Times New Roman" panose="02020603050405020304" pitchFamily="18" charset="0"/>
@@ -11175,7 +11360,7 @@
                       <a:pPr algn="ctr">
                         <a:buNone/>
                       </a:pPr>
-                      <a:endParaRPr lang="es-ES_tradnl" sz="1000" dirty="0">
+                      <a:endParaRPr lang="es-ES_tradnl" sz="900" dirty="0">
                         <a:effectLst/>
                         <a:latin typeface="Times New Roman" panose="02020603050405020304" pitchFamily="18" charset="0"/>
                         <a:ea typeface="Times New Roman" panose="02020603050405020304" pitchFamily="18" charset="0"/>
@@ -11204,7 +11389,7 @@
                       <a:pPr algn="ctr">
                         <a:buNone/>
                       </a:pPr>
-                      <a:endParaRPr lang="es-ES_tradnl" sz="1000" dirty="0">
+                      <a:endParaRPr lang="es-ES_tradnl" sz="900" dirty="0">
                         <a:effectLst/>
                         <a:latin typeface="Times New Roman" panose="02020603050405020304" pitchFamily="18" charset="0"/>
                         <a:ea typeface="Times New Roman" panose="02020603050405020304" pitchFamily="18" charset="0"/>
@@ -11233,7 +11418,7 @@
                       <a:pPr algn="ctr">
                         <a:buNone/>
                       </a:pPr>
-                      <a:endParaRPr lang="es-ES_tradnl" sz="1000" dirty="0">
+                      <a:endParaRPr lang="es-ES_tradnl" sz="900" dirty="0">
                         <a:effectLst/>
                         <a:latin typeface="Times New Roman" panose="02020603050405020304" pitchFamily="18" charset="0"/>
                         <a:ea typeface="Times New Roman" panose="02020603050405020304" pitchFamily="18" charset="0"/>
@@ -11262,7 +11447,7 @@
                       <a:pPr algn="ctr">
                         <a:buNone/>
                       </a:pPr>
-                      <a:endParaRPr lang="es-ES_tradnl" sz="1000" dirty="0">
+                      <a:endParaRPr lang="es-ES_tradnl" sz="900" dirty="0">
                         <a:effectLst/>
                         <a:latin typeface="Times New Roman" panose="02020603050405020304" pitchFamily="18" charset="0"/>
                         <a:ea typeface="Times New Roman" panose="02020603050405020304" pitchFamily="18" charset="0"/>
@@ -11291,7 +11476,7 @@
                       <a:pPr algn="ctr">
                         <a:buNone/>
                       </a:pPr>
-                      <a:endParaRPr lang="es-ES_tradnl" sz="1000" dirty="0">
+                      <a:endParaRPr lang="es-ES_tradnl" sz="900" dirty="0">
                         <a:effectLst/>
                         <a:latin typeface="Times New Roman" panose="02020603050405020304" pitchFamily="18" charset="0"/>
                         <a:ea typeface="Times New Roman" panose="02020603050405020304" pitchFamily="18" charset="0"/>
@@ -11320,7 +11505,7 @@
                       <a:pPr algn="ctr">
                         <a:buNone/>
                       </a:pPr>
-                      <a:endParaRPr lang="es-ES_tradnl" sz="1000" dirty="0">
+                      <a:endParaRPr lang="es-ES_tradnl" sz="900" dirty="0">
                         <a:effectLst/>
                         <a:latin typeface="Times New Roman" panose="02020603050405020304" pitchFamily="18" charset="0"/>
                         <a:ea typeface="Times New Roman" panose="02020603050405020304" pitchFamily="18" charset="0"/>
@@ -11349,7 +11534,7 @@
                       <a:pPr algn="ctr">
                         <a:buNone/>
                       </a:pPr>
-                      <a:endParaRPr lang="es-ES_tradnl" sz="1000" dirty="0">
+                      <a:endParaRPr lang="es-ES_tradnl" sz="900" dirty="0">
                         <a:effectLst/>
                         <a:latin typeface="Times New Roman" panose="02020603050405020304" pitchFamily="18" charset="0"/>
                         <a:ea typeface="Times New Roman" panose="02020603050405020304" pitchFamily="18" charset="0"/>
@@ -11758,38 +11943,6 @@
           </a:p>
         </p:txBody>
       </p:sp>
-      <p:pic>
-        <p:nvPicPr>
-          <p:cNvPr id="6" name="Onlinebild-Platzhalter 5">
-            <a:extLst>
-              <a:ext uri="{FF2B5EF4-FFF2-40B4-BE49-F238E27FC236}">
-                <a16:creationId xmlns:a16="http://schemas.microsoft.com/office/drawing/2014/main" id="{7448C71C-57A1-F646-B085-DAD5E613DC22}"/>
-              </a:ext>
-            </a:extLst>
-          </p:cNvPr>
-          <p:cNvPicPr>
-            <a:picLocks noGrp="1" noChangeAspect="1"/>
-          </p:cNvPicPr>
-          <p:nvPr>
-            <p:ph type="clipArt" sz="quarter" idx="15"/>
-          </p:nvPr>
-        </p:nvPicPr>
-        <p:blipFill>
-          <a:blip r:embed="rId2"/>
-          <a:stretch>
-            <a:fillRect/>
-          </a:stretch>
-        </p:blipFill>
-        <p:spPr>
-          <a:xfrm>
-            <a:off x="583920" y="2151063"/>
-            <a:ext cx="5239310" cy="4008437"/>
-          </a:xfrm>
-          <a:prstGeom prst="rect">
-            <a:avLst/>
-          </a:prstGeom>
-        </p:spPr>
-      </p:pic>
       <p:sp>
         <p:nvSpPr>
           <p:cNvPr id="2" name="Fußzeilenplatzhalter 2">
@@ -11919,6 +12072,38 @@
           </a:p>
         </p:txBody>
       </p:sp>
+      <p:pic>
+        <p:nvPicPr>
+          <p:cNvPr id="8" name="Onlinebild-Platzhalter 7">
+            <a:extLst>
+              <a:ext uri="{FF2B5EF4-FFF2-40B4-BE49-F238E27FC236}">
+                <a16:creationId xmlns:a16="http://schemas.microsoft.com/office/drawing/2014/main" id="{256996F0-70C5-27F8-AFDA-FA45DFA0BB32}"/>
+              </a:ext>
+            </a:extLst>
+          </p:cNvPr>
+          <p:cNvPicPr>
+            <a:picLocks noGrp="1" noChangeAspect="1"/>
+          </p:cNvPicPr>
+          <p:nvPr>
+            <p:ph type="clipArt" sz="quarter" idx="15"/>
+          </p:nvPr>
+        </p:nvPicPr>
+        <p:blipFill>
+          <a:blip r:embed="rId2"/>
+          <a:stretch>
+            <a:fillRect/>
+          </a:stretch>
+        </p:blipFill>
+        <p:spPr>
+          <a:xfrm>
+            <a:off x="639591" y="2151063"/>
+            <a:ext cx="5127968" cy="4008437"/>
+          </a:xfrm>
+          <a:prstGeom prst="rect">
+            <a:avLst/>
+          </a:prstGeom>
+        </p:spPr>
+      </p:pic>
     </p:spTree>
     <p:extLst>
       <p:ext uri="{BB962C8B-B14F-4D97-AF65-F5344CB8AC3E}">
@@ -12009,14 +12194,14 @@
             <p:ph sz="quarter" idx="14"/>
             <p:extLst>
               <p:ext uri="{D42A27DB-BD31-4B8C-83A1-F6EECF244321}">
-                <p14:modId xmlns:p14="http://schemas.microsoft.com/office/powerpoint/2010/main" val="1138736159"/>
+                <p14:modId xmlns:p14="http://schemas.microsoft.com/office/powerpoint/2010/main" val="3041525850"/>
               </p:ext>
             </p:extLst>
           </p:nvPr>
         </p:nvGraphicFramePr>
         <p:xfrm>
           <a:off x="561487" y="4631428"/>
-          <a:ext cx="10532960" cy="1559560"/>
+          <a:ext cx="10532960" cy="1210945"/>
         </p:xfrm>
         <a:graphic>
           <a:graphicData uri="http://schemas.openxmlformats.org/drawingml/2006/table">
@@ -13039,7 +13224,7 @@
                         <a:buNone/>
                       </a:pPr>
                       <a:r>
-                        <a:rPr lang="es-ES_tradnl" sz="1000" dirty="0">
+                        <a:rPr lang="es-ES_tradnl" sz="900" dirty="0">
                           <a:effectLst/>
                           <a:latin typeface="Times New Roman" panose="02020603050405020304" pitchFamily="18" charset="0"/>
                           <a:ea typeface="Times New Roman" panose="02020603050405020304" pitchFamily="18" charset="0"/>
@@ -13071,7 +13256,7 @@
                         <a:buNone/>
                       </a:pPr>
                       <a:r>
-                        <a:rPr lang="es-ES_tradnl" sz="1000" dirty="0">
+                        <a:rPr lang="es-ES_tradnl" sz="900" dirty="0">
                           <a:effectLst/>
                           <a:latin typeface="Times New Roman" panose="02020603050405020304" pitchFamily="18" charset="0"/>
                           <a:ea typeface="Times New Roman" panose="02020603050405020304" pitchFamily="18" charset="0"/>
@@ -13103,7 +13288,7 @@
                         <a:buNone/>
                       </a:pPr>
                       <a:r>
-                        <a:rPr lang="es-ES_tradnl" sz="1000" dirty="0">
+                        <a:rPr lang="es-ES_tradnl" sz="900" dirty="0">
                           <a:effectLst/>
                           <a:latin typeface="Times New Roman" panose="02020603050405020304" pitchFamily="18" charset="0"/>
                           <a:ea typeface="Times New Roman" panose="02020603050405020304" pitchFamily="18" charset="0"/>
@@ -13135,7 +13320,7 @@
                         <a:buNone/>
                       </a:pPr>
                       <a:r>
-                        <a:rPr lang="es-ES_tradnl" sz="1000" dirty="0">
+                        <a:rPr lang="es-ES_tradnl" sz="900" dirty="0">
                           <a:effectLst/>
                           <a:latin typeface="Times New Roman" panose="02020603050405020304" pitchFamily="18" charset="0"/>
                           <a:ea typeface="Times New Roman" panose="02020603050405020304" pitchFamily="18" charset="0"/>
@@ -13167,7 +13352,7 @@
                         <a:buNone/>
                       </a:pPr>
                       <a:r>
-                        <a:rPr lang="es-ES_tradnl" sz="1000" dirty="0">
+                        <a:rPr lang="es-ES_tradnl" sz="900" dirty="0">
                           <a:effectLst/>
                           <a:latin typeface="Times New Roman" panose="02020603050405020304" pitchFamily="18" charset="0"/>
                           <a:ea typeface="Times New Roman" panose="02020603050405020304" pitchFamily="18" charset="0"/>
@@ -13199,7 +13384,7 @@
                         <a:buNone/>
                       </a:pPr>
                       <a:r>
-                        <a:rPr lang="es-ES_tradnl" sz="1000" dirty="0">
+                        <a:rPr lang="es-ES_tradnl" sz="900" dirty="0">
                           <a:effectLst/>
                           <a:latin typeface="Times New Roman" panose="02020603050405020304" pitchFamily="18" charset="0"/>
                           <a:ea typeface="Times New Roman" panose="02020603050405020304" pitchFamily="18" charset="0"/>
@@ -13231,7 +13416,7 @@
                         <a:buNone/>
                       </a:pPr>
                       <a:r>
-                        <a:rPr lang="es-ES_tradnl" sz="1000" dirty="0">
+                        <a:rPr lang="es-ES_tradnl" sz="900" dirty="0">
                           <a:effectLst/>
                           <a:latin typeface="Times New Roman" panose="02020603050405020304" pitchFamily="18" charset="0"/>
                           <a:ea typeface="Times New Roman" panose="02020603050405020304" pitchFamily="18" charset="0"/>
@@ -13263,7 +13448,7 @@
                         <a:buNone/>
                       </a:pPr>
                       <a:r>
-                        <a:rPr lang="es-ES_tradnl" sz="1000" dirty="0">
+                        <a:rPr lang="es-ES_tradnl" sz="900" dirty="0">
                           <a:effectLst/>
                           <a:latin typeface="Times New Roman" panose="02020603050405020304" pitchFamily="18" charset="0"/>
                           <a:ea typeface="Times New Roman" panose="02020603050405020304" pitchFamily="18" charset="0"/>
@@ -13295,7 +13480,7 @@
                         <a:buNone/>
                       </a:pPr>
                       <a:r>
-                        <a:rPr lang="es-ES_tradnl" sz="1000" dirty="0">
+                        <a:rPr lang="es-ES_tradnl" sz="900" dirty="0">
                           <a:effectLst/>
                           <a:latin typeface="Times New Roman" panose="02020603050405020304" pitchFamily="18" charset="0"/>
                           <a:ea typeface="Times New Roman" panose="02020603050405020304" pitchFamily="18" charset="0"/>
@@ -13327,7 +13512,7 @@
                         <a:buNone/>
                       </a:pPr>
                       <a:r>
-                        <a:rPr lang="es-ES_tradnl" sz="1000" dirty="0">
+                        <a:rPr lang="es-ES_tradnl" sz="900" dirty="0">
                           <a:effectLst/>
                           <a:latin typeface="Times New Roman" panose="02020603050405020304" pitchFamily="18" charset="0"/>
                           <a:ea typeface="Times New Roman" panose="02020603050405020304" pitchFamily="18" charset="0"/>
@@ -13359,14 +13544,20 @@
                         <a:buNone/>
                       </a:pPr>
                       <a:r>
-                        <a:rPr lang="es-ES_tradnl" sz="1000" dirty="0">
+                        <a:rPr lang="es-ES" sz="900">
                           <a:effectLst/>
                           <a:latin typeface="Times New Roman" panose="02020603050405020304" pitchFamily="18" charset="0"/>
                           <a:ea typeface="Times New Roman" panose="02020603050405020304" pitchFamily="18" charset="0"/>
                           <a:cs typeface="Times New Roman" panose="02020603050405020304" pitchFamily="18" charset="0"/>
                         </a:rPr>
-                        <a:t>9.92</a:t>
-                      </a:r>
+                        <a:t>6.00</a:t>
+                      </a:r>
+                      <a:endParaRPr lang="de-DE" sz="900">
+                        <a:effectLst/>
+                        <a:latin typeface="Times New Roman" panose="02020603050405020304" pitchFamily="18" charset="0"/>
+                        <a:ea typeface="Times New Roman" panose="02020603050405020304" pitchFamily="18" charset="0"/>
+                        <a:cs typeface="Times New Roman" panose="02020603050405020304" pitchFamily="18" charset="0"/>
+                      </a:endParaRPr>
                     </a:p>
                   </a:txBody>
                   <a:tcPr marL="68580" marR="68580" marT="0" marB="0">
@@ -13391,14 +13582,20 @@
                         <a:buNone/>
                       </a:pPr>
                       <a:r>
-                        <a:rPr lang="es-ES_tradnl" sz="1000" dirty="0">
+                        <a:rPr lang="es-ES" sz="900">
                           <a:effectLst/>
                           <a:latin typeface="Times New Roman" panose="02020603050405020304" pitchFamily="18" charset="0"/>
                           <a:ea typeface="Times New Roman" panose="02020603050405020304" pitchFamily="18" charset="0"/>
                           <a:cs typeface="Times New Roman" panose="02020603050405020304" pitchFamily="18" charset="0"/>
                         </a:rPr>
-                        <a:t>3.53</a:t>
-                      </a:r>
+                        <a:t>2.60</a:t>
+                      </a:r>
+                      <a:endParaRPr lang="de-DE" sz="900">
+                        <a:effectLst/>
+                        <a:latin typeface="Times New Roman" panose="02020603050405020304" pitchFamily="18" charset="0"/>
+                        <a:ea typeface="Times New Roman" panose="02020603050405020304" pitchFamily="18" charset="0"/>
+                        <a:cs typeface="Times New Roman" panose="02020603050405020304" pitchFamily="18" charset="0"/>
+                      </a:endParaRPr>
                     </a:p>
                   </a:txBody>
                   <a:tcPr marL="68580" marR="68580" marT="0" marB="0">
@@ -13423,14 +13620,20 @@
                         <a:buNone/>
                       </a:pPr>
                       <a:r>
-                        <a:rPr lang="es-ES_tradnl" sz="1000" dirty="0">
+                        <a:rPr lang="es-ES" sz="900">
                           <a:effectLst/>
                           <a:latin typeface="Times New Roman" panose="02020603050405020304" pitchFamily="18" charset="0"/>
                           <a:ea typeface="Times New Roman" panose="02020603050405020304" pitchFamily="18" charset="0"/>
                           <a:cs typeface="Times New Roman" panose="02020603050405020304" pitchFamily="18" charset="0"/>
                         </a:rPr>
-                        <a:t>69.85</a:t>
-                      </a:r>
+                        <a:t>40.49</a:t>
+                      </a:r>
+                      <a:endParaRPr lang="de-DE" sz="900">
+                        <a:effectLst/>
+                        <a:latin typeface="Times New Roman" panose="02020603050405020304" pitchFamily="18" charset="0"/>
+                        <a:ea typeface="Times New Roman" panose="02020603050405020304" pitchFamily="18" charset="0"/>
+                        <a:cs typeface="Times New Roman" panose="02020603050405020304" pitchFamily="18" charset="0"/>
+                      </a:endParaRPr>
                     </a:p>
                   </a:txBody>
                   <a:tcPr marL="68580" marR="68580" marT="0" marB="0">
@@ -13455,14 +13658,20 @@
                         <a:buNone/>
                       </a:pPr>
                       <a:r>
-                        <a:rPr lang="es-ES_tradnl" sz="1000" dirty="0">
+                        <a:rPr lang="es-ES" sz="900">
                           <a:effectLst/>
                           <a:latin typeface="Times New Roman" panose="02020603050405020304" pitchFamily="18" charset="0"/>
                           <a:ea typeface="Times New Roman" panose="02020603050405020304" pitchFamily="18" charset="0"/>
                           <a:cs typeface="Times New Roman" panose="02020603050405020304" pitchFamily="18" charset="0"/>
                         </a:rPr>
-                        <a:t>18.38</a:t>
-                      </a:r>
+                        <a:t>14.51</a:t>
+                      </a:r>
+                      <a:endParaRPr lang="de-DE" sz="900">
+                        <a:effectLst/>
+                        <a:latin typeface="Times New Roman" panose="02020603050405020304" pitchFamily="18" charset="0"/>
+                        <a:ea typeface="Times New Roman" panose="02020603050405020304" pitchFamily="18" charset="0"/>
+                        <a:cs typeface="Times New Roman" panose="02020603050405020304" pitchFamily="18" charset="0"/>
+                      </a:endParaRPr>
                     </a:p>
                   </a:txBody>
                   <a:tcPr marL="68580" marR="68580" marT="0" marB="0">
@@ -13487,14 +13696,20 @@
                         <a:buNone/>
                       </a:pPr>
                       <a:r>
-                        <a:rPr lang="es-ES_tradnl" sz="1000" dirty="0">
+                        <a:rPr lang="es-ES" sz="900">
                           <a:effectLst/>
                           <a:latin typeface="Times New Roman" panose="02020603050405020304" pitchFamily="18" charset="0"/>
                           <a:ea typeface="Times New Roman" panose="02020603050405020304" pitchFamily="18" charset="0"/>
                           <a:cs typeface="Times New Roman" panose="02020603050405020304" pitchFamily="18" charset="0"/>
                         </a:rPr>
-                        <a:t>50.85</a:t>
-                      </a:r>
+                        <a:t>6.00</a:t>
+                      </a:r>
+                      <a:endParaRPr lang="de-DE" sz="900">
+                        <a:effectLst/>
+                        <a:latin typeface="Times New Roman" panose="02020603050405020304" pitchFamily="18" charset="0"/>
+                        <a:ea typeface="Times New Roman" panose="02020603050405020304" pitchFamily="18" charset="0"/>
+                        <a:cs typeface="Times New Roman" panose="02020603050405020304" pitchFamily="18" charset="0"/>
+                      </a:endParaRPr>
                     </a:p>
                   </a:txBody>
                   <a:tcPr marL="68580" marR="68580" marT="0" marB="0">
@@ -13552,7 +13767,7 @@
                         <a:buNone/>
                       </a:pPr>
                       <a:r>
-                        <a:rPr lang="es-ES_tradnl" sz="1000" dirty="0">
+                        <a:rPr lang="es-ES_tradnl" sz="900" dirty="0">
                           <a:effectLst/>
                           <a:latin typeface="Times New Roman" panose="02020603050405020304" pitchFamily="18" charset="0"/>
                           <a:ea typeface="Times New Roman" panose="02020603050405020304" pitchFamily="18" charset="0"/>
@@ -13575,7 +13790,7 @@
                         <a:buNone/>
                       </a:pPr>
                       <a:r>
-                        <a:rPr lang="es-ES_tradnl" sz="1000" dirty="0">
+                        <a:rPr lang="es-ES_tradnl" sz="900" dirty="0">
                           <a:effectLst/>
                           <a:latin typeface="Times New Roman" panose="02020603050405020304" pitchFamily="18" charset="0"/>
                           <a:ea typeface="Times New Roman" panose="02020603050405020304" pitchFamily="18" charset="0"/>
@@ -13598,7 +13813,7 @@
                         <a:buNone/>
                       </a:pPr>
                       <a:r>
-                        <a:rPr lang="es-ES_tradnl" sz="1000" dirty="0">
+                        <a:rPr lang="es-ES_tradnl" sz="900" dirty="0">
                           <a:effectLst/>
                           <a:latin typeface="Times New Roman" panose="02020603050405020304" pitchFamily="18" charset="0"/>
                           <a:ea typeface="Times New Roman" panose="02020603050405020304" pitchFamily="18" charset="0"/>
@@ -13621,7 +13836,7 @@
                         <a:buNone/>
                       </a:pPr>
                       <a:r>
-                        <a:rPr lang="es-ES_tradnl" sz="1000" dirty="0">
+                        <a:rPr lang="es-ES_tradnl" sz="900" dirty="0">
                           <a:effectLst/>
                           <a:latin typeface="Times New Roman" panose="02020603050405020304" pitchFamily="18" charset="0"/>
                           <a:ea typeface="Times New Roman" panose="02020603050405020304" pitchFamily="18" charset="0"/>
@@ -13644,7 +13859,7 @@
                         <a:buNone/>
                       </a:pPr>
                       <a:r>
-                        <a:rPr lang="es-ES_tradnl" sz="1000" dirty="0">
+                        <a:rPr lang="es-ES_tradnl" sz="900" dirty="0">
                           <a:effectLst/>
                           <a:latin typeface="Times New Roman" panose="02020603050405020304" pitchFamily="18" charset="0"/>
                           <a:ea typeface="Times New Roman" panose="02020603050405020304" pitchFamily="18" charset="0"/>
@@ -13667,7 +13882,7 @@
                         <a:buNone/>
                       </a:pPr>
                       <a:r>
-                        <a:rPr lang="es-ES_tradnl" sz="1000" dirty="0">
+                        <a:rPr lang="es-ES_tradnl" sz="900" dirty="0">
                           <a:effectLst/>
                           <a:latin typeface="Times New Roman" panose="02020603050405020304" pitchFamily="18" charset="0"/>
                           <a:ea typeface="Times New Roman" panose="02020603050405020304" pitchFamily="18" charset="0"/>
@@ -13690,7 +13905,7 @@
                         <a:buNone/>
                       </a:pPr>
                       <a:r>
-                        <a:rPr lang="es-ES_tradnl" sz="1000" dirty="0">
+                        <a:rPr lang="es-ES_tradnl" sz="900" dirty="0">
                           <a:effectLst/>
                           <a:latin typeface="Times New Roman" panose="02020603050405020304" pitchFamily="18" charset="0"/>
                           <a:ea typeface="Times New Roman" panose="02020603050405020304" pitchFamily="18" charset="0"/>
@@ -13713,7 +13928,7 @@
                         <a:buNone/>
                       </a:pPr>
                       <a:r>
-                        <a:rPr lang="es-ES_tradnl" sz="1000" dirty="0">
+                        <a:rPr lang="es-ES_tradnl" sz="900" dirty="0">
                           <a:effectLst/>
                           <a:latin typeface="Times New Roman" panose="02020603050405020304" pitchFamily="18" charset="0"/>
                           <a:ea typeface="Times New Roman" panose="02020603050405020304" pitchFamily="18" charset="0"/>
@@ -13736,7 +13951,7 @@
                         <a:buNone/>
                       </a:pPr>
                       <a:r>
-                        <a:rPr lang="es-ES_tradnl" sz="1000" dirty="0">
+                        <a:rPr lang="es-ES_tradnl" sz="900" dirty="0">
                           <a:effectLst/>
                           <a:latin typeface="Times New Roman" panose="02020603050405020304" pitchFamily="18" charset="0"/>
                           <a:ea typeface="Times New Roman" panose="02020603050405020304" pitchFamily="18" charset="0"/>
@@ -13759,7 +13974,7 @@
                         <a:buNone/>
                       </a:pPr>
                       <a:r>
-                        <a:rPr lang="es-ES_tradnl" sz="1000" dirty="0">
+                        <a:rPr lang="es-ES_tradnl" sz="900" dirty="0">
                           <a:effectLst/>
                           <a:latin typeface="Times New Roman" panose="02020603050405020304" pitchFamily="18" charset="0"/>
                           <a:ea typeface="Times New Roman" panose="02020603050405020304" pitchFamily="18" charset="0"/>
@@ -13782,106 +13997,136 @@
                         <a:buNone/>
                       </a:pPr>
                       <a:r>
-                        <a:rPr lang="es-ES_tradnl" sz="1000" dirty="0">
+                        <a:rPr lang="es-ES" sz="900">
                           <a:effectLst/>
                           <a:latin typeface="Times New Roman" panose="02020603050405020304" pitchFamily="18" charset="0"/>
                           <a:ea typeface="Times New Roman" panose="02020603050405020304" pitchFamily="18" charset="0"/>
                           <a:cs typeface="Times New Roman" panose="02020603050405020304" pitchFamily="18" charset="0"/>
                         </a:rPr>
-                        <a:t>9.92</a:t>
-                      </a:r>
-                    </a:p>
-                  </a:txBody>
-                  <a:tcPr marL="68580" marR="68580" marT="0" marB="0">
-                    <a:noFill/>
-                  </a:tcPr>
-                </a:tc>
-                <a:tc>
-                  <a:txBody>
-                    <a:bodyPr/>
-                    <a:lstStyle/>
-                    <a:p>
-                      <a:pPr algn="ctr">
-                        <a:buNone/>
-                      </a:pPr>
-                      <a:r>
-                        <a:rPr lang="es-ES_tradnl" sz="1000" dirty="0">
+                        <a:t>6.00</a:t>
+                      </a:r>
+                      <a:endParaRPr lang="de-DE" sz="900">
+                        <a:effectLst/>
+                        <a:latin typeface="Times New Roman" panose="02020603050405020304" pitchFamily="18" charset="0"/>
+                        <a:ea typeface="Times New Roman" panose="02020603050405020304" pitchFamily="18" charset="0"/>
+                        <a:cs typeface="Times New Roman" panose="02020603050405020304" pitchFamily="18" charset="0"/>
+                      </a:endParaRPr>
+                    </a:p>
+                  </a:txBody>
+                  <a:tcPr marL="68580" marR="68580" marT="0" marB="0">
+                    <a:noFill/>
+                  </a:tcPr>
+                </a:tc>
+                <a:tc>
+                  <a:txBody>
+                    <a:bodyPr/>
+                    <a:lstStyle/>
+                    <a:p>
+                      <a:pPr algn="ctr">
+                        <a:buNone/>
+                      </a:pPr>
+                      <a:r>
+                        <a:rPr lang="es-ES" sz="900">
                           <a:effectLst/>
                           <a:latin typeface="Times New Roman" panose="02020603050405020304" pitchFamily="18" charset="0"/>
                           <a:ea typeface="Times New Roman" panose="02020603050405020304" pitchFamily="18" charset="0"/>
                           <a:cs typeface="Times New Roman" panose="02020603050405020304" pitchFamily="18" charset="0"/>
                         </a:rPr>
-                        <a:t>3.74</a:t>
-                      </a:r>
-                    </a:p>
-                  </a:txBody>
-                  <a:tcPr marL="68580" marR="68580" marT="0" marB="0">
-                    <a:noFill/>
-                  </a:tcPr>
-                </a:tc>
-                <a:tc>
-                  <a:txBody>
-                    <a:bodyPr/>
-                    <a:lstStyle/>
-                    <a:p>
-                      <a:pPr algn="ctr">
-                        <a:buNone/>
-                      </a:pPr>
-                      <a:r>
-                        <a:rPr lang="es-ES_tradnl" sz="1000" dirty="0">
+                        <a:t>2.70</a:t>
+                      </a:r>
+                      <a:endParaRPr lang="de-DE" sz="900">
+                        <a:effectLst/>
+                        <a:latin typeface="Times New Roman" panose="02020603050405020304" pitchFamily="18" charset="0"/>
+                        <a:ea typeface="Times New Roman" panose="02020603050405020304" pitchFamily="18" charset="0"/>
+                        <a:cs typeface="Times New Roman" panose="02020603050405020304" pitchFamily="18" charset="0"/>
+                      </a:endParaRPr>
+                    </a:p>
+                  </a:txBody>
+                  <a:tcPr marL="68580" marR="68580" marT="0" marB="0">
+                    <a:noFill/>
+                  </a:tcPr>
+                </a:tc>
+                <a:tc>
+                  <a:txBody>
+                    <a:bodyPr/>
+                    <a:lstStyle/>
+                    <a:p>
+                      <a:pPr algn="ctr">
+                        <a:buNone/>
+                      </a:pPr>
+                      <a:r>
+                        <a:rPr lang="es-ES" sz="900">
                           <a:effectLst/>
                           <a:latin typeface="Times New Roman" panose="02020603050405020304" pitchFamily="18" charset="0"/>
                           <a:ea typeface="Times New Roman" panose="02020603050405020304" pitchFamily="18" charset="0"/>
                           <a:cs typeface="Times New Roman" panose="02020603050405020304" pitchFamily="18" charset="0"/>
                         </a:rPr>
-                        <a:t>78.53</a:t>
-                      </a:r>
-                    </a:p>
-                  </a:txBody>
-                  <a:tcPr marL="68580" marR="68580" marT="0" marB="0">
-                    <a:noFill/>
-                  </a:tcPr>
-                </a:tc>
-                <a:tc>
-                  <a:txBody>
-                    <a:bodyPr/>
-                    <a:lstStyle/>
-                    <a:p>
-                      <a:pPr algn="ctr">
-                        <a:buNone/>
-                      </a:pPr>
-                      <a:r>
-                        <a:rPr lang="es-ES_tradnl" sz="1000" dirty="0">
+                        <a:t>43.52</a:t>
+                      </a:r>
+                      <a:endParaRPr lang="de-DE" sz="900">
+                        <a:effectLst/>
+                        <a:latin typeface="Times New Roman" panose="02020603050405020304" pitchFamily="18" charset="0"/>
+                        <a:ea typeface="Times New Roman" panose="02020603050405020304" pitchFamily="18" charset="0"/>
+                        <a:cs typeface="Times New Roman" panose="02020603050405020304" pitchFamily="18" charset="0"/>
+                      </a:endParaRPr>
+                    </a:p>
+                  </a:txBody>
+                  <a:tcPr marL="68580" marR="68580" marT="0" marB="0">
+                    <a:noFill/>
+                  </a:tcPr>
+                </a:tc>
+                <a:tc>
+                  <a:txBody>
+                    <a:bodyPr/>
+                    <a:lstStyle/>
+                    <a:p>
+                      <a:pPr algn="ctr">
+                        <a:buNone/>
+                      </a:pPr>
+                      <a:r>
+                        <a:rPr lang="es-ES" sz="900">
                           <a:effectLst/>
                           <a:latin typeface="Times New Roman" panose="02020603050405020304" pitchFamily="18" charset="0"/>
                           <a:ea typeface="Times New Roman" panose="02020603050405020304" pitchFamily="18" charset="0"/>
                           <a:cs typeface="Times New Roman" panose="02020603050405020304" pitchFamily="18" charset="0"/>
                         </a:rPr>
-                        <a:t>19.16</a:t>
-                      </a:r>
-                    </a:p>
-                  </a:txBody>
-                  <a:tcPr marL="68580" marR="68580" marT="0" marB="0">
-                    <a:noFill/>
-                  </a:tcPr>
-                </a:tc>
-                <a:tc>
-                  <a:txBody>
-                    <a:bodyPr/>
-                    <a:lstStyle/>
-                    <a:p>
-                      <a:pPr algn="ctr">
-                        <a:buNone/>
-                      </a:pPr>
-                      <a:r>
-                        <a:rPr lang="es-ES_tradnl" sz="1000" dirty="0">
+                        <a:t>14.66</a:t>
+                      </a:r>
+                      <a:endParaRPr lang="de-DE" sz="900">
+                        <a:effectLst/>
+                        <a:latin typeface="Times New Roman" panose="02020603050405020304" pitchFamily="18" charset="0"/>
+                        <a:ea typeface="Times New Roman" panose="02020603050405020304" pitchFamily="18" charset="0"/>
+                        <a:cs typeface="Times New Roman" panose="02020603050405020304" pitchFamily="18" charset="0"/>
+                      </a:endParaRPr>
+                    </a:p>
+                  </a:txBody>
+                  <a:tcPr marL="68580" marR="68580" marT="0" marB="0">
+                    <a:noFill/>
+                  </a:tcPr>
+                </a:tc>
+                <a:tc>
+                  <a:txBody>
+                    <a:bodyPr/>
+                    <a:lstStyle/>
+                    <a:p>
+                      <a:pPr algn="ctr">
+                        <a:buNone/>
+                      </a:pPr>
+                      <a:r>
+                        <a:rPr lang="es-ES" sz="900">
                           <a:effectLst/>
                           <a:latin typeface="Times New Roman" panose="02020603050405020304" pitchFamily="18" charset="0"/>
                           <a:ea typeface="Times New Roman" panose="02020603050405020304" pitchFamily="18" charset="0"/>
                           <a:cs typeface="Times New Roman" panose="02020603050405020304" pitchFamily="18" charset="0"/>
                         </a:rPr>
-                        <a:t>48.30</a:t>
-                      </a:r>
+                        <a:t>6.00</a:t>
+                      </a:r>
+                      <a:endParaRPr lang="de-DE" sz="900">
+                        <a:effectLst/>
+                        <a:latin typeface="Times New Roman" panose="02020603050405020304" pitchFamily="18" charset="0"/>
+                        <a:ea typeface="Times New Roman" panose="02020603050405020304" pitchFamily="18" charset="0"/>
+                        <a:cs typeface="Times New Roman" panose="02020603050405020304" pitchFamily="18" charset="0"/>
+                      </a:endParaRPr>
                     </a:p>
                   </a:txBody>
                   <a:tcPr marL="68580" marR="68580" marT="0" marB="0">
@@ -13930,7 +14175,7 @@
                         <a:buNone/>
                       </a:pPr>
                       <a:r>
-                        <a:rPr lang="es-ES_tradnl" sz="1000" dirty="0">
+                        <a:rPr lang="es-ES_tradnl" sz="900" dirty="0">
                           <a:effectLst/>
                           <a:latin typeface="Times New Roman" panose="02020603050405020304" pitchFamily="18" charset="0"/>
                           <a:ea typeface="Times New Roman" panose="02020603050405020304" pitchFamily="18" charset="0"/>
@@ -13953,7 +14198,7 @@
                         <a:buNone/>
                       </a:pPr>
                       <a:r>
-                        <a:rPr lang="es-ES_tradnl" sz="1000" dirty="0">
+                        <a:rPr lang="es-ES_tradnl" sz="900" dirty="0">
                           <a:effectLst/>
                           <a:latin typeface="Times New Roman" panose="02020603050405020304" pitchFamily="18" charset="0"/>
                           <a:ea typeface="Times New Roman" panose="02020603050405020304" pitchFamily="18" charset="0"/>
@@ -13976,7 +14221,7 @@
                         <a:buNone/>
                       </a:pPr>
                       <a:r>
-                        <a:rPr lang="es-ES_tradnl" sz="1000" dirty="0">
+                        <a:rPr lang="es-ES_tradnl" sz="900" dirty="0">
                           <a:effectLst/>
                           <a:latin typeface="Times New Roman" panose="02020603050405020304" pitchFamily="18" charset="0"/>
                           <a:ea typeface="Times New Roman" panose="02020603050405020304" pitchFamily="18" charset="0"/>
@@ -13999,7 +14244,7 @@
                         <a:buNone/>
                       </a:pPr>
                       <a:r>
-                        <a:rPr lang="es-ES_tradnl" sz="1000" dirty="0">
+                        <a:rPr lang="es-ES_tradnl" sz="900" dirty="0">
                           <a:effectLst/>
                           <a:latin typeface="Times New Roman" panose="02020603050405020304" pitchFamily="18" charset="0"/>
                           <a:ea typeface="Times New Roman" panose="02020603050405020304" pitchFamily="18" charset="0"/>
@@ -14022,7 +14267,7 @@
                         <a:buNone/>
                       </a:pPr>
                       <a:r>
-                        <a:rPr lang="es-ES_tradnl" sz="1000" dirty="0">
+                        <a:rPr lang="es-ES_tradnl" sz="900" dirty="0">
                           <a:effectLst/>
                           <a:latin typeface="Times New Roman" panose="02020603050405020304" pitchFamily="18" charset="0"/>
                           <a:ea typeface="Times New Roman" panose="02020603050405020304" pitchFamily="18" charset="0"/>
@@ -14045,7 +14290,7 @@
                         <a:buNone/>
                       </a:pPr>
                       <a:r>
-                        <a:rPr lang="es-ES_tradnl" sz="1000" dirty="0">
+                        <a:rPr lang="es-ES_tradnl" sz="900" dirty="0">
                           <a:effectLst/>
                           <a:latin typeface="Times New Roman" panose="02020603050405020304" pitchFamily="18" charset="0"/>
                           <a:ea typeface="Times New Roman" panose="02020603050405020304" pitchFamily="18" charset="0"/>
@@ -14068,7 +14313,7 @@
                         <a:buNone/>
                       </a:pPr>
                       <a:r>
-                        <a:rPr lang="es-ES_tradnl" sz="1000" dirty="0">
+                        <a:rPr lang="es-ES_tradnl" sz="900" dirty="0">
                           <a:effectLst/>
                           <a:latin typeface="Times New Roman" panose="02020603050405020304" pitchFamily="18" charset="0"/>
                           <a:ea typeface="Times New Roman" panose="02020603050405020304" pitchFamily="18" charset="0"/>
@@ -14091,7 +14336,7 @@
                         <a:buNone/>
                       </a:pPr>
                       <a:r>
-                        <a:rPr lang="es-ES_tradnl" sz="1000" dirty="0">
+                        <a:rPr lang="es-ES_tradnl" sz="900" dirty="0">
                           <a:effectLst/>
                           <a:latin typeface="Times New Roman" panose="02020603050405020304" pitchFamily="18" charset="0"/>
                           <a:ea typeface="Times New Roman" panose="02020603050405020304" pitchFamily="18" charset="0"/>
@@ -14114,7 +14359,7 @@
                         <a:buNone/>
                       </a:pPr>
                       <a:r>
-                        <a:rPr lang="es-ES_tradnl" sz="1000" dirty="0">
+                        <a:rPr lang="es-ES_tradnl" sz="900" dirty="0">
                           <a:effectLst/>
                           <a:latin typeface="Times New Roman" panose="02020603050405020304" pitchFamily="18" charset="0"/>
                           <a:ea typeface="Times New Roman" panose="02020603050405020304" pitchFamily="18" charset="0"/>
@@ -14137,7 +14382,7 @@
                         <a:buNone/>
                       </a:pPr>
                       <a:r>
-                        <a:rPr lang="es-ES_tradnl" sz="1000" dirty="0">
+                        <a:rPr lang="es-ES_tradnl" sz="900" dirty="0">
                           <a:effectLst/>
                           <a:latin typeface="Times New Roman" panose="02020603050405020304" pitchFamily="18" charset="0"/>
                           <a:ea typeface="Times New Roman" panose="02020603050405020304" pitchFamily="18" charset="0"/>
@@ -14160,106 +14405,136 @@
                         <a:buNone/>
                       </a:pPr>
                       <a:r>
-                        <a:rPr lang="es-ES_tradnl" sz="1000" dirty="0">
+                        <a:rPr lang="es-ES" sz="900">
                           <a:effectLst/>
                           <a:latin typeface="Times New Roman" panose="02020603050405020304" pitchFamily="18" charset="0"/>
                           <a:ea typeface="Times New Roman" panose="02020603050405020304" pitchFamily="18" charset="0"/>
                           <a:cs typeface="Times New Roman" panose="02020603050405020304" pitchFamily="18" charset="0"/>
                         </a:rPr>
-                        <a:t>9.92</a:t>
-                      </a:r>
-                    </a:p>
-                  </a:txBody>
-                  <a:tcPr marL="68580" marR="68580" marT="0" marB="0">
-                    <a:noFill/>
-                  </a:tcPr>
-                </a:tc>
-                <a:tc>
-                  <a:txBody>
-                    <a:bodyPr/>
-                    <a:lstStyle/>
-                    <a:p>
-                      <a:pPr algn="ctr">
-                        <a:buNone/>
-                      </a:pPr>
-                      <a:r>
-                        <a:rPr lang="es-ES_tradnl" sz="1000" dirty="0">
+                        <a:t>6.00</a:t>
+                      </a:r>
+                      <a:endParaRPr lang="de-DE" sz="900">
+                        <a:effectLst/>
+                        <a:latin typeface="Times New Roman" panose="02020603050405020304" pitchFamily="18" charset="0"/>
+                        <a:ea typeface="Times New Roman" panose="02020603050405020304" pitchFamily="18" charset="0"/>
+                        <a:cs typeface="Times New Roman" panose="02020603050405020304" pitchFamily="18" charset="0"/>
+                      </a:endParaRPr>
+                    </a:p>
+                  </a:txBody>
+                  <a:tcPr marL="68580" marR="68580" marT="0" marB="0">
+                    <a:noFill/>
+                  </a:tcPr>
+                </a:tc>
+                <a:tc>
+                  <a:txBody>
+                    <a:bodyPr/>
+                    <a:lstStyle/>
+                    <a:p>
+                      <a:pPr algn="ctr">
+                        <a:buNone/>
+                      </a:pPr>
+                      <a:r>
+                        <a:rPr lang="es-ES" sz="900">
                           <a:effectLst/>
                           <a:latin typeface="Times New Roman" panose="02020603050405020304" pitchFamily="18" charset="0"/>
                           <a:ea typeface="Times New Roman" panose="02020603050405020304" pitchFamily="18" charset="0"/>
                           <a:cs typeface="Times New Roman" panose="02020603050405020304" pitchFamily="18" charset="0"/>
                         </a:rPr>
-                        <a:t>4.01</a:t>
-                      </a:r>
-                    </a:p>
-                  </a:txBody>
-                  <a:tcPr marL="68580" marR="68580" marT="0" marB="0">
-                    <a:noFill/>
-                  </a:tcPr>
-                </a:tc>
-                <a:tc>
-                  <a:txBody>
-                    <a:bodyPr/>
-                    <a:lstStyle/>
-                    <a:p>
-                      <a:pPr algn="ctr">
-                        <a:buNone/>
-                      </a:pPr>
-                      <a:r>
-                        <a:rPr lang="es-ES_tradnl" sz="1000" dirty="0">
+                        <a:t>2.84</a:t>
+                      </a:r>
+                      <a:endParaRPr lang="de-DE" sz="900">
+                        <a:effectLst/>
+                        <a:latin typeface="Times New Roman" panose="02020603050405020304" pitchFamily="18" charset="0"/>
+                        <a:ea typeface="Times New Roman" panose="02020603050405020304" pitchFamily="18" charset="0"/>
+                        <a:cs typeface="Times New Roman" panose="02020603050405020304" pitchFamily="18" charset="0"/>
+                      </a:endParaRPr>
+                    </a:p>
+                  </a:txBody>
+                  <a:tcPr marL="68580" marR="68580" marT="0" marB="0">
+                    <a:noFill/>
+                  </a:tcPr>
+                </a:tc>
+                <a:tc>
+                  <a:txBody>
+                    <a:bodyPr/>
+                    <a:lstStyle/>
+                    <a:p>
+                      <a:pPr algn="ctr">
+                        <a:buNone/>
+                      </a:pPr>
+                      <a:r>
+                        <a:rPr lang="es-ES" sz="900">
                           <a:effectLst/>
                           <a:latin typeface="Times New Roman" panose="02020603050405020304" pitchFamily="18" charset="0"/>
                           <a:ea typeface="Times New Roman" panose="02020603050405020304" pitchFamily="18" charset="0"/>
                           <a:cs typeface="Times New Roman" panose="02020603050405020304" pitchFamily="18" charset="0"/>
                         </a:rPr>
-                        <a:t>90.26</a:t>
-                      </a:r>
-                    </a:p>
-                  </a:txBody>
-                  <a:tcPr marL="68580" marR="68580" marT="0" marB="0">
-                    <a:noFill/>
-                  </a:tcPr>
-                </a:tc>
-                <a:tc>
-                  <a:txBody>
-                    <a:bodyPr/>
-                    <a:lstStyle/>
-                    <a:p>
-                      <a:pPr algn="ctr">
-                        <a:buNone/>
-                      </a:pPr>
-                      <a:r>
-                        <a:rPr lang="es-ES_tradnl" sz="1000" dirty="0">
+                        <a:t>47.82</a:t>
+                      </a:r>
+                      <a:endParaRPr lang="de-DE" sz="900">
+                        <a:effectLst/>
+                        <a:latin typeface="Times New Roman" panose="02020603050405020304" pitchFamily="18" charset="0"/>
+                        <a:ea typeface="Times New Roman" panose="02020603050405020304" pitchFamily="18" charset="0"/>
+                        <a:cs typeface="Times New Roman" panose="02020603050405020304" pitchFamily="18" charset="0"/>
+                      </a:endParaRPr>
+                    </a:p>
+                  </a:txBody>
+                  <a:tcPr marL="68580" marR="68580" marT="0" marB="0">
+                    <a:noFill/>
+                  </a:tcPr>
+                </a:tc>
+                <a:tc>
+                  <a:txBody>
+                    <a:bodyPr/>
+                    <a:lstStyle/>
+                    <a:p>
+                      <a:pPr algn="ctr">
+                        <a:buNone/>
+                      </a:pPr>
+                      <a:r>
+                        <a:rPr lang="es-ES" sz="900">
                           <a:effectLst/>
                           <a:latin typeface="Times New Roman" panose="02020603050405020304" pitchFamily="18" charset="0"/>
                           <a:ea typeface="Times New Roman" panose="02020603050405020304" pitchFamily="18" charset="0"/>
                           <a:cs typeface="Times New Roman" panose="02020603050405020304" pitchFamily="18" charset="0"/>
                         </a:rPr>
-                        <a:t>20.26</a:t>
-                      </a:r>
-                    </a:p>
-                  </a:txBody>
-                  <a:tcPr marL="68580" marR="68580" marT="0" marB="0">
-                    <a:noFill/>
-                  </a:tcPr>
-                </a:tc>
-                <a:tc>
-                  <a:txBody>
-                    <a:bodyPr/>
-                    <a:lstStyle/>
-                    <a:p>
-                      <a:pPr algn="ctr">
-                        <a:buNone/>
-                      </a:pPr>
-                      <a:r>
-                        <a:rPr lang="es-ES_tradnl" sz="1000" dirty="0">
+                        <a:t>15.22</a:t>
+                      </a:r>
+                      <a:endParaRPr lang="de-DE" sz="900">
+                        <a:effectLst/>
+                        <a:latin typeface="Times New Roman" panose="02020603050405020304" pitchFamily="18" charset="0"/>
+                        <a:ea typeface="Times New Roman" panose="02020603050405020304" pitchFamily="18" charset="0"/>
+                        <a:cs typeface="Times New Roman" panose="02020603050405020304" pitchFamily="18" charset="0"/>
+                      </a:endParaRPr>
+                    </a:p>
+                  </a:txBody>
+                  <a:tcPr marL="68580" marR="68580" marT="0" marB="0">
+                    <a:noFill/>
+                  </a:tcPr>
+                </a:tc>
+                <a:tc>
+                  <a:txBody>
+                    <a:bodyPr/>
+                    <a:lstStyle/>
+                    <a:p>
+                      <a:pPr algn="ctr">
+                        <a:buNone/>
+                      </a:pPr>
+                      <a:r>
+                        <a:rPr lang="es-ES" sz="900" dirty="0">
                           <a:effectLst/>
                           <a:latin typeface="Times New Roman" panose="02020603050405020304" pitchFamily="18" charset="0"/>
                           <a:ea typeface="Times New Roman" panose="02020603050405020304" pitchFamily="18" charset="0"/>
                           <a:cs typeface="Times New Roman" panose="02020603050405020304" pitchFamily="18" charset="0"/>
                         </a:rPr>
-                        <a:t>50.49</a:t>
-                      </a:r>
+                        <a:t>6.00</a:t>
+                      </a:r>
+                      <a:endParaRPr lang="de-DE" sz="900" dirty="0">
+                        <a:effectLst/>
+                        <a:latin typeface="Times New Roman" panose="02020603050405020304" pitchFamily="18" charset="0"/>
+                        <a:ea typeface="Times New Roman" panose="02020603050405020304" pitchFamily="18" charset="0"/>
+                        <a:cs typeface="Times New Roman" panose="02020603050405020304" pitchFamily="18" charset="0"/>
+                      </a:endParaRPr>
                     </a:p>
                   </a:txBody>
                   <a:tcPr marL="68580" marR="68580" marT="0" marB="0">
@@ -15528,98 +15803,6 @@
           </a:p>
         </p:txBody>
       </p:sp>
-      <p:pic>
-        <p:nvPicPr>
-          <p:cNvPr id="2" name="Onlinebild-Platzhalter 7">
-            <a:extLst>
-              <a:ext uri="{FF2B5EF4-FFF2-40B4-BE49-F238E27FC236}">
-                <a16:creationId xmlns:a16="http://schemas.microsoft.com/office/drawing/2014/main" id="{577208C3-2761-F872-B705-A84803427AF7}"/>
-              </a:ext>
-            </a:extLst>
-          </p:cNvPr>
-          <p:cNvPicPr>
-            <a:picLocks noGrp="1" noChangeAspect="1"/>
-          </p:cNvPicPr>
-          <p:nvPr>
-            <p:ph type="clipArt" sz="quarter" idx="15"/>
-          </p:nvPr>
-        </p:nvPicPr>
-        <p:blipFill>
-          <a:blip r:embed="rId2"/>
-          <a:stretch>
-            <a:fillRect/>
-          </a:stretch>
-        </p:blipFill>
-        <p:spPr>
-          <a:xfrm>
-            <a:off x="376884" y="2299118"/>
-            <a:ext cx="3480504" cy="2662828"/>
-          </a:xfrm>
-          <a:prstGeom prst="rect">
-            <a:avLst/>
-          </a:prstGeom>
-        </p:spPr>
-      </p:pic>
-      <p:pic>
-        <p:nvPicPr>
-          <p:cNvPr id="4" name="Onlinebild-Platzhalter 4">
-            <a:extLst>
-              <a:ext uri="{FF2B5EF4-FFF2-40B4-BE49-F238E27FC236}">
-                <a16:creationId xmlns:a16="http://schemas.microsoft.com/office/drawing/2014/main" id="{A0AE8812-1314-5C82-F10A-A33F518A111E}"/>
-              </a:ext>
-            </a:extLst>
-          </p:cNvPr>
-          <p:cNvPicPr>
-            <a:picLocks noChangeAspect="1"/>
-          </p:cNvPicPr>
-          <p:nvPr/>
-        </p:nvPicPr>
-        <p:blipFill>
-          <a:blip r:embed="rId3"/>
-          <a:stretch>
-            <a:fillRect/>
-          </a:stretch>
-        </p:blipFill>
-        <p:spPr>
-          <a:xfrm>
-            <a:off x="4040169" y="2299118"/>
-            <a:ext cx="3578647" cy="2737914"/>
-          </a:xfrm>
-          <a:prstGeom prst="rect">
-            <a:avLst/>
-          </a:prstGeom>
-        </p:spPr>
-      </p:pic>
-      <p:pic>
-        <p:nvPicPr>
-          <p:cNvPr id="5" name="Onlinebild-Platzhalter 5">
-            <a:extLst>
-              <a:ext uri="{FF2B5EF4-FFF2-40B4-BE49-F238E27FC236}">
-                <a16:creationId xmlns:a16="http://schemas.microsoft.com/office/drawing/2014/main" id="{E79A3E68-C22E-D1E4-CA5B-D0CAF01AE408}"/>
-              </a:ext>
-            </a:extLst>
-          </p:cNvPr>
-          <p:cNvPicPr>
-            <a:picLocks noChangeAspect="1"/>
-          </p:cNvPicPr>
-          <p:nvPr/>
-        </p:nvPicPr>
-        <p:blipFill>
-          <a:blip r:embed="rId4"/>
-          <a:stretch>
-            <a:fillRect/>
-          </a:stretch>
-        </p:blipFill>
-        <p:spPr>
-          <a:xfrm>
-            <a:off x="7785519" y="2299118"/>
-            <a:ext cx="3533154" cy="2703109"/>
-          </a:xfrm>
-          <a:prstGeom prst="rect">
-            <a:avLst/>
-          </a:prstGeom>
-        </p:spPr>
-      </p:pic>
       <p:sp>
         <p:nvSpPr>
           <p:cNvPr id="6" name="Fußzeilenplatzhalter 2">
@@ -15749,6 +15932,98 @@
           </a:p>
         </p:txBody>
       </p:sp>
+      <p:pic>
+        <p:nvPicPr>
+          <p:cNvPr id="9" name="Onlinebild-Platzhalter 8">
+            <a:extLst>
+              <a:ext uri="{FF2B5EF4-FFF2-40B4-BE49-F238E27FC236}">
+                <a16:creationId xmlns:a16="http://schemas.microsoft.com/office/drawing/2014/main" id="{56D02060-D51B-D5B2-2895-54CE6AFD4382}"/>
+              </a:ext>
+            </a:extLst>
+          </p:cNvPr>
+          <p:cNvPicPr>
+            <a:picLocks noChangeAspect="1"/>
+          </p:cNvPicPr>
+          <p:nvPr/>
+        </p:nvPicPr>
+        <p:blipFill>
+          <a:blip r:embed="rId2"/>
+          <a:stretch>
+            <a:fillRect/>
+          </a:stretch>
+        </p:blipFill>
+        <p:spPr>
+          <a:xfrm>
+            <a:off x="458949" y="2303819"/>
+            <a:ext cx="3496582" cy="2733213"/>
+          </a:xfrm>
+          <a:prstGeom prst="rect">
+            <a:avLst/>
+          </a:prstGeom>
+        </p:spPr>
+      </p:pic>
+      <p:pic>
+        <p:nvPicPr>
+          <p:cNvPr id="10" name="Onlinebild-Platzhalter 6">
+            <a:extLst>
+              <a:ext uri="{FF2B5EF4-FFF2-40B4-BE49-F238E27FC236}">
+                <a16:creationId xmlns:a16="http://schemas.microsoft.com/office/drawing/2014/main" id="{000B8B12-3F5C-6309-B924-AC32EC4AE974}"/>
+              </a:ext>
+            </a:extLst>
+          </p:cNvPr>
+          <p:cNvPicPr>
+            <a:picLocks noGrp="1" noChangeAspect="1"/>
+          </p:cNvPicPr>
+          <p:nvPr>
+            <p:ph type="clipArt" sz="quarter" idx="15"/>
+          </p:nvPr>
+        </p:nvPicPr>
+        <p:blipFill>
+          <a:blip r:embed="rId3"/>
+          <a:stretch>
+            <a:fillRect/>
+          </a:stretch>
+        </p:blipFill>
+        <p:spPr>
+          <a:xfrm>
+            <a:off x="4160916" y="2299118"/>
+            <a:ext cx="3533154" cy="2761801"/>
+          </a:xfrm>
+          <a:prstGeom prst="rect">
+            <a:avLst/>
+          </a:prstGeom>
+        </p:spPr>
+      </p:pic>
+      <p:pic>
+        <p:nvPicPr>
+          <p:cNvPr id="11" name="Grafik 10">
+            <a:extLst>
+              <a:ext uri="{FF2B5EF4-FFF2-40B4-BE49-F238E27FC236}">
+                <a16:creationId xmlns:a16="http://schemas.microsoft.com/office/drawing/2014/main" id="{1E86FC75-A28A-7C02-D285-5038C8EA9F01}"/>
+              </a:ext>
+            </a:extLst>
+          </p:cNvPr>
+          <p:cNvPicPr>
+            <a:picLocks noChangeAspect="1"/>
+          </p:cNvPicPr>
+          <p:nvPr/>
+        </p:nvPicPr>
+        <p:blipFill>
+          <a:blip r:embed="rId4"/>
+          <a:stretch>
+            <a:fillRect/>
+          </a:stretch>
+        </p:blipFill>
+        <p:spPr>
+          <a:xfrm>
+            <a:off x="7785154" y="2322488"/>
+            <a:ext cx="3295743" cy="2679739"/>
+          </a:xfrm>
+          <a:prstGeom prst="rect">
+            <a:avLst/>
+          </a:prstGeom>
+        </p:spPr>
+      </p:pic>
     </p:spTree>
     <p:extLst>
       <p:ext uri="{BB962C8B-B14F-4D97-AF65-F5344CB8AC3E}">

--- a/Fase2/03_results/Evaluación AgenteRL_F2– Plataforma Inclinada.pptx
+++ b/Fase2/03_results/Evaluación AgenteRL_F2– Plataforma Inclinada.pptx
@@ -267,7 +267,7 @@
           <a:p>
             <a:fld id="{EA95FD8C-7F73-E84F-BACD-84EACECBE6A5}" type="datetimeFigureOut">
               <a:rPr lang="es-ES_tradnl" smtClean="0"/>
-              <a:t>6/4/26</a:t>
+              <a:t>11/4/26</a:t>
             </a:fld>
             <a:endParaRPr lang="es-ES_tradnl"/>
           </a:p>
@@ -467,7 +467,7 @@
           <a:p>
             <a:fld id="{EA95FD8C-7F73-E84F-BACD-84EACECBE6A5}" type="datetimeFigureOut">
               <a:rPr lang="es-ES_tradnl" smtClean="0"/>
-              <a:t>6/4/26</a:t>
+              <a:t>11/4/26</a:t>
             </a:fld>
             <a:endParaRPr lang="es-ES_tradnl"/>
           </a:p>
@@ -677,7 +677,7 @@
           <a:p>
             <a:fld id="{EA95FD8C-7F73-E84F-BACD-84EACECBE6A5}" type="datetimeFigureOut">
               <a:rPr lang="es-ES_tradnl" smtClean="0"/>
-              <a:t>6/4/26</a:t>
+              <a:t>11/4/26</a:t>
             </a:fld>
             <a:endParaRPr lang="es-ES_tradnl"/>
           </a:p>
@@ -1731,7 +1731,7 @@
           <a:p>
             <a:fld id="{EA95FD8C-7F73-E84F-BACD-84EACECBE6A5}" type="datetimeFigureOut">
               <a:rPr lang="es-ES_tradnl" smtClean="0"/>
-              <a:t>6/4/26</a:t>
+              <a:t>11/4/26</a:t>
             </a:fld>
             <a:endParaRPr lang="es-ES_tradnl"/>
           </a:p>
@@ -2007,7 +2007,7 @@
           <a:p>
             <a:fld id="{EA95FD8C-7F73-E84F-BACD-84EACECBE6A5}" type="datetimeFigureOut">
               <a:rPr lang="es-ES_tradnl" smtClean="0"/>
-              <a:t>6/4/26</a:t>
+              <a:t>11/4/26</a:t>
             </a:fld>
             <a:endParaRPr lang="es-ES_tradnl"/>
           </a:p>
@@ -2275,7 +2275,7 @@
           <a:p>
             <a:fld id="{EA95FD8C-7F73-E84F-BACD-84EACECBE6A5}" type="datetimeFigureOut">
               <a:rPr lang="es-ES_tradnl" smtClean="0"/>
-              <a:t>6/4/26</a:t>
+              <a:t>11/4/26</a:t>
             </a:fld>
             <a:endParaRPr lang="es-ES_tradnl"/>
           </a:p>
@@ -2690,7 +2690,7 @@
           <a:p>
             <a:fld id="{EA95FD8C-7F73-E84F-BACD-84EACECBE6A5}" type="datetimeFigureOut">
               <a:rPr lang="es-ES_tradnl" smtClean="0"/>
-              <a:t>6/4/26</a:t>
+              <a:t>11/4/26</a:t>
             </a:fld>
             <a:endParaRPr lang="es-ES_tradnl"/>
           </a:p>
@@ -2832,7 +2832,7 @@
           <a:p>
             <a:fld id="{EA95FD8C-7F73-E84F-BACD-84EACECBE6A5}" type="datetimeFigureOut">
               <a:rPr lang="es-ES_tradnl" smtClean="0"/>
-              <a:t>6/4/26</a:t>
+              <a:t>11/4/26</a:t>
             </a:fld>
             <a:endParaRPr lang="es-ES_tradnl"/>
           </a:p>
@@ -2945,7 +2945,7 @@
           <a:p>
             <a:fld id="{EA95FD8C-7F73-E84F-BACD-84EACECBE6A5}" type="datetimeFigureOut">
               <a:rPr lang="es-ES_tradnl" smtClean="0"/>
-              <a:t>6/4/26</a:t>
+              <a:t>11/4/26</a:t>
             </a:fld>
             <a:endParaRPr lang="es-ES_tradnl"/>
           </a:p>
@@ -3258,7 +3258,7 @@
           <a:p>
             <a:fld id="{EA95FD8C-7F73-E84F-BACD-84EACECBE6A5}" type="datetimeFigureOut">
               <a:rPr lang="es-ES_tradnl" smtClean="0"/>
-              <a:t>6/4/26</a:t>
+              <a:t>11/4/26</a:t>
             </a:fld>
             <a:endParaRPr lang="es-ES_tradnl"/>
           </a:p>
@@ -3547,7 +3547,7 @@
           <a:p>
             <a:fld id="{EA95FD8C-7F73-E84F-BACD-84EACECBE6A5}" type="datetimeFigureOut">
               <a:rPr lang="es-ES_tradnl" smtClean="0"/>
-              <a:t>6/4/26</a:t>
+              <a:t>11/4/26</a:t>
             </a:fld>
             <a:endParaRPr lang="es-ES_tradnl"/>
           </a:p>
@@ -3790,7 +3790,7 @@
           <a:p>
             <a:fld id="{EA95FD8C-7F73-E84F-BACD-84EACECBE6A5}" type="datetimeFigureOut">
               <a:rPr lang="es-ES_tradnl" smtClean="0"/>
-              <a:t>6/4/26</a:t>
+              <a:t>11/4/26</a:t>
             </a:fld>
             <a:endParaRPr lang="es-ES_tradnl"/>
           </a:p>
@@ -4234,23 +4234,268 @@
         <p:spPr>
           <a:xfrm>
             <a:off x="6390198" y="5092979"/>
-            <a:ext cx="5064755" cy="1217510"/>
+            <a:ext cx="5417489" cy="1217510"/>
           </a:xfrm>
         </p:spPr>
         <p:txBody>
           <a:bodyPr>
-            <a:normAutofit/>
+            <a:normAutofit fontScale="92500"/>
           </a:bodyPr>
           <a:lstStyle/>
           <a:p>
-            <a:pPr algn="l">
-              <a:lnSpc>
-                <a:spcPct val="120000"/>
-              </a:lnSpc>
-            </a:pPr>
+            <a:pPr algn="l"/>
             <a:r>
-              <a:rPr lang="es-ES_tradnl" sz="1400" dirty="0"/>
-              <a:t>La posición inicial introduce distorsiones no uniformes en el RMSE, incrementando el error medio de 87.87° a más de 100° y evidenciando una fuerte dependencia del desempeño respecto al estado inicial.</a:t>
+              <a:rPr lang="de-DE" sz="1400" dirty="0"/>
+              <a:t>La </a:t>
+            </a:r>
+            <a:r>
+              <a:rPr lang="de-DE" sz="1400" dirty="0" err="1"/>
+              <a:t>posición</a:t>
+            </a:r>
+            <a:r>
+              <a:rPr lang="de-DE" sz="1400" dirty="0"/>
+              <a:t> </a:t>
+            </a:r>
+            <a:r>
+              <a:rPr lang="de-DE" sz="1400" dirty="0" err="1"/>
+              <a:t>inicial</a:t>
+            </a:r>
+            <a:r>
+              <a:rPr lang="de-DE" sz="1400" dirty="0"/>
+              <a:t> </a:t>
+            </a:r>
+            <a:r>
+              <a:rPr lang="de-DE" sz="1400" dirty="0" err="1"/>
+              <a:t>introduce</a:t>
+            </a:r>
+            <a:r>
+              <a:rPr lang="de-DE" sz="1400" dirty="0"/>
+              <a:t> </a:t>
+            </a:r>
+            <a:r>
+              <a:rPr lang="de-DE" sz="1400" dirty="0" err="1"/>
+              <a:t>distorsiones</a:t>
+            </a:r>
+            <a:r>
+              <a:rPr lang="de-DE" sz="1400" dirty="0"/>
+              <a:t> </a:t>
+            </a:r>
+            <a:r>
+              <a:rPr lang="de-DE" sz="1400" dirty="0" err="1"/>
+              <a:t>no</a:t>
+            </a:r>
+            <a:r>
+              <a:rPr lang="de-DE" sz="1400" dirty="0"/>
+              <a:t> uniformes en </a:t>
+            </a:r>
+            <a:r>
+              <a:rPr lang="de-DE" sz="1400" dirty="0" err="1"/>
+              <a:t>el</a:t>
+            </a:r>
+            <a:r>
+              <a:rPr lang="de-DE" sz="1400" dirty="0"/>
+              <a:t> RMSE, </a:t>
+            </a:r>
+          </a:p>
+          <a:p>
+            <a:pPr algn="l"/>
+            <a:r>
+              <a:rPr lang="de-DE" sz="1400" dirty="0" err="1"/>
+              <a:t>incrementando</a:t>
+            </a:r>
+            <a:r>
+              <a:rPr lang="de-DE" sz="1400" dirty="0"/>
+              <a:t> </a:t>
+            </a:r>
+            <a:r>
+              <a:rPr lang="de-DE" sz="1400" dirty="0" err="1"/>
+              <a:t>el</a:t>
+            </a:r>
+            <a:r>
+              <a:rPr lang="de-DE" sz="1400" dirty="0"/>
+              <a:t> </a:t>
+            </a:r>
+            <a:r>
+              <a:rPr lang="de-DE" sz="1400" dirty="0" err="1"/>
+              <a:t>error</a:t>
+            </a:r>
+            <a:r>
+              <a:rPr lang="de-DE" sz="1400" dirty="0"/>
+              <a:t> </a:t>
+            </a:r>
+            <a:r>
+              <a:rPr lang="de-DE" sz="1400" dirty="0" err="1"/>
+              <a:t>desde</a:t>
+            </a:r>
+            <a:r>
+              <a:rPr lang="de-DE" sz="1400" dirty="0"/>
+              <a:t> ≈ 51.80° en la </a:t>
+            </a:r>
+            <a:r>
+              <a:rPr lang="de-DE" sz="1400" dirty="0" err="1"/>
+              <a:t>condición</a:t>
+            </a:r>
+            <a:r>
+              <a:rPr lang="de-DE" sz="1400" dirty="0"/>
+              <a:t> nominal (o1ini = 0°) </a:t>
+            </a:r>
+          </a:p>
+          <a:p>
+            <a:pPr algn="l"/>
+            <a:r>
+              <a:rPr lang="de-DE" sz="1400" dirty="0" err="1"/>
+              <a:t>hasta</a:t>
+            </a:r>
+            <a:r>
+              <a:rPr lang="de-DE" sz="1400" dirty="0"/>
+              <a:t> </a:t>
+            </a:r>
+            <a:r>
+              <a:rPr lang="de-DE" sz="1400" dirty="0" err="1"/>
+              <a:t>valores</a:t>
+            </a:r>
+            <a:r>
+              <a:rPr lang="de-DE" sz="1400" dirty="0"/>
+              <a:t> de ≈ 75–76° en </a:t>
+            </a:r>
+            <a:r>
+              <a:rPr lang="de-DE" sz="1400" dirty="0" err="1"/>
+              <a:t>configuraciones</a:t>
+            </a:r>
+            <a:r>
+              <a:rPr lang="de-DE" sz="1400" dirty="0"/>
+              <a:t> </a:t>
+            </a:r>
+            <a:r>
+              <a:rPr lang="de-DE" sz="1400" dirty="0" err="1"/>
+              <a:t>extremas</a:t>
+            </a:r>
+            <a:r>
+              <a:rPr lang="de-DE" sz="1400" dirty="0"/>
+              <a:t> (o1ini = ±90°), </a:t>
+            </a:r>
+            <a:r>
+              <a:rPr lang="de-DE" sz="1400" dirty="0" err="1"/>
+              <a:t>lo</a:t>
+            </a:r>
+            <a:r>
+              <a:rPr lang="de-DE" sz="1400" dirty="0"/>
+              <a:t> </a:t>
+            </a:r>
+          </a:p>
+          <a:p>
+            <a:pPr algn="l"/>
+            <a:r>
+              <a:rPr lang="de-DE" sz="1400" dirty="0" err="1"/>
+              <a:t>que</a:t>
+            </a:r>
+            <a:r>
+              <a:rPr lang="de-DE" sz="1400" dirty="0"/>
+              <a:t> </a:t>
+            </a:r>
+            <a:r>
+              <a:rPr lang="de-DE" sz="1400" dirty="0" err="1"/>
+              <a:t>representa</a:t>
+            </a:r>
+            <a:r>
+              <a:rPr lang="de-DE" sz="1400" dirty="0"/>
+              <a:t> </a:t>
+            </a:r>
+            <a:r>
+              <a:rPr lang="de-DE" sz="1400" dirty="0" err="1"/>
+              <a:t>un</a:t>
+            </a:r>
+            <a:r>
+              <a:rPr lang="de-DE" sz="1400" dirty="0"/>
+              <a:t> </a:t>
+            </a:r>
+            <a:r>
+              <a:rPr lang="de-DE" sz="1400" dirty="0" err="1"/>
+              <a:t>aumento</a:t>
+            </a:r>
+            <a:r>
+              <a:rPr lang="de-DE" sz="1400" dirty="0"/>
+              <a:t> </a:t>
+            </a:r>
+            <a:r>
+              <a:rPr lang="de-DE" sz="1400" dirty="0" err="1"/>
+              <a:t>cercano</a:t>
+            </a:r>
+            <a:r>
+              <a:rPr lang="de-DE" sz="1400" dirty="0"/>
+              <a:t> al 45–50 %. Este </a:t>
+            </a:r>
+            <a:r>
+              <a:rPr lang="de-DE" sz="1400" dirty="0" err="1"/>
+              <a:t>comportamiento</a:t>
+            </a:r>
+            <a:r>
+              <a:rPr lang="de-DE" sz="1400" dirty="0"/>
+              <a:t> </a:t>
+            </a:r>
+            <a:r>
+              <a:rPr lang="de-DE" sz="1400" dirty="0" err="1"/>
+              <a:t>evidencia</a:t>
+            </a:r>
+            <a:r>
+              <a:rPr lang="de-DE" sz="1400" dirty="0"/>
+              <a:t> </a:t>
+            </a:r>
+            <a:r>
+              <a:rPr lang="de-DE" sz="1400" dirty="0" err="1"/>
+              <a:t>una</a:t>
+            </a:r>
+            <a:r>
+              <a:rPr lang="de-DE" sz="1400" dirty="0"/>
+              <a:t> </a:t>
+            </a:r>
+            <a:r>
+              <a:rPr lang="de-DE" sz="1400" dirty="0" err="1"/>
+              <a:t>fuerte</a:t>
+            </a:r>
+            <a:r>
+              <a:rPr lang="de-DE" sz="1400" dirty="0"/>
+              <a:t> </a:t>
+            </a:r>
+            <a:r>
+              <a:rPr lang="de-DE" sz="1400" dirty="0" err="1"/>
+              <a:t>dependencia</a:t>
+            </a:r>
+            <a:r>
+              <a:rPr lang="de-DE" sz="1400" dirty="0"/>
+              <a:t> del </a:t>
+            </a:r>
+            <a:r>
+              <a:rPr lang="de-DE" sz="1400" dirty="0" err="1"/>
+              <a:t>desempeño</a:t>
+            </a:r>
+            <a:r>
+              <a:rPr lang="de-DE" sz="1400" dirty="0"/>
+              <a:t> </a:t>
+            </a:r>
+            <a:r>
+              <a:rPr lang="de-DE" sz="1400" dirty="0" err="1"/>
+              <a:t>respecto</a:t>
+            </a:r>
+            <a:r>
+              <a:rPr lang="de-DE" sz="1400" dirty="0"/>
+              <a:t> al </a:t>
+            </a:r>
+            <a:r>
+              <a:rPr lang="de-DE" sz="1400" dirty="0" err="1"/>
+              <a:t>estado</a:t>
+            </a:r>
+            <a:r>
+              <a:rPr lang="de-DE" sz="1400" dirty="0"/>
+              <a:t> </a:t>
+            </a:r>
+            <a:r>
+              <a:rPr lang="de-DE" sz="1400" dirty="0" err="1"/>
+              <a:t>inicial</a:t>
+            </a:r>
+            <a:r>
+              <a:rPr lang="de-DE" sz="1400" dirty="0"/>
+              <a:t>.</a:t>
             </a:r>
           </a:p>
           <a:p>
@@ -4620,7 +4865,7 @@
             <p:ph sz="quarter" idx="14"/>
             <p:extLst>
               <p:ext uri="{D42A27DB-BD31-4B8C-83A1-F6EECF244321}">
-                <p14:modId xmlns:p14="http://schemas.microsoft.com/office/powerpoint/2010/main" val="618540953"/>
+                <p14:modId xmlns:p14="http://schemas.microsoft.com/office/powerpoint/2010/main" val="3457692735"/>
               </p:ext>
             </p:extLst>
           </p:nvPr>
@@ -5650,7 +5895,7 @@
                         <a:buNone/>
                       </a:pPr>
                       <a:r>
-                        <a:rPr lang="es-ES_tradnl" sz="900" dirty="0">
+                        <a:rPr lang="es-ES" sz="900">
                           <a:effectLst/>
                           <a:latin typeface="Times New Roman" panose="02020603050405020304" pitchFamily="18" charset="0"/>
                           <a:ea typeface="Times New Roman" panose="02020603050405020304" pitchFamily="18" charset="0"/>
@@ -5658,6 +5903,12 @@
                         </a:rPr>
                         <a:t>0.00</a:t>
                       </a:r>
+                      <a:endParaRPr lang="de-DE" sz="1200">
+                        <a:effectLst/>
+                        <a:latin typeface="Times New Roman" panose="02020603050405020304" pitchFamily="18" charset="0"/>
+                        <a:ea typeface="Times New Roman" panose="02020603050405020304" pitchFamily="18" charset="0"/>
+                        <a:cs typeface="Times New Roman" panose="02020603050405020304" pitchFamily="18" charset="0"/>
+                      </a:endParaRPr>
                     </a:p>
                   </a:txBody>
                   <a:tcPr marL="68580" marR="68580" marT="0" marB="0">
@@ -5682,14 +5933,20 @@
                         <a:buNone/>
                       </a:pPr>
                       <a:r>
-                        <a:rPr lang="es-ES_tradnl" sz="900" dirty="0">
+                        <a:rPr lang="es-ES" sz="900">
                           <a:effectLst/>
                           <a:latin typeface="Times New Roman" panose="02020603050405020304" pitchFamily="18" charset="0"/>
                           <a:ea typeface="Times New Roman" panose="02020603050405020304" pitchFamily="18" charset="0"/>
                           <a:cs typeface="Times New Roman" panose="02020603050405020304" pitchFamily="18" charset="0"/>
                         </a:rPr>
-                        <a:t>59.94</a:t>
-                      </a:r>
+                        <a:t>74.75</a:t>
+                      </a:r>
+                      <a:endParaRPr lang="de-DE" sz="1200">
+                        <a:effectLst/>
+                        <a:latin typeface="Times New Roman" panose="02020603050405020304" pitchFamily="18" charset="0"/>
+                        <a:ea typeface="Times New Roman" panose="02020603050405020304" pitchFamily="18" charset="0"/>
+                        <a:cs typeface="Times New Roman" panose="02020603050405020304" pitchFamily="18" charset="0"/>
+                      </a:endParaRPr>
                     </a:p>
                   </a:txBody>
                   <a:tcPr marL="68580" marR="68580" marT="0" marB="0">
@@ -5714,14 +5971,20 @@
                         <a:buNone/>
                       </a:pPr>
                       <a:r>
-                        <a:rPr lang="es-ES_tradnl" sz="900" dirty="0">
+                        <a:rPr lang="es-ES" sz="900">
                           <a:effectLst/>
                           <a:latin typeface="Times New Roman" panose="02020603050405020304" pitchFamily="18" charset="0"/>
                           <a:ea typeface="Times New Roman" panose="02020603050405020304" pitchFamily="18" charset="0"/>
                           <a:cs typeface="Times New Roman" panose="02020603050405020304" pitchFamily="18" charset="0"/>
                         </a:rPr>
-                        <a:t>25.92</a:t>
-                      </a:r>
+                        <a:t>30.62</a:t>
+                      </a:r>
+                      <a:endParaRPr lang="de-DE" sz="1200">
+                        <a:effectLst/>
+                        <a:latin typeface="Times New Roman" panose="02020603050405020304" pitchFamily="18" charset="0"/>
+                        <a:ea typeface="Times New Roman" panose="02020603050405020304" pitchFamily="18" charset="0"/>
+                        <a:cs typeface="Times New Roman" panose="02020603050405020304" pitchFamily="18" charset="0"/>
+                      </a:endParaRPr>
                     </a:p>
                   </a:txBody>
                   <a:tcPr marL="68580" marR="68580" marT="0" marB="0">
@@ -5746,14 +6009,20 @@
                         <a:buNone/>
                       </a:pPr>
                       <a:r>
-                        <a:rPr lang="es-ES_tradnl" sz="900" dirty="0">
+                        <a:rPr lang="es-ES" sz="900">
                           <a:effectLst/>
                           <a:latin typeface="Times New Roman" panose="02020603050405020304" pitchFamily="18" charset="0"/>
                           <a:ea typeface="Times New Roman" panose="02020603050405020304" pitchFamily="18" charset="0"/>
                           <a:cs typeface="Times New Roman" panose="02020603050405020304" pitchFamily="18" charset="0"/>
                         </a:rPr>
-                        <a:t>57.60</a:t>
-                      </a:r>
+                        <a:t>68.05</a:t>
+                      </a:r>
+                      <a:endParaRPr lang="de-DE" sz="1200">
+                        <a:effectLst/>
+                        <a:latin typeface="Times New Roman" panose="02020603050405020304" pitchFamily="18" charset="0"/>
+                        <a:ea typeface="Times New Roman" panose="02020603050405020304" pitchFamily="18" charset="0"/>
+                        <a:cs typeface="Times New Roman" panose="02020603050405020304" pitchFamily="18" charset="0"/>
+                      </a:endParaRPr>
                     </a:p>
                   </a:txBody>
                   <a:tcPr marL="68580" marR="68580" marT="0" marB="0">
@@ -5778,7 +6047,7 @@
                         <a:buNone/>
                       </a:pPr>
                       <a:r>
-                        <a:rPr lang="es-ES_tradnl" sz="900" dirty="0">
+                        <a:rPr lang="es-ES" sz="900">
                           <a:effectLst/>
                           <a:latin typeface="Times New Roman" panose="02020603050405020304" pitchFamily="18" charset="0"/>
                           <a:ea typeface="Times New Roman" panose="02020603050405020304" pitchFamily="18" charset="0"/>
@@ -5786,6 +6055,12 @@
                         </a:rPr>
                         <a:t>6.00</a:t>
                       </a:r>
+                      <a:endParaRPr lang="de-DE" sz="1200">
+                        <a:effectLst/>
+                        <a:latin typeface="Times New Roman" panose="02020603050405020304" pitchFamily="18" charset="0"/>
+                        <a:ea typeface="Times New Roman" panose="02020603050405020304" pitchFamily="18" charset="0"/>
+                        <a:cs typeface="Times New Roman" panose="02020603050405020304" pitchFamily="18" charset="0"/>
+                      </a:endParaRPr>
                     </a:p>
                   </a:txBody>
                   <a:tcPr marL="68580" marR="68580" marT="0" marB="0">
@@ -5810,14 +6085,20 @@
                         <a:buNone/>
                       </a:pPr>
                       <a:r>
-                        <a:rPr lang="es-ES_tradnl" sz="900" dirty="0">
+                        <a:rPr lang="es-ES" sz="900">
                           <a:effectLst/>
                           <a:latin typeface="Times New Roman" panose="02020603050405020304" pitchFamily="18" charset="0"/>
                           <a:ea typeface="Times New Roman" panose="02020603050405020304" pitchFamily="18" charset="0"/>
                           <a:cs typeface="Times New Roman" panose="02020603050405020304" pitchFamily="18" charset="0"/>
                         </a:rPr>
-                        <a:t>14.94</a:t>
-                      </a:r>
+                        <a:t>29.75</a:t>
+                      </a:r>
+                      <a:endParaRPr lang="de-DE" sz="1200">
+                        <a:effectLst/>
+                        <a:latin typeface="Times New Roman" panose="02020603050405020304" pitchFamily="18" charset="0"/>
+                        <a:ea typeface="Times New Roman" panose="02020603050405020304" pitchFamily="18" charset="0"/>
+                        <a:cs typeface="Times New Roman" panose="02020603050405020304" pitchFamily="18" charset="0"/>
+                      </a:endParaRPr>
                     </a:p>
                   </a:txBody>
                   <a:tcPr marL="68580" marR="68580" marT="0" marB="0">
@@ -5842,14 +6123,20 @@
                         <a:buNone/>
                       </a:pPr>
                       <a:r>
-                        <a:rPr lang="es-ES_tradnl" sz="900" dirty="0">
+                        <a:rPr lang="es-ES" sz="900">
                           <a:effectLst/>
                           <a:latin typeface="Times New Roman" panose="02020603050405020304" pitchFamily="18" charset="0"/>
                           <a:ea typeface="Times New Roman" panose="02020603050405020304" pitchFamily="18" charset="0"/>
                           <a:cs typeface="Times New Roman" panose="02020603050405020304" pitchFamily="18" charset="0"/>
                         </a:rPr>
-                        <a:t>17.78</a:t>
-                      </a:r>
+                        <a:t>29.93</a:t>
+                      </a:r>
+                      <a:endParaRPr lang="de-DE" sz="1200">
+                        <a:effectLst/>
+                        <a:latin typeface="Times New Roman" panose="02020603050405020304" pitchFamily="18" charset="0"/>
+                        <a:ea typeface="Times New Roman" panose="02020603050405020304" pitchFamily="18" charset="0"/>
+                        <a:cs typeface="Times New Roman" panose="02020603050405020304" pitchFamily="18" charset="0"/>
+                      </a:endParaRPr>
                     </a:p>
                   </a:txBody>
                   <a:tcPr marL="68580" marR="68580" marT="0" marB="0">
@@ -5874,14 +6161,20 @@
                         <a:buNone/>
                       </a:pPr>
                       <a:r>
-                        <a:rPr lang="es-ES_tradnl" sz="900" dirty="0">
+                        <a:rPr lang="es-ES" sz="900">
                           <a:effectLst/>
                           <a:latin typeface="Times New Roman" panose="02020603050405020304" pitchFamily="18" charset="0"/>
                           <a:ea typeface="Times New Roman" panose="02020603050405020304" pitchFamily="18" charset="0"/>
                           <a:cs typeface="Times New Roman" panose="02020603050405020304" pitchFamily="18" charset="0"/>
                         </a:rPr>
-                        <a:t>271.98</a:t>
-                      </a:r>
+                        <a:t>535.05</a:t>
+                      </a:r>
+                      <a:endParaRPr lang="de-DE" sz="1200">
+                        <a:effectLst/>
+                        <a:latin typeface="Times New Roman" panose="02020603050405020304" pitchFamily="18" charset="0"/>
+                        <a:ea typeface="Times New Roman" panose="02020603050405020304" pitchFamily="18" charset="0"/>
+                        <a:cs typeface="Times New Roman" panose="02020603050405020304" pitchFamily="18" charset="0"/>
+                      </a:endParaRPr>
                     </a:p>
                   </a:txBody>
                   <a:tcPr marL="68580" marR="68580" marT="0" marB="0">
@@ -5906,14 +6199,20 @@
                         <a:buNone/>
                       </a:pPr>
                       <a:r>
-                        <a:rPr lang="es-ES_tradnl" sz="900" dirty="0">
+                        <a:rPr lang="es-ES" sz="900">
                           <a:effectLst/>
                           <a:latin typeface="Times New Roman" panose="02020603050405020304" pitchFamily="18" charset="0"/>
                           <a:ea typeface="Times New Roman" panose="02020603050405020304" pitchFamily="18" charset="0"/>
                           <a:cs typeface="Times New Roman" panose="02020603050405020304" pitchFamily="18" charset="0"/>
                         </a:rPr>
-                        <a:t>0.29</a:t>
-                      </a:r>
+                        <a:t>0.28</a:t>
+                      </a:r>
+                      <a:endParaRPr lang="de-DE" sz="1200">
+                        <a:effectLst/>
+                        <a:latin typeface="Times New Roman" panose="02020603050405020304" pitchFamily="18" charset="0"/>
+                        <a:ea typeface="Times New Roman" panose="02020603050405020304" pitchFamily="18" charset="0"/>
+                        <a:cs typeface="Times New Roman" panose="02020603050405020304" pitchFamily="18" charset="0"/>
+                      </a:endParaRPr>
                     </a:p>
                   </a:txBody>
                   <a:tcPr marL="68580" marR="68580" marT="0" marB="0">
@@ -5938,14 +6237,20 @@
                         <a:buNone/>
                       </a:pPr>
                       <a:r>
-                        <a:rPr lang="es-ES_tradnl" sz="900" dirty="0">
+                        <a:rPr lang="es-ES" sz="900">
                           <a:effectLst/>
                           <a:latin typeface="Times New Roman" panose="02020603050405020304" pitchFamily="18" charset="0"/>
                           <a:ea typeface="Times New Roman" panose="02020603050405020304" pitchFamily="18" charset="0"/>
                           <a:cs typeface="Times New Roman" panose="02020603050405020304" pitchFamily="18" charset="0"/>
                         </a:rPr>
-                        <a:t>124.00</a:t>
-                      </a:r>
+                        <a:t>91.00</a:t>
+                      </a:r>
+                      <a:endParaRPr lang="de-DE" sz="1200">
+                        <a:effectLst/>
+                        <a:latin typeface="Times New Roman" panose="02020603050405020304" pitchFamily="18" charset="0"/>
+                        <a:ea typeface="Times New Roman" panose="02020603050405020304" pitchFamily="18" charset="0"/>
+                        <a:cs typeface="Times New Roman" panose="02020603050405020304" pitchFamily="18" charset="0"/>
+                      </a:endParaRPr>
                     </a:p>
                   </a:txBody>
                   <a:tcPr marL="68580" marR="68580" marT="0" marB="0">
@@ -5978,7 +6283,7 @@
                         </a:rPr>
                         <a:t>6.00</a:t>
                       </a:r>
-                      <a:endParaRPr lang="de-DE" sz="900">
+                      <a:endParaRPr lang="de-DE" sz="1200">
                         <a:effectLst/>
                         <a:latin typeface="Times New Roman" panose="02020603050405020304" pitchFamily="18" charset="0"/>
                         <a:ea typeface="Times New Roman" panose="02020603050405020304" pitchFamily="18" charset="0"/>
@@ -6016,7 +6321,7 @@
                         </a:rPr>
                         <a:t>2.70</a:t>
                       </a:r>
-                      <a:endParaRPr lang="de-DE" sz="900">
+                      <a:endParaRPr lang="de-DE" sz="1200">
                         <a:effectLst/>
                         <a:latin typeface="Times New Roman" panose="02020603050405020304" pitchFamily="18" charset="0"/>
                         <a:ea typeface="Times New Roman" panose="02020603050405020304" pitchFamily="18" charset="0"/>
@@ -6054,7 +6359,7 @@
                         </a:rPr>
                         <a:t>43.52</a:t>
                       </a:r>
-                      <a:endParaRPr lang="de-DE" sz="900">
+                      <a:endParaRPr lang="de-DE" sz="1200">
                         <a:effectLst/>
                         <a:latin typeface="Times New Roman" panose="02020603050405020304" pitchFamily="18" charset="0"/>
                         <a:ea typeface="Times New Roman" panose="02020603050405020304" pitchFamily="18" charset="0"/>
@@ -6092,7 +6397,7 @@
                         </a:rPr>
                         <a:t>14.66</a:t>
                       </a:r>
-                      <a:endParaRPr lang="de-DE" sz="900">
+                      <a:endParaRPr lang="de-DE" sz="1200">
                         <a:effectLst/>
                         <a:latin typeface="Times New Roman" panose="02020603050405020304" pitchFamily="18" charset="0"/>
                         <a:ea typeface="Times New Roman" panose="02020603050405020304" pitchFamily="18" charset="0"/>
@@ -6128,9 +6433,9 @@
                           <a:ea typeface="Times New Roman" panose="02020603050405020304" pitchFamily="18" charset="0"/>
                           <a:cs typeface="Times New Roman" panose="02020603050405020304" pitchFamily="18" charset="0"/>
                         </a:rPr>
-                        <a:t>6.00</a:t>
-                      </a:r>
-                      <a:endParaRPr lang="de-DE" sz="900">
+                        <a:t>20.41</a:t>
+                      </a:r>
+                      <a:endParaRPr lang="de-DE" sz="1200">
                         <a:effectLst/>
                         <a:latin typeface="Times New Roman" panose="02020603050405020304" pitchFamily="18" charset="0"/>
                         <a:ea typeface="Times New Roman" panose="02020603050405020304" pitchFamily="18" charset="0"/>
@@ -6193,7 +6498,7 @@
                         <a:buNone/>
                       </a:pPr>
                       <a:r>
-                        <a:rPr lang="es-ES_tradnl" sz="900" dirty="0">
+                        <a:rPr lang="es-ES" sz="900">
                           <a:effectLst/>
                           <a:latin typeface="Times New Roman" panose="02020603050405020304" pitchFamily="18" charset="0"/>
                           <a:ea typeface="Times New Roman" panose="02020603050405020304" pitchFamily="18" charset="0"/>
@@ -6201,45 +6506,57 @@
                         </a:rPr>
                         <a:t>90.00</a:t>
                       </a:r>
-                    </a:p>
-                  </a:txBody>
-                  <a:tcPr marL="68580" marR="68580" marT="0" marB="0">
-                    <a:noFill/>
-                  </a:tcPr>
-                </a:tc>
-                <a:tc>
-                  <a:txBody>
-                    <a:bodyPr/>
-                    <a:lstStyle/>
-                    <a:p>
-                      <a:pPr algn="ctr">
-                        <a:buNone/>
-                      </a:pPr>
-                      <a:r>
-                        <a:rPr lang="es-ES_tradnl" sz="900" dirty="0">
+                      <a:endParaRPr lang="de-DE" sz="1200">
+                        <a:effectLst/>
+                        <a:latin typeface="Times New Roman" panose="02020603050405020304" pitchFamily="18" charset="0"/>
+                        <a:ea typeface="Times New Roman" panose="02020603050405020304" pitchFamily="18" charset="0"/>
+                        <a:cs typeface="Times New Roman" panose="02020603050405020304" pitchFamily="18" charset="0"/>
+                      </a:endParaRPr>
+                    </a:p>
+                  </a:txBody>
+                  <a:tcPr marL="68580" marR="68580" marT="0" marB="0">
+                    <a:noFill/>
+                  </a:tcPr>
+                </a:tc>
+                <a:tc>
+                  <a:txBody>
+                    <a:bodyPr/>
+                    <a:lstStyle/>
+                    <a:p>
+                      <a:pPr algn="ctr">
+                        <a:buNone/>
+                      </a:pPr>
+                      <a:r>
+                        <a:rPr lang="es-ES" sz="900">
                           <a:effectLst/>
                           <a:latin typeface="Times New Roman" panose="02020603050405020304" pitchFamily="18" charset="0"/>
                           <a:ea typeface="Times New Roman" panose="02020603050405020304" pitchFamily="18" charset="0"/>
                           <a:cs typeface="Times New Roman" panose="02020603050405020304" pitchFamily="18" charset="0"/>
                         </a:rPr>
-                        <a:t>60.60</a:t>
-                      </a:r>
-                    </a:p>
-                  </a:txBody>
-                  <a:tcPr marL="68580" marR="68580" marT="0" marB="0">
-                    <a:noFill/>
-                  </a:tcPr>
-                </a:tc>
-                <a:tc>
-                  <a:txBody>
-                    <a:bodyPr/>
-                    <a:lstStyle/>
-                    <a:p>
-                      <a:pPr algn="ctr">
-                        <a:buNone/>
-                      </a:pPr>
-                      <a:r>
-                        <a:rPr lang="es-ES_tradnl" sz="900" dirty="0">
+                        <a:t>85.11</a:t>
+                      </a:r>
+                      <a:endParaRPr lang="de-DE" sz="1200">
+                        <a:effectLst/>
+                        <a:latin typeface="Times New Roman" panose="02020603050405020304" pitchFamily="18" charset="0"/>
+                        <a:ea typeface="Times New Roman" panose="02020603050405020304" pitchFamily="18" charset="0"/>
+                        <a:cs typeface="Times New Roman" panose="02020603050405020304" pitchFamily="18" charset="0"/>
+                      </a:endParaRPr>
+                    </a:p>
+                  </a:txBody>
+                  <a:tcPr marL="68580" marR="68580" marT="0" marB="0">
+                    <a:noFill/>
+                  </a:tcPr>
+                </a:tc>
+                <a:tc>
+                  <a:txBody>
+                    <a:bodyPr/>
+                    <a:lstStyle/>
+                    <a:p>
+                      <a:pPr algn="ctr">
+                        <a:buNone/>
+                      </a:pPr>
+                      <a:r>
+                        <a:rPr lang="es-ES" sz="900">
                           <a:effectLst/>
                           <a:latin typeface="Times New Roman" panose="02020603050405020304" pitchFamily="18" charset="0"/>
                           <a:ea typeface="Times New Roman" panose="02020603050405020304" pitchFamily="18" charset="0"/>
@@ -6247,22 +6564,28 @@
                         </a:rPr>
                         <a:t>45.00</a:t>
                       </a:r>
-                    </a:p>
-                  </a:txBody>
-                  <a:tcPr marL="68580" marR="68580" marT="0" marB="0">
-                    <a:noFill/>
-                  </a:tcPr>
-                </a:tc>
-                <a:tc>
-                  <a:txBody>
-                    <a:bodyPr/>
-                    <a:lstStyle/>
-                    <a:p>
-                      <a:pPr algn="ctr">
-                        <a:buNone/>
-                      </a:pPr>
-                      <a:r>
-                        <a:rPr lang="es-ES_tradnl" sz="900" dirty="0">
+                      <a:endParaRPr lang="de-DE" sz="1200">
+                        <a:effectLst/>
+                        <a:latin typeface="Times New Roman" panose="02020603050405020304" pitchFamily="18" charset="0"/>
+                        <a:ea typeface="Times New Roman" panose="02020603050405020304" pitchFamily="18" charset="0"/>
+                        <a:cs typeface="Times New Roman" panose="02020603050405020304" pitchFamily="18" charset="0"/>
+                      </a:endParaRPr>
+                    </a:p>
+                  </a:txBody>
+                  <a:tcPr marL="68580" marR="68580" marT="0" marB="0">
+                    <a:noFill/>
+                  </a:tcPr>
+                </a:tc>
+                <a:tc>
+                  <a:txBody>
+                    <a:bodyPr/>
+                    <a:lstStyle/>
+                    <a:p>
+                      <a:pPr algn="ctr">
+                        <a:buNone/>
+                      </a:pPr>
+                      <a:r>
+                        <a:rPr lang="es-ES" sz="900">
                           <a:effectLst/>
                           <a:latin typeface="Times New Roman" panose="02020603050405020304" pitchFamily="18" charset="0"/>
                           <a:ea typeface="Times New Roman" panose="02020603050405020304" pitchFamily="18" charset="0"/>
@@ -6270,22 +6593,28 @@
                         </a:rPr>
                         <a:t>100.00</a:t>
                       </a:r>
-                    </a:p>
-                  </a:txBody>
-                  <a:tcPr marL="68580" marR="68580" marT="0" marB="0">
-                    <a:noFill/>
-                  </a:tcPr>
-                </a:tc>
-                <a:tc>
-                  <a:txBody>
-                    <a:bodyPr/>
-                    <a:lstStyle/>
-                    <a:p>
-                      <a:pPr algn="ctr">
-                        <a:buNone/>
-                      </a:pPr>
-                      <a:r>
-                        <a:rPr lang="es-ES_tradnl" sz="900" dirty="0">
+                      <a:endParaRPr lang="de-DE" sz="1200">
+                        <a:effectLst/>
+                        <a:latin typeface="Times New Roman" panose="02020603050405020304" pitchFamily="18" charset="0"/>
+                        <a:ea typeface="Times New Roman" panose="02020603050405020304" pitchFamily="18" charset="0"/>
+                        <a:cs typeface="Times New Roman" panose="02020603050405020304" pitchFamily="18" charset="0"/>
+                      </a:endParaRPr>
+                    </a:p>
+                  </a:txBody>
+                  <a:tcPr marL="68580" marR="68580" marT="0" marB="0">
+                    <a:noFill/>
+                  </a:tcPr>
+                </a:tc>
+                <a:tc>
+                  <a:txBody>
+                    <a:bodyPr/>
+                    <a:lstStyle/>
+                    <a:p>
+                      <a:pPr algn="ctr">
+                        <a:buNone/>
+                      </a:pPr>
+                      <a:r>
+                        <a:rPr lang="es-ES" sz="900">
                           <a:effectLst/>
                           <a:latin typeface="Times New Roman" panose="02020603050405020304" pitchFamily="18" charset="0"/>
                           <a:ea typeface="Times New Roman" panose="02020603050405020304" pitchFamily="18" charset="0"/>
@@ -6293,91 +6622,115 @@
                         </a:rPr>
                         <a:t>6.00</a:t>
                       </a:r>
-                    </a:p>
-                  </a:txBody>
-                  <a:tcPr marL="68580" marR="68580" marT="0" marB="0">
-                    <a:noFill/>
-                  </a:tcPr>
-                </a:tc>
-                <a:tc>
-                  <a:txBody>
-                    <a:bodyPr/>
-                    <a:lstStyle/>
-                    <a:p>
-                      <a:pPr algn="ctr">
-                        <a:buNone/>
-                      </a:pPr>
-                      <a:r>
-                        <a:rPr lang="es-ES_tradnl" sz="900" dirty="0">
+                      <a:endParaRPr lang="de-DE" sz="1200">
+                        <a:effectLst/>
+                        <a:latin typeface="Times New Roman" panose="02020603050405020304" pitchFamily="18" charset="0"/>
+                        <a:ea typeface="Times New Roman" panose="02020603050405020304" pitchFamily="18" charset="0"/>
+                        <a:cs typeface="Times New Roman" panose="02020603050405020304" pitchFamily="18" charset="0"/>
+                      </a:endParaRPr>
+                    </a:p>
+                  </a:txBody>
+                  <a:tcPr marL="68580" marR="68580" marT="0" marB="0">
+                    <a:noFill/>
+                  </a:tcPr>
+                </a:tc>
+                <a:tc>
+                  <a:txBody>
+                    <a:bodyPr/>
+                    <a:lstStyle/>
+                    <a:p>
+                      <a:pPr algn="ctr">
+                        <a:buNone/>
+                      </a:pPr>
+                      <a:r>
+                        <a:rPr lang="es-ES" sz="900">
                           <a:effectLst/>
                           <a:latin typeface="Times New Roman" panose="02020603050405020304" pitchFamily="18" charset="0"/>
                           <a:ea typeface="Times New Roman" panose="02020603050405020304" pitchFamily="18" charset="0"/>
                           <a:cs typeface="Times New Roman" panose="02020603050405020304" pitchFamily="18" charset="0"/>
                         </a:rPr>
-                        <a:t>15.60</a:t>
-                      </a:r>
-                    </a:p>
-                  </a:txBody>
-                  <a:tcPr marL="68580" marR="68580" marT="0" marB="0">
-                    <a:noFill/>
-                  </a:tcPr>
-                </a:tc>
-                <a:tc>
-                  <a:txBody>
-                    <a:bodyPr/>
-                    <a:lstStyle/>
-                    <a:p>
-                      <a:pPr algn="ctr">
-                        <a:buNone/>
-                      </a:pPr>
-                      <a:r>
-                        <a:rPr lang="es-ES_tradnl" sz="900" dirty="0">
+                        <a:t>40.11</a:t>
+                      </a:r>
+                      <a:endParaRPr lang="de-DE" sz="1200">
+                        <a:effectLst/>
+                        <a:latin typeface="Times New Roman" panose="02020603050405020304" pitchFamily="18" charset="0"/>
+                        <a:ea typeface="Times New Roman" panose="02020603050405020304" pitchFamily="18" charset="0"/>
+                        <a:cs typeface="Times New Roman" panose="02020603050405020304" pitchFamily="18" charset="0"/>
+                      </a:endParaRPr>
+                    </a:p>
+                  </a:txBody>
+                  <a:tcPr marL="68580" marR="68580" marT="0" marB="0">
+                    <a:noFill/>
+                  </a:tcPr>
+                </a:tc>
+                <a:tc>
+                  <a:txBody>
+                    <a:bodyPr/>
+                    <a:lstStyle/>
+                    <a:p>
+                      <a:pPr algn="ctr">
+                        <a:buNone/>
+                      </a:pPr>
+                      <a:r>
+                        <a:rPr lang="es-ES" sz="900">
                           <a:effectLst/>
                           <a:latin typeface="Times New Roman" panose="02020603050405020304" pitchFamily="18" charset="0"/>
                           <a:ea typeface="Times New Roman" panose="02020603050405020304" pitchFamily="18" charset="0"/>
                           <a:cs typeface="Times New Roman" panose="02020603050405020304" pitchFamily="18" charset="0"/>
                         </a:rPr>
-                        <a:t>18.47</a:t>
-                      </a:r>
-                    </a:p>
-                  </a:txBody>
-                  <a:tcPr marL="68580" marR="68580" marT="0" marB="0">
-                    <a:noFill/>
-                  </a:tcPr>
-                </a:tc>
-                <a:tc>
-                  <a:txBody>
-                    <a:bodyPr/>
-                    <a:lstStyle/>
-                    <a:p>
-                      <a:pPr algn="ctr">
-                        <a:buNone/>
-                      </a:pPr>
-                      <a:r>
-                        <a:rPr lang="es-ES_tradnl" sz="900" dirty="0">
+                        <a:t>40.40</a:t>
+                      </a:r>
+                      <a:endParaRPr lang="de-DE" sz="1200">
+                        <a:effectLst/>
+                        <a:latin typeface="Times New Roman" panose="02020603050405020304" pitchFamily="18" charset="0"/>
+                        <a:ea typeface="Times New Roman" panose="02020603050405020304" pitchFamily="18" charset="0"/>
+                        <a:cs typeface="Times New Roman" panose="02020603050405020304" pitchFamily="18" charset="0"/>
+                      </a:endParaRPr>
+                    </a:p>
+                  </a:txBody>
+                  <a:tcPr marL="68580" marR="68580" marT="0" marB="0">
+                    <a:noFill/>
+                  </a:tcPr>
+                </a:tc>
+                <a:tc>
+                  <a:txBody>
+                    <a:bodyPr/>
+                    <a:lstStyle/>
+                    <a:p>
+                      <a:pPr algn="ctr">
+                        <a:buNone/>
+                      </a:pPr>
+                      <a:r>
+                        <a:rPr lang="es-ES" sz="900">
                           <a:effectLst/>
                           <a:latin typeface="Times New Roman" panose="02020603050405020304" pitchFamily="18" charset="0"/>
                           <a:ea typeface="Times New Roman" panose="02020603050405020304" pitchFamily="18" charset="0"/>
                           <a:cs typeface="Times New Roman" panose="02020603050405020304" pitchFamily="18" charset="0"/>
                         </a:rPr>
-                        <a:t>283.58</a:t>
-                      </a:r>
-                    </a:p>
-                  </a:txBody>
-                  <a:tcPr marL="68580" marR="68580" marT="0" marB="0">
-                    <a:noFill/>
-                  </a:tcPr>
-                </a:tc>
-                <a:tc>
-                  <a:txBody>
-                    <a:bodyPr/>
-                    <a:lstStyle/>
-                    <a:p>
-                      <a:pPr algn="ctr">
-                        <a:buNone/>
-                      </a:pPr>
-                      <a:r>
-                        <a:rPr lang="es-ES_tradnl" sz="900" dirty="0">
+                        <a:t>703.29</a:t>
+                      </a:r>
+                      <a:endParaRPr lang="de-DE" sz="1200">
+                        <a:effectLst/>
+                        <a:latin typeface="Times New Roman" panose="02020603050405020304" pitchFamily="18" charset="0"/>
+                        <a:ea typeface="Times New Roman" panose="02020603050405020304" pitchFamily="18" charset="0"/>
+                        <a:cs typeface="Times New Roman" panose="02020603050405020304" pitchFamily="18" charset="0"/>
+                      </a:endParaRPr>
+                    </a:p>
+                  </a:txBody>
+                  <a:tcPr marL="68580" marR="68580" marT="0" marB="0">
+                    <a:noFill/>
+                  </a:tcPr>
+                </a:tc>
+                <a:tc>
+                  <a:txBody>
+                    <a:bodyPr/>
+                    <a:lstStyle/>
+                    <a:p>
+                      <a:pPr algn="ctr">
+                        <a:buNone/>
+                      </a:pPr>
+                      <a:r>
+                        <a:rPr lang="es-ES" sz="900">
                           <a:effectLst/>
                           <a:latin typeface="Times New Roman" panose="02020603050405020304" pitchFamily="18" charset="0"/>
                           <a:ea typeface="Times New Roman" panose="02020603050405020304" pitchFamily="18" charset="0"/>
@@ -6385,29 +6738,41 @@
                         </a:rPr>
                         <a:t>0.00</a:t>
                       </a:r>
-                    </a:p>
-                  </a:txBody>
-                  <a:tcPr marL="68580" marR="68580" marT="0" marB="0">
-                    <a:noFill/>
-                  </a:tcPr>
-                </a:tc>
-                <a:tc>
-                  <a:txBody>
-                    <a:bodyPr/>
-                    <a:lstStyle/>
-                    <a:p>
-                      <a:pPr algn="ctr">
-                        <a:buNone/>
-                      </a:pPr>
-                      <a:r>
-                        <a:rPr lang="es-ES_tradnl" sz="900" dirty="0">
+                      <a:endParaRPr lang="de-DE" sz="1200">
+                        <a:effectLst/>
+                        <a:latin typeface="Times New Roman" panose="02020603050405020304" pitchFamily="18" charset="0"/>
+                        <a:ea typeface="Times New Roman" panose="02020603050405020304" pitchFamily="18" charset="0"/>
+                        <a:cs typeface="Times New Roman" panose="02020603050405020304" pitchFamily="18" charset="0"/>
+                      </a:endParaRPr>
+                    </a:p>
+                  </a:txBody>
+                  <a:tcPr marL="68580" marR="68580" marT="0" marB="0">
+                    <a:noFill/>
+                  </a:tcPr>
+                </a:tc>
+                <a:tc>
+                  <a:txBody>
+                    <a:bodyPr/>
+                    <a:lstStyle/>
+                    <a:p>
+                      <a:pPr algn="ctr">
+                        <a:buNone/>
+                      </a:pPr>
+                      <a:r>
+                        <a:rPr lang="es-ES" sz="900">
                           <a:effectLst/>
                           <a:latin typeface="Times New Roman" panose="02020603050405020304" pitchFamily="18" charset="0"/>
                           <a:ea typeface="Times New Roman" panose="02020603050405020304" pitchFamily="18" charset="0"/>
                           <a:cs typeface="Times New Roman" panose="02020603050405020304" pitchFamily="18" charset="0"/>
                         </a:rPr>
-                        <a:t>103.00</a:t>
-                      </a:r>
+                        <a:t>133.00</a:t>
+                      </a:r>
+                      <a:endParaRPr lang="de-DE" sz="1200">
+                        <a:effectLst/>
+                        <a:latin typeface="Times New Roman" panose="02020603050405020304" pitchFamily="18" charset="0"/>
+                        <a:ea typeface="Times New Roman" panose="02020603050405020304" pitchFamily="18" charset="0"/>
+                        <a:cs typeface="Times New Roman" panose="02020603050405020304" pitchFamily="18" charset="0"/>
+                      </a:endParaRPr>
                     </a:p>
                   </a:txBody>
                   <a:tcPr marL="68580" marR="68580" marT="0" marB="0">
@@ -6431,7 +6796,7 @@
                         </a:rPr>
                         <a:t>6.00</a:t>
                       </a:r>
-                      <a:endParaRPr lang="de-DE" sz="900">
+                      <a:endParaRPr lang="de-DE" sz="1200">
                         <a:effectLst/>
                         <a:latin typeface="Times New Roman" panose="02020603050405020304" pitchFamily="18" charset="0"/>
                         <a:ea typeface="Times New Roman" panose="02020603050405020304" pitchFamily="18" charset="0"/>
@@ -6460,7 +6825,7 @@
                         </a:rPr>
                         <a:t>1.99</a:t>
                       </a:r>
-                      <a:endParaRPr lang="de-DE" sz="900">
+                      <a:endParaRPr lang="de-DE" sz="1200">
                         <a:effectLst/>
                         <a:latin typeface="Times New Roman" panose="02020603050405020304" pitchFamily="18" charset="0"/>
                         <a:ea typeface="Times New Roman" panose="02020603050405020304" pitchFamily="18" charset="0"/>
@@ -6489,7 +6854,7 @@
                         </a:rPr>
                         <a:t>19.90</a:t>
                       </a:r>
-                      <a:endParaRPr lang="de-DE" sz="900">
+                      <a:endParaRPr lang="de-DE" sz="1200">
                         <a:effectLst/>
                         <a:latin typeface="Times New Roman" panose="02020603050405020304" pitchFamily="18" charset="0"/>
                         <a:ea typeface="Times New Roman" panose="02020603050405020304" pitchFamily="18" charset="0"/>
@@ -6518,7 +6883,7 @@
                         </a:rPr>
                         <a:t>9.79</a:t>
                       </a:r>
-                      <a:endParaRPr lang="de-DE" sz="900">
+                      <a:endParaRPr lang="de-DE" sz="1200">
                         <a:effectLst/>
                         <a:latin typeface="Times New Roman" panose="02020603050405020304" pitchFamily="18" charset="0"/>
                         <a:ea typeface="Times New Roman" panose="02020603050405020304" pitchFamily="18" charset="0"/>
@@ -6545,9 +6910,9 @@
                           <a:ea typeface="Times New Roman" panose="02020603050405020304" pitchFamily="18" charset="0"/>
                           <a:cs typeface="Times New Roman" panose="02020603050405020304" pitchFamily="18" charset="0"/>
                         </a:rPr>
-                        <a:t>6.00</a:t>
-                      </a:r>
-                      <a:endParaRPr lang="de-DE" sz="900">
+                        <a:t>29.51</a:t>
+                      </a:r>
+                      <a:endParaRPr lang="de-DE" sz="1200">
                         <a:effectLst/>
                         <a:latin typeface="Times New Roman" panose="02020603050405020304" pitchFamily="18" charset="0"/>
                         <a:ea typeface="Times New Roman" panose="02020603050405020304" pitchFamily="18" charset="0"/>
@@ -6601,7 +6966,7 @@
                         <a:buNone/>
                       </a:pPr>
                       <a:r>
-                        <a:rPr lang="es-ES_tradnl" sz="900" dirty="0">
+                        <a:rPr lang="es-ES" sz="900">
                           <a:effectLst/>
                           <a:latin typeface="Times New Roman" panose="02020603050405020304" pitchFamily="18" charset="0"/>
                           <a:ea typeface="Times New Roman" panose="02020603050405020304" pitchFamily="18" charset="0"/>
@@ -6609,91 +6974,115 @@
                         </a:rPr>
                         <a:t>-90.00</a:t>
                       </a:r>
-                    </a:p>
-                  </a:txBody>
-                  <a:tcPr marL="68580" marR="68580" marT="0" marB="0">
-                    <a:noFill/>
-                  </a:tcPr>
-                </a:tc>
-                <a:tc>
-                  <a:txBody>
-                    <a:bodyPr/>
-                    <a:lstStyle/>
-                    <a:p>
-                      <a:pPr algn="ctr">
-                        <a:buNone/>
-                      </a:pPr>
-                      <a:r>
-                        <a:rPr lang="es-ES_tradnl" sz="900" dirty="0">
+                      <a:endParaRPr lang="de-DE" sz="1200">
+                        <a:effectLst/>
+                        <a:latin typeface="Times New Roman" panose="02020603050405020304" pitchFamily="18" charset="0"/>
+                        <a:ea typeface="Times New Roman" panose="02020603050405020304" pitchFamily="18" charset="0"/>
+                        <a:cs typeface="Times New Roman" panose="02020603050405020304" pitchFamily="18" charset="0"/>
+                      </a:endParaRPr>
+                    </a:p>
+                  </a:txBody>
+                  <a:tcPr marL="68580" marR="68580" marT="0" marB="0">
+                    <a:noFill/>
+                  </a:tcPr>
+                </a:tc>
+                <a:tc>
+                  <a:txBody>
+                    <a:bodyPr/>
+                    <a:lstStyle/>
+                    <a:p>
+                      <a:pPr algn="ctr">
+                        <a:buNone/>
+                      </a:pPr>
+                      <a:r>
+                        <a:rPr lang="es-ES" sz="900">
                           <a:effectLst/>
                           <a:latin typeface="Times New Roman" panose="02020603050405020304" pitchFamily="18" charset="0"/>
                           <a:ea typeface="Times New Roman" panose="02020603050405020304" pitchFamily="18" charset="0"/>
                           <a:cs typeface="Times New Roman" panose="02020603050405020304" pitchFamily="18" charset="0"/>
                         </a:rPr>
-                        <a:t>-299.36</a:t>
-                      </a:r>
-                    </a:p>
-                  </a:txBody>
-                  <a:tcPr marL="68580" marR="68580" marT="0" marB="0">
-                    <a:noFill/>
-                  </a:tcPr>
-                </a:tc>
-                <a:tc>
-                  <a:txBody>
-                    <a:bodyPr/>
-                    <a:lstStyle/>
-                    <a:p>
-                      <a:pPr algn="ctr">
-                        <a:buNone/>
-                      </a:pPr>
-                      <a:r>
-                        <a:rPr lang="es-ES_tradnl" sz="900" dirty="0">
+                        <a:t>-274.94</a:t>
+                      </a:r>
+                      <a:endParaRPr lang="de-DE" sz="1200">
+                        <a:effectLst/>
+                        <a:latin typeface="Times New Roman" panose="02020603050405020304" pitchFamily="18" charset="0"/>
+                        <a:ea typeface="Times New Roman" panose="02020603050405020304" pitchFamily="18" charset="0"/>
+                        <a:cs typeface="Times New Roman" panose="02020603050405020304" pitchFamily="18" charset="0"/>
+                      </a:endParaRPr>
+                    </a:p>
+                  </a:txBody>
+                  <a:tcPr marL="68580" marR="68580" marT="0" marB="0">
+                    <a:noFill/>
+                  </a:tcPr>
+                </a:tc>
+                <a:tc>
+                  <a:txBody>
+                    <a:bodyPr/>
+                    <a:lstStyle/>
+                    <a:p>
+                      <a:pPr algn="ctr">
+                        <a:buNone/>
+                      </a:pPr>
+                      <a:r>
+                        <a:rPr lang="es-ES" sz="900">
                           <a:effectLst/>
                           <a:latin typeface="Times New Roman" panose="02020603050405020304" pitchFamily="18" charset="0"/>
                           <a:ea typeface="Times New Roman" panose="02020603050405020304" pitchFamily="18" charset="0"/>
                           <a:cs typeface="Times New Roman" panose="02020603050405020304" pitchFamily="18" charset="0"/>
                         </a:rPr>
-                        <a:t>-135.00</a:t>
-                      </a:r>
-                    </a:p>
-                  </a:txBody>
-                  <a:tcPr marL="68580" marR="68580" marT="0" marB="0">
-                    <a:noFill/>
-                  </a:tcPr>
-                </a:tc>
-                <a:tc>
-                  <a:txBody>
-                    <a:bodyPr/>
-                    <a:lstStyle/>
-                    <a:p>
-                      <a:pPr algn="ctr">
-                        <a:buNone/>
-                      </a:pPr>
-                      <a:r>
-                        <a:rPr lang="es-ES_tradnl" sz="900" dirty="0">
+                        <a:t>-45.00</a:t>
+                      </a:r>
+                      <a:endParaRPr lang="de-DE" sz="1200">
+                        <a:effectLst/>
+                        <a:latin typeface="Times New Roman" panose="02020603050405020304" pitchFamily="18" charset="0"/>
+                        <a:ea typeface="Times New Roman" panose="02020603050405020304" pitchFamily="18" charset="0"/>
+                        <a:cs typeface="Times New Roman" panose="02020603050405020304" pitchFamily="18" charset="0"/>
+                      </a:endParaRPr>
+                    </a:p>
+                  </a:txBody>
+                  <a:tcPr marL="68580" marR="68580" marT="0" marB="0">
+                    <a:noFill/>
+                  </a:tcPr>
+                </a:tc>
+                <a:tc>
+                  <a:txBody>
+                    <a:bodyPr/>
+                    <a:lstStyle/>
+                    <a:p>
+                      <a:pPr algn="ctr">
+                        <a:buNone/>
+                      </a:pPr>
+                      <a:r>
+                        <a:rPr lang="es-ES" sz="900">
                           <a:effectLst/>
                           <a:latin typeface="Times New Roman" panose="02020603050405020304" pitchFamily="18" charset="0"/>
                           <a:ea typeface="Times New Roman" panose="02020603050405020304" pitchFamily="18" charset="0"/>
                           <a:cs typeface="Times New Roman" panose="02020603050405020304" pitchFamily="18" charset="0"/>
                         </a:rPr>
-                        <a:t>-300.00</a:t>
-                      </a:r>
-                    </a:p>
-                  </a:txBody>
-                  <a:tcPr marL="68580" marR="68580" marT="0" marB="0">
-                    <a:noFill/>
-                  </a:tcPr>
-                </a:tc>
-                <a:tc>
-                  <a:txBody>
-                    <a:bodyPr/>
-                    <a:lstStyle/>
-                    <a:p>
-                      <a:pPr algn="ctr">
-                        <a:buNone/>
-                      </a:pPr>
-                      <a:r>
-                        <a:rPr lang="es-ES_tradnl" sz="900" dirty="0">
+                        <a:t>-100.00</a:t>
+                      </a:r>
+                      <a:endParaRPr lang="de-DE" sz="1200">
+                        <a:effectLst/>
+                        <a:latin typeface="Times New Roman" panose="02020603050405020304" pitchFamily="18" charset="0"/>
+                        <a:ea typeface="Times New Roman" panose="02020603050405020304" pitchFamily="18" charset="0"/>
+                        <a:cs typeface="Times New Roman" panose="02020603050405020304" pitchFamily="18" charset="0"/>
+                      </a:endParaRPr>
+                    </a:p>
+                  </a:txBody>
+                  <a:tcPr marL="68580" marR="68580" marT="0" marB="0">
+                    <a:noFill/>
+                  </a:tcPr>
+                </a:tc>
+                <a:tc>
+                  <a:txBody>
+                    <a:bodyPr/>
+                    <a:lstStyle/>
+                    <a:p>
+                      <a:pPr algn="ctr">
+                        <a:buNone/>
+                      </a:pPr>
+                      <a:r>
+                        <a:rPr lang="es-ES" sz="900">
                           <a:effectLst/>
                           <a:latin typeface="Times New Roman" panose="02020603050405020304" pitchFamily="18" charset="0"/>
                           <a:ea typeface="Times New Roman" panose="02020603050405020304" pitchFamily="18" charset="0"/>
@@ -6701,121 +7090,157 @@
                         </a:rPr>
                         <a:t>6.00</a:t>
                       </a:r>
-                    </a:p>
-                  </a:txBody>
-                  <a:tcPr marL="68580" marR="68580" marT="0" marB="0">
-                    <a:noFill/>
-                  </a:tcPr>
-                </a:tc>
-                <a:tc>
-                  <a:txBody>
-                    <a:bodyPr/>
-                    <a:lstStyle/>
-                    <a:p>
-                      <a:pPr algn="ctr">
-                        <a:buNone/>
-                      </a:pPr>
-                      <a:r>
-                        <a:rPr lang="es-ES_tradnl" sz="900" dirty="0">
+                      <a:endParaRPr lang="de-DE" sz="1200">
+                        <a:effectLst/>
+                        <a:latin typeface="Times New Roman" panose="02020603050405020304" pitchFamily="18" charset="0"/>
+                        <a:ea typeface="Times New Roman" panose="02020603050405020304" pitchFamily="18" charset="0"/>
+                        <a:cs typeface="Times New Roman" panose="02020603050405020304" pitchFamily="18" charset="0"/>
+                      </a:endParaRPr>
+                    </a:p>
+                  </a:txBody>
+                  <a:tcPr marL="68580" marR="68580" marT="0" marB="0">
+                    <a:noFill/>
+                  </a:tcPr>
+                </a:tc>
+                <a:tc>
+                  <a:txBody>
+                    <a:bodyPr/>
+                    <a:lstStyle/>
+                    <a:p>
+                      <a:pPr algn="ctr">
+                        <a:buNone/>
+                      </a:pPr>
+                      <a:r>
+                        <a:rPr lang="es-ES" sz="900">
                           <a:effectLst/>
                           <a:latin typeface="Times New Roman" panose="02020603050405020304" pitchFamily="18" charset="0"/>
                           <a:ea typeface="Times New Roman" panose="02020603050405020304" pitchFamily="18" charset="0"/>
                           <a:cs typeface="Times New Roman" panose="02020603050405020304" pitchFamily="18" charset="0"/>
                         </a:rPr>
-                        <a:t>15.64</a:t>
-                      </a:r>
-                    </a:p>
-                  </a:txBody>
-                  <a:tcPr marL="68580" marR="68580" marT="0" marB="0">
-                    <a:noFill/>
-                  </a:tcPr>
-                </a:tc>
-                <a:tc>
-                  <a:txBody>
-                    <a:bodyPr/>
-                    <a:lstStyle/>
-                    <a:p>
-                      <a:pPr algn="ctr">
-                        <a:buNone/>
-                      </a:pPr>
-                      <a:r>
-                        <a:rPr lang="es-ES_tradnl" sz="900" dirty="0">
+                        <a:t>40.06</a:t>
+                      </a:r>
+                      <a:endParaRPr lang="de-DE" sz="1200">
+                        <a:effectLst/>
+                        <a:latin typeface="Times New Roman" panose="02020603050405020304" pitchFamily="18" charset="0"/>
+                        <a:ea typeface="Times New Roman" panose="02020603050405020304" pitchFamily="18" charset="0"/>
+                        <a:cs typeface="Times New Roman" panose="02020603050405020304" pitchFamily="18" charset="0"/>
+                      </a:endParaRPr>
+                    </a:p>
+                  </a:txBody>
+                  <a:tcPr marL="68580" marR="68580" marT="0" marB="0">
+                    <a:noFill/>
+                  </a:tcPr>
+                </a:tc>
+                <a:tc>
+                  <a:txBody>
+                    <a:bodyPr/>
+                    <a:lstStyle/>
+                    <a:p>
+                      <a:pPr algn="ctr">
+                        <a:buNone/>
+                      </a:pPr>
+                      <a:r>
+                        <a:rPr lang="es-ES" sz="900">
                           <a:effectLst/>
                           <a:latin typeface="Times New Roman" panose="02020603050405020304" pitchFamily="18" charset="0"/>
                           <a:ea typeface="Times New Roman" panose="02020603050405020304" pitchFamily="18" charset="0"/>
                           <a:cs typeface="Times New Roman" panose="02020603050405020304" pitchFamily="18" charset="0"/>
                         </a:rPr>
-                        <a:t>65.03</a:t>
-                      </a:r>
-                    </a:p>
-                  </a:txBody>
-                  <a:tcPr marL="68580" marR="68580" marT="0" marB="0">
-                    <a:noFill/>
-                  </a:tcPr>
-                </a:tc>
-                <a:tc>
-                  <a:txBody>
-                    <a:bodyPr/>
-                    <a:lstStyle/>
-                    <a:p>
-                      <a:pPr algn="ctr">
-                        <a:buNone/>
-                      </a:pPr>
-                      <a:r>
-                        <a:rPr lang="es-ES_tradnl" sz="900" dirty="0">
+                        <a:t>78.20</a:t>
+                      </a:r>
+                      <a:endParaRPr lang="de-DE" sz="1200">
+                        <a:effectLst/>
+                        <a:latin typeface="Times New Roman" panose="02020603050405020304" pitchFamily="18" charset="0"/>
+                        <a:ea typeface="Times New Roman" panose="02020603050405020304" pitchFamily="18" charset="0"/>
+                        <a:cs typeface="Times New Roman" panose="02020603050405020304" pitchFamily="18" charset="0"/>
+                      </a:endParaRPr>
+                    </a:p>
+                  </a:txBody>
+                  <a:tcPr marL="68580" marR="68580" marT="0" marB="0">
+                    <a:noFill/>
+                  </a:tcPr>
+                </a:tc>
+                <a:tc>
+                  <a:txBody>
+                    <a:bodyPr/>
+                    <a:lstStyle/>
+                    <a:p>
+                      <a:pPr algn="ctr">
+                        <a:buNone/>
+                      </a:pPr>
+                      <a:r>
+                        <a:rPr lang="es-ES" sz="900">
                           <a:effectLst/>
                           <a:latin typeface="Times New Roman" panose="02020603050405020304" pitchFamily="18" charset="0"/>
                           <a:ea typeface="Times New Roman" panose="02020603050405020304" pitchFamily="18" charset="0"/>
                           <a:cs typeface="Times New Roman" panose="02020603050405020304" pitchFamily="18" charset="0"/>
                         </a:rPr>
-                        <a:t>373.37</a:t>
-                      </a:r>
-                    </a:p>
-                  </a:txBody>
-                  <a:tcPr marL="68580" marR="68580" marT="0" marB="0">
-                    <a:noFill/>
-                  </a:tcPr>
-                </a:tc>
-                <a:tc>
-                  <a:txBody>
-                    <a:bodyPr/>
-                    <a:lstStyle/>
-                    <a:p>
-                      <a:pPr algn="ctr">
-                        <a:buNone/>
-                      </a:pPr>
-                      <a:r>
-                        <a:rPr lang="es-ES_tradnl" sz="900" dirty="0">
+                        <a:t>820.34</a:t>
+                      </a:r>
+                      <a:endParaRPr lang="de-DE" sz="1200">
+                        <a:effectLst/>
+                        <a:latin typeface="Times New Roman" panose="02020603050405020304" pitchFamily="18" charset="0"/>
+                        <a:ea typeface="Times New Roman" panose="02020603050405020304" pitchFamily="18" charset="0"/>
+                        <a:cs typeface="Times New Roman" panose="02020603050405020304" pitchFamily="18" charset="0"/>
+                      </a:endParaRPr>
+                    </a:p>
+                  </a:txBody>
+                  <a:tcPr marL="68580" marR="68580" marT="0" marB="0">
+                    <a:noFill/>
+                  </a:tcPr>
+                </a:tc>
+                <a:tc>
+                  <a:txBody>
+                    <a:bodyPr/>
+                    <a:lstStyle/>
+                    <a:p>
+                      <a:pPr algn="ctr">
+                        <a:buNone/>
+                      </a:pPr>
+                      <a:r>
+                        <a:rPr lang="es-ES" sz="900">
                           <a:effectLst/>
                           <a:latin typeface="Times New Roman" panose="02020603050405020304" pitchFamily="18" charset="0"/>
                           <a:ea typeface="Times New Roman" panose="02020603050405020304" pitchFamily="18" charset="0"/>
                           <a:cs typeface="Times New Roman" panose="02020603050405020304" pitchFamily="18" charset="0"/>
                         </a:rPr>
-                        <a:t>78.00</a:t>
-                      </a:r>
-                    </a:p>
-                  </a:txBody>
-                  <a:tcPr marL="68580" marR="68580" marT="0" marB="0">
-                    <a:noFill/>
-                  </a:tcPr>
-                </a:tc>
-                <a:tc>
-                  <a:txBody>
-                    <a:bodyPr/>
-                    <a:lstStyle/>
-                    <a:p>
-                      <a:pPr algn="ctr">
-                        <a:buNone/>
-                      </a:pPr>
-                      <a:r>
-                        <a:rPr lang="es-ES_tradnl" sz="900" dirty="0">
+                        <a:t>56.00</a:t>
+                      </a:r>
+                      <a:endParaRPr lang="de-DE" sz="1200">
+                        <a:effectLst/>
+                        <a:latin typeface="Times New Roman" panose="02020603050405020304" pitchFamily="18" charset="0"/>
+                        <a:ea typeface="Times New Roman" panose="02020603050405020304" pitchFamily="18" charset="0"/>
+                        <a:cs typeface="Times New Roman" panose="02020603050405020304" pitchFamily="18" charset="0"/>
+                      </a:endParaRPr>
+                    </a:p>
+                  </a:txBody>
+                  <a:tcPr marL="68580" marR="68580" marT="0" marB="0">
+                    <a:noFill/>
+                  </a:tcPr>
+                </a:tc>
+                <a:tc>
+                  <a:txBody>
+                    <a:bodyPr/>
+                    <a:lstStyle/>
+                    <a:p>
+                      <a:pPr algn="ctr">
+                        <a:buNone/>
+                      </a:pPr>
+                      <a:r>
+                        <a:rPr lang="es-ES" sz="900">
                           <a:effectLst/>
                           <a:latin typeface="Times New Roman" panose="02020603050405020304" pitchFamily="18" charset="0"/>
                           <a:ea typeface="Times New Roman" panose="02020603050405020304" pitchFamily="18" charset="0"/>
                           <a:cs typeface="Times New Roman" panose="02020603050405020304" pitchFamily="18" charset="0"/>
                         </a:rPr>
-                        <a:t>10.00</a:t>
-                      </a:r>
+                        <a:t>6.00</a:t>
+                      </a:r>
+                      <a:endParaRPr lang="de-DE" sz="1200">
+                        <a:effectLst/>
+                        <a:latin typeface="Times New Roman" panose="02020603050405020304" pitchFamily="18" charset="0"/>
+                        <a:ea typeface="Times New Roman" panose="02020603050405020304" pitchFamily="18" charset="0"/>
+                        <a:cs typeface="Times New Roman" panose="02020603050405020304" pitchFamily="18" charset="0"/>
+                      </a:endParaRPr>
                     </a:p>
                   </a:txBody>
                   <a:tcPr marL="68580" marR="68580" marT="0" marB="0">
@@ -6839,7 +7264,7 @@
                         </a:rPr>
                         <a:t>3.44</a:t>
                       </a:r>
-                      <a:endParaRPr lang="de-DE" sz="900">
+                      <a:endParaRPr lang="de-DE" sz="1200">
                         <a:effectLst/>
                         <a:latin typeface="Times New Roman" panose="02020603050405020304" pitchFamily="18" charset="0"/>
                         <a:ea typeface="Times New Roman" panose="02020603050405020304" pitchFamily="18" charset="0"/>
@@ -6868,7 +7293,7 @@
                         </a:rPr>
                         <a:t>70.47</a:t>
                       </a:r>
-                      <a:endParaRPr lang="de-DE" sz="900">
+                      <a:endParaRPr lang="de-DE" sz="1200">
                         <a:effectLst/>
                         <a:latin typeface="Times New Roman" panose="02020603050405020304" pitchFamily="18" charset="0"/>
                         <a:ea typeface="Times New Roman" panose="02020603050405020304" pitchFamily="18" charset="0"/>
@@ -6897,7 +7322,7 @@
                         </a:rPr>
                         <a:t>17.86</a:t>
                       </a:r>
-                      <a:endParaRPr lang="de-DE" sz="900">
+                      <a:endParaRPr lang="de-DE" sz="1200">
                         <a:effectLst/>
                         <a:latin typeface="Times New Roman" panose="02020603050405020304" pitchFamily="18" charset="0"/>
                         <a:ea typeface="Times New Roman" panose="02020603050405020304" pitchFamily="18" charset="0"/>
@@ -6926,7 +7351,7 @@
                         </a:rPr>
                         <a:t>33.75</a:t>
                       </a:r>
-                      <a:endParaRPr lang="de-DE" sz="900">
+                      <a:endParaRPr lang="de-DE" sz="1200">
                         <a:effectLst/>
                         <a:latin typeface="Times New Roman" panose="02020603050405020304" pitchFamily="18" charset="0"/>
                         <a:ea typeface="Times New Roman" panose="02020603050405020304" pitchFamily="18" charset="0"/>
@@ -6953,9 +7378,9 @@
                           <a:ea typeface="Times New Roman" panose="02020603050405020304" pitchFamily="18" charset="0"/>
                           <a:cs typeface="Times New Roman" panose="02020603050405020304" pitchFamily="18" charset="0"/>
                         </a:rPr>
-                        <a:t>3.44</a:t>
-                      </a:r>
-                      <a:endParaRPr lang="de-DE" sz="900" dirty="0">
+                        <a:t>NaN</a:t>
+                      </a:r>
+                      <a:endParaRPr lang="de-DE" sz="1200" dirty="0">
                         <a:effectLst/>
                         <a:latin typeface="Times New Roman" panose="02020603050405020304" pitchFamily="18" charset="0"/>
                         <a:ea typeface="Times New Roman" panose="02020603050405020304" pitchFamily="18" charset="0"/>
@@ -7799,8 +8224,8 @@
         </p:nvSpPr>
         <p:spPr>
           <a:xfrm>
-            <a:off x="561487" y="2465822"/>
-            <a:ext cx="2688490" cy="1255728"/>
+            <a:off x="561486" y="2619611"/>
+            <a:ext cx="2854375" cy="1255728"/>
           </a:xfrm>
           <a:prstGeom prst="rect">
             <a:avLst/>
@@ -7815,44 +8240,12 @@
           <a:p>
             <a:pPr algn="l"/>
             <a:r>
-              <a:rPr lang="es-ES_tradnl" sz="1400" dirty="0"/>
-              <a:t>El sistema mantiene estabilidad en condiciones nominales, pero presenta degradaciones severas para estados iniciales extremos, incluyendo pérdida de seguimiento y divergencia.</a:t>
+              <a:rPr lang="es-ES_tradnl" sz="1200" dirty="0"/>
+              <a:t>El sistema mantiene estabilidad en condiciones nominales (o1ini = 0°), con un RMSE de ≈ 29.93°. Sin embargo, el error aumenta hasta ≈ 40.40° (o1ini = 90°) y ≈ 78.20° (o1ini = -90°), evidenciando una fuerte degradación y pérdida de seguimiento en condiciones extremas.</a:t>
             </a:r>
           </a:p>
         </p:txBody>
       </p:sp>
-      <p:pic>
-        <p:nvPicPr>
-          <p:cNvPr id="5" name="Onlinebild-Platzhalter 4">
-            <a:extLst>
-              <a:ext uri="{FF2B5EF4-FFF2-40B4-BE49-F238E27FC236}">
-                <a16:creationId xmlns:a16="http://schemas.microsoft.com/office/drawing/2014/main" id="{F0138DB2-57A3-BE50-8C27-E9A1D6F32F80}"/>
-              </a:ext>
-            </a:extLst>
-          </p:cNvPr>
-          <p:cNvPicPr>
-            <a:picLocks noGrp="1" noChangeAspect="1"/>
-          </p:cNvPicPr>
-          <p:nvPr>
-            <p:ph type="clipArt" sz="quarter" idx="15"/>
-          </p:nvPr>
-        </p:nvPicPr>
-        <p:blipFill>
-          <a:blip r:embed="rId2"/>
-          <a:stretch>
-            <a:fillRect/>
-          </a:stretch>
-        </p:blipFill>
-        <p:spPr>
-          <a:xfrm>
-            <a:off x="3431823" y="2078038"/>
-            <a:ext cx="7394222" cy="2505075"/>
-          </a:xfrm>
-          <a:prstGeom prst="rect">
-            <a:avLst/>
-          </a:prstGeom>
-        </p:spPr>
-      </p:pic>
       <p:sp>
         <p:nvSpPr>
           <p:cNvPr id="2" name="Fußzeilenplatzhalter 2">
@@ -7982,6 +8375,38 @@
           </a:p>
         </p:txBody>
       </p:sp>
+      <p:pic>
+        <p:nvPicPr>
+          <p:cNvPr id="9" name="Onlinebild-Platzhalter 8">
+            <a:extLst>
+              <a:ext uri="{FF2B5EF4-FFF2-40B4-BE49-F238E27FC236}">
+                <a16:creationId xmlns:a16="http://schemas.microsoft.com/office/drawing/2014/main" id="{8C741F7E-2B84-80CB-2644-C0FF69BE331C}"/>
+              </a:ext>
+            </a:extLst>
+          </p:cNvPr>
+          <p:cNvPicPr>
+            <a:picLocks noGrp="1" noChangeAspect="1"/>
+          </p:cNvPicPr>
+          <p:nvPr>
+            <p:ph type="clipArt" sz="quarter" idx="15"/>
+          </p:nvPr>
+        </p:nvPicPr>
+        <p:blipFill>
+          <a:blip r:embed="rId2"/>
+          <a:stretch>
+            <a:fillRect/>
+          </a:stretch>
+        </p:blipFill>
+        <p:spPr>
+          <a:xfrm>
+            <a:off x="3415862" y="2078038"/>
+            <a:ext cx="6994505" cy="2505075"/>
+          </a:xfrm>
+          <a:prstGeom prst="rect">
+            <a:avLst/>
+          </a:prstGeom>
+        </p:spPr>
+      </p:pic>
     </p:spTree>
     <p:extLst>
       <p:ext uri="{BB962C8B-B14F-4D97-AF65-F5344CB8AC3E}">
@@ -8404,7 +8829,7 @@
             <p:ph sz="quarter" idx="14"/>
             <p:extLst>
               <p:ext uri="{D42A27DB-BD31-4B8C-83A1-F6EECF244321}">
-                <p14:modId xmlns:p14="http://schemas.microsoft.com/office/powerpoint/2010/main" val="2394073669"/>
+                <p14:modId xmlns:p14="http://schemas.microsoft.com/office/powerpoint/2010/main" val="3522575424"/>
               </p:ext>
             </p:extLst>
           </p:nvPr>
@@ -9434,7 +9859,7 @@
                         <a:buNone/>
                       </a:pPr>
                       <a:r>
-                        <a:rPr lang="es-ES_tradnl" sz="900" dirty="0">
+                        <a:rPr lang="es-ES" sz="900">
                           <a:effectLst/>
                           <a:latin typeface="Times New Roman" panose="02020603050405020304" pitchFamily="18" charset="0"/>
                           <a:ea typeface="Times New Roman" panose="02020603050405020304" pitchFamily="18" charset="0"/>
@@ -9442,9 +9867,15 @@
                         </a:rPr>
                         <a:t>0.00</a:t>
                       </a:r>
-                    </a:p>
-                  </a:txBody>
-                  <a:tcPr marL="68580" marR="68580" marT="0" marB="0" anchor="ctr">
+                      <a:endParaRPr lang="de-DE" sz="900">
+                        <a:effectLst/>
+                        <a:latin typeface="Times New Roman" panose="02020603050405020304" pitchFamily="18" charset="0"/>
+                        <a:ea typeface="Times New Roman" panose="02020603050405020304" pitchFamily="18" charset="0"/>
+                        <a:cs typeface="Times New Roman" panose="02020603050405020304" pitchFamily="18" charset="0"/>
+                      </a:endParaRPr>
+                    </a:p>
+                  </a:txBody>
+                  <a:tcPr marL="68580" marR="68580" marT="0" marB="0">
                     <a:lnT w="12700" cap="flat" cmpd="sng" algn="ctr">
                       <a:solidFill>
                         <a:schemeClr val="tx1"/>
@@ -9466,17 +9897,23 @@
                         <a:buNone/>
                       </a:pPr>
                       <a:r>
-                        <a:rPr lang="es-ES_tradnl" sz="900" dirty="0">
+                        <a:rPr lang="es-ES" sz="900">
                           <a:effectLst/>
                           <a:latin typeface="Times New Roman" panose="02020603050405020304" pitchFamily="18" charset="0"/>
                           <a:ea typeface="Times New Roman" panose="02020603050405020304" pitchFamily="18" charset="0"/>
                           <a:cs typeface="Times New Roman" panose="02020603050405020304" pitchFamily="18" charset="0"/>
                         </a:rPr>
-                        <a:t>59.94</a:t>
-                      </a:r>
-                    </a:p>
-                  </a:txBody>
-                  <a:tcPr marL="68580" marR="68580" marT="0" marB="0" anchor="ctr">
+                        <a:t>74.75</a:t>
+                      </a:r>
+                      <a:endParaRPr lang="de-DE" sz="900">
+                        <a:effectLst/>
+                        <a:latin typeface="Times New Roman" panose="02020603050405020304" pitchFamily="18" charset="0"/>
+                        <a:ea typeface="Times New Roman" panose="02020603050405020304" pitchFamily="18" charset="0"/>
+                        <a:cs typeface="Times New Roman" panose="02020603050405020304" pitchFamily="18" charset="0"/>
+                      </a:endParaRPr>
+                    </a:p>
+                  </a:txBody>
+                  <a:tcPr marL="68580" marR="68580" marT="0" marB="0">
                     <a:lnT w="12700" cap="flat" cmpd="sng" algn="ctr">
                       <a:solidFill>
                         <a:schemeClr val="tx1"/>
@@ -9498,17 +9935,23 @@
                         <a:buNone/>
                       </a:pPr>
                       <a:r>
-                        <a:rPr lang="es-ES_tradnl" sz="900" dirty="0">
+                        <a:rPr lang="es-ES" sz="900">
                           <a:effectLst/>
                           <a:latin typeface="Times New Roman" panose="02020603050405020304" pitchFamily="18" charset="0"/>
                           <a:ea typeface="Times New Roman" panose="02020603050405020304" pitchFamily="18" charset="0"/>
                           <a:cs typeface="Times New Roman" panose="02020603050405020304" pitchFamily="18" charset="0"/>
                         </a:rPr>
-                        <a:t>25.92</a:t>
-                      </a:r>
-                    </a:p>
-                  </a:txBody>
-                  <a:tcPr marL="68580" marR="68580" marT="0" marB="0" anchor="ctr">
+                        <a:t>30.62</a:t>
+                      </a:r>
+                      <a:endParaRPr lang="de-DE" sz="900">
+                        <a:effectLst/>
+                        <a:latin typeface="Times New Roman" panose="02020603050405020304" pitchFamily="18" charset="0"/>
+                        <a:ea typeface="Times New Roman" panose="02020603050405020304" pitchFamily="18" charset="0"/>
+                        <a:cs typeface="Times New Roman" panose="02020603050405020304" pitchFamily="18" charset="0"/>
+                      </a:endParaRPr>
+                    </a:p>
+                  </a:txBody>
+                  <a:tcPr marL="68580" marR="68580" marT="0" marB="0">
                     <a:lnT w="12700" cap="flat" cmpd="sng" algn="ctr">
                       <a:solidFill>
                         <a:schemeClr val="tx1"/>
@@ -9530,17 +9973,23 @@
                         <a:buNone/>
                       </a:pPr>
                       <a:r>
-                        <a:rPr lang="es-ES_tradnl" sz="900" dirty="0">
+                        <a:rPr lang="es-ES" sz="900">
                           <a:effectLst/>
                           <a:latin typeface="Times New Roman" panose="02020603050405020304" pitchFamily="18" charset="0"/>
                           <a:ea typeface="Times New Roman" panose="02020603050405020304" pitchFamily="18" charset="0"/>
                           <a:cs typeface="Times New Roman" panose="02020603050405020304" pitchFamily="18" charset="0"/>
                         </a:rPr>
-                        <a:t>57.60</a:t>
-                      </a:r>
-                    </a:p>
-                  </a:txBody>
-                  <a:tcPr marL="68580" marR="68580" marT="0" marB="0" anchor="ctr">
+                        <a:t>68.05</a:t>
+                      </a:r>
+                      <a:endParaRPr lang="de-DE" sz="900">
+                        <a:effectLst/>
+                        <a:latin typeface="Times New Roman" panose="02020603050405020304" pitchFamily="18" charset="0"/>
+                        <a:ea typeface="Times New Roman" panose="02020603050405020304" pitchFamily="18" charset="0"/>
+                        <a:cs typeface="Times New Roman" panose="02020603050405020304" pitchFamily="18" charset="0"/>
+                      </a:endParaRPr>
+                    </a:p>
+                  </a:txBody>
+                  <a:tcPr marL="68580" marR="68580" marT="0" marB="0">
                     <a:lnT w="12700" cap="flat" cmpd="sng" algn="ctr">
                       <a:solidFill>
                         <a:schemeClr val="tx1"/>
@@ -9562,7 +10011,7 @@
                         <a:buNone/>
                       </a:pPr>
                       <a:r>
-                        <a:rPr lang="es-ES_tradnl" sz="900" dirty="0">
+                        <a:rPr lang="es-ES" sz="900">
                           <a:effectLst/>
                           <a:latin typeface="Times New Roman" panose="02020603050405020304" pitchFamily="18" charset="0"/>
                           <a:ea typeface="Times New Roman" panose="02020603050405020304" pitchFamily="18" charset="0"/>
@@ -9570,9 +10019,15 @@
                         </a:rPr>
                         <a:t>6.00</a:t>
                       </a:r>
-                    </a:p>
-                  </a:txBody>
-                  <a:tcPr marL="68580" marR="68580" marT="0" marB="0" anchor="ctr">
+                      <a:endParaRPr lang="de-DE" sz="900">
+                        <a:effectLst/>
+                        <a:latin typeface="Times New Roman" panose="02020603050405020304" pitchFamily="18" charset="0"/>
+                        <a:ea typeface="Times New Roman" panose="02020603050405020304" pitchFamily="18" charset="0"/>
+                        <a:cs typeface="Times New Roman" panose="02020603050405020304" pitchFamily="18" charset="0"/>
+                      </a:endParaRPr>
+                    </a:p>
+                  </a:txBody>
+                  <a:tcPr marL="68580" marR="68580" marT="0" marB="0">
                     <a:lnT w="12700" cap="flat" cmpd="sng" algn="ctr">
                       <a:solidFill>
                         <a:schemeClr val="tx1"/>
@@ -9594,17 +10049,23 @@
                         <a:buNone/>
                       </a:pPr>
                       <a:r>
-                        <a:rPr lang="es-ES_tradnl" sz="900" dirty="0">
+                        <a:rPr lang="es-ES" sz="900">
                           <a:effectLst/>
                           <a:latin typeface="Times New Roman" panose="02020603050405020304" pitchFamily="18" charset="0"/>
                           <a:ea typeface="Times New Roman" panose="02020603050405020304" pitchFamily="18" charset="0"/>
                           <a:cs typeface="Times New Roman" panose="02020603050405020304" pitchFamily="18" charset="0"/>
                         </a:rPr>
-                        <a:t>14.94</a:t>
-                      </a:r>
-                    </a:p>
-                  </a:txBody>
-                  <a:tcPr marL="68580" marR="68580" marT="0" marB="0" anchor="ctr">
+                        <a:t>29.75</a:t>
+                      </a:r>
+                      <a:endParaRPr lang="de-DE" sz="900">
+                        <a:effectLst/>
+                        <a:latin typeface="Times New Roman" panose="02020603050405020304" pitchFamily="18" charset="0"/>
+                        <a:ea typeface="Times New Roman" panose="02020603050405020304" pitchFamily="18" charset="0"/>
+                        <a:cs typeface="Times New Roman" panose="02020603050405020304" pitchFamily="18" charset="0"/>
+                      </a:endParaRPr>
+                    </a:p>
+                  </a:txBody>
+                  <a:tcPr marL="68580" marR="68580" marT="0" marB="0">
                     <a:lnT w="12700" cap="flat" cmpd="sng" algn="ctr">
                       <a:solidFill>
                         <a:schemeClr val="tx1"/>
@@ -9626,17 +10087,23 @@
                         <a:buNone/>
                       </a:pPr>
                       <a:r>
-                        <a:rPr lang="es-ES_tradnl" sz="900" dirty="0">
+                        <a:rPr lang="es-ES" sz="900">
                           <a:effectLst/>
                           <a:latin typeface="Times New Roman" panose="02020603050405020304" pitchFamily="18" charset="0"/>
                           <a:ea typeface="Times New Roman" panose="02020603050405020304" pitchFamily="18" charset="0"/>
                           <a:cs typeface="Times New Roman" panose="02020603050405020304" pitchFamily="18" charset="0"/>
                         </a:rPr>
-                        <a:t>17.78</a:t>
-                      </a:r>
-                    </a:p>
-                  </a:txBody>
-                  <a:tcPr marL="68580" marR="68580" marT="0" marB="0" anchor="ctr">
+                        <a:t>29.93</a:t>
+                      </a:r>
+                      <a:endParaRPr lang="de-DE" sz="900">
+                        <a:effectLst/>
+                        <a:latin typeface="Times New Roman" panose="02020603050405020304" pitchFamily="18" charset="0"/>
+                        <a:ea typeface="Times New Roman" panose="02020603050405020304" pitchFamily="18" charset="0"/>
+                        <a:cs typeface="Times New Roman" panose="02020603050405020304" pitchFamily="18" charset="0"/>
+                      </a:endParaRPr>
+                    </a:p>
+                  </a:txBody>
+                  <a:tcPr marL="68580" marR="68580" marT="0" marB="0">
                     <a:lnT w="12700" cap="flat" cmpd="sng" algn="ctr">
                       <a:solidFill>
                         <a:schemeClr val="tx1"/>
@@ -9658,17 +10125,23 @@
                         <a:buNone/>
                       </a:pPr>
                       <a:r>
-                        <a:rPr lang="es-ES_tradnl" sz="900" dirty="0">
+                        <a:rPr lang="es-ES" sz="900">
                           <a:effectLst/>
                           <a:latin typeface="Times New Roman" panose="02020603050405020304" pitchFamily="18" charset="0"/>
                           <a:ea typeface="Times New Roman" panose="02020603050405020304" pitchFamily="18" charset="0"/>
                           <a:cs typeface="Times New Roman" panose="02020603050405020304" pitchFamily="18" charset="0"/>
                         </a:rPr>
-                        <a:t>271.98</a:t>
-                      </a:r>
-                    </a:p>
-                  </a:txBody>
-                  <a:tcPr marL="68580" marR="68580" marT="0" marB="0" anchor="ctr">
+                        <a:t>535.05</a:t>
+                      </a:r>
+                      <a:endParaRPr lang="de-DE" sz="900">
+                        <a:effectLst/>
+                        <a:latin typeface="Times New Roman" panose="02020603050405020304" pitchFamily="18" charset="0"/>
+                        <a:ea typeface="Times New Roman" panose="02020603050405020304" pitchFamily="18" charset="0"/>
+                        <a:cs typeface="Times New Roman" panose="02020603050405020304" pitchFamily="18" charset="0"/>
+                      </a:endParaRPr>
+                    </a:p>
+                  </a:txBody>
+                  <a:tcPr marL="68580" marR="68580" marT="0" marB="0">
                     <a:lnT w="12700" cap="flat" cmpd="sng" algn="ctr">
                       <a:solidFill>
                         <a:schemeClr val="tx1"/>
@@ -9690,17 +10163,23 @@
                         <a:buNone/>
                       </a:pPr>
                       <a:r>
-                        <a:rPr lang="es-ES_tradnl" sz="900" dirty="0">
+                        <a:rPr lang="es-ES" sz="900">
                           <a:effectLst/>
                           <a:latin typeface="Times New Roman" panose="02020603050405020304" pitchFamily="18" charset="0"/>
                           <a:ea typeface="Times New Roman" panose="02020603050405020304" pitchFamily="18" charset="0"/>
                           <a:cs typeface="Times New Roman" panose="02020603050405020304" pitchFamily="18" charset="0"/>
                         </a:rPr>
-                        <a:t>0.29</a:t>
-                      </a:r>
-                    </a:p>
-                  </a:txBody>
-                  <a:tcPr marL="68580" marR="68580" marT="0" marB="0" anchor="ctr">
+                        <a:t>0.28</a:t>
+                      </a:r>
+                      <a:endParaRPr lang="de-DE" sz="900">
+                        <a:effectLst/>
+                        <a:latin typeface="Times New Roman" panose="02020603050405020304" pitchFamily="18" charset="0"/>
+                        <a:ea typeface="Times New Roman" panose="02020603050405020304" pitchFamily="18" charset="0"/>
+                        <a:cs typeface="Times New Roman" panose="02020603050405020304" pitchFamily="18" charset="0"/>
+                      </a:endParaRPr>
+                    </a:p>
+                  </a:txBody>
+                  <a:tcPr marL="68580" marR="68580" marT="0" marB="0">
                     <a:lnT w="12700" cap="flat" cmpd="sng" algn="ctr">
                       <a:solidFill>
                         <a:schemeClr val="tx1"/>
@@ -9722,17 +10201,23 @@
                         <a:buNone/>
                       </a:pPr>
                       <a:r>
-                        <a:rPr lang="es-ES_tradnl" sz="900" dirty="0">
+                        <a:rPr lang="es-ES" sz="900">
                           <a:effectLst/>
                           <a:latin typeface="Times New Roman" panose="02020603050405020304" pitchFamily="18" charset="0"/>
                           <a:ea typeface="Times New Roman" panose="02020603050405020304" pitchFamily="18" charset="0"/>
                           <a:cs typeface="Times New Roman" panose="02020603050405020304" pitchFamily="18" charset="0"/>
                         </a:rPr>
-                        <a:t>124.00</a:t>
-                      </a:r>
-                    </a:p>
-                  </a:txBody>
-                  <a:tcPr marL="68580" marR="68580" marT="0" marB="0" anchor="ctr">
+                        <a:t>91.00</a:t>
+                      </a:r>
+                      <a:endParaRPr lang="de-DE" sz="900">
+                        <a:effectLst/>
+                        <a:latin typeface="Times New Roman" panose="02020603050405020304" pitchFamily="18" charset="0"/>
+                        <a:ea typeface="Times New Roman" panose="02020603050405020304" pitchFamily="18" charset="0"/>
+                        <a:cs typeface="Times New Roman" panose="02020603050405020304" pitchFamily="18" charset="0"/>
+                      </a:endParaRPr>
+                    </a:p>
+                  </a:txBody>
+                  <a:tcPr marL="68580" marR="68580" marT="0" marB="0">
                     <a:lnT w="12700" cap="flat" cmpd="sng" algn="ctr">
                       <a:solidFill>
                         <a:schemeClr val="tx1"/>
@@ -9912,7 +10397,7 @@
                           <a:ea typeface="Times New Roman" panose="02020603050405020304" pitchFamily="18" charset="0"/>
                           <a:cs typeface="Times New Roman" panose="02020603050405020304" pitchFamily="18" charset="0"/>
                         </a:rPr>
-                        <a:t>6.00</a:t>
+                        <a:t>20.41</a:t>
                       </a:r>
                       <a:endParaRPr lang="de-DE" sz="900">
                         <a:effectLst/>
@@ -9977,7 +10462,7 @@
                         <a:buNone/>
                       </a:pPr>
                       <a:r>
-                        <a:rPr lang="es-ES_tradnl" sz="900" dirty="0">
+                        <a:rPr lang="es-ES" sz="900">
                           <a:effectLst/>
                           <a:latin typeface="Times New Roman" panose="02020603050405020304" pitchFamily="18" charset="0"/>
                           <a:ea typeface="Times New Roman" panose="02020603050405020304" pitchFamily="18" charset="0"/>
@@ -9985,91 +10470,115 @@
                         </a:rPr>
                         <a:t>0.01</a:t>
                       </a:r>
-                    </a:p>
-                  </a:txBody>
-                  <a:tcPr marL="68580" marR="68580" marT="0" marB="0" anchor="ctr">
-                    <a:noFill/>
-                  </a:tcPr>
-                </a:tc>
-                <a:tc>
-                  <a:txBody>
-                    <a:bodyPr/>
-                    <a:lstStyle/>
-                    <a:p>
-                      <a:pPr algn="ctr">
-                        <a:buNone/>
-                      </a:pPr>
-                      <a:r>
-                        <a:rPr lang="es-ES_tradnl" sz="900" dirty="0">
+                      <a:endParaRPr lang="de-DE" sz="900">
+                        <a:effectLst/>
+                        <a:latin typeface="Times New Roman" panose="02020603050405020304" pitchFamily="18" charset="0"/>
+                        <a:ea typeface="Times New Roman" panose="02020603050405020304" pitchFamily="18" charset="0"/>
+                        <a:cs typeface="Times New Roman" panose="02020603050405020304" pitchFamily="18" charset="0"/>
+                      </a:endParaRPr>
+                    </a:p>
+                  </a:txBody>
+                  <a:tcPr marL="68580" marR="68580" marT="0" marB="0">
+                    <a:noFill/>
+                  </a:tcPr>
+                </a:tc>
+                <a:tc>
+                  <a:txBody>
+                    <a:bodyPr/>
+                    <a:lstStyle/>
+                    <a:p>
+                      <a:pPr algn="ctr">
+                        <a:buNone/>
+                      </a:pPr>
+                      <a:r>
+                        <a:rPr lang="es-ES" sz="900">
                           <a:effectLst/>
                           <a:latin typeface="Times New Roman" panose="02020603050405020304" pitchFamily="18" charset="0"/>
                           <a:ea typeface="Times New Roman" panose="02020603050405020304" pitchFamily="18" charset="0"/>
                           <a:cs typeface="Times New Roman" panose="02020603050405020304" pitchFamily="18" charset="0"/>
                         </a:rPr>
-                        <a:t>59.94</a:t>
-                      </a:r>
-                    </a:p>
-                  </a:txBody>
-                  <a:tcPr marL="68580" marR="68580" marT="0" marB="0" anchor="ctr">
-                    <a:noFill/>
-                  </a:tcPr>
-                </a:tc>
-                <a:tc>
-                  <a:txBody>
-                    <a:bodyPr/>
-                    <a:lstStyle/>
-                    <a:p>
-                      <a:pPr algn="ctr">
-                        <a:buNone/>
-                      </a:pPr>
-                      <a:r>
-                        <a:rPr lang="es-ES_tradnl" sz="900" dirty="0">
+                        <a:t>74.75</a:t>
+                      </a:r>
+                      <a:endParaRPr lang="de-DE" sz="900">
+                        <a:effectLst/>
+                        <a:latin typeface="Times New Roman" panose="02020603050405020304" pitchFamily="18" charset="0"/>
+                        <a:ea typeface="Times New Roman" panose="02020603050405020304" pitchFamily="18" charset="0"/>
+                        <a:cs typeface="Times New Roman" panose="02020603050405020304" pitchFamily="18" charset="0"/>
+                      </a:endParaRPr>
+                    </a:p>
+                  </a:txBody>
+                  <a:tcPr marL="68580" marR="68580" marT="0" marB="0">
+                    <a:noFill/>
+                  </a:tcPr>
+                </a:tc>
+                <a:tc>
+                  <a:txBody>
+                    <a:bodyPr/>
+                    <a:lstStyle/>
+                    <a:p>
+                      <a:pPr algn="ctr">
+                        <a:buNone/>
+                      </a:pPr>
+                      <a:r>
+                        <a:rPr lang="es-ES" sz="900">
                           <a:effectLst/>
                           <a:latin typeface="Times New Roman" panose="02020603050405020304" pitchFamily="18" charset="0"/>
                           <a:ea typeface="Times New Roman" panose="02020603050405020304" pitchFamily="18" charset="0"/>
                           <a:cs typeface="Times New Roman" panose="02020603050405020304" pitchFamily="18" charset="0"/>
                         </a:rPr>
-                        <a:t>27.64</a:t>
-                      </a:r>
-                    </a:p>
-                  </a:txBody>
-                  <a:tcPr marL="68580" marR="68580" marT="0" marB="0" anchor="ctr">
-                    <a:noFill/>
-                  </a:tcPr>
-                </a:tc>
-                <a:tc>
-                  <a:txBody>
-                    <a:bodyPr/>
-                    <a:lstStyle/>
-                    <a:p>
-                      <a:pPr algn="ctr">
-                        <a:buNone/>
-                      </a:pPr>
-                      <a:r>
-                        <a:rPr lang="es-ES_tradnl" sz="900" dirty="0">
+                        <a:t>31.07</a:t>
+                      </a:r>
+                      <a:endParaRPr lang="de-DE" sz="900">
+                        <a:effectLst/>
+                        <a:latin typeface="Times New Roman" panose="02020603050405020304" pitchFamily="18" charset="0"/>
+                        <a:ea typeface="Times New Roman" panose="02020603050405020304" pitchFamily="18" charset="0"/>
+                        <a:cs typeface="Times New Roman" panose="02020603050405020304" pitchFamily="18" charset="0"/>
+                      </a:endParaRPr>
+                    </a:p>
+                  </a:txBody>
+                  <a:tcPr marL="68580" marR="68580" marT="0" marB="0">
+                    <a:noFill/>
+                  </a:tcPr>
+                </a:tc>
+                <a:tc>
+                  <a:txBody>
+                    <a:bodyPr/>
+                    <a:lstStyle/>
+                    <a:p>
+                      <a:pPr algn="ctr">
+                        <a:buNone/>
+                      </a:pPr>
+                      <a:r>
+                        <a:rPr lang="es-ES" sz="900">
                           <a:effectLst/>
                           <a:latin typeface="Times New Roman" panose="02020603050405020304" pitchFamily="18" charset="0"/>
                           <a:ea typeface="Times New Roman" panose="02020603050405020304" pitchFamily="18" charset="0"/>
                           <a:cs typeface="Times New Roman" panose="02020603050405020304" pitchFamily="18" charset="0"/>
                         </a:rPr>
-                        <a:t>61.43</a:t>
-                      </a:r>
-                    </a:p>
-                  </a:txBody>
-                  <a:tcPr marL="68580" marR="68580" marT="0" marB="0" anchor="ctr">
-                    <a:noFill/>
-                  </a:tcPr>
-                </a:tc>
-                <a:tc>
-                  <a:txBody>
-                    <a:bodyPr/>
-                    <a:lstStyle/>
-                    <a:p>
-                      <a:pPr algn="ctr">
-                        <a:buNone/>
-                      </a:pPr>
-                      <a:r>
-                        <a:rPr lang="es-ES_tradnl" sz="900" dirty="0">
+                        <a:t>69.05</a:t>
+                      </a:r>
+                      <a:endParaRPr lang="de-DE" sz="900">
+                        <a:effectLst/>
+                        <a:latin typeface="Times New Roman" panose="02020603050405020304" pitchFamily="18" charset="0"/>
+                        <a:ea typeface="Times New Roman" panose="02020603050405020304" pitchFamily="18" charset="0"/>
+                        <a:cs typeface="Times New Roman" panose="02020603050405020304" pitchFamily="18" charset="0"/>
+                      </a:endParaRPr>
+                    </a:p>
+                  </a:txBody>
+                  <a:tcPr marL="68580" marR="68580" marT="0" marB="0">
+                    <a:noFill/>
+                  </a:tcPr>
+                </a:tc>
+                <a:tc>
+                  <a:txBody>
+                    <a:bodyPr/>
+                    <a:lstStyle/>
+                    <a:p>
+                      <a:pPr algn="ctr">
+                        <a:buNone/>
+                      </a:pPr>
+                      <a:r>
+                        <a:rPr lang="es-ES" sz="900">
                           <a:effectLst/>
                           <a:latin typeface="Times New Roman" panose="02020603050405020304" pitchFamily="18" charset="0"/>
                           <a:ea typeface="Times New Roman" panose="02020603050405020304" pitchFamily="18" charset="0"/>
@@ -10077,124 +10586,160 @@
                         </a:rPr>
                         <a:t>6.00</a:t>
                       </a:r>
-                    </a:p>
-                  </a:txBody>
-                  <a:tcPr marL="68580" marR="68580" marT="0" marB="0" anchor="ctr">
-                    <a:noFill/>
-                  </a:tcPr>
-                </a:tc>
-                <a:tc>
-                  <a:txBody>
-                    <a:bodyPr/>
-                    <a:lstStyle/>
-                    <a:p>
-                      <a:pPr algn="ctr">
-                        <a:buNone/>
-                      </a:pPr>
-                      <a:r>
-                        <a:rPr lang="es-ES_tradnl" sz="900" dirty="0">
+                      <a:endParaRPr lang="de-DE" sz="900">
+                        <a:effectLst/>
+                        <a:latin typeface="Times New Roman" panose="02020603050405020304" pitchFamily="18" charset="0"/>
+                        <a:ea typeface="Times New Roman" panose="02020603050405020304" pitchFamily="18" charset="0"/>
+                        <a:cs typeface="Times New Roman" panose="02020603050405020304" pitchFamily="18" charset="0"/>
+                      </a:endParaRPr>
+                    </a:p>
+                  </a:txBody>
+                  <a:tcPr marL="68580" marR="68580" marT="0" marB="0">
+                    <a:noFill/>
+                  </a:tcPr>
+                </a:tc>
+                <a:tc>
+                  <a:txBody>
+                    <a:bodyPr/>
+                    <a:lstStyle/>
+                    <a:p>
+                      <a:pPr algn="ctr">
+                        <a:buNone/>
+                      </a:pPr>
+                      <a:r>
+                        <a:rPr lang="es-ES" sz="900">
                           <a:effectLst/>
                           <a:latin typeface="Times New Roman" panose="02020603050405020304" pitchFamily="18" charset="0"/>
                           <a:ea typeface="Times New Roman" panose="02020603050405020304" pitchFamily="18" charset="0"/>
                           <a:cs typeface="Times New Roman" panose="02020603050405020304" pitchFamily="18" charset="0"/>
                         </a:rPr>
-                        <a:t>14.94</a:t>
-                      </a:r>
-                    </a:p>
-                  </a:txBody>
-                  <a:tcPr marL="68580" marR="68580" marT="0" marB="0" anchor="ctr">
-                    <a:noFill/>
-                  </a:tcPr>
-                </a:tc>
-                <a:tc>
-                  <a:txBody>
-                    <a:bodyPr/>
-                    <a:lstStyle/>
-                    <a:p>
-                      <a:pPr algn="ctr">
-                        <a:buNone/>
-                      </a:pPr>
-                      <a:r>
-                        <a:rPr lang="es-ES_tradnl" sz="900" dirty="0">
+                        <a:t>29.75</a:t>
+                      </a:r>
+                      <a:endParaRPr lang="de-DE" sz="900">
+                        <a:effectLst/>
+                        <a:latin typeface="Times New Roman" panose="02020603050405020304" pitchFamily="18" charset="0"/>
+                        <a:ea typeface="Times New Roman" panose="02020603050405020304" pitchFamily="18" charset="0"/>
+                        <a:cs typeface="Times New Roman" panose="02020603050405020304" pitchFamily="18" charset="0"/>
+                      </a:endParaRPr>
+                    </a:p>
+                  </a:txBody>
+                  <a:tcPr marL="68580" marR="68580" marT="0" marB="0">
+                    <a:noFill/>
+                  </a:tcPr>
+                </a:tc>
+                <a:tc>
+                  <a:txBody>
+                    <a:bodyPr/>
+                    <a:lstStyle/>
+                    <a:p>
+                      <a:pPr algn="ctr">
+                        <a:buNone/>
+                      </a:pPr>
+                      <a:r>
+                        <a:rPr lang="es-ES" sz="900">
                           <a:effectLst/>
                           <a:latin typeface="Times New Roman" panose="02020603050405020304" pitchFamily="18" charset="0"/>
                           <a:ea typeface="Times New Roman" panose="02020603050405020304" pitchFamily="18" charset="0"/>
                           <a:cs typeface="Times New Roman" panose="02020603050405020304" pitchFamily="18" charset="0"/>
                         </a:rPr>
-                        <a:t>18.02</a:t>
-                      </a:r>
-                    </a:p>
-                  </a:txBody>
-                  <a:tcPr marL="68580" marR="68580" marT="0" marB="0" anchor="ctr">
-                    <a:noFill/>
-                  </a:tcPr>
-                </a:tc>
-                <a:tc>
-                  <a:txBody>
-                    <a:bodyPr/>
-                    <a:lstStyle/>
-                    <a:p>
-                      <a:pPr algn="ctr">
-                        <a:buNone/>
-                      </a:pPr>
-                      <a:r>
-                        <a:rPr lang="es-ES_tradnl" sz="900" dirty="0">
+                        <a:t>30.00</a:t>
+                      </a:r>
+                      <a:endParaRPr lang="de-DE" sz="900">
+                        <a:effectLst/>
+                        <a:latin typeface="Times New Roman" panose="02020603050405020304" pitchFamily="18" charset="0"/>
+                        <a:ea typeface="Times New Roman" panose="02020603050405020304" pitchFamily="18" charset="0"/>
+                        <a:cs typeface="Times New Roman" panose="02020603050405020304" pitchFamily="18" charset="0"/>
+                      </a:endParaRPr>
+                    </a:p>
+                  </a:txBody>
+                  <a:tcPr marL="68580" marR="68580" marT="0" marB="0">
+                    <a:noFill/>
+                  </a:tcPr>
+                </a:tc>
+                <a:tc>
+                  <a:txBody>
+                    <a:bodyPr/>
+                    <a:lstStyle/>
+                    <a:p>
+                      <a:pPr algn="ctr">
+                        <a:buNone/>
+                      </a:pPr>
+                      <a:r>
+                        <a:rPr lang="es-ES" sz="900">
                           <a:effectLst/>
                           <a:latin typeface="Times New Roman" panose="02020603050405020304" pitchFamily="18" charset="0"/>
                           <a:ea typeface="Times New Roman" panose="02020603050405020304" pitchFamily="18" charset="0"/>
                           <a:cs typeface="Times New Roman" panose="02020603050405020304" pitchFamily="18" charset="0"/>
                         </a:rPr>
-                        <a:t>272.51</a:t>
-                      </a:r>
-                    </a:p>
-                  </a:txBody>
-                  <a:tcPr marL="68580" marR="68580" marT="0" marB="0" anchor="ctr">
-                    <a:noFill/>
-                  </a:tcPr>
-                </a:tc>
-                <a:tc>
-                  <a:txBody>
-                    <a:bodyPr/>
-                    <a:lstStyle/>
-                    <a:p>
-                      <a:pPr algn="ctr">
-                        <a:buNone/>
-                      </a:pPr>
-                      <a:r>
-                        <a:rPr lang="es-ES_tradnl" sz="900" dirty="0">
+                        <a:t>535.35</a:t>
+                      </a:r>
+                      <a:endParaRPr lang="de-DE" sz="900">
+                        <a:effectLst/>
+                        <a:latin typeface="Times New Roman" panose="02020603050405020304" pitchFamily="18" charset="0"/>
+                        <a:ea typeface="Times New Roman" panose="02020603050405020304" pitchFamily="18" charset="0"/>
+                        <a:cs typeface="Times New Roman" panose="02020603050405020304" pitchFamily="18" charset="0"/>
+                      </a:endParaRPr>
+                    </a:p>
+                  </a:txBody>
+                  <a:tcPr marL="68580" marR="68580" marT="0" marB="0">
+                    <a:noFill/>
+                  </a:tcPr>
+                </a:tc>
+                <a:tc>
+                  <a:txBody>
+                    <a:bodyPr/>
+                    <a:lstStyle/>
+                    <a:p>
+                      <a:pPr algn="ctr">
+                        <a:buNone/>
+                      </a:pPr>
+                      <a:r>
+                        <a:rPr lang="es-ES" sz="900">
                           <a:effectLst/>
                           <a:latin typeface="Times New Roman" panose="02020603050405020304" pitchFamily="18" charset="0"/>
                           <a:ea typeface="Times New Roman" panose="02020603050405020304" pitchFamily="18" charset="0"/>
                           <a:cs typeface="Times New Roman" panose="02020603050405020304" pitchFamily="18" charset="0"/>
                         </a:rPr>
-                        <a:t>0.29</a:t>
-                      </a:r>
-                    </a:p>
-                  </a:txBody>
-                  <a:tcPr marL="68580" marR="68580" marT="0" marB="0" anchor="ctr">
-                    <a:noFill/>
-                  </a:tcPr>
-                </a:tc>
-                <a:tc>
-                  <a:txBody>
-                    <a:bodyPr/>
-                    <a:lstStyle/>
-                    <a:p>
-                      <a:pPr algn="ctr">
-                        <a:buNone/>
-                      </a:pPr>
-                      <a:r>
-                        <a:rPr lang="es-ES_tradnl" sz="900" dirty="0">
+                        <a:t>0.28</a:t>
+                      </a:r>
+                      <a:endParaRPr lang="de-DE" sz="900">
+                        <a:effectLst/>
+                        <a:latin typeface="Times New Roman" panose="02020603050405020304" pitchFamily="18" charset="0"/>
+                        <a:ea typeface="Times New Roman" panose="02020603050405020304" pitchFamily="18" charset="0"/>
+                        <a:cs typeface="Times New Roman" panose="02020603050405020304" pitchFamily="18" charset="0"/>
+                      </a:endParaRPr>
+                    </a:p>
+                  </a:txBody>
+                  <a:tcPr marL="68580" marR="68580" marT="0" marB="0">
+                    <a:noFill/>
+                  </a:tcPr>
+                </a:tc>
+                <a:tc>
+                  <a:txBody>
+                    <a:bodyPr/>
+                    <a:lstStyle/>
+                    <a:p>
+                      <a:pPr algn="ctr">
+                        <a:buNone/>
+                      </a:pPr>
+                      <a:r>
+                        <a:rPr lang="es-ES" sz="900">
                           <a:effectLst/>
                           <a:latin typeface="Times New Roman" panose="02020603050405020304" pitchFamily="18" charset="0"/>
                           <a:ea typeface="Times New Roman" panose="02020603050405020304" pitchFamily="18" charset="0"/>
                           <a:cs typeface="Times New Roman" panose="02020603050405020304" pitchFamily="18" charset="0"/>
                         </a:rPr>
-                        <a:t>138.00</a:t>
-                      </a:r>
-                    </a:p>
-                  </a:txBody>
-                  <a:tcPr marL="68580" marR="68580" marT="0" marB="0" anchor="ctr">
+                        <a:t>83.00</a:t>
+                      </a:r>
+                      <a:endParaRPr lang="de-DE" sz="900">
+                        <a:effectLst/>
+                        <a:latin typeface="Times New Roman" panose="02020603050405020304" pitchFamily="18" charset="0"/>
+                        <a:ea typeface="Times New Roman" panose="02020603050405020304" pitchFamily="18" charset="0"/>
+                        <a:cs typeface="Times New Roman" panose="02020603050405020304" pitchFamily="18" charset="0"/>
+                      </a:endParaRPr>
+                    </a:p>
+                  </a:txBody>
+                  <a:tcPr marL="68580" marR="68580" marT="0" marB="0">
                     <a:noFill/>
                   </a:tcPr>
                 </a:tc>
@@ -10329,7 +10874,7 @@
                           <a:ea typeface="Times New Roman" panose="02020603050405020304" pitchFamily="18" charset="0"/>
                           <a:cs typeface="Times New Roman" panose="02020603050405020304" pitchFamily="18" charset="0"/>
                         </a:rPr>
-                        <a:t>6.00</a:t>
+                        <a:t>20.83</a:t>
                       </a:r>
                       <a:endParaRPr lang="de-DE" sz="900">
                         <a:effectLst/>
@@ -10385,7 +10930,7 @@
                         <a:buNone/>
                       </a:pPr>
                       <a:r>
-                        <a:rPr lang="es-ES_tradnl" sz="900" dirty="0">
+                        <a:rPr lang="es-ES" sz="900">
                           <a:effectLst/>
                           <a:latin typeface="Times New Roman" panose="02020603050405020304" pitchFamily="18" charset="0"/>
                           <a:ea typeface="Times New Roman" panose="02020603050405020304" pitchFamily="18" charset="0"/>
@@ -10393,91 +10938,115 @@
                         </a:rPr>
                         <a:t>0.02</a:t>
                       </a:r>
-                    </a:p>
-                  </a:txBody>
-                  <a:tcPr marL="68580" marR="68580" marT="0" marB="0" anchor="ctr">
-                    <a:noFill/>
-                  </a:tcPr>
-                </a:tc>
-                <a:tc>
-                  <a:txBody>
-                    <a:bodyPr/>
-                    <a:lstStyle/>
-                    <a:p>
-                      <a:pPr algn="ctr">
-                        <a:buNone/>
-                      </a:pPr>
-                      <a:r>
-                        <a:rPr lang="es-ES_tradnl" sz="900" dirty="0">
+                      <a:endParaRPr lang="de-DE" sz="900">
+                        <a:effectLst/>
+                        <a:latin typeface="Times New Roman" panose="02020603050405020304" pitchFamily="18" charset="0"/>
+                        <a:ea typeface="Times New Roman" panose="02020603050405020304" pitchFamily="18" charset="0"/>
+                        <a:cs typeface="Times New Roman" panose="02020603050405020304" pitchFamily="18" charset="0"/>
+                      </a:endParaRPr>
+                    </a:p>
+                  </a:txBody>
+                  <a:tcPr marL="68580" marR="68580" marT="0" marB="0">
+                    <a:noFill/>
+                  </a:tcPr>
+                </a:tc>
+                <a:tc>
+                  <a:txBody>
+                    <a:bodyPr/>
+                    <a:lstStyle/>
+                    <a:p>
+                      <a:pPr algn="ctr">
+                        <a:buNone/>
+                      </a:pPr>
+                      <a:r>
+                        <a:rPr lang="es-ES" sz="900">
                           <a:effectLst/>
                           <a:latin typeface="Times New Roman" panose="02020603050405020304" pitchFamily="18" charset="0"/>
                           <a:ea typeface="Times New Roman" panose="02020603050405020304" pitchFamily="18" charset="0"/>
                           <a:cs typeface="Times New Roman" panose="02020603050405020304" pitchFamily="18" charset="0"/>
                         </a:rPr>
-                        <a:t>59.87</a:t>
-                      </a:r>
-                    </a:p>
-                  </a:txBody>
-                  <a:tcPr marL="68580" marR="68580" marT="0" marB="0" anchor="ctr">
-                    <a:noFill/>
-                  </a:tcPr>
-                </a:tc>
-                <a:tc>
-                  <a:txBody>
-                    <a:bodyPr/>
-                    <a:lstStyle/>
-                    <a:p>
-                      <a:pPr algn="ctr">
-                        <a:buNone/>
-                      </a:pPr>
-                      <a:r>
-                        <a:rPr lang="es-ES_tradnl" sz="900" dirty="0">
+                        <a:t>74.76</a:t>
+                      </a:r>
+                      <a:endParaRPr lang="de-DE" sz="900">
+                        <a:effectLst/>
+                        <a:latin typeface="Times New Roman" panose="02020603050405020304" pitchFamily="18" charset="0"/>
+                        <a:ea typeface="Times New Roman" panose="02020603050405020304" pitchFamily="18" charset="0"/>
+                        <a:cs typeface="Times New Roman" panose="02020603050405020304" pitchFamily="18" charset="0"/>
+                      </a:endParaRPr>
+                    </a:p>
+                  </a:txBody>
+                  <a:tcPr marL="68580" marR="68580" marT="0" marB="0">
+                    <a:noFill/>
+                  </a:tcPr>
+                </a:tc>
+                <a:tc>
+                  <a:txBody>
+                    <a:bodyPr/>
+                    <a:lstStyle/>
+                    <a:p>
+                      <a:pPr algn="ctr">
+                        <a:buNone/>
+                      </a:pPr>
+                      <a:r>
+                        <a:rPr lang="es-ES" sz="900">
                           <a:effectLst/>
                           <a:latin typeface="Times New Roman" panose="02020603050405020304" pitchFamily="18" charset="0"/>
                           <a:ea typeface="Times New Roman" panose="02020603050405020304" pitchFamily="18" charset="0"/>
                           <a:cs typeface="Times New Roman" panose="02020603050405020304" pitchFamily="18" charset="0"/>
                         </a:rPr>
-                        <a:t>29.60</a:t>
-                      </a:r>
-                    </a:p>
-                  </a:txBody>
-                  <a:tcPr marL="68580" marR="68580" marT="0" marB="0" anchor="ctr">
-                    <a:noFill/>
-                  </a:tcPr>
-                </a:tc>
-                <a:tc>
-                  <a:txBody>
-                    <a:bodyPr/>
-                    <a:lstStyle/>
-                    <a:p>
-                      <a:pPr algn="ctr">
-                        <a:buNone/>
-                      </a:pPr>
-                      <a:r>
-                        <a:rPr lang="es-ES_tradnl" sz="900" dirty="0">
+                        <a:t>31.77</a:t>
+                      </a:r>
+                      <a:endParaRPr lang="de-DE" sz="900">
+                        <a:effectLst/>
+                        <a:latin typeface="Times New Roman" panose="02020603050405020304" pitchFamily="18" charset="0"/>
+                        <a:ea typeface="Times New Roman" panose="02020603050405020304" pitchFamily="18" charset="0"/>
+                        <a:cs typeface="Times New Roman" panose="02020603050405020304" pitchFamily="18" charset="0"/>
+                      </a:endParaRPr>
+                    </a:p>
+                  </a:txBody>
+                  <a:tcPr marL="68580" marR="68580" marT="0" marB="0">
+                    <a:noFill/>
+                  </a:tcPr>
+                </a:tc>
+                <a:tc>
+                  <a:txBody>
+                    <a:bodyPr/>
+                    <a:lstStyle/>
+                    <a:p>
+                      <a:pPr algn="ctr">
+                        <a:buNone/>
+                      </a:pPr>
+                      <a:r>
+                        <a:rPr lang="es-ES" sz="900">
                           <a:effectLst/>
                           <a:latin typeface="Times New Roman" panose="02020603050405020304" pitchFamily="18" charset="0"/>
                           <a:ea typeface="Times New Roman" panose="02020603050405020304" pitchFamily="18" charset="0"/>
                           <a:cs typeface="Times New Roman" panose="02020603050405020304" pitchFamily="18" charset="0"/>
                         </a:rPr>
-                        <a:t>65.77</a:t>
-                      </a:r>
-                    </a:p>
-                  </a:txBody>
-                  <a:tcPr marL="68580" marR="68580" marT="0" marB="0" anchor="ctr">
-                    <a:noFill/>
-                  </a:tcPr>
-                </a:tc>
-                <a:tc>
-                  <a:txBody>
-                    <a:bodyPr/>
-                    <a:lstStyle/>
-                    <a:p>
-                      <a:pPr algn="ctr">
-                        <a:buNone/>
-                      </a:pPr>
-                      <a:r>
-                        <a:rPr lang="es-ES_tradnl" sz="900" dirty="0">
+                        <a:t>70.59</a:t>
+                      </a:r>
+                      <a:endParaRPr lang="de-DE" sz="900">
+                        <a:effectLst/>
+                        <a:latin typeface="Times New Roman" panose="02020603050405020304" pitchFamily="18" charset="0"/>
+                        <a:ea typeface="Times New Roman" panose="02020603050405020304" pitchFamily="18" charset="0"/>
+                        <a:cs typeface="Times New Roman" panose="02020603050405020304" pitchFamily="18" charset="0"/>
+                      </a:endParaRPr>
+                    </a:p>
+                  </a:txBody>
+                  <a:tcPr marL="68580" marR="68580" marT="0" marB="0">
+                    <a:noFill/>
+                  </a:tcPr>
+                </a:tc>
+                <a:tc>
+                  <a:txBody>
+                    <a:bodyPr/>
+                    <a:lstStyle/>
+                    <a:p>
+                      <a:pPr algn="ctr">
+                        <a:buNone/>
+                      </a:pPr>
+                      <a:r>
+                        <a:rPr lang="es-ES" sz="900">
                           <a:effectLst/>
                           <a:latin typeface="Times New Roman" panose="02020603050405020304" pitchFamily="18" charset="0"/>
                           <a:ea typeface="Times New Roman" panose="02020603050405020304" pitchFamily="18" charset="0"/>
@@ -10485,124 +11054,160 @@
                         </a:rPr>
                         <a:t>6.00</a:t>
                       </a:r>
-                    </a:p>
-                  </a:txBody>
-                  <a:tcPr marL="68580" marR="68580" marT="0" marB="0" anchor="ctr">
-                    <a:noFill/>
-                  </a:tcPr>
-                </a:tc>
-                <a:tc>
-                  <a:txBody>
-                    <a:bodyPr/>
-                    <a:lstStyle/>
-                    <a:p>
-                      <a:pPr algn="ctr">
-                        <a:buNone/>
-                      </a:pPr>
-                      <a:r>
-                        <a:rPr lang="es-ES_tradnl" sz="900" dirty="0">
+                      <a:endParaRPr lang="de-DE" sz="900">
+                        <a:effectLst/>
+                        <a:latin typeface="Times New Roman" panose="02020603050405020304" pitchFamily="18" charset="0"/>
+                        <a:ea typeface="Times New Roman" panose="02020603050405020304" pitchFamily="18" charset="0"/>
+                        <a:cs typeface="Times New Roman" panose="02020603050405020304" pitchFamily="18" charset="0"/>
+                      </a:endParaRPr>
+                    </a:p>
+                  </a:txBody>
+                  <a:tcPr marL="68580" marR="68580" marT="0" marB="0">
+                    <a:noFill/>
+                  </a:tcPr>
+                </a:tc>
+                <a:tc>
+                  <a:txBody>
+                    <a:bodyPr/>
+                    <a:lstStyle/>
+                    <a:p>
+                      <a:pPr algn="ctr">
+                        <a:buNone/>
+                      </a:pPr>
+                      <a:r>
+                        <a:rPr lang="es-ES" sz="900">
                           <a:effectLst/>
                           <a:latin typeface="Times New Roman" panose="02020603050405020304" pitchFamily="18" charset="0"/>
                           <a:ea typeface="Times New Roman" panose="02020603050405020304" pitchFamily="18" charset="0"/>
                           <a:cs typeface="Times New Roman" panose="02020603050405020304" pitchFamily="18" charset="0"/>
                         </a:rPr>
-                        <a:t>14.87</a:t>
-                      </a:r>
-                    </a:p>
-                  </a:txBody>
-                  <a:tcPr marL="68580" marR="68580" marT="0" marB="0" anchor="ctr">
-                    <a:noFill/>
-                  </a:tcPr>
-                </a:tc>
-                <a:tc>
-                  <a:txBody>
-                    <a:bodyPr/>
-                    <a:lstStyle/>
-                    <a:p>
-                      <a:pPr algn="ctr">
-                        <a:buNone/>
-                      </a:pPr>
-                      <a:r>
-                        <a:rPr lang="es-ES_tradnl" sz="900" dirty="0">
+                        <a:t>29.76</a:t>
+                      </a:r>
+                      <a:endParaRPr lang="de-DE" sz="900">
+                        <a:effectLst/>
+                        <a:latin typeface="Times New Roman" panose="02020603050405020304" pitchFamily="18" charset="0"/>
+                        <a:ea typeface="Times New Roman" panose="02020603050405020304" pitchFamily="18" charset="0"/>
+                        <a:cs typeface="Times New Roman" panose="02020603050405020304" pitchFamily="18" charset="0"/>
+                      </a:endParaRPr>
+                    </a:p>
+                  </a:txBody>
+                  <a:tcPr marL="68580" marR="68580" marT="0" marB="0">
+                    <a:noFill/>
+                  </a:tcPr>
+                </a:tc>
+                <a:tc>
+                  <a:txBody>
+                    <a:bodyPr/>
+                    <a:lstStyle/>
+                    <a:p>
+                      <a:pPr algn="ctr">
+                        <a:buNone/>
+                      </a:pPr>
+                      <a:r>
+                        <a:rPr lang="es-ES" sz="900">
                           <a:effectLst/>
                           <a:latin typeface="Times New Roman" panose="02020603050405020304" pitchFamily="18" charset="0"/>
                           <a:ea typeface="Times New Roman" panose="02020603050405020304" pitchFamily="18" charset="0"/>
                           <a:cs typeface="Times New Roman" panose="02020603050405020304" pitchFamily="18" charset="0"/>
                         </a:rPr>
-                        <a:t>18.22</a:t>
-                      </a:r>
-                    </a:p>
-                  </a:txBody>
-                  <a:tcPr marL="68580" marR="68580" marT="0" marB="0" anchor="ctr">
-                    <a:noFill/>
-                  </a:tcPr>
-                </a:tc>
-                <a:tc>
-                  <a:txBody>
-                    <a:bodyPr/>
-                    <a:lstStyle/>
-                    <a:p>
-                      <a:pPr algn="ctr">
-                        <a:buNone/>
-                      </a:pPr>
-                      <a:r>
-                        <a:rPr lang="es-ES_tradnl" sz="900" dirty="0">
+                        <a:t>30.01</a:t>
+                      </a:r>
+                      <a:endParaRPr lang="de-DE" sz="900">
+                        <a:effectLst/>
+                        <a:latin typeface="Times New Roman" panose="02020603050405020304" pitchFamily="18" charset="0"/>
+                        <a:ea typeface="Times New Roman" panose="02020603050405020304" pitchFamily="18" charset="0"/>
+                        <a:cs typeface="Times New Roman" panose="02020603050405020304" pitchFamily="18" charset="0"/>
+                      </a:endParaRPr>
+                    </a:p>
+                  </a:txBody>
+                  <a:tcPr marL="68580" marR="68580" marT="0" marB="0">
+                    <a:noFill/>
+                  </a:tcPr>
+                </a:tc>
+                <a:tc>
+                  <a:txBody>
+                    <a:bodyPr/>
+                    <a:lstStyle/>
+                    <a:p>
+                      <a:pPr algn="ctr">
+                        <a:buNone/>
+                      </a:pPr>
+                      <a:r>
+                        <a:rPr lang="es-ES" sz="900">
                           <a:effectLst/>
                           <a:latin typeface="Times New Roman" panose="02020603050405020304" pitchFamily="18" charset="0"/>
                           <a:ea typeface="Times New Roman" panose="02020603050405020304" pitchFamily="18" charset="0"/>
                           <a:cs typeface="Times New Roman" panose="02020603050405020304" pitchFamily="18" charset="0"/>
                         </a:rPr>
-                        <a:t>271.24</a:t>
-                      </a:r>
-                    </a:p>
-                  </a:txBody>
-                  <a:tcPr marL="68580" marR="68580" marT="0" marB="0" anchor="ctr">
-                    <a:noFill/>
-                  </a:tcPr>
-                </a:tc>
-                <a:tc>
-                  <a:txBody>
-                    <a:bodyPr/>
-                    <a:lstStyle/>
-                    <a:p>
-                      <a:pPr algn="ctr">
-                        <a:buNone/>
-                      </a:pPr>
-                      <a:r>
-                        <a:rPr lang="es-ES_tradnl" sz="900" dirty="0">
+                        <a:t>534.51</a:t>
+                      </a:r>
+                      <a:endParaRPr lang="de-DE" sz="900">
+                        <a:effectLst/>
+                        <a:latin typeface="Times New Roman" panose="02020603050405020304" pitchFamily="18" charset="0"/>
+                        <a:ea typeface="Times New Roman" panose="02020603050405020304" pitchFamily="18" charset="0"/>
+                        <a:cs typeface="Times New Roman" panose="02020603050405020304" pitchFamily="18" charset="0"/>
+                      </a:endParaRPr>
+                    </a:p>
+                  </a:txBody>
+                  <a:tcPr marL="68580" marR="68580" marT="0" marB="0">
+                    <a:noFill/>
+                  </a:tcPr>
+                </a:tc>
+                <a:tc>
+                  <a:txBody>
+                    <a:bodyPr/>
+                    <a:lstStyle/>
+                    <a:p>
+                      <a:pPr algn="ctr">
+                        <a:buNone/>
+                      </a:pPr>
+                      <a:r>
+                        <a:rPr lang="es-ES" sz="900">
                           <a:effectLst/>
                           <a:latin typeface="Times New Roman" panose="02020603050405020304" pitchFamily="18" charset="0"/>
                           <a:ea typeface="Times New Roman" panose="02020603050405020304" pitchFamily="18" charset="0"/>
                           <a:cs typeface="Times New Roman" panose="02020603050405020304" pitchFamily="18" charset="0"/>
                         </a:rPr>
-                        <a:t>0.29</a:t>
-                      </a:r>
-                    </a:p>
-                  </a:txBody>
-                  <a:tcPr marL="68580" marR="68580" marT="0" marB="0" anchor="ctr">
-                    <a:noFill/>
-                  </a:tcPr>
-                </a:tc>
-                <a:tc>
-                  <a:txBody>
-                    <a:bodyPr/>
-                    <a:lstStyle/>
-                    <a:p>
-                      <a:pPr algn="ctr">
-                        <a:buNone/>
-                      </a:pPr>
-                      <a:r>
-                        <a:rPr lang="es-ES_tradnl" sz="900" dirty="0">
+                        <a:t>0.28</a:t>
+                      </a:r>
+                      <a:endParaRPr lang="de-DE" sz="900">
+                        <a:effectLst/>
+                        <a:latin typeface="Times New Roman" panose="02020603050405020304" pitchFamily="18" charset="0"/>
+                        <a:ea typeface="Times New Roman" panose="02020603050405020304" pitchFamily="18" charset="0"/>
+                        <a:cs typeface="Times New Roman" panose="02020603050405020304" pitchFamily="18" charset="0"/>
+                      </a:endParaRPr>
+                    </a:p>
+                  </a:txBody>
+                  <a:tcPr marL="68580" marR="68580" marT="0" marB="0">
+                    <a:noFill/>
+                  </a:tcPr>
+                </a:tc>
+                <a:tc>
+                  <a:txBody>
+                    <a:bodyPr/>
+                    <a:lstStyle/>
+                    <a:p>
+                      <a:pPr algn="ctr">
+                        <a:buNone/>
+                      </a:pPr>
+                      <a:r>
+                        <a:rPr lang="es-ES" sz="900">
                           <a:effectLst/>
                           <a:latin typeface="Times New Roman" panose="02020603050405020304" pitchFamily="18" charset="0"/>
                           <a:ea typeface="Times New Roman" panose="02020603050405020304" pitchFamily="18" charset="0"/>
                           <a:cs typeface="Times New Roman" panose="02020603050405020304" pitchFamily="18" charset="0"/>
                         </a:rPr>
-                        <a:t>157.00</a:t>
-                      </a:r>
-                    </a:p>
-                  </a:txBody>
-                  <a:tcPr marL="68580" marR="68580" marT="0" marB="0" anchor="ctr">
+                        <a:t>123.00</a:t>
+                      </a:r>
+                      <a:endParaRPr lang="de-DE" sz="900">
+                        <a:effectLst/>
+                        <a:latin typeface="Times New Roman" panose="02020603050405020304" pitchFamily="18" charset="0"/>
+                        <a:ea typeface="Times New Roman" panose="02020603050405020304" pitchFamily="18" charset="0"/>
+                        <a:cs typeface="Times New Roman" panose="02020603050405020304" pitchFamily="18" charset="0"/>
+                      </a:endParaRPr>
+                    </a:p>
+                  </a:txBody>
+                  <a:tcPr marL="68580" marR="68580" marT="0" marB="0">
                     <a:noFill/>
                   </a:tcPr>
                 </a:tc>
@@ -10737,7 +11342,7 @@
                           <a:ea typeface="Times New Roman" panose="02020603050405020304" pitchFamily="18" charset="0"/>
                           <a:cs typeface="Times New Roman" panose="02020603050405020304" pitchFamily="18" charset="0"/>
                         </a:rPr>
-                        <a:t>6.00</a:t>
+                        <a:t>22.28</a:t>
                       </a:r>
                       <a:endParaRPr lang="de-DE" sz="900" dirty="0">
                         <a:effectLst/>
@@ -11583,8 +12188,8 @@
         </p:nvSpPr>
         <p:spPr>
           <a:xfrm>
-            <a:off x="561487" y="2465822"/>
-            <a:ext cx="2688490" cy="1421928"/>
+            <a:off x="520862" y="2488108"/>
+            <a:ext cx="2643757" cy="1588127"/>
           </a:xfrm>
           <a:prstGeom prst="rect">
             <a:avLst/>
@@ -11599,44 +12204,12 @@
           <a:p>
             <a:pPr algn="l"/>
             <a:r>
-              <a:rPr lang="es-ES_tradnl" dirty="0"/>
-              <a:t>El sistema mantiene estabilidad, pero el retardo incrementa sobreimpulso, oscilaciones y esfuerzo de control en el régimen transitorio.</a:t>
+              <a:rPr lang="es-ES_tradnl" sz="1200" dirty="0"/>
+              <a:t>El sistema mantiene estabilidad ante retardos pequeños, con variaciones prácticamente despreciables en el RMSE (≈ 29.93° a ≈ 30.01°). El sobreimpulso se mantiene prácticamente constante, observándose únicamente un ligero aumento en el esfuerzo de control en el régimen transitorio.</a:t>
             </a:r>
           </a:p>
         </p:txBody>
       </p:sp>
-      <p:pic>
-        <p:nvPicPr>
-          <p:cNvPr id="6" name="Onlinebild-Platzhalter 5">
-            <a:extLst>
-              <a:ext uri="{FF2B5EF4-FFF2-40B4-BE49-F238E27FC236}">
-                <a16:creationId xmlns:a16="http://schemas.microsoft.com/office/drawing/2014/main" id="{1AF8FA9F-C1D2-7489-6286-89AEAB7A8F38}"/>
-              </a:ext>
-            </a:extLst>
-          </p:cNvPr>
-          <p:cNvPicPr>
-            <a:picLocks noGrp="1" noChangeAspect="1"/>
-          </p:cNvPicPr>
-          <p:nvPr>
-            <p:ph type="clipArt" sz="quarter" idx="15"/>
-          </p:nvPr>
-        </p:nvPicPr>
-        <p:blipFill>
-          <a:blip r:embed="rId2"/>
-          <a:stretch>
-            <a:fillRect/>
-          </a:stretch>
-        </p:blipFill>
-        <p:spPr>
-          <a:xfrm>
-            <a:off x="3488268" y="2078038"/>
-            <a:ext cx="7123288" cy="2505075"/>
-          </a:xfrm>
-          <a:prstGeom prst="rect">
-            <a:avLst/>
-          </a:prstGeom>
-        </p:spPr>
-      </p:pic>
       <p:sp>
         <p:nvSpPr>
           <p:cNvPr id="2" name="Fußzeilenplatzhalter 2">
@@ -11766,6 +12339,38 @@
           </a:p>
         </p:txBody>
       </p:sp>
+      <p:pic>
+        <p:nvPicPr>
+          <p:cNvPr id="9" name="Onlinebild-Platzhalter 8">
+            <a:extLst>
+              <a:ext uri="{FF2B5EF4-FFF2-40B4-BE49-F238E27FC236}">
+                <a16:creationId xmlns:a16="http://schemas.microsoft.com/office/drawing/2014/main" id="{44DF7B9C-1BEE-97C3-3940-DD83B6A78CFF}"/>
+              </a:ext>
+            </a:extLst>
+          </p:cNvPr>
+          <p:cNvPicPr>
+            <a:picLocks noGrp="1" noChangeAspect="1"/>
+          </p:cNvPicPr>
+          <p:nvPr>
+            <p:ph type="clipArt" sz="quarter" idx="15"/>
+          </p:nvPr>
+        </p:nvPicPr>
+        <p:blipFill>
+          <a:blip r:embed="rId2"/>
+          <a:stretch>
+            <a:fillRect/>
+          </a:stretch>
+        </p:blipFill>
+        <p:spPr>
+          <a:xfrm>
+            <a:off x="3249978" y="2078038"/>
+            <a:ext cx="6881994" cy="2505075"/>
+          </a:xfrm>
+          <a:prstGeom prst="rect">
+            <a:avLst/>
+          </a:prstGeom>
+        </p:spPr>
+      </p:pic>
     </p:spTree>
     <p:extLst>
       <p:ext uri="{BB962C8B-B14F-4D97-AF65-F5344CB8AC3E}">
@@ -12194,7 +12799,7 @@
             <p:ph sz="quarter" idx="14"/>
             <p:extLst>
               <p:ext uri="{D42A27DB-BD31-4B8C-83A1-F6EECF244321}">
-                <p14:modId xmlns:p14="http://schemas.microsoft.com/office/powerpoint/2010/main" val="3041525850"/>
+                <p14:modId xmlns:p14="http://schemas.microsoft.com/office/powerpoint/2010/main" val="4013112646"/>
               </p:ext>
             </p:extLst>
           </p:nvPr>
@@ -13224,7 +13829,7 @@
                         <a:buNone/>
                       </a:pPr>
                       <a:r>
-                        <a:rPr lang="es-ES_tradnl" sz="900" dirty="0">
+                        <a:rPr lang="es-ES" sz="900">
                           <a:effectLst/>
                           <a:latin typeface="Times New Roman" panose="02020603050405020304" pitchFamily="18" charset="0"/>
                           <a:ea typeface="Times New Roman" panose="02020603050405020304" pitchFamily="18" charset="0"/>
@@ -13232,6 +13837,12 @@
                         </a:rPr>
                         <a:t>3.14</a:t>
                       </a:r>
+                      <a:endParaRPr lang="de-DE" sz="1200">
+                        <a:effectLst/>
+                        <a:latin typeface="Times New Roman" panose="02020603050405020304" pitchFamily="18" charset="0"/>
+                        <a:ea typeface="Times New Roman" panose="02020603050405020304" pitchFamily="18" charset="0"/>
+                        <a:cs typeface="Times New Roman" panose="02020603050405020304" pitchFamily="18" charset="0"/>
+                      </a:endParaRPr>
                     </a:p>
                   </a:txBody>
                   <a:tcPr marL="68580" marR="68580" marT="0" marB="0">
@@ -13256,14 +13867,20 @@
                         <a:buNone/>
                       </a:pPr>
                       <a:r>
-                        <a:rPr lang="es-ES_tradnl" sz="900" dirty="0">
+                        <a:rPr lang="es-ES" sz="900">
                           <a:effectLst/>
                           <a:latin typeface="Times New Roman" panose="02020603050405020304" pitchFamily="18" charset="0"/>
                           <a:ea typeface="Times New Roman" panose="02020603050405020304" pitchFamily="18" charset="0"/>
                           <a:cs typeface="Times New Roman" panose="02020603050405020304" pitchFamily="18" charset="0"/>
                         </a:rPr>
-                        <a:t>59.95</a:t>
-                      </a:r>
+                        <a:t>75.07</a:t>
+                      </a:r>
+                      <a:endParaRPr lang="de-DE" sz="1200">
+                        <a:effectLst/>
+                        <a:latin typeface="Times New Roman" panose="02020603050405020304" pitchFamily="18" charset="0"/>
+                        <a:ea typeface="Times New Roman" panose="02020603050405020304" pitchFamily="18" charset="0"/>
+                        <a:cs typeface="Times New Roman" panose="02020603050405020304" pitchFamily="18" charset="0"/>
+                      </a:endParaRPr>
                     </a:p>
                   </a:txBody>
                   <a:tcPr marL="68580" marR="68580" marT="0" marB="0">
@@ -13288,14 +13905,20 @@
                         <a:buNone/>
                       </a:pPr>
                       <a:r>
-                        <a:rPr lang="es-ES_tradnl" sz="900" dirty="0">
+                        <a:rPr lang="es-ES" sz="900">
                           <a:effectLst/>
                           <a:latin typeface="Times New Roman" panose="02020603050405020304" pitchFamily="18" charset="0"/>
                           <a:ea typeface="Times New Roman" panose="02020603050405020304" pitchFamily="18" charset="0"/>
                           <a:cs typeface="Times New Roman" panose="02020603050405020304" pitchFamily="18" charset="0"/>
                         </a:rPr>
-                        <a:t>26.74</a:t>
-                      </a:r>
+                        <a:t>30.69</a:t>
+                      </a:r>
+                      <a:endParaRPr lang="de-DE" sz="1200">
+                        <a:effectLst/>
+                        <a:latin typeface="Times New Roman" panose="02020603050405020304" pitchFamily="18" charset="0"/>
+                        <a:ea typeface="Times New Roman" panose="02020603050405020304" pitchFamily="18" charset="0"/>
+                        <a:cs typeface="Times New Roman" panose="02020603050405020304" pitchFamily="18" charset="0"/>
+                      </a:endParaRPr>
                     </a:p>
                   </a:txBody>
                   <a:tcPr marL="68580" marR="68580" marT="0" marB="0">
@@ -13320,14 +13943,20 @@
                         <a:buNone/>
                       </a:pPr>
                       <a:r>
-                        <a:rPr lang="es-ES_tradnl" sz="900" dirty="0">
+                        <a:rPr lang="es-ES" sz="900">
                           <a:effectLst/>
                           <a:latin typeface="Times New Roman" panose="02020603050405020304" pitchFamily="18" charset="0"/>
                           <a:ea typeface="Times New Roman" panose="02020603050405020304" pitchFamily="18" charset="0"/>
                           <a:cs typeface="Times New Roman" panose="02020603050405020304" pitchFamily="18" charset="0"/>
                         </a:rPr>
-                        <a:t>59.43</a:t>
-                      </a:r>
+                        <a:t>68.20</a:t>
+                      </a:r>
+                      <a:endParaRPr lang="de-DE" sz="1200">
+                        <a:effectLst/>
+                        <a:latin typeface="Times New Roman" panose="02020603050405020304" pitchFamily="18" charset="0"/>
+                        <a:ea typeface="Times New Roman" panose="02020603050405020304" pitchFamily="18" charset="0"/>
+                        <a:cs typeface="Times New Roman" panose="02020603050405020304" pitchFamily="18" charset="0"/>
+                      </a:endParaRPr>
                     </a:p>
                   </a:txBody>
                   <a:tcPr marL="68580" marR="68580" marT="0" marB="0">
@@ -13352,7 +13981,7 @@
                         <a:buNone/>
                       </a:pPr>
                       <a:r>
-                        <a:rPr lang="es-ES_tradnl" sz="900" dirty="0">
+                        <a:rPr lang="es-ES" sz="900">
                           <a:effectLst/>
                           <a:latin typeface="Times New Roman" panose="02020603050405020304" pitchFamily="18" charset="0"/>
                           <a:ea typeface="Times New Roman" panose="02020603050405020304" pitchFamily="18" charset="0"/>
@@ -13360,6 +13989,12 @@
                         </a:rPr>
                         <a:t>6.00</a:t>
                       </a:r>
+                      <a:endParaRPr lang="de-DE" sz="1200">
+                        <a:effectLst/>
+                        <a:latin typeface="Times New Roman" panose="02020603050405020304" pitchFamily="18" charset="0"/>
+                        <a:ea typeface="Times New Roman" panose="02020603050405020304" pitchFamily="18" charset="0"/>
+                        <a:cs typeface="Times New Roman" panose="02020603050405020304" pitchFamily="18" charset="0"/>
+                      </a:endParaRPr>
                     </a:p>
                   </a:txBody>
                   <a:tcPr marL="68580" marR="68580" marT="0" marB="0">
@@ -13384,14 +14019,20 @@
                         <a:buNone/>
                       </a:pPr>
                       <a:r>
-                        <a:rPr lang="es-ES_tradnl" sz="900" dirty="0">
+                        <a:rPr lang="es-ES" sz="900">
                           <a:effectLst/>
                           <a:latin typeface="Times New Roman" panose="02020603050405020304" pitchFamily="18" charset="0"/>
                           <a:ea typeface="Times New Roman" panose="02020603050405020304" pitchFamily="18" charset="0"/>
                           <a:cs typeface="Times New Roman" panose="02020603050405020304" pitchFamily="18" charset="0"/>
                         </a:rPr>
-                        <a:t>14.95</a:t>
-                      </a:r>
+                        <a:t>30.07</a:t>
+                      </a:r>
+                      <a:endParaRPr lang="de-DE" sz="1200">
+                        <a:effectLst/>
+                        <a:latin typeface="Times New Roman" panose="02020603050405020304" pitchFamily="18" charset="0"/>
+                        <a:ea typeface="Times New Roman" panose="02020603050405020304" pitchFamily="18" charset="0"/>
+                        <a:cs typeface="Times New Roman" panose="02020603050405020304" pitchFamily="18" charset="0"/>
+                      </a:endParaRPr>
                     </a:p>
                   </a:txBody>
                   <a:tcPr marL="68580" marR="68580" marT="0" marB="0">
@@ -13416,14 +14057,20 @@
                         <a:buNone/>
                       </a:pPr>
                       <a:r>
-                        <a:rPr lang="es-ES_tradnl" sz="900" dirty="0">
+                        <a:rPr lang="es-ES" sz="900">
                           <a:effectLst/>
                           <a:latin typeface="Times New Roman" panose="02020603050405020304" pitchFamily="18" charset="0"/>
                           <a:ea typeface="Times New Roman" panose="02020603050405020304" pitchFamily="18" charset="0"/>
                           <a:cs typeface="Times New Roman" panose="02020603050405020304" pitchFamily="18" charset="0"/>
                         </a:rPr>
-                        <a:t>16.88</a:t>
-                      </a:r>
+                        <a:t>29.85</a:t>
+                      </a:r>
+                      <a:endParaRPr lang="de-DE" sz="1200">
+                        <a:effectLst/>
+                        <a:latin typeface="Times New Roman" panose="02020603050405020304" pitchFamily="18" charset="0"/>
+                        <a:ea typeface="Times New Roman" panose="02020603050405020304" pitchFamily="18" charset="0"/>
+                        <a:cs typeface="Times New Roman" panose="02020603050405020304" pitchFamily="18" charset="0"/>
+                      </a:endParaRPr>
                     </a:p>
                   </a:txBody>
                   <a:tcPr marL="68580" marR="68580" marT="0" marB="0">
@@ -13448,14 +14095,20 @@
                         <a:buNone/>
                       </a:pPr>
                       <a:r>
-                        <a:rPr lang="es-ES_tradnl" sz="900" dirty="0">
+                        <a:rPr lang="es-ES" sz="900">
                           <a:effectLst/>
                           <a:latin typeface="Times New Roman" panose="02020603050405020304" pitchFamily="18" charset="0"/>
                           <a:ea typeface="Times New Roman" panose="02020603050405020304" pitchFamily="18" charset="0"/>
                           <a:cs typeface="Times New Roman" panose="02020603050405020304" pitchFamily="18" charset="0"/>
                         </a:rPr>
-                        <a:t>271.57</a:t>
-                      </a:r>
+                        <a:t>539.68</a:t>
+                      </a:r>
+                      <a:endParaRPr lang="de-DE" sz="1200">
+                        <a:effectLst/>
+                        <a:latin typeface="Times New Roman" panose="02020603050405020304" pitchFamily="18" charset="0"/>
+                        <a:ea typeface="Times New Roman" panose="02020603050405020304" pitchFamily="18" charset="0"/>
+                        <a:cs typeface="Times New Roman" panose="02020603050405020304" pitchFamily="18" charset="0"/>
+                      </a:endParaRPr>
                     </a:p>
                   </a:txBody>
                   <a:tcPr marL="68580" marR="68580" marT="0" marB="0">
@@ -13480,7 +14133,7 @@
                         <a:buNone/>
                       </a:pPr>
                       <a:r>
-                        <a:rPr lang="es-ES_tradnl" sz="900" dirty="0">
+                        <a:rPr lang="es-ES" sz="900">
                           <a:effectLst/>
                           <a:latin typeface="Times New Roman" panose="02020603050405020304" pitchFamily="18" charset="0"/>
                           <a:ea typeface="Times New Roman" panose="02020603050405020304" pitchFamily="18" charset="0"/>
@@ -13488,6 +14141,12 @@
                         </a:rPr>
                         <a:t>0.22</a:t>
                       </a:r>
+                      <a:endParaRPr lang="de-DE" sz="1200">
+                        <a:effectLst/>
+                        <a:latin typeface="Times New Roman" panose="02020603050405020304" pitchFamily="18" charset="0"/>
+                        <a:ea typeface="Times New Roman" panose="02020603050405020304" pitchFamily="18" charset="0"/>
+                        <a:cs typeface="Times New Roman" panose="02020603050405020304" pitchFamily="18" charset="0"/>
+                      </a:endParaRPr>
                     </a:p>
                   </a:txBody>
                   <a:tcPr marL="68580" marR="68580" marT="0" marB="0">
@@ -13512,14 +14171,20 @@
                         <a:buNone/>
                       </a:pPr>
                       <a:r>
-                        <a:rPr lang="es-ES_tradnl" sz="900" dirty="0">
+                        <a:rPr lang="es-ES" sz="900">
                           <a:effectLst/>
                           <a:latin typeface="Times New Roman" panose="02020603050405020304" pitchFamily="18" charset="0"/>
                           <a:ea typeface="Times New Roman" panose="02020603050405020304" pitchFamily="18" charset="0"/>
                           <a:cs typeface="Times New Roman" panose="02020603050405020304" pitchFamily="18" charset="0"/>
                         </a:rPr>
-                        <a:t>114.00</a:t>
-                      </a:r>
+                        <a:t>23.00</a:t>
+                      </a:r>
+                      <a:endParaRPr lang="de-DE" sz="1200">
+                        <a:effectLst/>
+                        <a:latin typeface="Times New Roman" panose="02020603050405020304" pitchFamily="18" charset="0"/>
+                        <a:ea typeface="Times New Roman" panose="02020603050405020304" pitchFamily="18" charset="0"/>
+                        <a:cs typeface="Times New Roman" panose="02020603050405020304" pitchFamily="18" charset="0"/>
+                      </a:endParaRPr>
                     </a:p>
                   </a:txBody>
                   <a:tcPr marL="68580" marR="68580" marT="0" marB="0">
@@ -13552,7 +14217,7 @@
                         </a:rPr>
                         <a:t>6.00</a:t>
                       </a:r>
-                      <a:endParaRPr lang="de-DE" sz="900">
+                      <a:endParaRPr lang="de-DE" sz="1200">
                         <a:effectLst/>
                         <a:latin typeface="Times New Roman" panose="02020603050405020304" pitchFamily="18" charset="0"/>
                         <a:ea typeface="Times New Roman" panose="02020603050405020304" pitchFamily="18" charset="0"/>
@@ -13590,7 +14255,7 @@
                         </a:rPr>
                         <a:t>2.60</a:t>
                       </a:r>
-                      <a:endParaRPr lang="de-DE" sz="900">
+                      <a:endParaRPr lang="de-DE" sz="1200">
                         <a:effectLst/>
                         <a:latin typeface="Times New Roman" panose="02020603050405020304" pitchFamily="18" charset="0"/>
                         <a:ea typeface="Times New Roman" panose="02020603050405020304" pitchFamily="18" charset="0"/>
@@ -13628,7 +14293,7 @@
                         </a:rPr>
                         <a:t>40.49</a:t>
                       </a:r>
-                      <a:endParaRPr lang="de-DE" sz="900">
+                      <a:endParaRPr lang="de-DE" sz="1200">
                         <a:effectLst/>
                         <a:latin typeface="Times New Roman" panose="02020603050405020304" pitchFamily="18" charset="0"/>
                         <a:ea typeface="Times New Roman" panose="02020603050405020304" pitchFamily="18" charset="0"/>
@@ -13666,7 +14331,7 @@
                         </a:rPr>
                         <a:t>14.51</a:t>
                       </a:r>
-                      <a:endParaRPr lang="de-DE" sz="900">
+                      <a:endParaRPr lang="de-DE" sz="1200">
                         <a:effectLst/>
                         <a:latin typeface="Times New Roman" panose="02020603050405020304" pitchFamily="18" charset="0"/>
                         <a:ea typeface="Times New Roman" panose="02020603050405020304" pitchFamily="18" charset="0"/>
@@ -13702,9 +14367,9 @@
                           <a:ea typeface="Times New Roman" panose="02020603050405020304" pitchFamily="18" charset="0"/>
                           <a:cs typeface="Times New Roman" panose="02020603050405020304" pitchFamily="18" charset="0"/>
                         </a:rPr>
-                        <a:t>6.00</a:t>
-                      </a:r>
-                      <a:endParaRPr lang="de-DE" sz="900">
+                        <a:t>17.98</a:t>
+                      </a:r>
+                      <a:endParaRPr lang="de-DE" sz="1200">
                         <a:effectLst/>
                         <a:latin typeface="Times New Roman" panose="02020603050405020304" pitchFamily="18" charset="0"/>
                         <a:ea typeface="Times New Roman" panose="02020603050405020304" pitchFamily="18" charset="0"/>
@@ -13767,7 +14432,7 @@
                         <a:buNone/>
                       </a:pPr>
                       <a:r>
-                        <a:rPr lang="es-ES_tradnl" sz="900" dirty="0">
+                        <a:rPr lang="es-ES" sz="900">
                           <a:effectLst/>
                           <a:latin typeface="Times New Roman" panose="02020603050405020304" pitchFamily="18" charset="0"/>
                           <a:ea typeface="Times New Roman" panose="02020603050405020304" pitchFamily="18" charset="0"/>
@@ -13775,91 +14440,115 @@
                         </a:rPr>
                         <a:t>0.00</a:t>
                       </a:r>
-                    </a:p>
-                  </a:txBody>
-                  <a:tcPr marL="68580" marR="68580" marT="0" marB="0">
-                    <a:noFill/>
-                  </a:tcPr>
-                </a:tc>
-                <a:tc>
-                  <a:txBody>
-                    <a:bodyPr/>
-                    <a:lstStyle/>
-                    <a:p>
-                      <a:pPr algn="ctr">
-                        <a:buNone/>
-                      </a:pPr>
-                      <a:r>
-                        <a:rPr lang="es-ES_tradnl" sz="900" dirty="0">
+                      <a:endParaRPr lang="de-DE" sz="1200">
+                        <a:effectLst/>
+                        <a:latin typeface="Times New Roman" panose="02020603050405020304" pitchFamily="18" charset="0"/>
+                        <a:ea typeface="Times New Roman" panose="02020603050405020304" pitchFamily="18" charset="0"/>
+                        <a:cs typeface="Times New Roman" panose="02020603050405020304" pitchFamily="18" charset="0"/>
+                      </a:endParaRPr>
+                    </a:p>
+                  </a:txBody>
+                  <a:tcPr marL="68580" marR="68580" marT="0" marB="0">
+                    <a:noFill/>
+                  </a:tcPr>
+                </a:tc>
+                <a:tc>
+                  <a:txBody>
+                    <a:bodyPr/>
+                    <a:lstStyle/>
+                    <a:p>
+                      <a:pPr algn="ctr">
+                        <a:buNone/>
+                      </a:pPr>
+                      <a:r>
+                        <a:rPr lang="es-ES" sz="900">
                           <a:effectLst/>
                           <a:latin typeface="Times New Roman" panose="02020603050405020304" pitchFamily="18" charset="0"/>
                           <a:ea typeface="Times New Roman" panose="02020603050405020304" pitchFamily="18" charset="0"/>
                           <a:cs typeface="Times New Roman" panose="02020603050405020304" pitchFamily="18" charset="0"/>
                         </a:rPr>
-                        <a:t>59.94</a:t>
-                      </a:r>
-                    </a:p>
-                  </a:txBody>
-                  <a:tcPr marL="68580" marR="68580" marT="0" marB="0">
-                    <a:noFill/>
-                  </a:tcPr>
-                </a:tc>
-                <a:tc>
-                  <a:txBody>
-                    <a:bodyPr/>
-                    <a:lstStyle/>
-                    <a:p>
-                      <a:pPr algn="ctr">
-                        <a:buNone/>
-                      </a:pPr>
-                      <a:r>
-                        <a:rPr lang="es-ES_tradnl" sz="900" dirty="0">
+                        <a:t>74.75</a:t>
+                      </a:r>
+                      <a:endParaRPr lang="de-DE" sz="1200">
+                        <a:effectLst/>
+                        <a:latin typeface="Times New Roman" panose="02020603050405020304" pitchFamily="18" charset="0"/>
+                        <a:ea typeface="Times New Roman" panose="02020603050405020304" pitchFamily="18" charset="0"/>
+                        <a:cs typeface="Times New Roman" panose="02020603050405020304" pitchFamily="18" charset="0"/>
+                      </a:endParaRPr>
+                    </a:p>
+                  </a:txBody>
+                  <a:tcPr marL="68580" marR="68580" marT="0" marB="0">
+                    <a:noFill/>
+                  </a:tcPr>
+                </a:tc>
+                <a:tc>
+                  <a:txBody>
+                    <a:bodyPr/>
+                    <a:lstStyle/>
+                    <a:p>
+                      <a:pPr algn="ctr">
+                        <a:buNone/>
+                      </a:pPr>
+                      <a:r>
+                        <a:rPr lang="es-ES" sz="900">
                           <a:effectLst/>
                           <a:latin typeface="Times New Roman" panose="02020603050405020304" pitchFamily="18" charset="0"/>
                           <a:ea typeface="Times New Roman" panose="02020603050405020304" pitchFamily="18" charset="0"/>
                           <a:cs typeface="Times New Roman" panose="02020603050405020304" pitchFamily="18" charset="0"/>
                         </a:rPr>
-                        <a:t>25.92</a:t>
-                      </a:r>
-                    </a:p>
-                  </a:txBody>
-                  <a:tcPr marL="68580" marR="68580" marT="0" marB="0">
-                    <a:noFill/>
-                  </a:tcPr>
-                </a:tc>
-                <a:tc>
-                  <a:txBody>
-                    <a:bodyPr/>
-                    <a:lstStyle/>
-                    <a:p>
-                      <a:pPr algn="ctr">
-                        <a:buNone/>
-                      </a:pPr>
-                      <a:r>
-                        <a:rPr lang="es-ES_tradnl" sz="900" dirty="0">
+                        <a:t>30.62</a:t>
+                      </a:r>
+                      <a:endParaRPr lang="de-DE" sz="1200">
+                        <a:effectLst/>
+                        <a:latin typeface="Times New Roman" panose="02020603050405020304" pitchFamily="18" charset="0"/>
+                        <a:ea typeface="Times New Roman" panose="02020603050405020304" pitchFamily="18" charset="0"/>
+                        <a:cs typeface="Times New Roman" panose="02020603050405020304" pitchFamily="18" charset="0"/>
+                      </a:endParaRPr>
+                    </a:p>
+                  </a:txBody>
+                  <a:tcPr marL="68580" marR="68580" marT="0" marB="0">
+                    <a:noFill/>
+                  </a:tcPr>
+                </a:tc>
+                <a:tc>
+                  <a:txBody>
+                    <a:bodyPr/>
+                    <a:lstStyle/>
+                    <a:p>
+                      <a:pPr algn="ctr">
+                        <a:buNone/>
+                      </a:pPr>
+                      <a:r>
+                        <a:rPr lang="es-ES" sz="900">
                           <a:effectLst/>
                           <a:latin typeface="Times New Roman" panose="02020603050405020304" pitchFamily="18" charset="0"/>
                           <a:ea typeface="Times New Roman" panose="02020603050405020304" pitchFamily="18" charset="0"/>
                           <a:cs typeface="Times New Roman" panose="02020603050405020304" pitchFamily="18" charset="0"/>
                         </a:rPr>
-                        <a:t>57.60</a:t>
-                      </a:r>
-                    </a:p>
-                  </a:txBody>
-                  <a:tcPr marL="68580" marR="68580" marT="0" marB="0">
-                    <a:noFill/>
-                  </a:tcPr>
-                </a:tc>
-                <a:tc>
-                  <a:txBody>
-                    <a:bodyPr/>
-                    <a:lstStyle/>
-                    <a:p>
-                      <a:pPr algn="ctr">
-                        <a:buNone/>
-                      </a:pPr>
-                      <a:r>
-                        <a:rPr lang="es-ES_tradnl" sz="900" dirty="0">
+                        <a:t>68.05</a:t>
+                      </a:r>
+                      <a:endParaRPr lang="de-DE" sz="1200">
+                        <a:effectLst/>
+                        <a:latin typeface="Times New Roman" panose="02020603050405020304" pitchFamily="18" charset="0"/>
+                        <a:ea typeface="Times New Roman" panose="02020603050405020304" pitchFamily="18" charset="0"/>
+                        <a:cs typeface="Times New Roman" panose="02020603050405020304" pitchFamily="18" charset="0"/>
+                      </a:endParaRPr>
+                    </a:p>
+                  </a:txBody>
+                  <a:tcPr marL="68580" marR="68580" marT="0" marB="0">
+                    <a:noFill/>
+                  </a:tcPr>
+                </a:tc>
+                <a:tc>
+                  <a:txBody>
+                    <a:bodyPr/>
+                    <a:lstStyle/>
+                    <a:p>
+                      <a:pPr algn="ctr">
+                        <a:buNone/>
+                      </a:pPr>
+                      <a:r>
+                        <a:rPr lang="es-ES" sz="900">
                           <a:effectLst/>
                           <a:latin typeface="Times New Roman" panose="02020603050405020304" pitchFamily="18" charset="0"/>
                           <a:ea typeface="Times New Roman" panose="02020603050405020304" pitchFamily="18" charset="0"/>
@@ -13867,121 +14556,157 @@
                         </a:rPr>
                         <a:t>6.00</a:t>
                       </a:r>
-                    </a:p>
-                  </a:txBody>
-                  <a:tcPr marL="68580" marR="68580" marT="0" marB="0">
-                    <a:noFill/>
-                  </a:tcPr>
-                </a:tc>
-                <a:tc>
-                  <a:txBody>
-                    <a:bodyPr/>
-                    <a:lstStyle/>
-                    <a:p>
-                      <a:pPr algn="ctr">
-                        <a:buNone/>
-                      </a:pPr>
-                      <a:r>
-                        <a:rPr lang="es-ES_tradnl" sz="900" dirty="0">
+                      <a:endParaRPr lang="de-DE" sz="1200">
+                        <a:effectLst/>
+                        <a:latin typeface="Times New Roman" panose="02020603050405020304" pitchFamily="18" charset="0"/>
+                        <a:ea typeface="Times New Roman" panose="02020603050405020304" pitchFamily="18" charset="0"/>
+                        <a:cs typeface="Times New Roman" panose="02020603050405020304" pitchFamily="18" charset="0"/>
+                      </a:endParaRPr>
+                    </a:p>
+                  </a:txBody>
+                  <a:tcPr marL="68580" marR="68580" marT="0" marB="0">
+                    <a:noFill/>
+                  </a:tcPr>
+                </a:tc>
+                <a:tc>
+                  <a:txBody>
+                    <a:bodyPr/>
+                    <a:lstStyle/>
+                    <a:p>
+                      <a:pPr algn="ctr">
+                        <a:buNone/>
+                      </a:pPr>
+                      <a:r>
+                        <a:rPr lang="es-ES" sz="900">
                           <a:effectLst/>
                           <a:latin typeface="Times New Roman" panose="02020603050405020304" pitchFamily="18" charset="0"/>
                           <a:ea typeface="Times New Roman" panose="02020603050405020304" pitchFamily="18" charset="0"/>
                           <a:cs typeface="Times New Roman" panose="02020603050405020304" pitchFamily="18" charset="0"/>
                         </a:rPr>
-                        <a:t>14.94</a:t>
-                      </a:r>
-                    </a:p>
-                  </a:txBody>
-                  <a:tcPr marL="68580" marR="68580" marT="0" marB="0">
-                    <a:noFill/>
-                  </a:tcPr>
-                </a:tc>
-                <a:tc>
-                  <a:txBody>
-                    <a:bodyPr/>
-                    <a:lstStyle/>
-                    <a:p>
-                      <a:pPr algn="ctr">
-                        <a:buNone/>
-                      </a:pPr>
-                      <a:r>
-                        <a:rPr lang="es-ES_tradnl" sz="900" dirty="0">
+                        <a:t>29.75</a:t>
+                      </a:r>
+                      <a:endParaRPr lang="de-DE" sz="1200">
+                        <a:effectLst/>
+                        <a:latin typeface="Times New Roman" panose="02020603050405020304" pitchFamily="18" charset="0"/>
+                        <a:ea typeface="Times New Roman" panose="02020603050405020304" pitchFamily="18" charset="0"/>
+                        <a:cs typeface="Times New Roman" panose="02020603050405020304" pitchFamily="18" charset="0"/>
+                      </a:endParaRPr>
+                    </a:p>
+                  </a:txBody>
+                  <a:tcPr marL="68580" marR="68580" marT="0" marB="0">
+                    <a:noFill/>
+                  </a:tcPr>
+                </a:tc>
+                <a:tc>
+                  <a:txBody>
+                    <a:bodyPr/>
+                    <a:lstStyle/>
+                    <a:p>
+                      <a:pPr algn="ctr">
+                        <a:buNone/>
+                      </a:pPr>
+                      <a:r>
+                        <a:rPr lang="es-ES" sz="900">
                           <a:effectLst/>
                           <a:latin typeface="Times New Roman" panose="02020603050405020304" pitchFamily="18" charset="0"/>
                           <a:ea typeface="Times New Roman" panose="02020603050405020304" pitchFamily="18" charset="0"/>
                           <a:cs typeface="Times New Roman" panose="02020603050405020304" pitchFamily="18" charset="0"/>
                         </a:rPr>
-                        <a:t>17.78</a:t>
-                      </a:r>
-                    </a:p>
-                  </a:txBody>
-                  <a:tcPr marL="68580" marR="68580" marT="0" marB="0">
-                    <a:noFill/>
-                  </a:tcPr>
-                </a:tc>
-                <a:tc>
-                  <a:txBody>
-                    <a:bodyPr/>
-                    <a:lstStyle/>
-                    <a:p>
-                      <a:pPr algn="ctr">
-                        <a:buNone/>
-                      </a:pPr>
-                      <a:r>
-                        <a:rPr lang="es-ES_tradnl" sz="900" dirty="0">
+                        <a:t>29.93</a:t>
+                      </a:r>
+                      <a:endParaRPr lang="de-DE" sz="1200">
+                        <a:effectLst/>
+                        <a:latin typeface="Times New Roman" panose="02020603050405020304" pitchFamily="18" charset="0"/>
+                        <a:ea typeface="Times New Roman" panose="02020603050405020304" pitchFamily="18" charset="0"/>
+                        <a:cs typeface="Times New Roman" panose="02020603050405020304" pitchFamily="18" charset="0"/>
+                      </a:endParaRPr>
+                    </a:p>
+                  </a:txBody>
+                  <a:tcPr marL="68580" marR="68580" marT="0" marB="0">
+                    <a:noFill/>
+                  </a:tcPr>
+                </a:tc>
+                <a:tc>
+                  <a:txBody>
+                    <a:bodyPr/>
+                    <a:lstStyle/>
+                    <a:p>
+                      <a:pPr algn="ctr">
+                        <a:buNone/>
+                      </a:pPr>
+                      <a:r>
+                        <a:rPr lang="es-ES" sz="900">
                           <a:effectLst/>
                           <a:latin typeface="Times New Roman" panose="02020603050405020304" pitchFamily="18" charset="0"/>
                           <a:ea typeface="Times New Roman" panose="02020603050405020304" pitchFamily="18" charset="0"/>
                           <a:cs typeface="Times New Roman" panose="02020603050405020304" pitchFamily="18" charset="0"/>
                         </a:rPr>
-                        <a:t>271.98</a:t>
-                      </a:r>
-                    </a:p>
-                  </a:txBody>
-                  <a:tcPr marL="68580" marR="68580" marT="0" marB="0">
-                    <a:noFill/>
-                  </a:tcPr>
-                </a:tc>
-                <a:tc>
-                  <a:txBody>
-                    <a:bodyPr/>
-                    <a:lstStyle/>
-                    <a:p>
-                      <a:pPr algn="ctr">
-                        <a:buNone/>
-                      </a:pPr>
-                      <a:r>
-                        <a:rPr lang="es-ES_tradnl" sz="900" dirty="0">
+                        <a:t>535.05</a:t>
+                      </a:r>
+                      <a:endParaRPr lang="de-DE" sz="1200">
+                        <a:effectLst/>
+                        <a:latin typeface="Times New Roman" panose="02020603050405020304" pitchFamily="18" charset="0"/>
+                        <a:ea typeface="Times New Roman" panose="02020603050405020304" pitchFamily="18" charset="0"/>
+                        <a:cs typeface="Times New Roman" panose="02020603050405020304" pitchFamily="18" charset="0"/>
+                      </a:endParaRPr>
+                    </a:p>
+                  </a:txBody>
+                  <a:tcPr marL="68580" marR="68580" marT="0" marB="0">
+                    <a:noFill/>
+                  </a:tcPr>
+                </a:tc>
+                <a:tc>
+                  <a:txBody>
+                    <a:bodyPr/>
+                    <a:lstStyle/>
+                    <a:p>
+                      <a:pPr algn="ctr">
+                        <a:buNone/>
+                      </a:pPr>
+                      <a:r>
+                        <a:rPr lang="es-ES" sz="900">
                           <a:effectLst/>
                           <a:latin typeface="Times New Roman" panose="02020603050405020304" pitchFamily="18" charset="0"/>
                           <a:ea typeface="Times New Roman" panose="02020603050405020304" pitchFamily="18" charset="0"/>
                           <a:cs typeface="Times New Roman" panose="02020603050405020304" pitchFamily="18" charset="0"/>
                         </a:rPr>
-                        <a:t>0.29</a:t>
-                      </a:r>
-                    </a:p>
-                  </a:txBody>
-                  <a:tcPr marL="68580" marR="68580" marT="0" marB="0">
-                    <a:noFill/>
-                  </a:tcPr>
-                </a:tc>
-                <a:tc>
-                  <a:txBody>
-                    <a:bodyPr/>
-                    <a:lstStyle/>
-                    <a:p>
-                      <a:pPr algn="ctr">
-                        <a:buNone/>
-                      </a:pPr>
-                      <a:r>
-                        <a:rPr lang="es-ES_tradnl" sz="900" dirty="0">
+                        <a:t>0.28</a:t>
+                      </a:r>
+                      <a:endParaRPr lang="de-DE" sz="1200">
+                        <a:effectLst/>
+                        <a:latin typeface="Times New Roman" panose="02020603050405020304" pitchFamily="18" charset="0"/>
+                        <a:ea typeface="Times New Roman" panose="02020603050405020304" pitchFamily="18" charset="0"/>
+                        <a:cs typeface="Times New Roman" panose="02020603050405020304" pitchFamily="18" charset="0"/>
+                      </a:endParaRPr>
+                    </a:p>
+                  </a:txBody>
+                  <a:tcPr marL="68580" marR="68580" marT="0" marB="0">
+                    <a:noFill/>
+                  </a:tcPr>
+                </a:tc>
+                <a:tc>
+                  <a:txBody>
+                    <a:bodyPr/>
+                    <a:lstStyle/>
+                    <a:p>
+                      <a:pPr algn="ctr">
+                        <a:buNone/>
+                      </a:pPr>
+                      <a:r>
+                        <a:rPr lang="es-ES" sz="900">
                           <a:effectLst/>
                           <a:latin typeface="Times New Roman" panose="02020603050405020304" pitchFamily="18" charset="0"/>
                           <a:ea typeface="Times New Roman" panose="02020603050405020304" pitchFamily="18" charset="0"/>
                           <a:cs typeface="Times New Roman" panose="02020603050405020304" pitchFamily="18" charset="0"/>
                         </a:rPr>
-                        <a:t>124.00</a:t>
-                      </a:r>
+                        <a:t>91.00</a:t>
+                      </a:r>
+                      <a:endParaRPr lang="de-DE" sz="1200">
+                        <a:effectLst/>
+                        <a:latin typeface="Times New Roman" panose="02020603050405020304" pitchFamily="18" charset="0"/>
+                        <a:ea typeface="Times New Roman" panose="02020603050405020304" pitchFamily="18" charset="0"/>
+                        <a:cs typeface="Times New Roman" panose="02020603050405020304" pitchFamily="18" charset="0"/>
+                      </a:endParaRPr>
                     </a:p>
                   </a:txBody>
                   <a:tcPr marL="68580" marR="68580" marT="0" marB="0">
@@ -14005,7 +14730,7 @@
                         </a:rPr>
                         <a:t>6.00</a:t>
                       </a:r>
-                      <a:endParaRPr lang="de-DE" sz="900">
+                      <a:endParaRPr lang="de-DE" sz="1200">
                         <a:effectLst/>
                         <a:latin typeface="Times New Roman" panose="02020603050405020304" pitchFamily="18" charset="0"/>
                         <a:ea typeface="Times New Roman" panose="02020603050405020304" pitchFamily="18" charset="0"/>
@@ -14034,7 +14759,7 @@
                         </a:rPr>
                         <a:t>2.70</a:t>
                       </a:r>
-                      <a:endParaRPr lang="de-DE" sz="900">
+                      <a:endParaRPr lang="de-DE" sz="1200">
                         <a:effectLst/>
                         <a:latin typeface="Times New Roman" panose="02020603050405020304" pitchFamily="18" charset="0"/>
                         <a:ea typeface="Times New Roman" panose="02020603050405020304" pitchFamily="18" charset="0"/>
@@ -14063,7 +14788,7 @@
                         </a:rPr>
                         <a:t>43.52</a:t>
                       </a:r>
-                      <a:endParaRPr lang="de-DE" sz="900">
+                      <a:endParaRPr lang="de-DE" sz="1200">
                         <a:effectLst/>
                         <a:latin typeface="Times New Roman" panose="02020603050405020304" pitchFamily="18" charset="0"/>
                         <a:ea typeface="Times New Roman" panose="02020603050405020304" pitchFamily="18" charset="0"/>
@@ -14092,7 +14817,7 @@
                         </a:rPr>
                         <a:t>14.66</a:t>
                       </a:r>
-                      <a:endParaRPr lang="de-DE" sz="900">
+                      <a:endParaRPr lang="de-DE" sz="1200">
                         <a:effectLst/>
                         <a:latin typeface="Times New Roman" panose="02020603050405020304" pitchFamily="18" charset="0"/>
                         <a:ea typeface="Times New Roman" panose="02020603050405020304" pitchFamily="18" charset="0"/>
@@ -14119,9 +14844,9 @@
                           <a:ea typeface="Times New Roman" panose="02020603050405020304" pitchFamily="18" charset="0"/>
                           <a:cs typeface="Times New Roman" panose="02020603050405020304" pitchFamily="18" charset="0"/>
                         </a:rPr>
-                        <a:t>6.00</a:t>
-                      </a:r>
-                      <a:endParaRPr lang="de-DE" sz="900">
+                        <a:t>20.41</a:t>
+                      </a:r>
+                      <a:endParaRPr lang="de-DE" sz="1200">
                         <a:effectLst/>
                         <a:latin typeface="Times New Roman" panose="02020603050405020304" pitchFamily="18" charset="0"/>
                         <a:ea typeface="Times New Roman" panose="02020603050405020304" pitchFamily="18" charset="0"/>
@@ -14175,7 +14900,7 @@
                         <a:buNone/>
                       </a:pPr>
                       <a:r>
-                        <a:rPr lang="es-ES_tradnl" sz="900" dirty="0">
+                        <a:rPr lang="es-ES" sz="900">
                           <a:effectLst/>
                           <a:latin typeface="Times New Roman" panose="02020603050405020304" pitchFamily="18" charset="0"/>
                           <a:ea typeface="Times New Roman" panose="02020603050405020304" pitchFamily="18" charset="0"/>
@@ -14183,91 +14908,115 @@
                         </a:rPr>
                         <a:t>-3.14</a:t>
                       </a:r>
-                    </a:p>
-                  </a:txBody>
-                  <a:tcPr marL="68580" marR="68580" marT="0" marB="0">
-                    <a:noFill/>
-                  </a:tcPr>
-                </a:tc>
-                <a:tc>
-                  <a:txBody>
-                    <a:bodyPr/>
-                    <a:lstStyle/>
-                    <a:p>
-                      <a:pPr algn="ctr">
-                        <a:buNone/>
-                      </a:pPr>
-                      <a:r>
-                        <a:rPr lang="es-ES_tradnl" sz="900" dirty="0">
+                      <a:endParaRPr lang="de-DE" sz="1200">
+                        <a:effectLst/>
+                        <a:latin typeface="Times New Roman" panose="02020603050405020304" pitchFamily="18" charset="0"/>
+                        <a:ea typeface="Times New Roman" panose="02020603050405020304" pitchFamily="18" charset="0"/>
+                        <a:cs typeface="Times New Roman" panose="02020603050405020304" pitchFamily="18" charset="0"/>
+                      </a:endParaRPr>
+                    </a:p>
+                  </a:txBody>
+                  <a:tcPr marL="68580" marR="68580" marT="0" marB="0">
+                    <a:noFill/>
+                  </a:tcPr>
+                </a:tc>
+                <a:tc>
+                  <a:txBody>
+                    <a:bodyPr/>
+                    <a:lstStyle/>
+                    <a:p>
+                      <a:pPr algn="ctr">
+                        <a:buNone/>
+                      </a:pPr>
+                      <a:r>
+                        <a:rPr lang="es-ES" sz="900">
                           <a:effectLst/>
                           <a:latin typeface="Times New Roman" panose="02020603050405020304" pitchFamily="18" charset="0"/>
                           <a:ea typeface="Times New Roman" panose="02020603050405020304" pitchFamily="18" charset="0"/>
                           <a:cs typeface="Times New Roman" panose="02020603050405020304" pitchFamily="18" charset="0"/>
                         </a:rPr>
-                        <a:t>59.95</a:t>
-                      </a:r>
-                    </a:p>
-                  </a:txBody>
-                  <a:tcPr marL="68580" marR="68580" marT="0" marB="0">
-                    <a:noFill/>
-                  </a:tcPr>
-                </a:tc>
-                <a:tc>
-                  <a:txBody>
-                    <a:bodyPr/>
-                    <a:lstStyle/>
-                    <a:p>
-                      <a:pPr algn="ctr">
-                        <a:buNone/>
-                      </a:pPr>
-                      <a:r>
-                        <a:rPr lang="es-ES_tradnl" sz="900" dirty="0">
+                        <a:t>74.75</a:t>
+                      </a:r>
+                      <a:endParaRPr lang="de-DE" sz="1200">
+                        <a:effectLst/>
+                        <a:latin typeface="Times New Roman" panose="02020603050405020304" pitchFamily="18" charset="0"/>
+                        <a:ea typeface="Times New Roman" panose="02020603050405020304" pitchFamily="18" charset="0"/>
+                        <a:cs typeface="Times New Roman" panose="02020603050405020304" pitchFamily="18" charset="0"/>
+                      </a:endParaRPr>
+                    </a:p>
+                  </a:txBody>
+                  <a:tcPr marL="68580" marR="68580" marT="0" marB="0">
+                    <a:noFill/>
+                  </a:tcPr>
+                </a:tc>
+                <a:tc>
+                  <a:txBody>
+                    <a:bodyPr/>
+                    <a:lstStyle/>
+                    <a:p>
+                      <a:pPr algn="ctr">
+                        <a:buNone/>
+                      </a:pPr>
+                      <a:r>
+                        <a:rPr lang="es-ES" sz="900">
                           <a:effectLst/>
                           <a:latin typeface="Times New Roman" panose="02020603050405020304" pitchFamily="18" charset="0"/>
                           <a:ea typeface="Times New Roman" panose="02020603050405020304" pitchFamily="18" charset="0"/>
                           <a:cs typeface="Times New Roman" panose="02020603050405020304" pitchFamily="18" charset="0"/>
                         </a:rPr>
-                        <a:t>26.19</a:t>
-                      </a:r>
-                    </a:p>
-                  </a:txBody>
-                  <a:tcPr marL="68580" marR="68580" marT="0" marB="0">
-                    <a:noFill/>
-                  </a:tcPr>
-                </a:tc>
-                <a:tc>
-                  <a:txBody>
-                    <a:bodyPr/>
-                    <a:lstStyle/>
-                    <a:p>
-                      <a:pPr algn="ctr">
-                        <a:buNone/>
-                      </a:pPr>
-                      <a:r>
-                        <a:rPr lang="es-ES_tradnl" sz="900" dirty="0">
+                        <a:t>30.64</a:t>
+                      </a:r>
+                      <a:endParaRPr lang="de-DE" sz="1200">
+                        <a:effectLst/>
+                        <a:latin typeface="Times New Roman" panose="02020603050405020304" pitchFamily="18" charset="0"/>
+                        <a:ea typeface="Times New Roman" panose="02020603050405020304" pitchFamily="18" charset="0"/>
+                        <a:cs typeface="Times New Roman" panose="02020603050405020304" pitchFamily="18" charset="0"/>
+                      </a:endParaRPr>
+                    </a:p>
+                  </a:txBody>
+                  <a:tcPr marL="68580" marR="68580" marT="0" marB="0">
+                    <a:noFill/>
+                  </a:tcPr>
+                </a:tc>
+                <a:tc>
+                  <a:txBody>
+                    <a:bodyPr/>
+                    <a:lstStyle/>
+                    <a:p>
+                      <a:pPr algn="ctr">
+                        <a:buNone/>
+                      </a:pPr>
+                      <a:r>
+                        <a:rPr lang="es-ES" sz="900">
                           <a:effectLst/>
                           <a:latin typeface="Times New Roman" panose="02020603050405020304" pitchFamily="18" charset="0"/>
                           <a:ea typeface="Times New Roman" panose="02020603050405020304" pitchFamily="18" charset="0"/>
                           <a:cs typeface="Times New Roman" panose="02020603050405020304" pitchFamily="18" charset="0"/>
                         </a:rPr>
-                        <a:t>58.21</a:t>
-                      </a:r>
-                    </a:p>
-                  </a:txBody>
-                  <a:tcPr marL="68580" marR="68580" marT="0" marB="0">
-                    <a:noFill/>
-                  </a:tcPr>
-                </a:tc>
-                <a:tc>
-                  <a:txBody>
-                    <a:bodyPr/>
-                    <a:lstStyle/>
-                    <a:p>
-                      <a:pPr algn="ctr">
-                        <a:buNone/>
-                      </a:pPr>
-                      <a:r>
-                        <a:rPr lang="es-ES_tradnl" sz="900" dirty="0">
+                        <a:t>68.09</a:t>
+                      </a:r>
+                      <a:endParaRPr lang="de-DE" sz="1200">
+                        <a:effectLst/>
+                        <a:latin typeface="Times New Roman" panose="02020603050405020304" pitchFamily="18" charset="0"/>
+                        <a:ea typeface="Times New Roman" panose="02020603050405020304" pitchFamily="18" charset="0"/>
+                        <a:cs typeface="Times New Roman" panose="02020603050405020304" pitchFamily="18" charset="0"/>
+                      </a:endParaRPr>
+                    </a:p>
+                  </a:txBody>
+                  <a:tcPr marL="68580" marR="68580" marT="0" marB="0">
+                    <a:noFill/>
+                  </a:tcPr>
+                </a:tc>
+                <a:tc>
+                  <a:txBody>
+                    <a:bodyPr/>
+                    <a:lstStyle/>
+                    <a:p>
+                      <a:pPr algn="ctr">
+                        <a:buNone/>
+                      </a:pPr>
+                      <a:r>
+                        <a:rPr lang="es-ES" sz="900">
                           <a:effectLst/>
                           <a:latin typeface="Times New Roman" panose="02020603050405020304" pitchFamily="18" charset="0"/>
                           <a:ea typeface="Times New Roman" panose="02020603050405020304" pitchFamily="18" charset="0"/>
@@ -14275,121 +15024,157 @@
                         </a:rPr>
                         <a:t>6.00</a:t>
                       </a:r>
-                    </a:p>
-                  </a:txBody>
-                  <a:tcPr marL="68580" marR="68580" marT="0" marB="0">
-                    <a:noFill/>
-                  </a:tcPr>
-                </a:tc>
-                <a:tc>
-                  <a:txBody>
-                    <a:bodyPr/>
-                    <a:lstStyle/>
-                    <a:p>
-                      <a:pPr algn="ctr">
-                        <a:buNone/>
-                      </a:pPr>
-                      <a:r>
-                        <a:rPr lang="es-ES_tradnl" sz="900" dirty="0">
+                      <a:endParaRPr lang="de-DE" sz="1200">
+                        <a:effectLst/>
+                        <a:latin typeface="Times New Roman" panose="02020603050405020304" pitchFamily="18" charset="0"/>
+                        <a:ea typeface="Times New Roman" panose="02020603050405020304" pitchFamily="18" charset="0"/>
+                        <a:cs typeface="Times New Roman" panose="02020603050405020304" pitchFamily="18" charset="0"/>
+                      </a:endParaRPr>
+                    </a:p>
+                  </a:txBody>
+                  <a:tcPr marL="68580" marR="68580" marT="0" marB="0">
+                    <a:noFill/>
+                  </a:tcPr>
+                </a:tc>
+                <a:tc>
+                  <a:txBody>
+                    <a:bodyPr/>
+                    <a:lstStyle/>
+                    <a:p>
+                      <a:pPr algn="ctr">
+                        <a:buNone/>
+                      </a:pPr>
+                      <a:r>
+                        <a:rPr lang="es-ES" sz="900">
                           <a:effectLst/>
                           <a:latin typeface="Times New Roman" panose="02020603050405020304" pitchFamily="18" charset="0"/>
                           <a:ea typeface="Times New Roman" panose="02020603050405020304" pitchFamily="18" charset="0"/>
                           <a:cs typeface="Times New Roman" panose="02020603050405020304" pitchFamily="18" charset="0"/>
                         </a:rPr>
-                        <a:t>14.95</a:t>
-                      </a:r>
-                    </a:p>
-                  </a:txBody>
-                  <a:tcPr marL="68580" marR="68580" marT="0" marB="0">
-                    <a:noFill/>
-                  </a:tcPr>
-                </a:tc>
-                <a:tc>
-                  <a:txBody>
-                    <a:bodyPr/>
-                    <a:lstStyle/>
-                    <a:p>
-                      <a:pPr algn="ctr">
-                        <a:buNone/>
-                      </a:pPr>
-                      <a:r>
-                        <a:rPr lang="es-ES_tradnl" sz="900" dirty="0">
+                        <a:t>29.75</a:t>
+                      </a:r>
+                      <a:endParaRPr lang="de-DE" sz="1200">
+                        <a:effectLst/>
+                        <a:latin typeface="Times New Roman" panose="02020603050405020304" pitchFamily="18" charset="0"/>
+                        <a:ea typeface="Times New Roman" panose="02020603050405020304" pitchFamily="18" charset="0"/>
+                        <a:cs typeface="Times New Roman" panose="02020603050405020304" pitchFamily="18" charset="0"/>
+                      </a:endParaRPr>
+                    </a:p>
+                  </a:txBody>
+                  <a:tcPr marL="68580" marR="68580" marT="0" marB="0">
+                    <a:noFill/>
+                  </a:tcPr>
+                </a:tc>
+                <a:tc>
+                  <a:txBody>
+                    <a:bodyPr/>
+                    <a:lstStyle/>
+                    <a:p>
+                      <a:pPr algn="ctr">
+                        <a:buNone/>
+                      </a:pPr>
+                      <a:r>
+                        <a:rPr lang="es-ES" sz="900">
                           <a:effectLst/>
                           <a:latin typeface="Times New Roman" panose="02020603050405020304" pitchFamily="18" charset="0"/>
                           <a:ea typeface="Times New Roman" panose="02020603050405020304" pitchFamily="18" charset="0"/>
                           <a:cs typeface="Times New Roman" panose="02020603050405020304" pitchFamily="18" charset="0"/>
                         </a:rPr>
-                        <a:t>20.98</a:t>
-                      </a:r>
-                    </a:p>
-                  </a:txBody>
-                  <a:tcPr marL="68580" marR="68580" marT="0" marB="0">
-                    <a:noFill/>
-                  </a:tcPr>
-                </a:tc>
-                <a:tc>
-                  <a:txBody>
-                    <a:bodyPr/>
-                    <a:lstStyle/>
-                    <a:p>
-                      <a:pPr algn="ctr">
-                        <a:buNone/>
-                      </a:pPr>
-                      <a:r>
-                        <a:rPr lang="es-ES_tradnl" sz="900" dirty="0">
+                        <a:t>31.06</a:t>
+                      </a:r>
+                      <a:endParaRPr lang="de-DE" sz="1200">
+                        <a:effectLst/>
+                        <a:latin typeface="Times New Roman" panose="02020603050405020304" pitchFamily="18" charset="0"/>
+                        <a:ea typeface="Times New Roman" panose="02020603050405020304" pitchFamily="18" charset="0"/>
+                        <a:cs typeface="Times New Roman" panose="02020603050405020304" pitchFamily="18" charset="0"/>
+                      </a:endParaRPr>
+                    </a:p>
+                  </a:txBody>
+                  <a:tcPr marL="68580" marR="68580" marT="0" marB="0">
+                    <a:noFill/>
+                  </a:tcPr>
+                </a:tc>
+                <a:tc>
+                  <a:txBody>
+                    <a:bodyPr/>
+                    <a:lstStyle/>
+                    <a:p>
+                      <a:pPr algn="ctr">
+                        <a:buNone/>
+                      </a:pPr>
+                      <a:r>
+                        <a:rPr lang="es-ES" sz="900">
                           <a:effectLst/>
                           <a:latin typeface="Times New Roman" panose="02020603050405020304" pitchFamily="18" charset="0"/>
                           <a:ea typeface="Times New Roman" panose="02020603050405020304" pitchFamily="18" charset="0"/>
                           <a:cs typeface="Times New Roman" panose="02020603050405020304" pitchFamily="18" charset="0"/>
                         </a:rPr>
-                        <a:t>275.41</a:t>
-                      </a:r>
-                    </a:p>
-                  </a:txBody>
-                  <a:tcPr marL="68580" marR="68580" marT="0" marB="0">
-                    <a:noFill/>
-                  </a:tcPr>
-                </a:tc>
-                <a:tc>
-                  <a:txBody>
-                    <a:bodyPr/>
-                    <a:lstStyle/>
-                    <a:p>
-                      <a:pPr algn="ctr">
-                        <a:buNone/>
-                      </a:pPr>
-                      <a:r>
-                        <a:rPr lang="es-ES_tradnl" sz="900" dirty="0">
+                        <a:t>535.24</a:t>
+                      </a:r>
+                      <a:endParaRPr lang="de-DE" sz="1200">
+                        <a:effectLst/>
+                        <a:latin typeface="Times New Roman" panose="02020603050405020304" pitchFamily="18" charset="0"/>
+                        <a:ea typeface="Times New Roman" panose="02020603050405020304" pitchFamily="18" charset="0"/>
+                        <a:cs typeface="Times New Roman" panose="02020603050405020304" pitchFamily="18" charset="0"/>
+                      </a:endParaRPr>
+                    </a:p>
+                  </a:txBody>
+                  <a:tcPr marL="68580" marR="68580" marT="0" marB="0">
+                    <a:noFill/>
+                  </a:tcPr>
+                </a:tc>
+                <a:tc>
+                  <a:txBody>
+                    <a:bodyPr/>
+                    <a:lstStyle/>
+                    <a:p>
+                      <a:pPr algn="ctr">
+                        <a:buNone/>
+                      </a:pPr>
+                      <a:r>
+                        <a:rPr lang="es-ES" sz="900">
                           <a:effectLst/>
                           <a:latin typeface="Times New Roman" panose="02020603050405020304" pitchFamily="18" charset="0"/>
                           <a:ea typeface="Times New Roman" panose="02020603050405020304" pitchFamily="18" charset="0"/>
                           <a:cs typeface="Times New Roman" panose="02020603050405020304" pitchFamily="18" charset="0"/>
                         </a:rPr>
-                        <a:t>0.25</a:t>
-                      </a:r>
-                    </a:p>
-                  </a:txBody>
-                  <a:tcPr marL="68580" marR="68580" marT="0" marB="0">
-                    <a:noFill/>
-                  </a:tcPr>
-                </a:tc>
-                <a:tc>
-                  <a:txBody>
-                    <a:bodyPr/>
-                    <a:lstStyle/>
-                    <a:p>
-                      <a:pPr algn="ctr">
-                        <a:buNone/>
-                      </a:pPr>
-                      <a:r>
-                        <a:rPr lang="es-ES_tradnl" sz="900" dirty="0">
+                        <a:t>0.26</a:t>
+                      </a:r>
+                      <a:endParaRPr lang="de-DE" sz="1200">
+                        <a:effectLst/>
+                        <a:latin typeface="Times New Roman" panose="02020603050405020304" pitchFamily="18" charset="0"/>
+                        <a:ea typeface="Times New Roman" panose="02020603050405020304" pitchFamily="18" charset="0"/>
+                        <a:cs typeface="Times New Roman" panose="02020603050405020304" pitchFamily="18" charset="0"/>
+                      </a:endParaRPr>
+                    </a:p>
+                  </a:txBody>
+                  <a:tcPr marL="68580" marR="68580" marT="0" marB="0">
+                    <a:noFill/>
+                  </a:tcPr>
+                </a:tc>
+                <a:tc>
+                  <a:txBody>
+                    <a:bodyPr/>
+                    <a:lstStyle/>
+                    <a:p>
+                      <a:pPr algn="ctr">
+                        <a:buNone/>
+                      </a:pPr>
+                      <a:r>
+                        <a:rPr lang="es-ES" sz="900">
                           <a:effectLst/>
                           <a:latin typeface="Times New Roman" panose="02020603050405020304" pitchFamily="18" charset="0"/>
                           <a:ea typeface="Times New Roman" panose="02020603050405020304" pitchFamily="18" charset="0"/>
                           <a:cs typeface="Times New Roman" panose="02020603050405020304" pitchFamily="18" charset="0"/>
                         </a:rPr>
-                        <a:t>117.00</a:t>
-                      </a:r>
+                        <a:t>84.00</a:t>
+                      </a:r>
+                      <a:endParaRPr lang="de-DE" sz="1200">
+                        <a:effectLst/>
+                        <a:latin typeface="Times New Roman" panose="02020603050405020304" pitchFamily="18" charset="0"/>
+                        <a:ea typeface="Times New Roman" panose="02020603050405020304" pitchFamily="18" charset="0"/>
+                        <a:cs typeface="Times New Roman" panose="02020603050405020304" pitchFamily="18" charset="0"/>
+                      </a:endParaRPr>
                     </a:p>
                   </a:txBody>
                   <a:tcPr marL="68580" marR="68580" marT="0" marB="0">
@@ -14413,7 +15198,7 @@
                         </a:rPr>
                         <a:t>6.00</a:t>
                       </a:r>
-                      <a:endParaRPr lang="de-DE" sz="900">
+                      <a:endParaRPr lang="de-DE" sz="1200">
                         <a:effectLst/>
                         <a:latin typeface="Times New Roman" panose="02020603050405020304" pitchFamily="18" charset="0"/>
                         <a:ea typeface="Times New Roman" panose="02020603050405020304" pitchFamily="18" charset="0"/>
@@ -14442,7 +15227,7 @@
                         </a:rPr>
                         <a:t>2.84</a:t>
                       </a:r>
-                      <a:endParaRPr lang="de-DE" sz="900">
+                      <a:endParaRPr lang="de-DE" sz="1200">
                         <a:effectLst/>
                         <a:latin typeface="Times New Roman" panose="02020603050405020304" pitchFamily="18" charset="0"/>
                         <a:ea typeface="Times New Roman" panose="02020603050405020304" pitchFamily="18" charset="0"/>
@@ -14471,7 +15256,7 @@
                         </a:rPr>
                         <a:t>47.82</a:t>
                       </a:r>
-                      <a:endParaRPr lang="de-DE" sz="900">
+                      <a:endParaRPr lang="de-DE" sz="1200">
                         <a:effectLst/>
                         <a:latin typeface="Times New Roman" panose="02020603050405020304" pitchFamily="18" charset="0"/>
                         <a:ea typeface="Times New Roman" panose="02020603050405020304" pitchFamily="18" charset="0"/>
@@ -14500,7 +15285,7 @@
                         </a:rPr>
                         <a:t>15.22</a:t>
                       </a:r>
-                      <a:endParaRPr lang="de-DE" sz="900">
+                      <a:endParaRPr lang="de-DE" sz="1200">
                         <a:effectLst/>
                         <a:latin typeface="Times New Roman" panose="02020603050405020304" pitchFamily="18" charset="0"/>
                         <a:ea typeface="Times New Roman" panose="02020603050405020304" pitchFamily="18" charset="0"/>
@@ -14527,9 +15312,9 @@
                           <a:ea typeface="Times New Roman" panose="02020603050405020304" pitchFamily="18" charset="0"/>
                           <a:cs typeface="Times New Roman" panose="02020603050405020304" pitchFamily="18" charset="0"/>
                         </a:rPr>
-                        <a:t>6.00</a:t>
-                      </a:r>
-                      <a:endParaRPr lang="de-DE" sz="900" dirty="0">
+                        <a:t>45.53</a:t>
+                      </a:r>
+                      <a:endParaRPr lang="de-DE" sz="1200" dirty="0">
                         <a:effectLst/>
                         <a:latin typeface="Times New Roman" panose="02020603050405020304" pitchFamily="18" charset="0"/>
                         <a:ea typeface="Times New Roman" panose="02020603050405020304" pitchFamily="18" charset="0"/>
@@ -15373,8 +16158,8 @@
         </p:nvSpPr>
         <p:spPr>
           <a:xfrm>
-            <a:off x="561487" y="2465822"/>
-            <a:ext cx="2688490" cy="1421928"/>
+            <a:off x="561487" y="2635877"/>
+            <a:ext cx="2688490" cy="1255728"/>
           </a:xfrm>
           <a:prstGeom prst="rect">
             <a:avLst/>
@@ -15389,44 +16174,12 @@
           <a:p>
             <a:pPr algn="l"/>
             <a:r>
-              <a:rPr lang="es-ES_tradnl" dirty="0"/>
-              <a:t>La velocidad inicial impacta el transitorio, generando variaciones en convergencia, RMSE y esfuerzo de control, sin afectar el estado estacionario.</a:t>
+              <a:rPr lang="es-ES_tradnl" sz="1200" dirty="0"/>
+              <a:t>La velocidad inicial afecta principalmente el régimen transitorio, con variaciones leves en el RMSE (≈ 29.85° - 31.06°) y en el esfuerzo de control. Sin embargo, el estado estacionario se mantiene prácticamente inalterado.</a:t>
             </a:r>
           </a:p>
         </p:txBody>
       </p:sp>
-      <p:pic>
-        <p:nvPicPr>
-          <p:cNvPr id="6" name="Onlinebild-Platzhalter 5">
-            <a:extLst>
-              <a:ext uri="{FF2B5EF4-FFF2-40B4-BE49-F238E27FC236}">
-                <a16:creationId xmlns:a16="http://schemas.microsoft.com/office/drawing/2014/main" id="{A18A7EBA-FF88-9F73-7ACE-C28D2800D5AC}"/>
-              </a:ext>
-            </a:extLst>
-          </p:cNvPr>
-          <p:cNvPicPr>
-            <a:picLocks noGrp="1" noChangeAspect="1"/>
-          </p:cNvPicPr>
-          <p:nvPr>
-            <p:ph type="clipArt" sz="quarter" idx="15"/>
-          </p:nvPr>
-        </p:nvPicPr>
-        <p:blipFill>
-          <a:blip r:embed="rId2"/>
-          <a:stretch>
-            <a:fillRect/>
-          </a:stretch>
-        </p:blipFill>
-        <p:spPr>
-          <a:xfrm>
-            <a:off x="3476978" y="2078038"/>
-            <a:ext cx="6716889" cy="2505075"/>
-          </a:xfrm>
-          <a:prstGeom prst="rect">
-            <a:avLst/>
-          </a:prstGeom>
-        </p:spPr>
-      </p:pic>
       <p:sp>
         <p:nvSpPr>
           <p:cNvPr id="2" name="Fußzeilenplatzhalter 2">
@@ -15556,6 +16309,38 @@
           </a:p>
         </p:txBody>
       </p:sp>
+      <p:pic>
+        <p:nvPicPr>
+          <p:cNvPr id="9" name="Onlinebild-Platzhalter 8">
+            <a:extLst>
+              <a:ext uri="{FF2B5EF4-FFF2-40B4-BE49-F238E27FC236}">
+                <a16:creationId xmlns:a16="http://schemas.microsoft.com/office/drawing/2014/main" id="{A1AAB7BE-95D5-B913-C353-1FCC89068CE2}"/>
+              </a:ext>
+            </a:extLst>
+          </p:cNvPr>
+          <p:cNvPicPr>
+            <a:picLocks noGrp="1" noChangeAspect="1"/>
+          </p:cNvPicPr>
+          <p:nvPr>
+            <p:ph type="clipArt" sz="quarter" idx="15"/>
+          </p:nvPr>
+        </p:nvPicPr>
+        <p:blipFill>
+          <a:blip r:embed="rId2"/>
+          <a:stretch>
+            <a:fillRect/>
+          </a:stretch>
+        </p:blipFill>
+        <p:spPr>
+          <a:xfrm>
+            <a:off x="3249976" y="2078038"/>
+            <a:ext cx="6871485" cy="2505075"/>
+          </a:xfrm>
+          <a:prstGeom prst="rect">
+            <a:avLst/>
+          </a:prstGeom>
+        </p:spPr>
+      </p:pic>
     </p:spTree>
     <p:extLst>
       <p:ext uri="{BB962C8B-B14F-4D97-AF65-F5344CB8AC3E}">
@@ -15762,7 +16547,7 @@
         <p:spPr>
           <a:xfrm>
             <a:off x="376884" y="5440095"/>
-            <a:ext cx="11609170" cy="1077218"/>
+            <a:ext cx="11609170" cy="584775"/>
           </a:xfrm>
           <a:prstGeom prst="rect">
             <a:avLst/>
@@ -15781,25 +16566,8 @@
                 <a:latin typeface="Times New Roman" panose="02020603050405020304" pitchFamily="18" charset="0"/>
                 <a:cs typeface="Times New Roman" panose="02020603050405020304" pitchFamily="18" charset="0"/>
               </a:rPr>
-              <a:t>El agente mantiene la forma global del RMSE.</a:t>
+              <a:t>El agente mantiene la forma global del RMSE. El retardo tiene un impacto despreciable, mientras que las condiciones iniciales introducen variaciones locales, destacando el ángulo inicial como el factor más influyente en el desempeño.</a:t>
             </a:r>
-          </a:p>
-          <a:p>
-            <a:pPr algn="ctr"/>
-            <a:r>
-              <a:rPr lang="es-ES_tradnl" sz="1600" dirty="0">
-                <a:latin typeface="Times New Roman" panose="02020603050405020304" pitchFamily="18" charset="0"/>
-                <a:cs typeface="Times New Roman" panose="02020603050405020304" pitchFamily="18" charset="0"/>
-              </a:rPr>
-              <a:t>El retardo tiene impacto mínimo, mientras que las condiciones iniciales —especialmente la velocidad— introducen variaciones locales y dependencia del estado inicial</a:t>
-            </a:r>
-          </a:p>
-          <a:p>
-            <a:pPr algn="ctr"/>
-            <a:endParaRPr lang="es-ES_tradnl" sz="1600" dirty="0">
-              <a:latin typeface="Times New Roman" panose="02020603050405020304" pitchFamily="18" charset="0"/>
-              <a:cs typeface="Times New Roman" panose="02020603050405020304" pitchFamily="18" charset="0"/>
-            </a:endParaRPr>
           </a:p>
         </p:txBody>
       </p:sp>
